--- a/protected-downloads/praesentation/M07.pptx
+++ b/protected-downloads/praesentation/M07.pptx
@@ -8,13 +8,14 @@
     <p:sldId id="256" r:id="rId7"/>
     <p:sldId id="257" r:id="rId8"/>
     <p:sldId id="258" r:id="rId9"/>
-    <p:sldId id="259" r:id="rId10"/>
-    <p:sldId id="260" r:id="rId11"/>
-    <p:sldId id="261" r:id="rId12"/>
-    <p:sldId id="262" r:id="rId13"/>
-    <p:sldId id="263" r:id="rId14"/>
-    <p:sldId id="264" r:id="rId15"/>
-    <p:sldId id="265" r:id="rId16"/>
+    <p:sldId id="259" r:id="rId11"/>
+    <p:sldId id="260" r:id="rId12"/>
+    <p:sldId id="261" r:id="rId13"/>
+    <p:sldId id="262" r:id="rId14"/>
+    <p:sldId id="263" r:id="rId15"/>
+    <p:sldId id="264" r:id="rId16"/>
+    <p:sldId id="265" r:id="rId17"/>
+    <p:sldId id="266" r:id="rId18"/>
   </p:sldIdLst>
   <p:sldSz cx="12188952" cy="6858000" type="screen4x3"/>
   <p:notesSz cx="6858000" cy="9144000"/>
@@ -114,6 +115,971 @@
     </a:lvl9pPr>
   </p:defaultTextStyle>
 </p:presentation>
+</file>
+
+<file path=ppt/notesMasters/notesMaster1.xml><?xml version="1.0" encoding="utf-8"?>
+<p:notesMaster xmlns:a="http://schemas.openxmlformats.org/drawingml/2006/main" xmlns:p="http://schemas.openxmlformats.org/presentationml/2006/main" xmlns:r="http://schemas.openxmlformats.org/officeDocument/2006/relationships">
+  <p:cSld>
+    <p:bg>
+      <p:bgRef idx="1001">
+        <a:schemeClr val="bg1"/>
+      </p:bgRef>
+    </p:bg>
+    <p:spTree>
+      <p:nvGrpSpPr>
+        <p:cNvPr id="1" name=""/>
+        <p:cNvGrpSpPr/>
+        <p:nvPr/>
+      </p:nvGrpSpPr>
+      <p:grpSpPr>
+        <a:xfrm>
+          <a:off x="0" y="0"/>
+          <a:ext cx="0" cy="0"/>
+          <a:chOff x="0" y="0"/>
+          <a:chExt cx="0" cy="0"/>
+        </a:xfrm>
+      </p:grpSpPr>
+      <p:sp>
+        <p:nvSpPr>
+          <p:cNvPr id="2" name="Header Placeholder 1"/>
+          <p:cNvSpPr>
+            <a:spLocks noGrp="1"/>
+          </p:cNvSpPr>
+          <p:nvPr>
+            <p:ph type="hdr" sz="quarter"/>
+          </p:nvPr>
+        </p:nvSpPr>
+        <p:spPr>
+          <a:xfrm>
+            <a:off x="0" y="0"/>
+            <a:ext cx="2971800" cy="457200"/>
+          </a:xfrm>
+          <a:prstGeom prst="rect">
+            <a:avLst/>
+          </a:prstGeom>
+        </p:spPr>
+        <p:txBody>
+          <a:bodyPr vert="horz" lIns="91440" tIns="45720" rIns="91440" bIns="45720" rtlCol="0"/>
+          <a:lstStyle>
+            <a:lvl1pPr algn="l">
+              <a:defRPr sz="1200"/>
+            </a:lvl1pPr>
+          </a:lstStyle>
+          <a:p>
+            <a:endParaRPr lang="en-US"/>
+          </a:p>
+        </p:txBody>
+      </p:sp>
+      <p:sp>
+        <p:nvSpPr>
+          <p:cNvPr id="3" name="Date Placeholder 2"/>
+          <p:cNvSpPr>
+            <a:spLocks noGrp="1"/>
+          </p:cNvSpPr>
+          <p:nvPr>
+            <p:ph type="dt" idx="1"/>
+          </p:nvPr>
+        </p:nvSpPr>
+        <p:spPr>
+          <a:xfrm>
+            <a:off x="3884613" y="0"/>
+            <a:ext cx="2971800" cy="457200"/>
+          </a:xfrm>
+          <a:prstGeom prst="rect">
+            <a:avLst/>
+          </a:prstGeom>
+        </p:spPr>
+        <p:txBody>
+          <a:bodyPr vert="horz" lIns="91440" tIns="45720" rIns="91440" bIns="45720" rtlCol="0"/>
+          <a:lstStyle>
+            <a:lvl1pPr algn="r">
+              <a:defRPr sz="1200"/>
+            </a:lvl1pPr>
+          </a:lstStyle>
+          <a:p>
+            <a:fld id="{0F89C1C7-3DCD-1040-A9CF-14679D8B5DDD}" type="datetimeFigureOut">
+              <a:rPr lang="en-US" smtClean="0"/>
+              <a:t>10/17/16</a:t>
+            </a:fld>
+            <a:endParaRPr lang="en-US"/>
+          </a:p>
+        </p:txBody>
+      </p:sp>
+      <p:sp>
+        <p:nvSpPr>
+          <p:cNvPr id="4" name="Slide Image Placeholder 3"/>
+          <p:cNvSpPr>
+            <a:spLocks noGrp="1" noRot="1" noChangeAspect="1"/>
+          </p:cNvSpPr>
+          <p:nvPr>
+            <p:ph type="sldImg" idx="2"/>
+          </p:nvPr>
+        </p:nvSpPr>
+        <p:spPr>
+          <a:xfrm>
+            <a:off x="1143000" y="685800"/>
+            <a:ext cx="4572000" cy="3429000"/>
+          </a:xfrm>
+          <a:prstGeom prst="rect">
+            <a:avLst/>
+          </a:prstGeom>
+          <a:noFill/>
+          <a:ln w="12700">
+            <a:solidFill>
+              <a:prstClr val="black"/>
+            </a:solidFill>
+          </a:ln>
+        </p:spPr>
+        <p:txBody>
+          <a:bodyPr vert="horz" lIns="91440" tIns="45720" rIns="91440" bIns="45720" rtlCol="0" anchor="ctr"/>
+          <a:lstStyle/>
+          <a:p>
+            <a:endParaRPr lang="en-US"/>
+          </a:p>
+        </p:txBody>
+      </p:sp>
+      <p:sp>
+        <p:nvSpPr>
+          <p:cNvPr id="5" name="Notes Placeholder 4"/>
+          <p:cNvSpPr>
+            <a:spLocks noGrp="1"/>
+          </p:cNvSpPr>
+          <p:nvPr>
+            <p:ph type="body" sz="quarter" idx="3"/>
+          </p:nvPr>
+        </p:nvSpPr>
+        <p:spPr>
+          <a:xfrm>
+            <a:off x="685800" y="4343400"/>
+            <a:ext cx="5486400" cy="4114800"/>
+          </a:xfrm>
+          <a:prstGeom prst="rect">
+            <a:avLst/>
+          </a:prstGeom>
+        </p:spPr>
+        <p:txBody>
+          <a:bodyPr vert="horz" lIns="91440" tIns="45720" rIns="91440" bIns="45720" rtlCol="0"/>
+          <a:lstStyle/>
+          <a:p>
+            <a:pPr lvl="0"/>
+            <a:r>
+              <a:rPr lang="en-US" smtClean="0"/>
+              <a:t>Click to edit Master text styles</a:t>
+            </a:r>
+          </a:p>
+          <a:p>
+            <a:pPr lvl="1"/>
+            <a:r>
+              <a:rPr lang="en-US" smtClean="0"/>
+              <a:t>Second level</a:t>
+            </a:r>
+          </a:p>
+          <a:p>
+            <a:pPr lvl="2"/>
+            <a:r>
+              <a:rPr lang="en-US" smtClean="0"/>
+              <a:t>Third level</a:t>
+            </a:r>
+          </a:p>
+          <a:p>
+            <a:pPr lvl="3"/>
+            <a:r>
+              <a:rPr lang="en-US" smtClean="0"/>
+              <a:t>Fourth level</a:t>
+            </a:r>
+          </a:p>
+          <a:p>
+            <a:pPr lvl="4"/>
+            <a:r>
+              <a:rPr lang="en-US" smtClean="0"/>
+              <a:t>Fifth level</a:t>
+            </a:r>
+            <a:endParaRPr lang="en-US"/>
+          </a:p>
+        </p:txBody>
+      </p:sp>
+      <p:sp>
+        <p:nvSpPr>
+          <p:cNvPr id="6" name="Footer Placeholder 5"/>
+          <p:cNvSpPr>
+            <a:spLocks noGrp="1"/>
+          </p:cNvSpPr>
+          <p:nvPr>
+            <p:ph type="ftr" sz="quarter" idx="4"/>
+          </p:nvPr>
+        </p:nvSpPr>
+        <p:spPr>
+          <a:xfrm>
+            <a:off x="0" y="8685213"/>
+            <a:ext cx="2971800" cy="457200"/>
+          </a:xfrm>
+          <a:prstGeom prst="rect">
+            <a:avLst/>
+          </a:prstGeom>
+        </p:spPr>
+        <p:txBody>
+          <a:bodyPr vert="horz" lIns="91440" tIns="45720" rIns="91440" bIns="45720" rtlCol="0" anchor="b"/>
+          <a:lstStyle>
+            <a:lvl1pPr algn="l">
+              <a:defRPr sz="1200"/>
+            </a:lvl1pPr>
+          </a:lstStyle>
+          <a:p>
+            <a:endParaRPr lang="en-US"/>
+          </a:p>
+        </p:txBody>
+      </p:sp>
+      <p:sp>
+        <p:nvSpPr>
+          <p:cNvPr id="7" name="Slide Number Placeholder 6"/>
+          <p:cNvSpPr>
+            <a:spLocks noGrp="1"/>
+          </p:cNvSpPr>
+          <p:nvPr>
+            <p:ph type="sldNum" sz="quarter" idx="5"/>
+          </p:nvPr>
+        </p:nvSpPr>
+        <p:spPr>
+          <a:xfrm>
+            <a:off x="3884613" y="8685213"/>
+            <a:ext cx="2971800" cy="457200"/>
+          </a:xfrm>
+          <a:prstGeom prst="rect">
+            <a:avLst/>
+          </a:prstGeom>
+        </p:spPr>
+        <p:txBody>
+          <a:bodyPr vert="horz" lIns="91440" tIns="45720" rIns="91440" bIns="45720" rtlCol="0" anchor="b"/>
+          <a:lstStyle>
+            <a:lvl1pPr algn="r">
+              <a:defRPr sz="1200"/>
+            </a:lvl1pPr>
+          </a:lstStyle>
+          <a:p>
+            <a:fld id="{BB5E49A5-4136-284D-997B-48E1D791AD67}" type="slidenum">
+              <a:rPr lang="en-US" smtClean="0"/>
+              <a:t>‹#›</a:t>
+            </a:fld>
+            <a:endParaRPr lang="en-US"/>
+          </a:p>
+        </p:txBody>
+      </p:sp>
+    </p:spTree>
+    <p:extLst>
+      <p:ext uri="{BB962C8B-B14F-4D97-AF65-F5344CB8AC3E}">
+        <p14:creationId xmlns:p14="http://schemas.microsoft.com/office/powerpoint/2010/main" val="2623252185"/>
+      </p:ext>
+    </p:extLst>
+  </p:cSld>
+  <p:clrMap bg1="lt1" tx1="dk1" bg2="lt2" tx2="dk2" accent1="accent1" accent2="accent2" accent3="accent3" accent4="accent4" accent5="accent5" accent6="accent6" hlink="hlink" folHlink="folHlink"/>
+  <p:notesStyle>
+    <a:lvl1pPr marL="0" algn="l" defTabSz="457200" rtl="0" eaLnBrk="1" latinLnBrk="0" hangingPunct="1">
+      <a:defRPr sz="1200" kern="1200">
+        <a:solidFill>
+          <a:schemeClr val="tx1"/>
+        </a:solidFill>
+        <a:latin typeface="+mn-lt"/>
+        <a:ea typeface="+mn-ea"/>
+        <a:cs typeface="+mn-cs"/>
+      </a:defRPr>
+    </a:lvl1pPr>
+    <a:lvl2pPr marL="457200" algn="l" defTabSz="457200" rtl="0" eaLnBrk="1" latinLnBrk="0" hangingPunct="1">
+      <a:defRPr sz="1200" kern="1200">
+        <a:solidFill>
+          <a:schemeClr val="tx1"/>
+        </a:solidFill>
+        <a:latin typeface="+mn-lt"/>
+        <a:ea typeface="+mn-ea"/>
+        <a:cs typeface="+mn-cs"/>
+      </a:defRPr>
+    </a:lvl2pPr>
+    <a:lvl3pPr marL="914400" algn="l" defTabSz="457200" rtl="0" eaLnBrk="1" latinLnBrk="0" hangingPunct="1">
+      <a:defRPr sz="1200" kern="1200">
+        <a:solidFill>
+          <a:schemeClr val="tx1"/>
+        </a:solidFill>
+        <a:latin typeface="+mn-lt"/>
+        <a:ea typeface="+mn-ea"/>
+        <a:cs typeface="+mn-cs"/>
+      </a:defRPr>
+    </a:lvl3pPr>
+    <a:lvl4pPr marL="1371600" algn="l" defTabSz="457200" rtl="0" eaLnBrk="1" latinLnBrk="0" hangingPunct="1">
+      <a:defRPr sz="1200" kern="1200">
+        <a:solidFill>
+          <a:schemeClr val="tx1"/>
+        </a:solidFill>
+        <a:latin typeface="+mn-lt"/>
+        <a:ea typeface="+mn-ea"/>
+        <a:cs typeface="+mn-cs"/>
+      </a:defRPr>
+    </a:lvl4pPr>
+    <a:lvl5pPr marL="1828800" algn="l" defTabSz="457200" rtl="0" eaLnBrk="1" latinLnBrk="0" hangingPunct="1">
+      <a:defRPr sz="1200" kern="1200">
+        <a:solidFill>
+          <a:schemeClr val="tx1"/>
+        </a:solidFill>
+        <a:latin typeface="+mn-lt"/>
+        <a:ea typeface="+mn-ea"/>
+        <a:cs typeface="+mn-cs"/>
+      </a:defRPr>
+    </a:lvl5pPr>
+    <a:lvl6pPr marL="2286000" algn="l" defTabSz="457200" rtl="0" eaLnBrk="1" latinLnBrk="0" hangingPunct="1">
+      <a:defRPr sz="1200" kern="1200">
+        <a:solidFill>
+          <a:schemeClr val="tx1"/>
+        </a:solidFill>
+        <a:latin typeface="+mn-lt"/>
+        <a:ea typeface="+mn-ea"/>
+        <a:cs typeface="+mn-cs"/>
+      </a:defRPr>
+    </a:lvl6pPr>
+    <a:lvl7pPr marL="2743200" algn="l" defTabSz="457200" rtl="0" eaLnBrk="1" latinLnBrk="0" hangingPunct="1">
+      <a:defRPr sz="1200" kern="1200">
+        <a:solidFill>
+          <a:schemeClr val="tx1"/>
+        </a:solidFill>
+        <a:latin typeface="+mn-lt"/>
+        <a:ea typeface="+mn-ea"/>
+        <a:cs typeface="+mn-cs"/>
+      </a:defRPr>
+    </a:lvl7pPr>
+    <a:lvl8pPr marL="3200400" algn="l" defTabSz="457200" rtl="0" eaLnBrk="1" latinLnBrk="0" hangingPunct="1">
+      <a:defRPr sz="1200" kern="1200">
+        <a:solidFill>
+          <a:schemeClr val="tx1"/>
+        </a:solidFill>
+        <a:latin typeface="+mn-lt"/>
+        <a:ea typeface="+mn-ea"/>
+        <a:cs typeface="+mn-cs"/>
+      </a:defRPr>
+    </a:lvl8pPr>
+    <a:lvl9pPr marL="3657600" algn="l" defTabSz="457200" rtl="0" eaLnBrk="1" latinLnBrk="0" hangingPunct="1">
+      <a:defRPr sz="1200" kern="1200">
+        <a:solidFill>
+          <a:schemeClr val="tx1"/>
+        </a:solidFill>
+        <a:latin typeface="+mn-lt"/>
+        <a:ea typeface="+mn-ea"/>
+        <a:cs typeface="+mn-cs"/>
+      </a:defRPr>
+    </a:lvl9pPr>
+  </p:notesStyle>
+</p:notesMaster>
+</file>
+
+<file path=ppt/notesSlides/notesSlide1.xml><?xml version="1.0" encoding="utf-8"?>
+<p:notes xmlns:a="http://schemas.openxmlformats.org/drawingml/2006/main" xmlns:p="http://schemas.openxmlformats.org/presentationml/2006/main" xmlns:r="http://schemas.openxmlformats.org/officeDocument/2006/relationships">
+  <p:cSld>
+    <p:spTree>
+      <p:nvGrpSpPr>
+        <p:cNvPr id="1" name=""/>
+        <p:cNvGrpSpPr/>
+        <p:nvPr/>
+      </p:nvGrpSpPr>
+      <p:grpSpPr>
+        <a:xfrm>
+          <a:off x="0" y="0"/>
+          <a:ext cx="0" cy="0"/>
+          <a:chOff x="0" y="0"/>
+          <a:chExt cx="0" cy="0"/>
+        </a:xfrm>
+      </p:grpSpPr>
+      <p:sp>
+        <p:nvSpPr>
+          <p:cNvPr id="2" name="Slide Image Placeholder 1"/>
+          <p:cNvSpPr>
+            <a:spLocks noGrp="1"/>
+          </p:cNvSpPr>
+          <p:nvPr>
+            <p:ph type="sldImg" idx="2"/>
+          </p:nvPr>
+        </p:nvSpPr>
+        <p:spPr/>
+      </p:sp>
+      <p:sp>
+        <p:nvSpPr>
+          <p:cNvPr id="3" name="Notes Placeholder 2"/>
+          <p:cNvSpPr>
+            <a:spLocks noGrp="1"/>
+          </p:cNvSpPr>
+          <p:nvPr>
+            <p:ph type="body" idx="3" sz="quarter"/>
+          </p:nvPr>
+        </p:nvSpPr>
+        <p:spPr/>
+        <p:txBody>
+          <a:bodyPr/>
+          <a:lstStyle/>
+          <a:p>
+            <a:r>
+              <a:t>Agenda-Überblick. Timing und Pausen siehe Ablaufplan im Trainerhandbuch (Sektion 3).</a:t>
+            </a:r>
+          </a:p>
+        </p:txBody>
+      </p:sp>
+      <p:sp>
+        <p:nvSpPr>
+          <p:cNvPr id="4" name="Slide Number Placeholder 3"/>
+          <p:cNvSpPr>
+            <a:spLocks noGrp="1"/>
+          </p:cNvSpPr>
+          <p:nvPr>
+            <p:ph type="sldNum" idx="5" sz="quarter"/>
+          </p:nvPr>
+        </p:nvSpPr>
+        <p:spPr/>
+      </p:sp>
+    </p:spTree>
+  </p:cSld>
+  <p:clrMapOvr>
+    <a:masterClrMapping/>
+  </p:clrMapOvr>
+</p:notes>
+</file>
+
+<file path=ppt/notesSlides/notesSlide2.xml><?xml version="1.0" encoding="utf-8"?>
+<p:notes xmlns:a="http://schemas.openxmlformats.org/drawingml/2006/main" xmlns:p="http://schemas.openxmlformats.org/presentationml/2006/main" xmlns:r="http://schemas.openxmlformats.org/officeDocument/2006/relationships">
+  <p:cSld>
+    <p:spTree>
+      <p:nvGrpSpPr>
+        <p:cNvPr id="1" name=""/>
+        <p:cNvGrpSpPr/>
+        <p:nvPr/>
+      </p:nvGrpSpPr>
+      <p:grpSpPr>
+        <a:xfrm>
+          <a:off x="0" y="0"/>
+          <a:ext cx="0" cy="0"/>
+          <a:chOff x="0" y="0"/>
+          <a:chExt cx="0" cy="0"/>
+        </a:xfrm>
+      </p:grpSpPr>
+      <p:sp>
+        <p:nvSpPr>
+          <p:cNvPr id="2" name="Slide Image Placeholder 1"/>
+          <p:cNvSpPr>
+            <a:spLocks noGrp="1"/>
+          </p:cNvSpPr>
+          <p:nvPr>
+            <p:ph type="sldImg" idx="2"/>
+          </p:nvPr>
+        </p:nvSpPr>
+        <p:spPr/>
+      </p:sp>
+      <p:sp>
+        <p:nvSpPr>
+          <p:cNvPr id="3" name="Notes Placeholder 2"/>
+          <p:cNvSpPr>
+            <a:spLocks noGrp="1"/>
+          </p:cNvSpPr>
+          <p:nvPr>
+            <p:ph type="body" idx="3" sz="quarter"/>
+          </p:nvPr>
+        </p:nvSpPr>
+        <p:spPr/>
+        <p:txBody>
+          <a:bodyPr/>
+          <a:lstStyle/>
+          <a:p>
+            <a:r>
+              <a:t>Siehe Trainerhandbuch (Sektion 3) für Moderationshinweise, Timing und erwartete Teilnehmerreaktionen.</a:t>
+            </a:r>
+          </a:p>
+        </p:txBody>
+      </p:sp>
+      <p:sp>
+        <p:nvSpPr>
+          <p:cNvPr id="4" name="Slide Number Placeholder 3"/>
+          <p:cNvSpPr>
+            <a:spLocks noGrp="1"/>
+          </p:cNvSpPr>
+          <p:nvPr>
+            <p:ph type="sldNum" idx="5" sz="quarter"/>
+          </p:nvPr>
+        </p:nvSpPr>
+        <p:spPr/>
+      </p:sp>
+    </p:spTree>
+  </p:cSld>
+  <p:clrMapOvr>
+    <a:masterClrMapping/>
+  </p:clrMapOvr>
+</p:notes>
+</file>
+
+<file path=ppt/notesSlides/notesSlide3.xml><?xml version="1.0" encoding="utf-8"?>
+<p:notes xmlns:a="http://schemas.openxmlformats.org/drawingml/2006/main" xmlns:p="http://schemas.openxmlformats.org/presentationml/2006/main" xmlns:r="http://schemas.openxmlformats.org/officeDocument/2006/relationships">
+  <p:cSld>
+    <p:spTree>
+      <p:nvGrpSpPr>
+        <p:cNvPr id="1" name=""/>
+        <p:cNvGrpSpPr/>
+        <p:nvPr/>
+      </p:nvGrpSpPr>
+      <p:grpSpPr>
+        <a:xfrm>
+          <a:off x="0" y="0"/>
+          <a:ext cx="0" cy="0"/>
+          <a:chOff x="0" y="0"/>
+          <a:chExt cx="0" cy="0"/>
+        </a:xfrm>
+      </p:grpSpPr>
+      <p:sp>
+        <p:nvSpPr>
+          <p:cNvPr id="2" name="Slide Image Placeholder 1"/>
+          <p:cNvSpPr>
+            <a:spLocks noGrp="1"/>
+          </p:cNvSpPr>
+          <p:nvPr>
+            <p:ph type="sldImg" idx="2"/>
+          </p:nvPr>
+        </p:nvSpPr>
+        <p:spPr/>
+      </p:sp>
+      <p:sp>
+        <p:nvSpPr>
+          <p:cNvPr id="3" name="Notes Placeholder 2"/>
+          <p:cNvSpPr>
+            <a:spLocks noGrp="1"/>
+          </p:cNvSpPr>
+          <p:nvPr>
+            <p:ph type="body" idx="3" sz="quarter"/>
+          </p:nvPr>
+        </p:nvSpPr>
+        <p:spPr/>
+        <p:txBody>
+          <a:bodyPr/>
+          <a:lstStyle/>
+          <a:p>
+            <a:r>
+              <a:t>Siehe Trainerhandbuch (Sektion 3) für Moderationshinweise, Timing und erwartete Teilnehmerreaktionen.</a:t>
+            </a:r>
+          </a:p>
+        </p:txBody>
+      </p:sp>
+      <p:sp>
+        <p:nvSpPr>
+          <p:cNvPr id="4" name="Slide Number Placeholder 3"/>
+          <p:cNvSpPr>
+            <a:spLocks noGrp="1"/>
+          </p:cNvSpPr>
+          <p:nvPr>
+            <p:ph type="sldNum" idx="5" sz="quarter"/>
+          </p:nvPr>
+        </p:nvSpPr>
+        <p:spPr/>
+      </p:sp>
+    </p:spTree>
+  </p:cSld>
+  <p:clrMapOvr>
+    <a:masterClrMapping/>
+  </p:clrMapOvr>
+</p:notes>
+</file>
+
+<file path=ppt/notesSlides/notesSlide4.xml><?xml version="1.0" encoding="utf-8"?>
+<p:notes xmlns:a="http://schemas.openxmlformats.org/drawingml/2006/main" xmlns:p="http://schemas.openxmlformats.org/presentationml/2006/main" xmlns:r="http://schemas.openxmlformats.org/officeDocument/2006/relationships">
+  <p:cSld>
+    <p:spTree>
+      <p:nvGrpSpPr>
+        <p:cNvPr id="1" name=""/>
+        <p:cNvGrpSpPr/>
+        <p:nvPr/>
+      </p:nvGrpSpPr>
+      <p:grpSpPr>
+        <a:xfrm>
+          <a:off x="0" y="0"/>
+          <a:ext cx="0" cy="0"/>
+          <a:chOff x="0" y="0"/>
+          <a:chExt cx="0" cy="0"/>
+        </a:xfrm>
+      </p:grpSpPr>
+      <p:sp>
+        <p:nvSpPr>
+          <p:cNvPr id="2" name="Slide Image Placeholder 1"/>
+          <p:cNvSpPr>
+            <a:spLocks noGrp="1"/>
+          </p:cNvSpPr>
+          <p:nvPr>
+            <p:ph type="sldImg" idx="2"/>
+          </p:nvPr>
+        </p:nvSpPr>
+        <p:spPr/>
+      </p:sp>
+      <p:sp>
+        <p:nvSpPr>
+          <p:cNvPr id="3" name="Notes Placeholder 2"/>
+          <p:cNvSpPr>
+            <a:spLocks noGrp="1"/>
+          </p:cNvSpPr>
+          <p:nvPr>
+            <p:ph type="body" idx="3" sz="quarter"/>
+          </p:nvPr>
+        </p:nvSpPr>
+        <p:spPr/>
+        <p:txBody>
+          <a:bodyPr/>
+          <a:lstStyle/>
+          <a:p>
+            <a:r>
+              <a:t>Siehe Trainerhandbuch (Sektion 3) für Moderationshinweise, Timing und erwartete Teilnehmerreaktionen.</a:t>
+            </a:r>
+          </a:p>
+        </p:txBody>
+      </p:sp>
+      <p:sp>
+        <p:nvSpPr>
+          <p:cNvPr id="4" name="Slide Number Placeholder 3"/>
+          <p:cNvSpPr>
+            <a:spLocks noGrp="1"/>
+          </p:cNvSpPr>
+          <p:nvPr>
+            <p:ph type="sldNum" idx="5" sz="quarter"/>
+          </p:nvPr>
+        </p:nvSpPr>
+        <p:spPr/>
+      </p:sp>
+    </p:spTree>
+  </p:cSld>
+  <p:clrMapOvr>
+    <a:masterClrMapping/>
+  </p:clrMapOvr>
+</p:notes>
+</file>
+
+<file path=ppt/notesSlides/notesSlide5.xml><?xml version="1.0" encoding="utf-8"?>
+<p:notes xmlns:a="http://schemas.openxmlformats.org/drawingml/2006/main" xmlns:p="http://schemas.openxmlformats.org/presentationml/2006/main" xmlns:r="http://schemas.openxmlformats.org/officeDocument/2006/relationships">
+  <p:cSld>
+    <p:spTree>
+      <p:nvGrpSpPr>
+        <p:cNvPr id="1" name=""/>
+        <p:cNvGrpSpPr/>
+        <p:nvPr/>
+      </p:nvGrpSpPr>
+      <p:grpSpPr>
+        <a:xfrm>
+          <a:off x="0" y="0"/>
+          <a:ext cx="0" cy="0"/>
+          <a:chOff x="0" y="0"/>
+          <a:chExt cx="0" cy="0"/>
+        </a:xfrm>
+      </p:grpSpPr>
+      <p:sp>
+        <p:nvSpPr>
+          <p:cNvPr id="2" name="Slide Image Placeholder 1"/>
+          <p:cNvSpPr>
+            <a:spLocks noGrp="1"/>
+          </p:cNvSpPr>
+          <p:nvPr>
+            <p:ph type="sldImg" idx="2"/>
+          </p:nvPr>
+        </p:nvSpPr>
+        <p:spPr/>
+      </p:sp>
+      <p:sp>
+        <p:nvSpPr>
+          <p:cNvPr id="3" name="Notes Placeholder 2"/>
+          <p:cNvSpPr>
+            <a:spLocks noGrp="1"/>
+          </p:cNvSpPr>
+          <p:nvPr>
+            <p:ph type="body" idx="3" sz="quarter"/>
+          </p:nvPr>
+        </p:nvSpPr>
+        <p:spPr/>
+        <p:txBody>
+          <a:bodyPr/>
+          <a:lstStyle/>
+          <a:p>
+            <a:r>
+              <a:t>Musterlösung (Trainer-Referenz)</a:t>
+            </a:r>
+          </a:p>
+          <a:p>
+            <a:r>
+              <a:t>Aufgabe 1 – IDW S5:</a:t>
+            </a:r>
+          </a:p>
+          <a:p>
+            <a:r>
+              <a:t>Ø Jahresüberschuss:          303.333 EUR</a:t>
+            </a:r>
+          </a:p>
+          <a:p>
+            <a:r>
+              <a:t>./. Unternehmerlohn:         130.000 EUR</a:t>
+            </a:r>
+          </a:p>
+          <a:p>
+            <a:r>
+              <a:t>= Ertrag vor Risiko:         173.333 EUR</a:t>
+            </a:r>
+          </a:p>
+          <a:p>
+            <a:r>
+              <a:t>./. Risikoabschlag 25 %:     - 43.333 EUR</a:t>
+            </a:r>
+          </a:p>
+          <a:p>
+            <a:r>
+              <a:t>= Nachhaltiger Jahresertrag: 130.000 EUR</a:t>
+            </a:r>
+          </a:p>
+          <a:p>
+            <a:r>
+              <a:t>× Kapitalisierungsfaktor 3,0:</a:t>
+            </a:r>
+          </a:p>
+          <a:p>
+            <a:r>
+              <a:t>= Goodwill (rechnerisch):    390.000 EUR</a:t>
+            </a:r>
+          </a:p>
+          <a:p>
+            <a:r>
+              <a:t>Der vereinbarte Goodwill von 220.000 EUR liegt deutlich unter dem rechnerischen Wert (Differenz: 170.000 EUR). Die Übernahme erscheint aus Käuferperspektive günstig bewertet.</a:t>
+            </a:r>
+          </a:p>
+          <a:p>
+            <a:r>
+              <a:t>Trainer-Hinweis – Vertiefungsfragen zum Gap: Dieser Unterschied von 170.000 EUR ist erklärungsbedürftig. Regen Sie folgende Diskussion an:</a:t>
+            </a:r>
+          </a:p>
+          <a:p>
+            <a:r>
+              <a:t>1. Warum akzeptiert Dr. Schmidt einen Goodwill von nur 220.000 EUR statt der rechnerischen 390.000 EUR? Mögliche Antworten: Zeitdruck beim Verkäufer (gesundheitliche Gründe), begrenzte Zahl qualifizierter Käufer in der Region, Patientenstamm-Risiko durch hohen Anteil an Stammkunden älterer Patienten, persönliche Sympathie für den Nachfolger.</a:t>
+            </a:r>
+          </a:p>
+          <a:p>
+            <a:r>
+              <a:t>2. Ist der niedrige Kaufpreis für die Bank ein Signal oder ein Vorteil? Ein Käufer, der günstig einkauft, hat einen besseren DSCR – aber: Warum wird so günstig verkauft? Hat Dr. Schmidt Informationen, die Dr. Mayer (und die Bank) nicht haben? → Asymmetrische Information ist das zentrale Risiko.</a:t>
+            </a:r>
+          </a:p>
+          <a:p>
+            <a:r>
+              <a:t>3. Was sollte die Bank zusätzlich prüfen? Laufende Regressverfahren, Abrechnungsauffälligkeiten bei der KV, Patientenstamm-Altersstruktur (wie viele Patienten sind unter 60 und bleiben der Praxis erhalten?), lokale Wettbewerbssituation (neues MVZ in der Nähe?).</a:t>
+            </a:r>
+          </a:p>
+          <a:p>
+            <a:r>
+              <a:t>Fazit: Der günstige Kaufpreis ist aus DSCR-Sicht attraktiv – rechtfertigt aber intensivere Due Diligence, nicht weniger.</a:t>
+            </a:r>
+          </a:p>
+          <a:p>
+            <a:r>
+              <a:t>Aufgabe 2 – DSCR:</a:t>
+            </a:r>
+          </a:p>
+          <a:p>
+            <a:r>
+              <a:t>380.000 EUR / 10 Jahre = 38.000 EUR Tilgung p.a.</a:t>
+            </a:r>
+          </a:p>
+          <a:p>
+            <a:r>
+              <a:t>Zinsen Anfangsjahr: 380.000 × 5,5 % = 20.900 EUR</a:t>
+            </a:r>
+          </a:p>
+          <a:p>
+            <a:r>
+              <a:t>Zinsen Endjahr: 38.000 × 5,5 % = 2.090 EUR</a:t>
+            </a:r>
+          </a:p>
+          <a:p>
+            <a:r>
+              <a:t>Ø Zinsen: (20.900 + 2.090) / 2 = 11.495 EUR p.a.</a:t>
+            </a:r>
+          </a:p>
+          <a:p>
+            <a:r>
+              <a:t>Kapitaldienst gesamt: 38.000 + 11.495 = 49.495 EUR p.a.</a:t>
+            </a:r>
+          </a:p>
+          <a:p>
+            <a:r>
+              <a:t>DSCR: 75.000 / 49.495 = 1,52</a:t>
+            </a:r>
+          </a:p>
+          <a:p>
+            <a:r>
+              <a:t>Trainer-Hinweis – Kritische Diskussion: DSCR 1,52 liegt rechnerisch über der Mindestanforderung (1,20) – aber ist er bei diesem Risikoniveau wirklich ausreichend? Folgende Argumente sprechen dafür, ihn kritisch zu hinterfragen:</a:t>
+            </a:r>
+          </a:p>
+          <a:p>
+            <a:r>
+              <a:t>1. Anlaufrisiko: Die 65 %-Patientenübernahme ist eine Prognose, kein gesicherter Wert. Historisch werden in den ersten 12 Monaten nach Übernahme teils nur 50–60 % erreicht. Sinkt die Patientenquote auf 55 %, bricht der Cashflow auf ca. 55.000 EUR – DSCR dann unter 1,20.</a:t>
+            </a:r>
+          </a:p>
+          <a:p>
+            <a:r>
+              <a:t>2. Kein Puffer für unvorhergesehene Ausgaben: Bei einer einzigen größeren Reparatur oder einem KV-Regressverfahren fehlt der Puffer.</a:t>
+            </a:r>
+          </a:p>
+          <a:p>
+            <a:r>
+              <a:t>3. Empfehlung: Tilgungsfreie Anlaufzeit (12 Monate nur Zinsen: 11.495 EUR p.a.) deutlich beantragen – reduziert den Kapitaldienst im ersten Jahr auf ca. 23 % des freien Cashflows und schafft echten Sicherheits</a:t>
+            </a:r>
+          </a:p>
+        </p:txBody>
+      </p:sp>
+      <p:sp>
+        <p:nvSpPr>
+          <p:cNvPr id="4" name="Slide Number Placeholder 3"/>
+          <p:cNvSpPr>
+            <a:spLocks noGrp="1"/>
+          </p:cNvSpPr>
+          <p:nvPr>
+            <p:ph type="sldNum" idx="5" sz="quarter"/>
+          </p:nvPr>
+        </p:nvSpPr>
+        <p:spPr/>
+      </p:sp>
+    </p:spTree>
+  </p:cSld>
+  <p:clrMapOvr>
+    <a:masterClrMapping/>
+  </p:clrMapOvr>
+</p:notes>
+</file>
+
+<file path=ppt/notesSlides/notesSlide6.xml><?xml version="1.0" encoding="utf-8"?>
+<p:notes xmlns:a="http://schemas.openxmlformats.org/drawingml/2006/main" xmlns:p="http://schemas.openxmlformats.org/presentationml/2006/main" xmlns:r="http://schemas.openxmlformats.org/officeDocument/2006/relationships">
+  <p:cSld>
+    <p:spTree>
+      <p:nvGrpSpPr>
+        <p:cNvPr id="1" name=""/>
+        <p:cNvGrpSpPr/>
+        <p:nvPr/>
+      </p:nvGrpSpPr>
+      <p:grpSpPr>
+        <a:xfrm>
+          <a:off x="0" y="0"/>
+          <a:ext cx="0" cy="0"/>
+          <a:chOff x="0" y="0"/>
+          <a:chExt cx="0" cy="0"/>
+        </a:xfrm>
+      </p:grpSpPr>
+      <p:sp>
+        <p:nvSpPr>
+          <p:cNvPr id="2" name="Slide Image Placeholder 1"/>
+          <p:cNvSpPr>
+            <a:spLocks noGrp="1"/>
+          </p:cNvSpPr>
+          <p:nvPr>
+            <p:ph type="sldImg" idx="2"/>
+          </p:nvPr>
+        </p:nvSpPr>
+        <p:spPr/>
+      </p:sp>
+      <p:sp>
+        <p:nvSpPr>
+          <p:cNvPr id="3" name="Notes Placeholder 2"/>
+          <p:cNvSpPr>
+            <a:spLocks noGrp="1"/>
+          </p:cNvSpPr>
+          <p:nvPr>
+            <p:ph type="body" idx="3" sz="quarter"/>
+          </p:nvPr>
+        </p:nvSpPr>
+        <p:spPr/>
+        <p:txBody>
+          <a:bodyPr/>
+          <a:lstStyle/>
+          <a:p>
+            <a:r>
+              <a:t>Siehe Trainerhandbuch (Sektion 3) für Moderationshinweise, Timing und erwartete Teilnehmerreaktionen.</a:t>
+            </a:r>
+          </a:p>
+        </p:txBody>
+      </p:sp>
+      <p:sp>
+        <p:nvSpPr>
+          <p:cNvPr id="4" name="Slide Number Placeholder 3"/>
+          <p:cNvSpPr>
+            <a:spLocks noGrp="1"/>
+          </p:cNvSpPr>
+          <p:nvPr>
+            <p:ph type="sldNum" idx="5" sz="quarter"/>
+          </p:nvPr>
+        </p:nvSpPr>
+        <p:spPr/>
+      </p:sp>
+    </p:spTree>
+  </p:cSld>
+  <p:clrMapOvr>
+    <a:masterClrMapping/>
+  </p:clrMapOvr>
+</p:notes>
+</file>
+
+<file path=ppt/notesSlides/notesSlide7.xml><?xml version="1.0" encoding="utf-8"?>
+<p:notes xmlns:a="http://schemas.openxmlformats.org/drawingml/2006/main" xmlns:p="http://schemas.openxmlformats.org/presentationml/2006/main" xmlns:r="http://schemas.openxmlformats.org/officeDocument/2006/relationships">
+  <p:cSld>
+    <p:spTree>
+      <p:nvGrpSpPr>
+        <p:cNvPr id="1" name=""/>
+        <p:cNvGrpSpPr/>
+        <p:nvPr/>
+      </p:nvGrpSpPr>
+      <p:grpSpPr>
+        <a:xfrm>
+          <a:off x="0" y="0"/>
+          <a:ext cx="0" cy="0"/>
+          <a:chOff x="0" y="0"/>
+          <a:chExt cx="0" cy="0"/>
+        </a:xfrm>
+      </p:grpSpPr>
+      <p:sp>
+        <p:nvSpPr>
+          <p:cNvPr id="2" name="Slide Image Placeholder 1"/>
+          <p:cNvSpPr>
+            <a:spLocks noGrp="1"/>
+          </p:cNvSpPr>
+          <p:nvPr>
+            <p:ph type="sldImg" idx="2"/>
+          </p:nvPr>
+        </p:nvSpPr>
+        <p:spPr/>
+      </p:sp>
+      <p:sp>
+        <p:nvSpPr>
+          <p:cNvPr id="3" name="Notes Placeholder 2"/>
+          <p:cNvSpPr>
+            <a:spLocks noGrp="1"/>
+          </p:cNvSpPr>
+          <p:nvPr>
+            <p:ph type="body" idx="3" sz="quarter"/>
+          </p:nvPr>
+        </p:nvSpPr>
+        <p:spPr/>
+        <p:txBody>
+          <a:bodyPr/>
+          <a:lstStyle/>
+          <a:p>
+            <a:r>
+              <a:t>Siehe Trainerhandbuch (Sektion 3) für Moderationshinweise, Timing und erwartete Teilnehmerreaktionen.</a:t>
+            </a:r>
+          </a:p>
+        </p:txBody>
+      </p:sp>
+      <p:sp>
+        <p:nvSpPr>
+          <p:cNvPr id="4" name="Slide Number Placeholder 3"/>
+          <p:cNvSpPr>
+            <a:spLocks noGrp="1"/>
+          </p:cNvSpPr>
+          <p:nvPr>
+            <p:ph type="sldNum" idx="5" sz="quarter"/>
+          </p:nvPr>
+        </p:nvSpPr>
+        <p:spPr/>
+      </p:sp>
+    </p:spTree>
+  </p:cSld>
+  <p:clrMapOvr>
+    <a:masterClrMapping/>
+  </p:clrMapOvr>
+</p:notes>
 </file>
 
 <file path=ppt/slideLayouts/slideLayout1.xml><?xml version="1.0" encoding="utf-8"?>
@@ -3909,6 +4875,595 @@
                 </a:solidFill>
                 <a:latin typeface="Source Serif 4"/>
               </a:rPr>
+              <a:t>Checkliste: Heilberufe-Erstgespräch (15 Punkte)</a:t>
+            </a:r>
+          </a:p>
+        </p:txBody>
+      </p:sp>
+      <p:sp>
+        <p:nvSpPr>
+          <p:cNvPr id="8" name="TextBox 7"/>
+          <p:cNvSpPr txBox="1"/>
+          <p:nvPr/>
+        </p:nvSpPr>
+        <p:spPr>
+          <a:xfrm>
+            <a:off x="685800" y="1417320"/>
+            <a:ext cx="10817352" cy="5029200"/>
+          </a:xfrm>
+          <a:prstGeom prst="rect">
+            <a:avLst/>
+          </a:prstGeom>
+          <a:noFill/>
+        </p:spPr>
+        <p:txBody>
+          <a:bodyPr wrap="square">
+            <a:spAutoFit/>
+          </a:bodyPr>
+          <a:lstStyle/>
+          <a:p>
+            <a:pPr>
+              <a:spcBef>
+                <a:spcPts val="400"/>
+              </a:spcBef>
+              <a:spcAft>
+                <a:spcPts val="200"/>
+              </a:spcAft>
+            </a:pPr>
+            <a:r>
+              <a:rPr sz="1200">
+                <a:solidFill>
+                  <a:srgbClr val="3D5466"/>
+                </a:solidFill>
+                <a:latin typeface="Arial"/>
+              </a:rPr>
+              <a:t>Nutzen Sie diese Checkliste zur Vorbereitung und Strukturierung von Erstgesprächen mit Heilberufe-Kunden.</a:t>
+            </a:r>
+          </a:p>
+          <a:p>
+            <a:pPr>
+              <a:spcBef>
+                <a:spcPts val="400"/>
+              </a:spcBef>
+              <a:spcAft>
+                <a:spcPts val="200"/>
+              </a:spcAft>
+            </a:pPr>
+            <a:r>
+              <a:rPr sz="1200">
+                <a:solidFill>
+                  <a:srgbClr val="3D5466"/>
+                </a:solidFill>
+                <a:latin typeface="Arial"/>
+              </a:rPr>
+              <a:t>Branche &amp; Zulassung</a:t>
+            </a:r>
+          </a:p>
+          <a:p>
+            <a:pPr>
+              <a:spcBef>
+                <a:spcPts val="400"/>
+              </a:spcBef>
+              <a:spcAft>
+                <a:spcPts val="200"/>
+              </a:spcAft>
+            </a:pPr>
+            <a:r>
+              <a:rPr sz="1300">
+                <a:solidFill>
+                  <a:srgbClr val="3D5466"/>
+                </a:solidFill>
+                <a:latin typeface="Arial"/>
+              </a:rPr>
+              <a:t>▸  [ ] 1. Zulassungsart: GKV-Zulassung, Privatarzt, MVZ-Anstellung?</a:t>
+            </a:r>
+          </a:p>
+          <a:p>
+            <a:pPr>
+              <a:spcBef>
+                <a:spcPts val="400"/>
+              </a:spcBef>
+              <a:spcAft>
+                <a:spcPts val="200"/>
+              </a:spcAft>
+            </a:pPr>
+            <a:r>
+              <a:rPr sz="1300">
+                <a:solidFill>
+                  <a:srgbClr val="3D5466"/>
+                </a:solidFill>
+                <a:latin typeface="Arial"/>
+              </a:rPr>
+              <a:t>▸  [ ] 2. KV-Bezirk und Versorgungsgebiet – überversorgt oder Mangelgebiet?</a:t>
+            </a:r>
+          </a:p>
+          <a:p>
+            <a:pPr>
+              <a:spcBef>
+                <a:spcPts val="400"/>
+              </a:spcBef>
+              <a:spcAft>
+                <a:spcPts val="200"/>
+              </a:spcAft>
+            </a:pPr>
+            <a:r>
+              <a:rPr sz="1300">
+                <a:solidFill>
+                  <a:srgbClr val="3D5466"/>
+                </a:solidFill>
+                <a:latin typeface="Arial"/>
+              </a:rPr>
+              <a:t>▸  [ ] 3. Berufsbezeichnung und Kammerzugehörigkeit klären</a:t>
+            </a:r>
+          </a:p>
+          <a:p>
+            <a:pPr>
+              <a:spcBef>
+                <a:spcPts val="400"/>
+              </a:spcBef>
+              <a:spcAft>
+                <a:spcPts val="200"/>
+              </a:spcAft>
+            </a:pPr>
+            <a:r>
+              <a:rPr sz="1300">
+                <a:solidFill>
+                  <a:srgbClr val="3D5466"/>
+                </a:solidFill>
+                <a:latin typeface="Arial"/>
+              </a:rPr>
+              <a:t>▸  [ ] 4. Einzelpraxis oder BAG/Gemeinschaftspraxis? → Bei Berufsausübungsgemeinschaft (BAG): Gesellschaftsvertrag anfordern; Sicherheitenkonzept und Bonitätsprüfung gelten für alle Partner</a:t>
+            </a:r>
+          </a:p>
+          <a:p>
+            <a:pPr>
+              <a:spcBef>
+                <a:spcPts val="400"/>
+              </a:spcBef>
+              <a:spcAft>
+                <a:spcPts val="200"/>
+              </a:spcAft>
+            </a:pPr>
+            <a:r>
+              <a:rPr sz="1300">
+                <a:solidFill>
+                  <a:srgbClr val="3D5466"/>
+                </a:solidFill>
+                <a:latin typeface="Arial"/>
+              </a:rPr>
+              <a:t>▸  [ ] 5. Umsatzsteuer-Status klären (§ 4 Nr. 14 UStG: Heilbehandlungen grds. USt-frei; Ausnahmen: Gutachtertätigkeit, Schönheitschirurgie ohne Heilzweck → partielle USt-Pflicht möglich)</a:t>
+            </a:r>
+          </a:p>
+          <a:p>
+            <a:pPr>
+              <a:spcBef>
+                <a:spcPts val="400"/>
+              </a:spcBef>
+              <a:spcAft>
+                <a:spcPts val="200"/>
+              </a:spcAft>
+            </a:pPr>
+            <a:r>
+              <a:rPr sz="1200">
+                <a:solidFill>
+                  <a:srgbClr val="3D5466"/>
+                </a:solidFill>
+                <a:latin typeface="Arial"/>
+              </a:rPr>
+              <a:t>Einkommenssituation</a:t>
+            </a:r>
+          </a:p>
+          <a:p>
+            <a:pPr>
+              <a:spcBef>
+                <a:spcPts val="400"/>
+              </a:spcBef>
+              <a:spcAft>
+                <a:spcPts val="200"/>
+              </a:spcAft>
+            </a:pPr>
+            <a:r>
+              <a:rPr sz="1300">
+                <a:solidFill>
+                  <a:srgbClr val="3D5466"/>
+                </a:solidFill>
+                <a:latin typeface="Arial"/>
+              </a:rPr>
+              <a:t>▸  [ ] 6. Einnahmenquellen: GKV-Anteil / PKV-Anteil / Selbstzahler</a:t>
+            </a:r>
+          </a:p>
+          <a:p>
+            <a:pPr>
+              <a:spcBef>
+                <a:spcPts val="400"/>
+              </a:spcBef>
+              <a:spcAft>
+                <a:spcPts val="200"/>
+              </a:spcAft>
+            </a:pPr>
+            <a:r>
+              <a:rPr sz="1300">
+                <a:solidFill>
+                  <a:srgbClr val="3D5466"/>
+                </a:solidFill>
+                <a:latin typeface="Arial"/>
+              </a:rPr>
+              <a:t>▸  [ ] 7. EÜR letzter 3 Jahre + Steuerbescheide anfordern</a:t>
+            </a:r>
+          </a:p>
+          <a:p>
+            <a:pPr>
+              <a:spcBef>
+                <a:spcPts val="400"/>
+              </a:spcBef>
+              <a:spcAft>
+                <a:spcPts val="200"/>
+              </a:spcAft>
+            </a:pPr>
+            <a:r>
+              <a:rPr sz="1300">
+                <a:solidFill>
+                  <a:srgbClr val="3D5466"/>
+                </a:solidFill>
+                <a:latin typeface="Arial"/>
+              </a:rPr>
+              <a:t>▸  [ ] 8. Rückstände oder laufende Regressverfahren erfragen</a:t>
+            </a:r>
+          </a:p>
+          <a:p>
+            <a:pPr>
+              <a:spcBef>
+                <a:spcPts val="400"/>
+              </a:spcBef>
+              <a:spcAft>
+                <a:spcPts val="200"/>
+              </a:spcAft>
+            </a:pPr>
+            <a:r>
+              <a:rPr sz="1300">
+                <a:solidFill>
+                  <a:srgbClr val="3D5466"/>
+                </a:solidFill>
+                <a:latin typeface="Arial"/>
+              </a:rPr>
+              <a:t>▸  [ ] 9. Betriebsausgaben auf Plausibilität prüfen (Personalquote, Mietquote)</a:t>
+            </a:r>
+          </a:p>
+        </p:txBody>
+      </p:sp>
+      <p:sp>
+        <p:nvSpPr>
+          <p:cNvPr id="9" name="Rectangle 8"/>
+          <p:cNvSpPr/>
+          <p:nvPr/>
+        </p:nvSpPr>
+        <p:spPr>
+          <a:xfrm>
+            <a:off x="0" y="6510528"/>
+            <a:ext cx="12188952" cy="347472"/>
+          </a:xfrm>
+          <a:prstGeom prst="rect">
+            <a:avLst/>
+          </a:prstGeom>
+          <a:solidFill>
+            <a:srgbClr val="0A1937"/>
+          </a:solidFill>
+          <a:ln>
+            <a:noFill/>
+          </a:ln>
+        </p:spPr>
+        <p:style>
+          <a:lnRef idx="1">
+            <a:schemeClr val="accent1"/>
+          </a:lnRef>
+          <a:fillRef idx="3">
+            <a:schemeClr val="accent1"/>
+          </a:fillRef>
+          <a:effectRef idx="2">
+            <a:schemeClr val="accent1"/>
+          </a:effectRef>
+          <a:fontRef idx="minor">
+            <a:schemeClr val="lt1"/>
+          </a:fontRef>
+        </p:style>
+        <p:txBody>
+          <a:bodyPr rtlCol="0" anchor="ctr"/>
+          <a:lstStyle/>
+          <a:p>
+            <a:pPr algn="ctr"/>
+          </a:p>
+        </p:txBody>
+      </p:sp>
+      <p:sp>
+        <p:nvSpPr>
+          <p:cNvPr id="10" name="TextBox 9"/>
+          <p:cNvSpPr txBox="1"/>
+          <p:nvPr/>
+        </p:nvSpPr>
+        <p:spPr>
+          <a:xfrm>
+            <a:off x="685800" y="6583680"/>
+            <a:ext cx="6490411" cy="256032"/>
+          </a:xfrm>
+          <a:prstGeom prst="rect">
+            <a:avLst/>
+          </a:prstGeom>
+          <a:noFill/>
+        </p:spPr>
+        <p:txBody>
+          <a:bodyPr wrap="none">
+            <a:spAutoFit/>
+          </a:bodyPr>
+          <a:lstStyle/>
+          <a:p>
+            <a:pPr algn="l"/>
+            <a:r>
+              <a:rPr sz="700">
+                <a:solidFill>
+                  <a:srgbClr val="A0B4D2"/>
+                </a:solidFill>
+                <a:latin typeface="JetBrains Mono"/>
+              </a:rPr>
+              <a:t>Benedikt Zoller Coaching  ·  FKB Campus  ·  M07</a:t>
+            </a:r>
+          </a:p>
+        </p:txBody>
+      </p:sp>
+    </p:spTree>
+  </p:cSld>
+  <p:clrMapOvr>
+    <a:masterClrMapping/>
+  </p:clrMapOvr>
+</p:sld>
+</file>
+
+<file path=ppt/slides/slide11.xml><?xml version="1.0" encoding="utf-8"?>
+<p:sld xmlns:a="http://schemas.openxmlformats.org/drawingml/2006/main" xmlns:p="http://schemas.openxmlformats.org/presentationml/2006/main" xmlns:r="http://schemas.openxmlformats.org/officeDocument/2006/relationships">
+  <p:cSld>
+    <p:spTree>
+      <p:nvGrpSpPr>
+        <p:cNvPr id="1" name=""/>
+        <p:cNvGrpSpPr/>
+        <p:nvPr/>
+      </p:nvGrpSpPr>
+      <p:grpSpPr/>
+      <p:sp>
+        <p:nvSpPr>
+          <p:cNvPr id="2" name="Rectangle 1"/>
+          <p:cNvSpPr/>
+          <p:nvPr/>
+        </p:nvSpPr>
+        <p:spPr>
+          <a:xfrm>
+            <a:off x="0" y="0"/>
+            <a:ext cx="12188952" cy="6858000"/>
+          </a:xfrm>
+          <a:prstGeom prst="rect">
+            <a:avLst/>
+          </a:prstGeom>
+          <a:solidFill>
+            <a:srgbClr val="EDEDF3"/>
+          </a:solidFill>
+          <a:ln>
+            <a:noFill/>
+          </a:ln>
+        </p:spPr>
+        <p:style>
+          <a:lnRef idx="1">
+            <a:schemeClr val="accent1"/>
+          </a:lnRef>
+          <a:fillRef idx="3">
+            <a:schemeClr val="accent1"/>
+          </a:fillRef>
+          <a:effectRef idx="2">
+            <a:schemeClr val="accent1"/>
+          </a:effectRef>
+          <a:fontRef idx="minor">
+            <a:schemeClr val="lt1"/>
+          </a:fontRef>
+        </p:style>
+        <p:txBody>
+          <a:bodyPr rtlCol="0" anchor="ctr"/>
+          <a:lstStyle/>
+          <a:p>
+            <a:pPr algn="ctr"/>
+          </a:p>
+        </p:txBody>
+      </p:sp>
+      <p:sp>
+        <p:nvSpPr>
+          <p:cNvPr id="3" name="Rectangle 2"/>
+          <p:cNvSpPr/>
+          <p:nvPr/>
+        </p:nvSpPr>
+        <p:spPr>
+          <a:xfrm>
+            <a:off x="0" y="0"/>
+            <a:ext cx="12188952" cy="50292"/>
+          </a:xfrm>
+          <a:prstGeom prst="rect">
+            <a:avLst/>
+          </a:prstGeom>
+          <a:solidFill>
+            <a:srgbClr val="1F2C56"/>
+          </a:solidFill>
+          <a:ln>
+            <a:noFill/>
+          </a:ln>
+        </p:spPr>
+        <p:style>
+          <a:lnRef idx="1">
+            <a:schemeClr val="accent1"/>
+          </a:lnRef>
+          <a:fillRef idx="3">
+            <a:schemeClr val="accent1"/>
+          </a:fillRef>
+          <a:effectRef idx="2">
+            <a:schemeClr val="accent1"/>
+          </a:effectRef>
+          <a:fontRef idx="minor">
+            <a:schemeClr val="lt1"/>
+          </a:fontRef>
+        </p:style>
+        <p:txBody>
+          <a:bodyPr rtlCol="0" anchor="ctr"/>
+          <a:lstStyle/>
+          <a:p>
+            <a:pPr algn="ctr"/>
+          </a:p>
+        </p:txBody>
+      </p:sp>
+      <p:sp>
+        <p:nvSpPr>
+          <p:cNvPr id="4" name="TextBox 3"/>
+          <p:cNvSpPr txBox="1"/>
+          <p:nvPr/>
+        </p:nvSpPr>
+        <p:spPr>
+          <a:xfrm>
+            <a:off x="685800" y="109728"/>
+            <a:ext cx="10817352" cy="228600"/>
+          </a:xfrm>
+          <a:prstGeom prst="rect">
+            <a:avLst/>
+          </a:prstGeom>
+          <a:noFill/>
+        </p:spPr>
+        <p:txBody>
+          <a:bodyPr wrap="none">
+            <a:spAutoFit/>
+          </a:bodyPr>
+          <a:lstStyle/>
+          <a:p>
+            <a:pPr algn="l"/>
+            <a:r>
+              <a:rPr sz="750">
+                <a:solidFill>
+                  <a:srgbClr val="78808C"/>
+                </a:solidFill>
+                <a:latin typeface="JetBrains Mono"/>
+              </a:rPr>
+              <a:t>M07  ·  INHALT</a:t>
+            </a:r>
+          </a:p>
+        </p:txBody>
+      </p:sp>
+      <p:sp>
+        <p:nvSpPr>
+          <p:cNvPr id="5" name="Rectangle 4"/>
+          <p:cNvSpPr/>
+          <p:nvPr/>
+        </p:nvSpPr>
+        <p:spPr>
+          <a:xfrm>
+            <a:off x="0" y="1234440"/>
+            <a:ext cx="12188952" cy="12700"/>
+          </a:xfrm>
+          <a:prstGeom prst="rect">
+            <a:avLst/>
+          </a:prstGeom>
+          <a:solidFill>
+            <a:srgbClr val="D8DFE4"/>
+          </a:solidFill>
+          <a:ln>
+            <a:noFill/>
+          </a:ln>
+        </p:spPr>
+        <p:style>
+          <a:lnRef idx="1">
+            <a:schemeClr val="accent1"/>
+          </a:lnRef>
+          <a:fillRef idx="3">
+            <a:schemeClr val="accent1"/>
+          </a:fillRef>
+          <a:effectRef idx="2">
+            <a:schemeClr val="accent1"/>
+          </a:effectRef>
+          <a:fontRef idx="minor">
+            <a:schemeClr val="lt1"/>
+          </a:fontRef>
+        </p:style>
+        <p:txBody>
+          <a:bodyPr rtlCol="0" anchor="ctr"/>
+          <a:lstStyle/>
+          <a:p>
+            <a:pPr algn="ctr"/>
+          </a:p>
+        </p:txBody>
+      </p:sp>
+      <p:sp>
+        <p:nvSpPr>
+          <p:cNvPr id="6" name="Rectangle 5"/>
+          <p:cNvSpPr/>
+          <p:nvPr/>
+        </p:nvSpPr>
+        <p:spPr>
+          <a:xfrm>
+            <a:off x="685800" y="502920"/>
+            <a:ext cx="36576" cy="658368"/>
+          </a:xfrm>
+          <a:prstGeom prst="rect">
+            <a:avLst/>
+          </a:prstGeom>
+          <a:solidFill>
+            <a:srgbClr val="D9C089"/>
+          </a:solidFill>
+          <a:ln>
+            <a:noFill/>
+          </a:ln>
+        </p:spPr>
+        <p:style>
+          <a:lnRef idx="1">
+            <a:schemeClr val="accent1"/>
+          </a:lnRef>
+          <a:fillRef idx="3">
+            <a:schemeClr val="accent1"/>
+          </a:fillRef>
+          <a:effectRef idx="2">
+            <a:schemeClr val="accent1"/>
+          </a:effectRef>
+          <a:fontRef idx="minor">
+            <a:schemeClr val="lt1"/>
+          </a:fontRef>
+        </p:style>
+        <p:txBody>
+          <a:bodyPr rtlCol="0" anchor="ctr"/>
+          <a:lstStyle/>
+          <a:p>
+            <a:pPr algn="ctr"/>
+          </a:p>
+        </p:txBody>
+      </p:sp>
+      <p:sp>
+        <p:nvSpPr>
+          <p:cNvPr id="7" name="TextBox 6"/>
+          <p:cNvSpPr txBox="1"/>
+          <p:nvPr/>
+        </p:nvSpPr>
+        <p:spPr>
+          <a:xfrm>
+            <a:off x="813816" y="502920"/>
+            <a:ext cx="10634472" cy="685800"/>
+          </a:xfrm>
+          <a:prstGeom prst="rect">
+            <a:avLst/>
+          </a:prstGeom>
+          <a:noFill/>
+        </p:spPr>
+        <p:txBody>
+          <a:bodyPr wrap="square">
+            <a:spAutoFit/>
+          </a:bodyPr>
+          <a:lstStyle/>
+          <a:p>
+            <a:pPr algn="l"/>
+            <a:r>
+              <a:rPr sz="2400" b="1" i="0">
+                <a:solidFill>
+                  <a:srgbClr val="1F2C56"/>
+                </a:solidFill>
+                <a:latin typeface="Source Serif 4"/>
+              </a:rPr>
               <a:t>Reflexionsfragen</a:t>
             </a:r>
           </a:p>
@@ -4600,7 +6155,7 @@
                 </a:solidFill>
                 <a:latin typeface="JetBrains Mono"/>
               </a:rPr>
-              <a:t>M07  ·  INHALT</a:t>
+              <a:t>AGENDA  ·  M07</a:t>
             </a:r>
           </a:p>
         </p:txBody>
@@ -4650,57 +6205,14 @@
       </p:sp>
       <p:sp>
         <p:nvSpPr>
-          <p:cNvPr id="6" name="Rectangle 5"/>
-          <p:cNvSpPr/>
+          <p:cNvPr id="6" name="TextBox 5"/>
+          <p:cNvSpPr txBox="1"/>
           <p:nvPr/>
         </p:nvSpPr>
         <p:spPr>
           <a:xfrm>
             <a:off x="685800" y="502920"/>
-            <a:ext cx="36576" cy="658368"/>
-          </a:xfrm>
-          <a:prstGeom prst="rect">
-            <a:avLst/>
-          </a:prstGeom>
-          <a:solidFill>
-            <a:srgbClr val="D9C089"/>
-          </a:solidFill>
-          <a:ln>
-            <a:noFill/>
-          </a:ln>
-        </p:spPr>
-        <p:style>
-          <a:lnRef idx="1">
-            <a:schemeClr val="accent1"/>
-          </a:lnRef>
-          <a:fillRef idx="3">
-            <a:schemeClr val="accent1"/>
-          </a:fillRef>
-          <a:effectRef idx="2">
-            <a:schemeClr val="accent1"/>
-          </a:effectRef>
-          <a:fontRef idx="minor">
-            <a:schemeClr val="lt1"/>
-          </a:fontRef>
-        </p:style>
-        <p:txBody>
-          <a:bodyPr rtlCol="0" anchor="ctr"/>
-          <a:lstStyle/>
-          <a:p>
-            <a:pPr algn="ctr"/>
-          </a:p>
-        </p:txBody>
-      </p:sp>
-      <p:sp>
-        <p:nvSpPr>
-          <p:cNvPr id="7" name="TextBox 6"/>
-          <p:cNvSpPr txBox="1"/>
-          <p:nvPr/>
-        </p:nvSpPr>
-        <p:spPr>
-          <a:xfrm>
-            <a:off x="813816" y="502920"/>
-            <a:ext cx="10634472" cy="685800"/>
+            <a:ext cx="10817352" cy="658368"/>
           </a:xfrm>
           <a:prstGeom prst="rect">
             <a:avLst/>
@@ -4715,27 +6227,27 @@
           <a:p>
             <a:pPr algn="l"/>
             <a:r>
-              <a:rPr sz="2400" b="1" i="0">
+              <a:rPr sz="2600" b="1" i="0">
                 <a:solidFill>
                   <a:srgbClr val="1F2C56"/>
                 </a:solidFill>
                 <a:latin typeface="Source Serif 4"/>
               </a:rPr>
-              <a:t>Theorie-Input 1: Freie Berufe – rechtliche und wirtschaftliche Grundlagen</a:t>
-            </a:r>
-          </a:p>
-        </p:txBody>
-      </p:sp>
-      <p:sp>
-        <p:nvSpPr>
-          <p:cNvPr id="8" name="TextBox 7"/>
+              <a:t>Agenda</a:t>
+            </a:r>
+          </a:p>
+        </p:txBody>
+      </p:sp>
+      <p:sp>
+        <p:nvSpPr>
+          <p:cNvPr id="7" name="TextBox 6"/>
           <p:cNvSpPr txBox="1"/>
           <p:nvPr/>
         </p:nvSpPr>
         <p:spPr>
           <a:xfrm>
-            <a:off x="685800" y="1417320"/>
-            <a:ext cx="10817352" cy="5029200"/>
+            <a:off x="685800" y="1463040"/>
+            <a:ext cx="10817352" cy="4937760"/>
           </a:xfrm>
           <a:prstGeom prst="rect">
             <a:avLst/>
@@ -4750,236 +6262,122 @@
           <a:p>
             <a:pPr>
               <a:spcBef>
-                <a:spcPts val="1000"/>
+                <a:spcPts val="800"/>
               </a:spcBef>
               <a:spcAft>
                 <a:spcPts val="200"/>
               </a:spcAft>
             </a:pPr>
             <a:r>
-              <a:rPr sz="800" b="1">
-                <a:solidFill>
-                  <a:srgbClr val="78808C"/>
-                </a:solidFill>
-                <a:latin typeface="JetBrains Mono"/>
-              </a:rPr>
-              <a:t>ABGRENZUNG: FREIER BERUF VS. GEWERBE</a:t>
+              <a:rPr sz="1500">
+                <a:solidFill>
+                  <a:srgbClr val="3D5466"/>
+                </a:solidFill>
+                <a:latin typeface="Arial"/>
+              </a:rPr>
+              <a:t>01   Theorie-Input 1: Freie Berufe – rechtliche und wirtschaftliche Grundlagen</a:t>
             </a:r>
           </a:p>
           <a:p>
             <a:pPr>
               <a:spcBef>
-                <a:spcPts val="400"/>
+                <a:spcPts val="800"/>
               </a:spcBef>
               <a:spcAft>
                 <a:spcPts val="200"/>
               </a:spcAft>
             </a:pPr>
             <a:r>
-              <a:rPr sz="1200">
+              <a:rPr sz="1500">
                 <a:solidFill>
                   <a:srgbClr val="3D5466"/>
                 </a:solidFill>
                 <a:latin typeface="Arial"/>
               </a:rPr>
-              <a:t>Die praktischen Konsequenzen für die Bankbeziehung:</a:t>
+              <a:t>02   Theorie-Input 2: Praxisbewertung und Finanzierungsstruktur</a:t>
             </a:r>
           </a:p>
           <a:p>
             <a:pPr>
               <a:spcBef>
-                <a:spcPts val="400"/>
+                <a:spcPts val="800"/>
               </a:spcBef>
               <a:spcAft>
                 <a:spcPts val="200"/>
               </a:spcAft>
             </a:pPr>
             <a:r>
-              <a:rPr sz="1200">
+              <a:rPr sz="1500">
                 <a:solidFill>
                   <a:srgbClr val="3D5466"/>
                 </a:solidFill>
                 <a:latin typeface="Arial"/>
               </a:rPr>
-              <a:t>Quellen: § 18 EStG; § 4 Abs. 3 EStG; Gumpert &amp; Kausch (2022 )</a:t>
+              <a:t>03   Theorie-Input 3: Risikoprofil und Sicherheitenkonzept</a:t>
             </a:r>
           </a:p>
           <a:p>
             <a:pPr>
               <a:spcBef>
-                <a:spcPts val="1000"/>
+                <a:spcPts val="800"/>
               </a:spcBef>
               <a:spcAft>
                 <a:spcPts val="200"/>
               </a:spcAft>
             </a:pPr>
             <a:r>
-              <a:rPr sz="800" b="1">
-                <a:solidFill>
-                  <a:srgbClr val="78808C"/>
-                </a:solidFill>
-                <a:latin typeface="JetBrains Mono"/>
-              </a:rPr>
-              <a:t>PRAXISRELEVANZ: EINZELPRAXIS, BERUFSAUSÜBUNGSGEMEINSCHAFT (BAG) UND MVZ IM VERGLEICH</a:t>
+              <a:rPr sz="1500">
+                <a:solidFill>
+                  <a:srgbClr val="3D5466"/>
+                </a:solidFill>
+                <a:latin typeface="Arial"/>
+              </a:rPr>
+              <a:t>04   Praxiscase: Dr. Mayer – Zahnarztpraxis-Übernahme in Ravensburg</a:t>
             </a:r>
           </a:p>
           <a:p>
             <a:pPr>
               <a:spcBef>
-                <a:spcPts val="400"/>
+                <a:spcPts val="800"/>
               </a:spcBef>
               <a:spcAft>
                 <a:spcPts val="200"/>
               </a:spcAft>
             </a:pPr>
             <a:r>
-              <a:rPr sz="1200">
+              <a:rPr sz="1500">
                 <a:solidFill>
                   <a:srgbClr val="3D5466"/>
                 </a:solidFill>
                 <a:latin typeface="Arial"/>
               </a:rPr>
-              <a:t>Die bloße Abgrenzung „Freier Beruf vs. Gewerbe" greift in der Beratungspraxis zu kurz. Entscheidend für die Kreditanalyse ist auch die Organisationsform, in der der Heilberuf ausgeübt wird:</a:t>
+              <a:t>05   Checkliste: Heilberufe-Erstgespräch (15 Punkte)</a:t>
             </a:r>
           </a:p>
           <a:p>
             <a:pPr>
               <a:spcBef>
-                <a:spcPts val="400"/>
+                <a:spcPts val="800"/>
               </a:spcBef>
               <a:spcAft>
                 <a:spcPts val="200"/>
               </a:spcAft>
             </a:pPr>
             <a:r>
-              <a:rPr sz="1200">
+              <a:rPr sz="1500">
                 <a:solidFill>
                   <a:srgbClr val="3D5466"/>
                 </a:solidFill>
                 <a:latin typeface="Arial"/>
               </a:rPr>
-              <a:t>Für den Berater – Daumenregel:</a:t>
-            </a:r>
-          </a:p>
-          <a:p>
-            <a:pPr>
-              <a:spcBef>
-                <a:spcPts val="400"/>
-              </a:spcBef>
-              <a:spcAft>
-                <a:spcPts val="200"/>
-              </a:spcAft>
-            </a:pPr>
-            <a:r>
-              <a:rPr sz="1300">
-                <a:solidFill>
-                  <a:srgbClr val="3D5466"/>
-                </a:solidFill>
-                <a:latin typeface="Arial"/>
-              </a:rPr>
-              <a:t>▸  Einzelpraxis: Standardvorgehen gemäß M07</a:t>
-            </a:r>
-          </a:p>
-          <a:p>
-            <a:pPr>
-              <a:spcBef>
-                <a:spcPts val="400"/>
-              </a:spcBef>
-              <a:spcAft>
-                <a:spcPts val="200"/>
-              </a:spcAft>
-            </a:pPr>
-            <a:r>
-              <a:rPr sz="1300">
-                <a:solidFill>
-                  <a:srgbClr val="3D5466"/>
-                </a:solidFill>
-                <a:latin typeface="Arial"/>
-              </a:rPr>
-              <a:t>▸  BAG mit 2–3 Partnern: immer Gesellschaftsvertrag anfordern, Bonitätsprüfung aller Partner, Regelung bei Ausscheiden eines Partners klären</a:t>
-            </a:r>
-          </a:p>
-          <a:p>
-            <a:pPr>
-              <a:spcBef>
-                <a:spcPts val="400"/>
-              </a:spcBef>
-              <a:spcAft>
-                <a:spcPts val="200"/>
-              </a:spcAft>
-            </a:pPr>
-            <a:r>
-              <a:rPr sz="1300">
-                <a:solidFill>
-                  <a:srgbClr val="3D5466"/>
-                </a:solidFill>
-                <a:latin typeface="Arial"/>
-              </a:rPr>
-              <a:t>▸  MVZ: Spezialisten einbinden (DZ BANK Corporate Finance oder internen gewerblichen Spezialisten) – das ist keine klassische Freiberufler-Finanzierung mehr</a:t>
-            </a:r>
-          </a:p>
-          <a:p>
-            <a:pPr>
-              <a:spcBef>
-                <a:spcPts val="400"/>
-              </a:spcBef>
-              <a:spcAft>
-                <a:spcPts val="200"/>
-              </a:spcAft>
-            </a:pPr>
-            <a:r>
-              <a:rPr sz="1200">
-                <a:solidFill>
-                  <a:srgbClr val="3D5466"/>
-                </a:solidFill>
-                <a:latin typeface="Arial"/>
-              </a:rPr>
-              <a:t>Quelle: Gumpert &amp; Kausch (2022 )</a:t>
-            </a:r>
-          </a:p>
-          <a:p>
-            <a:pPr>
-              <a:spcBef>
-                <a:spcPts val="1000"/>
-              </a:spcBef>
-              <a:spcAft>
-                <a:spcPts val="200"/>
-              </a:spcAft>
-            </a:pPr>
-            <a:r>
-              <a:rPr sz="800" b="1">
-                <a:solidFill>
-                  <a:srgbClr val="78808C"/>
-                </a:solidFill>
-                <a:latin typeface="JetBrains Mono"/>
-              </a:rPr>
-              <a:t>EÜR VS. BILANZ: WAS DER BERATER WISSEN MUSS</a:t>
-            </a:r>
-          </a:p>
-          <a:p>
-            <a:pPr>
-              <a:spcBef>
-                <a:spcPts val="400"/>
-              </a:spcBef>
-              <a:spcAft>
-                <a:spcPts val="200"/>
-              </a:spcAft>
-            </a:pPr>
-            <a:r>
-              <a:rPr sz="1200">
-                <a:solidFill>
-                  <a:srgbClr val="3D5466"/>
-                </a:solidFill>
-                <a:latin typeface="Arial"/>
-              </a:rPr>
-              <a:t>Keine Abgrenzung von Anlagevermögen in der EÜR: Investitionen erscheinen als sofortiger Aufwand oder werden über AfA-Listen abgeschrieben; eine bilanzielle Kapitalstruktur fehlt.</a:t>
-            </a:r>
-          </a:p>
-        </p:txBody>
-      </p:sp>
-      <p:sp>
-        <p:nvSpPr>
-          <p:cNvPr id="9" name="Rectangle 8"/>
+              <a:t>06   Reflexionsfragen</a:t>
+            </a:r>
+          </a:p>
+        </p:txBody>
+      </p:sp>
+      <p:sp>
+        <p:nvSpPr>
+          <p:cNvPr id="8" name="Rectangle 7"/>
           <p:cNvSpPr/>
           <p:nvPr/>
         </p:nvSpPr>
@@ -5022,7 +6420,7 @@
       </p:sp>
       <p:sp>
         <p:nvSpPr>
-          <p:cNvPr id="10" name="TextBox 9"/>
+          <p:cNvPr id="9" name="TextBox 8"/>
           <p:cNvSpPr txBox="1"/>
           <p:nvPr/>
         </p:nvSpPr>
@@ -5310,7 +6708,7 @@
                 </a:solidFill>
                 <a:latin typeface="Source Serif 4"/>
               </a:rPr>
-              <a:t>Theorie-Input 2: Praxisbewertung und Finanzierungsstruktur</a:t>
+              <a:t>Theorie-Input 1: Freie Berufe – rechtliche und wirtschaftliche Grundlagen</a:t>
             </a:r>
           </a:p>
         </p:txBody>
@@ -5352,7 +6750,7 @@
                 </a:solidFill>
                 <a:latin typeface="JetBrains Mono"/>
               </a:rPr>
-              <a:t>PRAXISÜBERNAHME VS. PRAXISGRÜNDUNG</a:t>
+              <a:t>ABGRENZUNG: FREIER BERUF VS. GEWERBE</a:t>
             </a:r>
           </a:p>
           <a:p>
@@ -5371,7 +6769,7 @@
                 </a:solidFill>
                 <a:latin typeface="Arial"/>
               </a:rPr>
-              <a:t>Bewertungsverfahren nach IDW S5:</a:t>
+              <a:t>Die praktischen Konsequenzen für die Bankbeziehung:</a:t>
             </a:r>
           </a:p>
           <a:p>
@@ -5390,7 +6788,26 @@
                 </a:solidFill>
                 <a:latin typeface="Arial"/>
               </a:rPr>
-              <a:t>Substanzwert: Zeitwert aller materiellen Wirtschaftsgüter (Praxiseinrichtung, Medizintechnik, IT, Vorräte). Dieser Anteil ist relativ unproblematisch zu finanzieren und gut beleihbar.</a:t>
+              <a:t>Quellen: § 18 EStG; § 4 Abs. 3 EStG; Gumpert &amp; Kausch (2022 )</a:t>
+            </a:r>
+          </a:p>
+          <a:p>
+            <a:pPr>
+              <a:spcBef>
+                <a:spcPts val="1000"/>
+              </a:spcBef>
+              <a:spcAft>
+                <a:spcPts val="200"/>
+              </a:spcAft>
+            </a:pPr>
+            <a:r>
+              <a:rPr sz="800" b="1">
+                <a:solidFill>
+                  <a:srgbClr val="78808C"/>
+                </a:solidFill>
+                <a:latin typeface="JetBrains Mono"/>
+              </a:rPr>
+              <a:t>PRAXISRELEVANZ: EINZELPRAXIS, BERUFSAUSÜBUNGSGEMEINSCHAFT (BAG) UND MVZ IM VERGLEICH</a:t>
             </a:r>
           </a:p>
           <a:p>
@@ -5409,7 +6826,7 @@
                 </a:solidFill>
                 <a:latin typeface="Arial"/>
               </a:rPr>
-              <a:t>```</a:t>
+              <a:t>Die bloße Abgrenzung „Freier Beruf vs. Gewerbe" greift in der Beratungspraxis zu kurz. Entscheidend für die Kreditanalyse ist auch die Organisationsform, in der der Heilberuf ausgeübt wird:</a:t>
             </a:r>
           </a:p>
           <a:p>
@@ -5428,7 +6845,7 @@
                 </a:solidFill>
                 <a:latin typeface="Arial"/>
               </a:rPr>
-              <a:t>Modifizierte Ertragswertmethode (IDW S5):</a:t>
+              <a:t>Für den Berater – Daumenregel:</a:t>
             </a:r>
           </a:p>
           <a:p>
@@ -5447,7 +6864,7 @@
                 </a:solidFill>
                 <a:latin typeface="Arial"/>
               </a:rPr>
-              <a:t>▸  Durchschnittlicher Jahresüberschuss (Ø 3 Jahre)     EUR ___________</a:t>
+              <a:t>▸  Einzelpraxis: Standardvorgehen gemäß M07</a:t>
             </a:r>
           </a:p>
           <a:p>
@@ -5466,7 +6883,7 @@
                 </a:solidFill>
                 <a:latin typeface="Arial"/>
               </a:rPr>
-              <a:t>▸  ./. Unternehmerlohn (arztspezifischer Fixbetrag)     EUR ___________</a:t>
+              <a:t>▸  BAG mit 2–3 Partnern: immer Gesellschaftsvertrag anfordern, Bonitätsprüfung aller Partner, Regelung bei Ausscheiden eines Partners klären</a:t>
             </a:r>
           </a:p>
           <a:p>
@@ -5485,7 +6902,7 @@
                 </a:solidFill>
                 <a:latin typeface="Arial"/>
               </a:rPr>
-              <a:t>▸  ./. Risikoabschlag (Zulassungsrisiko, Inhaberabhängigkeit) ca. 20–30 %</a:t>
+              <a:t>▸  MVZ: Spezialisten einbinden (DZ BANK Corporate Finance oder internen gewerblichen Spezialisten) – das ist keine klassische Freiberufler-Finanzierung mehr</a:t>
             </a:r>
           </a:p>
           <a:p>
@@ -5498,13 +6915,32 @@
               </a:spcAft>
             </a:pPr>
             <a:r>
-              <a:rPr sz="1300">
+              <a:rPr sz="1200">
                 <a:solidFill>
                   <a:srgbClr val="3D5466"/>
                 </a:solidFill>
                 <a:latin typeface="Arial"/>
               </a:rPr>
-              <a:t>▸  = Nachhaltiger Jahresertrag                          EUR ___________</a:t>
+              <a:t>Quelle: Gumpert &amp; Kausch (2022 )</a:t>
+            </a:r>
+          </a:p>
+          <a:p>
+            <a:pPr>
+              <a:spcBef>
+                <a:spcPts val="1000"/>
+              </a:spcBef>
+              <a:spcAft>
+                <a:spcPts val="200"/>
+              </a:spcAft>
+            </a:pPr>
+            <a:r>
+              <a:rPr sz="800" b="1">
+                <a:solidFill>
+                  <a:srgbClr val="78808C"/>
+                </a:solidFill>
+                <a:latin typeface="JetBrains Mono"/>
+              </a:rPr>
+              <a:t>EÜR VS. BILANZ: WAS DER BERATER WISSEN MUSS</a:t>
             </a:r>
           </a:p>
           <a:p>
@@ -5517,51 +6953,13 @@
               </a:spcAft>
             </a:pPr>
             <a:r>
-              <a:rPr sz="1300">
+              <a:rPr sz="1200">
                 <a:solidFill>
                   <a:srgbClr val="3D5466"/>
                 </a:solidFill>
                 <a:latin typeface="Arial"/>
               </a:rPr>
-              <a:t>▸  × Kapitalisierungsfaktor (ca. 2,0–3,5×, je nach Fach/Lage)</a:t>
-            </a:r>
-          </a:p>
-          <a:p>
-            <a:pPr>
-              <a:spcBef>
-                <a:spcPts val="400"/>
-              </a:spcBef>
-              <a:spcAft>
-                <a:spcPts val="200"/>
-              </a:spcAft>
-            </a:pPr>
-            <a:r>
-              <a:rPr sz="1300">
-                <a:solidFill>
-                  <a:srgbClr val="3D5466"/>
-                </a:solidFill>
-                <a:latin typeface="Arial"/>
-              </a:rPr>
-              <a:t>▸  = Ideeller Praxiswert (Goodwill)                     EUR ___________</a:t>
-            </a:r>
-          </a:p>
-          <a:p>
-            <a:pPr>
-              <a:spcBef>
-                <a:spcPts val="400"/>
-              </a:spcBef>
-              <a:spcAft>
-                <a:spcPts val="200"/>
-              </a:spcAft>
-            </a:pPr>
-            <a:r>
-              <a:rPr sz="1200">
-                <a:solidFill>
-                  <a:srgbClr val="3D5466"/>
-                </a:solidFill>
-                <a:latin typeface="Arial"/>
-              </a:rPr>
-              <a:t>Praxiswert gesamt = Substanzwert + Goodwill</a:t>
+              <a:t>Keine Abgrenzung von Anlagevermögen in der EÜR: Investitionen erscheinen als sofortiger Aufwand oder werden über AfA-Listen abgeschrieben; eine bilanzielle Kapitalstruktur fehlt.</a:t>
             </a:r>
           </a:p>
         </p:txBody>
@@ -5677,7 +7075,7 @@
             <a:avLst/>
           </a:prstGeom>
           <a:solidFill>
-            <a:srgbClr val="FFFFFF"/>
+            <a:srgbClr val="EDEDF3"/>
           </a:solidFill>
           <a:ln>
             <a:noFill/>
@@ -5778,43 +7176,51 @@
                 </a:solidFill>
                 <a:latin typeface="JetBrains Mono"/>
               </a:rPr>
-              <a:t>M07  ·  SCHAUBILD</a:t>
-            </a:r>
-          </a:p>
-        </p:txBody>
-      </p:sp>
-      <p:sp>
-        <p:nvSpPr>
-          <p:cNvPr id="5" name="TextBox 4"/>
-          <p:cNvSpPr txBox="1"/>
-          <p:nvPr/>
-        </p:nvSpPr>
-        <p:spPr>
-          <a:xfrm>
-            <a:off x="685800" y="502920"/>
-            <a:ext cx="10817352" cy="594360"/>
-          </a:xfrm>
-          <a:prstGeom prst="rect">
-            <a:avLst/>
-          </a:prstGeom>
-          <a:noFill/>
-        </p:spPr>
-        <p:txBody>
-          <a:bodyPr wrap="square">
-            <a:spAutoFit/>
-          </a:bodyPr>
-          <a:lstStyle/>
-          <a:p>
-            <a:pPr algn="l"/>
-            <a:r>
-              <a:rPr sz="2000" b="1" i="0">
-                <a:solidFill>
-                  <a:srgbClr val="1F2C56"/>
-                </a:solidFill>
-                <a:latin typeface="Source Serif 4"/>
-              </a:rPr>
-              <a:t>Praxiswert-Ermittlung nach IDW S5</a:t>
-            </a:r>
+              <a:t>M07  ·  INHALT</a:t>
+            </a:r>
+          </a:p>
+        </p:txBody>
+      </p:sp>
+      <p:sp>
+        <p:nvSpPr>
+          <p:cNvPr id="5" name="Rectangle 4"/>
+          <p:cNvSpPr/>
+          <p:nvPr/>
+        </p:nvSpPr>
+        <p:spPr>
+          <a:xfrm>
+            <a:off x="0" y="1234440"/>
+            <a:ext cx="12188952" cy="12700"/>
+          </a:xfrm>
+          <a:prstGeom prst="rect">
+            <a:avLst/>
+          </a:prstGeom>
+          <a:solidFill>
+            <a:srgbClr val="D8DFE4"/>
+          </a:solidFill>
+          <a:ln>
+            <a:noFill/>
+          </a:ln>
+        </p:spPr>
+        <p:style>
+          <a:lnRef idx="1">
+            <a:schemeClr val="accent1"/>
+          </a:lnRef>
+          <a:fillRef idx="3">
+            <a:schemeClr val="accent1"/>
+          </a:fillRef>
+          <a:effectRef idx="2">
+            <a:schemeClr val="accent1"/>
+          </a:effectRef>
+          <a:fontRef idx="minor">
+            <a:schemeClr val="lt1"/>
+          </a:fontRef>
+        </p:style>
+        <p:txBody>
+          <a:bodyPr rtlCol="0" anchor="ctr"/>
+          <a:lstStyle/>
+          <a:p>
+            <a:pPr algn="ctr"/>
           </a:p>
         </p:txBody>
       </p:sp>
@@ -5826,8 +7232,8 @@
         </p:nvSpPr>
         <p:spPr>
           <a:xfrm>
-            <a:off x="685800" y="1143000"/>
-            <a:ext cx="10817352" cy="25400"/>
+            <a:off x="685800" y="502920"/>
+            <a:ext cx="36576" cy="658368"/>
           </a:xfrm>
           <a:prstGeom prst="rect">
             <a:avLst/>
@@ -5861,33 +7267,295 @@
           </a:p>
         </p:txBody>
       </p:sp>
-      <p:pic>
-        <p:nvPicPr>
-          <p:cNvPr id="7" name="Picture 6" descr="image.png"/>
-          <p:cNvPicPr>
-            <a:picLocks noChangeAspect="1"/>
-          </p:cNvPicPr>
-          <p:nvPr/>
-        </p:nvPicPr>
-        <p:blipFill>
-          <a:blip r:embed="rId2"/>
-          <a:stretch>
-            <a:fillRect/>
-          </a:stretch>
-        </p:blipFill>
-        <p:spPr>
-          <a:xfrm>
-            <a:off x="2303489" y="1325880"/>
-            <a:ext cx="7581973" cy="4937760"/>
-          </a:xfrm>
-          <a:prstGeom prst="rect">
-            <a:avLst/>
-          </a:prstGeom>
-        </p:spPr>
-      </p:pic>
-      <p:sp>
-        <p:nvSpPr>
-          <p:cNvPr id="8" name="Rectangle 7"/>
+      <p:sp>
+        <p:nvSpPr>
+          <p:cNvPr id="7" name="TextBox 6"/>
+          <p:cNvSpPr txBox="1"/>
+          <p:nvPr/>
+        </p:nvSpPr>
+        <p:spPr>
+          <a:xfrm>
+            <a:off x="813816" y="502920"/>
+            <a:ext cx="10634472" cy="685800"/>
+          </a:xfrm>
+          <a:prstGeom prst="rect">
+            <a:avLst/>
+          </a:prstGeom>
+          <a:noFill/>
+        </p:spPr>
+        <p:txBody>
+          <a:bodyPr wrap="square">
+            <a:spAutoFit/>
+          </a:bodyPr>
+          <a:lstStyle/>
+          <a:p>
+            <a:pPr algn="l"/>
+            <a:r>
+              <a:rPr sz="2400" b="1" i="0">
+                <a:solidFill>
+                  <a:srgbClr val="1F2C56"/>
+                </a:solidFill>
+                <a:latin typeface="Source Serif 4"/>
+              </a:rPr>
+              <a:t>Theorie-Input 2: Praxisbewertung und Finanzierungsstruktur</a:t>
+            </a:r>
+          </a:p>
+        </p:txBody>
+      </p:sp>
+      <p:sp>
+        <p:nvSpPr>
+          <p:cNvPr id="8" name="TextBox 7"/>
+          <p:cNvSpPr txBox="1"/>
+          <p:nvPr/>
+        </p:nvSpPr>
+        <p:spPr>
+          <a:xfrm>
+            <a:off x="685800" y="1417320"/>
+            <a:ext cx="10817352" cy="5029200"/>
+          </a:xfrm>
+          <a:prstGeom prst="rect">
+            <a:avLst/>
+          </a:prstGeom>
+          <a:noFill/>
+        </p:spPr>
+        <p:txBody>
+          <a:bodyPr wrap="square">
+            <a:spAutoFit/>
+          </a:bodyPr>
+          <a:lstStyle/>
+          <a:p>
+            <a:pPr>
+              <a:spcBef>
+                <a:spcPts val="1000"/>
+              </a:spcBef>
+              <a:spcAft>
+                <a:spcPts val="200"/>
+              </a:spcAft>
+            </a:pPr>
+            <a:r>
+              <a:rPr sz="800" b="1">
+                <a:solidFill>
+                  <a:srgbClr val="78808C"/>
+                </a:solidFill>
+                <a:latin typeface="JetBrains Mono"/>
+              </a:rPr>
+              <a:t>PRAXISÜBERNAHME VS. PRAXISGRÜNDUNG</a:t>
+            </a:r>
+          </a:p>
+          <a:p>
+            <a:pPr>
+              <a:spcBef>
+                <a:spcPts val="400"/>
+              </a:spcBef>
+              <a:spcAft>
+                <a:spcPts val="200"/>
+              </a:spcAft>
+            </a:pPr>
+            <a:r>
+              <a:rPr sz="1200">
+                <a:solidFill>
+                  <a:srgbClr val="3D5466"/>
+                </a:solidFill>
+                <a:latin typeface="Arial"/>
+              </a:rPr>
+              <a:t>Bewertungsverfahren nach IDW S5:</a:t>
+            </a:r>
+          </a:p>
+          <a:p>
+            <a:pPr>
+              <a:spcBef>
+                <a:spcPts val="400"/>
+              </a:spcBef>
+              <a:spcAft>
+                <a:spcPts val="200"/>
+              </a:spcAft>
+            </a:pPr>
+            <a:r>
+              <a:rPr sz="1200">
+                <a:solidFill>
+                  <a:srgbClr val="3D5466"/>
+                </a:solidFill>
+                <a:latin typeface="Arial"/>
+              </a:rPr>
+              <a:t>Substanzwert: Zeitwert aller materiellen Wirtschaftsgüter (Praxiseinrichtung, Medizintechnik, IT, Vorräte). Dieser Anteil ist relativ unproblematisch zu finanzieren und gut beleihbar.</a:t>
+            </a:r>
+          </a:p>
+          <a:p>
+            <a:pPr>
+              <a:spcBef>
+                <a:spcPts val="400"/>
+              </a:spcBef>
+              <a:spcAft>
+                <a:spcPts val="200"/>
+              </a:spcAft>
+            </a:pPr>
+            <a:r>
+              <a:rPr sz="1200">
+                <a:solidFill>
+                  <a:srgbClr val="3D5466"/>
+                </a:solidFill>
+                <a:latin typeface="Arial"/>
+              </a:rPr>
+              <a:t>```</a:t>
+            </a:r>
+          </a:p>
+          <a:p>
+            <a:pPr>
+              <a:spcBef>
+                <a:spcPts val="400"/>
+              </a:spcBef>
+              <a:spcAft>
+                <a:spcPts val="200"/>
+              </a:spcAft>
+            </a:pPr>
+            <a:r>
+              <a:rPr sz="1200">
+                <a:solidFill>
+                  <a:srgbClr val="3D5466"/>
+                </a:solidFill>
+                <a:latin typeface="Arial"/>
+              </a:rPr>
+              <a:t>Modifizierte Ertragswertmethode (IDW S5):</a:t>
+            </a:r>
+          </a:p>
+          <a:p>
+            <a:pPr>
+              <a:spcBef>
+                <a:spcPts val="400"/>
+              </a:spcBef>
+              <a:spcAft>
+                <a:spcPts val="200"/>
+              </a:spcAft>
+            </a:pPr>
+            <a:r>
+              <a:rPr sz="1300">
+                <a:solidFill>
+                  <a:srgbClr val="3D5466"/>
+                </a:solidFill>
+                <a:latin typeface="Arial"/>
+              </a:rPr>
+              <a:t>▸  ./. Risikoabschlag (Zulassungsrisiko, Inhaberabhängigkeit) ca. 20–30 %</a:t>
+            </a:r>
+          </a:p>
+          <a:p>
+            <a:pPr>
+              <a:spcBef>
+                <a:spcPts val="400"/>
+              </a:spcBef>
+              <a:spcAft>
+                <a:spcPts val="200"/>
+              </a:spcAft>
+            </a:pPr>
+            <a:r>
+              <a:rPr sz="1300">
+                <a:solidFill>
+                  <a:srgbClr val="3D5466"/>
+                </a:solidFill>
+                <a:latin typeface="Arial"/>
+              </a:rPr>
+              <a:t>▸  × Kapitalisierungsfaktor (ca. 2,0–3,5×, je nach Fach/Lage)</a:t>
+            </a:r>
+          </a:p>
+          <a:p>
+            <a:pPr>
+              <a:spcBef>
+                <a:spcPts val="400"/>
+              </a:spcBef>
+              <a:spcAft>
+                <a:spcPts val="200"/>
+              </a:spcAft>
+            </a:pPr>
+            <a:r>
+              <a:rPr sz="1200">
+                <a:solidFill>
+                  <a:srgbClr val="3D5466"/>
+                </a:solidFill>
+                <a:latin typeface="Arial"/>
+              </a:rPr>
+              <a:t>Praxiswert gesamt = Substanzwert + Goodwill</a:t>
+            </a:r>
+          </a:p>
+          <a:p>
+            <a:pPr>
+              <a:spcBef>
+                <a:spcPts val="400"/>
+              </a:spcBef>
+              <a:spcAft>
+                <a:spcPts val="200"/>
+              </a:spcAft>
+            </a:pPr>
+            <a:r>
+              <a:rPr sz="1200">
+                <a:solidFill>
+                  <a:srgbClr val="3D5466"/>
+                </a:solidFill>
+                <a:latin typeface="Arial"/>
+              </a:rPr>
+              <a:t>```</a:t>
+            </a:r>
+          </a:p>
+          <a:p>
+            <a:pPr>
+              <a:spcBef>
+                <a:spcPts val="400"/>
+              </a:spcBef>
+              <a:spcAft>
+                <a:spcPts val="200"/>
+              </a:spcAft>
+            </a:pPr>
+            <a:r>
+              <a:rPr sz="1200">
+                <a:solidFill>
+                  <a:srgbClr val="3D5466"/>
+                </a:solidFill>
+                <a:latin typeface="Arial"/>
+              </a:rPr>
+              <a:t>Quelle: IDW S5 (2021 ); Frodl (2019 )</a:t>
+            </a:r>
+          </a:p>
+          <a:p>
+            <a:pPr>
+              <a:spcBef>
+                <a:spcPts val="1000"/>
+              </a:spcBef>
+              <a:spcAft>
+                <a:spcPts val="200"/>
+              </a:spcAft>
+            </a:pPr>
+            <a:r>
+              <a:rPr sz="800" b="1">
+                <a:solidFill>
+                  <a:srgbClr val="78808C"/>
+                </a:solidFill>
+                <a:latin typeface="JetBrains Mono"/>
+              </a:rPr>
+              <a:t>TYPISCHE INVESTITIONSANLÄSSE IM ÜBERBLICK</a:t>
+            </a:r>
+          </a:p>
+          <a:p>
+            <a:pPr>
+              <a:spcBef>
+                <a:spcPts val="400"/>
+              </a:spcBef>
+              <a:spcAft>
+                <a:spcPts val="200"/>
+              </a:spcAft>
+            </a:pPr>
+            <a:r>
+              <a:rPr sz="1200">
+                <a:solidFill>
+                  <a:srgbClr val="3D5466"/>
+                </a:solidFill>
+                <a:latin typeface="Arial"/>
+              </a:rPr>
+              <a:t>Medizinische Versorgungszentren (MVZ):</a:t>
+            </a:r>
+          </a:p>
+        </p:txBody>
+      </p:sp>
+      <p:sp>
+        <p:nvSpPr>
+          <p:cNvPr id="9" name="Rectangle 8"/>
           <p:cNvSpPr/>
           <p:nvPr/>
         </p:nvSpPr>
@@ -5930,7 +7598,7 @@
       </p:sp>
       <p:sp>
         <p:nvSpPr>
-          <p:cNvPr id="9" name="TextBox 8"/>
+          <p:cNvPr id="10" name="TextBox 9"/>
           <p:cNvSpPr txBox="1"/>
           <p:nvPr/>
         </p:nvSpPr>
@@ -5959,41 +7627,6 @@
                 <a:latin typeface="JetBrains Mono"/>
               </a:rPr>
               <a:t>Benedikt Zoller Coaching  ·  FKB Campus  ·  M07</a:t>
-            </a:r>
-          </a:p>
-        </p:txBody>
-      </p:sp>
-      <p:sp>
-        <p:nvSpPr>
-          <p:cNvPr id="10" name="TextBox 9"/>
-          <p:cNvSpPr txBox="1"/>
-          <p:nvPr/>
-        </p:nvSpPr>
-        <p:spPr>
-          <a:xfrm>
-            <a:off x="7176211" y="6583680"/>
-            <a:ext cx="4326940" cy="256032"/>
-          </a:xfrm>
-          <a:prstGeom prst="rect">
-            <a:avLst/>
-          </a:prstGeom>
-          <a:noFill/>
-        </p:spPr>
-        <p:txBody>
-          <a:bodyPr wrap="none">
-            <a:spAutoFit/>
-          </a:bodyPr>
-          <a:lstStyle/>
-          <a:p>
-            <a:pPr algn="r"/>
-            <a:r>
-              <a:rPr sz="700">
-                <a:solidFill>
-                  <a:srgbClr val="A0B4D2"/>
-                </a:solidFill>
-                <a:latin typeface="JetBrains Mono"/>
-              </a:rPr>
-              <a:t>Schaubild</a:t>
             </a:r>
           </a:p>
         </p:txBody>
@@ -6031,7 +7664,7 @@
             <a:avLst/>
           </a:prstGeom>
           <a:solidFill>
-            <a:srgbClr val="EDEDF3"/>
+            <a:srgbClr val="FFFFFF"/>
           </a:solidFill>
           <a:ln>
             <a:noFill/>
@@ -6132,51 +7765,43 @@
                 </a:solidFill>
                 <a:latin typeface="JetBrains Mono"/>
               </a:rPr>
-              <a:t>M07  ·  INHALT</a:t>
-            </a:r>
-          </a:p>
-        </p:txBody>
-      </p:sp>
-      <p:sp>
-        <p:nvSpPr>
-          <p:cNvPr id="5" name="Rectangle 4"/>
-          <p:cNvSpPr/>
-          <p:nvPr/>
-        </p:nvSpPr>
-        <p:spPr>
-          <a:xfrm>
-            <a:off x="0" y="1234440"/>
-            <a:ext cx="12188952" cy="12700"/>
-          </a:xfrm>
-          <a:prstGeom prst="rect">
-            <a:avLst/>
-          </a:prstGeom>
-          <a:solidFill>
-            <a:srgbClr val="D8DFE4"/>
-          </a:solidFill>
-          <a:ln>
-            <a:noFill/>
-          </a:ln>
-        </p:spPr>
-        <p:style>
-          <a:lnRef idx="1">
-            <a:schemeClr val="accent1"/>
-          </a:lnRef>
-          <a:fillRef idx="3">
-            <a:schemeClr val="accent1"/>
-          </a:fillRef>
-          <a:effectRef idx="2">
-            <a:schemeClr val="accent1"/>
-          </a:effectRef>
-          <a:fontRef idx="minor">
-            <a:schemeClr val="lt1"/>
-          </a:fontRef>
-        </p:style>
-        <p:txBody>
-          <a:bodyPr rtlCol="0" anchor="ctr"/>
-          <a:lstStyle/>
-          <a:p>
-            <a:pPr algn="ctr"/>
+              <a:t>M07  ·  SCHAUBILD</a:t>
+            </a:r>
+          </a:p>
+        </p:txBody>
+      </p:sp>
+      <p:sp>
+        <p:nvSpPr>
+          <p:cNvPr id="5" name="TextBox 4"/>
+          <p:cNvSpPr txBox="1"/>
+          <p:nvPr/>
+        </p:nvSpPr>
+        <p:spPr>
+          <a:xfrm>
+            <a:off x="685800" y="502920"/>
+            <a:ext cx="10817352" cy="594360"/>
+          </a:xfrm>
+          <a:prstGeom prst="rect">
+            <a:avLst/>
+          </a:prstGeom>
+          <a:noFill/>
+        </p:spPr>
+        <p:txBody>
+          <a:bodyPr wrap="square">
+            <a:spAutoFit/>
+          </a:bodyPr>
+          <a:lstStyle/>
+          <a:p>
+            <a:pPr algn="l"/>
+            <a:r>
+              <a:rPr sz="2000" b="1" i="0">
+                <a:solidFill>
+                  <a:srgbClr val="1F2C56"/>
+                </a:solidFill>
+                <a:latin typeface="Source Serif 4"/>
+              </a:rPr>
+              <a:t>Praxiswert-Ermittlung nach IDW S5</a:t>
+            </a:r>
           </a:p>
         </p:txBody>
       </p:sp>
@@ -6188,8 +7813,8 @@
         </p:nvSpPr>
         <p:spPr>
           <a:xfrm>
-            <a:off x="685800" y="502920"/>
-            <a:ext cx="36576" cy="658368"/>
+            <a:off x="685800" y="1143000"/>
+            <a:ext cx="10817352" cy="25400"/>
           </a:xfrm>
           <a:prstGeom prst="rect">
             <a:avLst/>
@@ -6223,295 +7848,33 @@
           </a:p>
         </p:txBody>
       </p:sp>
-      <p:sp>
-        <p:nvSpPr>
-          <p:cNvPr id="7" name="TextBox 6"/>
-          <p:cNvSpPr txBox="1"/>
-          <p:nvPr/>
-        </p:nvSpPr>
-        <p:spPr>
-          <a:xfrm>
-            <a:off x="813816" y="502920"/>
-            <a:ext cx="10634472" cy="685800"/>
-          </a:xfrm>
-          <a:prstGeom prst="rect">
-            <a:avLst/>
-          </a:prstGeom>
-          <a:noFill/>
-        </p:spPr>
-        <p:txBody>
-          <a:bodyPr wrap="square">
-            <a:spAutoFit/>
-          </a:bodyPr>
-          <a:lstStyle/>
-          <a:p>
-            <a:pPr algn="l"/>
-            <a:r>
-              <a:rPr sz="2400" b="1" i="0">
-                <a:solidFill>
-                  <a:srgbClr val="1F2C56"/>
-                </a:solidFill>
-                <a:latin typeface="Source Serif 4"/>
-              </a:rPr>
-              <a:t>Theorie-Input 3: Risikoprofil und Sicherheitenkonzept</a:t>
-            </a:r>
-          </a:p>
-        </p:txBody>
-      </p:sp>
-      <p:sp>
-        <p:nvSpPr>
-          <p:cNvPr id="8" name="TextBox 7"/>
-          <p:cNvSpPr txBox="1"/>
-          <p:nvPr/>
-        </p:nvSpPr>
-        <p:spPr>
-          <a:xfrm>
-            <a:off x="685800" y="1417320"/>
-            <a:ext cx="10817352" cy="5029200"/>
-          </a:xfrm>
-          <a:prstGeom prst="rect">
-            <a:avLst/>
-          </a:prstGeom>
-          <a:noFill/>
-        </p:spPr>
-        <p:txBody>
-          <a:bodyPr wrap="square">
-            <a:spAutoFit/>
-          </a:bodyPr>
-          <a:lstStyle/>
-          <a:p>
-            <a:pPr>
-              <a:spcBef>
-                <a:spcPts val="1000"/>
-              </a:spcBef>
-              <a:spcAft>
-                <a:spcPts val="200"/>
-              </a:spcAft>
-            </a:pPr>
-            <a:r>
-              <a:rPr sz="800" b="1">
-                <a:solidFill>
-                  <a:srgbClr val="78808C"/>
-                </a:solidFill>
-                <a:latin typeface="JetBrains Mono"/>
-              </a:rPr>
-              <a:t>SPEZIFISCHE RISIKEN BEI HEILBERUFE-KUNDEN</a:t>
-            </a:r>
-          </a:p>
-          <a:p>
-            <a:pPr>
-              <a:spcBef>
-                <a:spcPts val="400"/>
-              </a:spcBef>
-              <a:spcAft>
-                <a:spcPts val="200"/>
-              </a:spcAft>
-            </a:pPr>
-            <a:r>
-              <a:rPr sz="1200">
-                <a:solidFill>
-                  <a:srgbClr val="3D5466"/>
-                </a:solidFill>
-                <a:latin typeface="Arial"/>
-              </a:rPr>
-              <a:t>Zulassungsrisiko:</a:t>
-            </a:r>
-          </a:p>
-          <a:p>
-            <a:pPr>
-              <a:spcBef>
-                <a:spcPts val="400"/>
-              </a:spcBef>
-              <a:spcAft>
-                <a:spcPts val="200"/>
-              </a:spcAft>
-            </a:pPr>
-            <a:r>
-              <a:rPr sz="1200">
-                <a:solidFill>
-                  <a:srgbClr val="3D5466"/>
-                </a:solidFill>
-                <a:latin typeface="Arial"/>
-              </a:rPr>
-              <a:t>Kassenarztzulassung und ihre Übertragbarkeit in der Nachfolge:</a:t>
-            </a:r>
-          </a:p>
-          <a:p>
-            <a:pPr>
-              <a:spcBef>
-                <a:spcPts val="400"/>
-              </a:spcBef>
-              <a:spcAft>
-                <a:spcPts val="200"/>
-              </a:spcAft>
-            </a:pPr>
-            <a:r>
-              <a:rPr sz="1200">
-                <a:solidFill>
-                  <a:srgbClr val="3D5466"/>
-                </a:solidFill>
-                <a:latin typeface="Arial"/>
-              </a:rPr>
-              <a:t>Regressrisiko:</a:t>
-            </a:r>
-          </a:p>
-          <a:p>
-            <a:pPr>
-              <a:spcBef>
-                <a:spcPts val="400"/>
-              </a:spcBef>
-              <a:spcAft>
-                <a:spcPts val="200"/>
-              </a:spcAft>
-            </a:pPr>
-            <a:r>
-              <a:rPr sz="1200">
-                <a:solidFill>
-                  <a:srgbClr val="3D5466"/>
-                </a:solidFill>
-                <a:latin typeface="Arial"/>
-              </a:rPr>
-              <a:t>Inhaberabhängigkeit:</a:t>
-            </a:r>
-          </a:p>
-          <a:p>
-            <a:pPr>
-              <a:spcBef>
-                <a:spcPts val="400"/>
-              </a:spcBef>
-              <a:spcAft>
-                <a:spcPts val="200"/>
-              </a:spcAft>
-            </a:pPr>
-            <a:r>
-              <a:rPr sz="1200">
-                <a:solidFill>
-                  <a:srgbClr val="3D5466"/>
-                </a:solidFill>
-                <a:latin typeface="Arial"/>
-              </a:rPr>
-              <a:t>Versorgungswerk statt gesetzliche Rentenversicherung:</a:t>
-            </a:r>
-          </a:p>
-          <a:p>
-            <a:pPr>
-              <a:spcBef>
-                <a:spcPts val="400"/>
-              </a:spcBef>
-              <a:spcAft>
-                <a:spcPts val="200"/>
-              </a:spcAft>
-            </a:pPr>
-            <a:r>
-              <a:rPr sz="1200">
-                <a:solidFill>
-                  <a:srgbClr val="3D5466"/>
-                </a:solidFill>
-                <a:latin typeface="Arial"/>
-              </a:rPr>
-              <a:t>Strukturrisiko MVZ-Konsolidierung:</a:t>
-            </a:r>
-          </a:p>
-          <a:p>
-            <a:pPr>
-              <a:spcBef>
-                <a:spcPts val="1000"/>
-              </a:spcBef>
-              <a:spcAft>
-                <a:spcPts val="200"/>
-              </a:spcAft>
-            </a:pPr>
-            <a:r>
-              <a:rPr sz="800" b="1">
-                <a:solidFill>
-                  <a:srgbClr val="78808C"/>
-                </a:solidFill>
-                <a:latin typeface="JetBrains Mono"/>
-              </a:rPr>
-              <a:t>SICHERHEITENKONZEPT BEI HEILBERUFE-FINANZIERUNGEN</a:t>
-            </a:r>
-          </a:p>
-          <a:p>
-            <a:pPr>
-              <a:spcBef>
-                <a:spcPts val="400"/>
-              </a:spcBef>
-              <a:spcAft>
-                <a:spcPts val="200"/>
-              </a:spcAft>
-            </a:pPr>
-            <a:r>
-              <a:rPr sz="1200">
-                <a:solidFill>
-                  <a:srgbClr val="3D5466"/>
-                </a:solidFill>
-                <a:latin typeface="Arial"/>
-              </a:rPr>
-              <a:t>§ 18 KWG (Offenlegungspflicht ab 750.000 EUR Kreditbetrag) ist zu beachten. Die gesamtschuldnerische Bonitätsanalyse bei Praxisübernahmen folgt MaRisk BTO 1.2.1 .</a:t>
-            </a:r>
-          </a:p>
-          <a:p>
-            <a:pPr>
-              <a:spcBef>
-                <a:spcPts val="1000"/>
-              </a:spcBef>
-              <a:spcAft>
-                <a:spcPts val="200"/>
-              </a:spcAft>
-            </a:pPr>
-            <a:r>
-              <a:rPr sz="800" b="1">
-                <a:solidFill>
-                  <a:srgbClr val="78808C"/>
-                </a:solidFill>
-                <a:latin typeface="JetBrains Mono"/>
-              </a:rPr>
-              <a:t>VERBUNDPARTNER SCHWÄBISCH HALL: PRAXISIMMOBILIEN UND TILGUNGSAUSSETZUNGSMODELL</a:t>
-            </a:r>
-          </a:p>
-          <a:p>
-            <a:pPr>
-              <a:spcBef>
-                <a:spcPts val="400"/>
-              </a:spcBef>
-              <a:spcAft>
-                <a:spcPts val="200"/>
-              </a:spcAft>
-            </a:pPr>
-            <a:r>
-              <a:rPr sz="1200">
-                <a:solidFill>
-                  <a:srgbClr val="3D5466"/>
-                </a:solidFill>
-                <a:latin typeface="Arial"/>
-              </a:rPr>
-              <a:t>Das Tilgungsaussetzungsmodell (Vorfinanzierung mit Bausparvertrag):</a:t>
-            </a:r>
-          </a:p>
-          <a:p>
-            <a:pPr>
-              <a:spcBef>
-                <a:spcPts val="400"/>
-              </a:spcBef>
-              <a:spcAft>
-                <a:spcPts val="200"/>
-              </a:spcAft>
-            </a:pPr>
-            <a:r>
-              <a:rPr sz="1200">
-                <a:solidFill>
-                  <a:srgbClr val="3D5466"/>
-                </a:solidFill>
-                <a:latin typeface="Arial"/>
-              </a:rPr>
-              <a:t>Vorteile für den Kunden:</a:t>
-            </a:r>
-          </a:p>
-        </p:txBody>
-      </p:sp>
-      <p:sp>
-        <p:nvSpPr>
-          <p:cNvPr id="9" name="Rectangle 8"/>
+      <p:pic>
+        <p:nvPicPr>
+          <p:cNvPr id="7" name="Picture 6" descr="image.png"/>
+          <p:cNvPicPr>
+            <a:picLocks noChangeAspect="1"/>
+          </p:cNvPicPr>
+          <p:nvPr/>
+        </p:nvPicPr>
+        <p:blipFill>
+          <a:blip r:embed="rId2"/>
+          <a:stretch>
+            <a:fillRect/>
+          </a:stretch>
+        </p:blipFill>
+        <p:spPr>
+          <a:xfrm>
+            <a:off x="2303489" y="1325880"/>
+            <a:ext cx="7581973" cy="4937760"/>
+          </a:xfrm>
+          <a:prstGeom prst="rect">
+            <a:avLst/>
+          </a:prstGeom>
+        </p:spPr>
+      </p:pic>
+      <p:sp>
+        <p:nvSpPr>
+          <p:cNvPr id="8" name="Rectangle 7"/>
           <p:cNvSpPr/>
           <p:nvPr/>
         </p:nvSpPr>
@@ -6554,7 +7917,7 @@
       </p:sp>
       <p:sp>
         <p:nvSpPr>
-          <p:cNvPr id="10" name="TextBox 9"/>
+          <p:cNvPr id="9" name="TextBox 8"/>
           <p:cNvSpPr txBox="1"/>
           <p:nvPr/>
         </p:nvSpPr>
@@ -6583,6 +7946,41 @@
                 <a:latin typeface="JetBrains Mono"/>
               </a:rPr>
               <a:t>Benedikt Zoller Coaching  ·  FKB Campus  ·  M07</a:t>
+            </a:r>
+          </a:p>
+        </p:txBody>
+      </p:sp>
+      <p:sp>
+        <p:nvSpPr>
+          <p:cNvPr id="10" name="TextBox 9"/>
+          <p:cNvSpPr txBox="1"/>
+          <p:nvPr/>
+        </p:nvSpPr>
+        <p:spPr>
+          <a:xfrm>
+            <a:off x="7176211" y="6583680"/>
+            <a:ext cx="4326940" cy="256032"/>
+          </a:xfrm>
+          <a:prstGeom prst="rect">
+            <a:avLst/>
+          </a:prstGeom>
+          <a:noFill/>
+        </p:spPr>
+        <p:txBody>
+          <a:bodyPr wrap="none">
+            <a:spAutoFit/>
+          </a:bodyPr>
+          <a:lstStyle/>
+          <a:p>
+            <a:pPr algn="r"/>
+            <a:r>
+              <a:rPr sz="700">
+                <a:solidFill>
+                  <a:srgbClr val="A0B4D2"/>
+                </a:solidFill>
+                <a:latin typeface="JetBrains Mono"/>
+              </a:rPr>
+              <a:t>Schaubild</a:t>
             </a:r>
           </a:p>
         </p:txBody>
@@ -6620,7 +8018,7 @@
             <a:avLst/>
           </a:prstGeom>
           <a:solidFill>
-            <a:srgbClr val="FFFFFF"/>
+            <a:srgbClr val="EDEDF3"/>
           </a:solidFill>
           <a:ln>
             <a:noFill/>
@@ -6721,43 +8119,51 @@
                 </a:solidFill>
                 <a:latin typeface="JetBrains Mono"/>
               </a:rPr>
-              <a:t>M07  ·  SCHAUBILD</a:t>
-            </a:r>
-          </a:p>
-        </p:txBody>
-      </p:sp>
-      <p:sp>
-        <p:nvSpPr>
-          <p:cNvPr id="5" name="TextBox 4"/>
-          <p:cNvSpPr txBox="1"/>
-          <p:nvPr/>
-        </p:nvSpPr>
-        <p:spPr>
-          <a:xfrm>
-            <a:off x="685800" y="502920"/>
-            <a:ext cx="10817352" cy="594360"/>
-          </a:xfrm>
-          <a:prstGeom prst="rect">
-            <a:avLst/>
-          </a:prstGeom>
-          <a:noFill/>
-        </p:spPr>
-        <p:txBody>
-          <a:bodyPr wrap="square">
-            <a:spAutoFit/>
-          </a:bodyPr>
-          <a:lstStyle/>
-          <a:p>
-            <a:pPr algn="l"/>
-            <a:r>
-              <a:rPr sz="2000" b="1" i="0">
-                <a:solidFill>
-                  <a:srgbClr val="1F2C56"/>
-                </a:solidFill>
-                <a:latin typeface="Source Serif 4"/>
-              </a:rPr>
-              <a:t>Handlungsempfehlung Heilberufe</a:t>
-            </a:r>
+              <a:t>M07  ·  INHALT</a:t>
+            </a:r>
+          </a:p>
+        </p:txBody>
+      </p:sp>
+      <p:sp>
+        <p:nvSpPr>
+          <p:cNvPr id="5" name="Rectangle 4"/>
+          <p:cNvSpPr/>
+          <p:nvPr/>
+        </p:nvSpPr>
+        <p:spPr>
+          <a:xfrm>
+            <a:off x="0" y="1234440"/>
+            <a:ext cx="12188952" cy="12700"/>
+          </a:xfrm>
+          <a:prstGeom prst="rect">
+            <a:avLst/>
+          </a:prstGeom>
+          <a:solidFill>
+            <a:srgbClr val="D8DFE4"/>
+          </a:solidFill>
+          <a:ln>
+            <a:noFill/>
+          </a:ln>
+        </p:spPr>
+        <p:style>
+          <a:lnRef idx="1">
+            <a:schemeClr val="accent1"/>
+          </a:lnRef>
+          <a:fillRef idx="3">
+            <a:schemeClr val="accent1"/>
+          </a:fillRef>
+          <a:effectRef idx="2">
+            <a:schemeClr val="accent1"/>
+          </a:effectRef>
+          <a:fontRef idx="minor">
+            <a:schemeClr val="lt1"/>
+          </a:fontRef>
+        </p:style>
+        <p:txBody>
+          <a:bodyPr rtlCol="0" anchor="ctr"/>
+          <a:lstStyle/>
+          <a:p>
+            <a:pPr algn="ctr"/>
           </a:p>
         </p:txBody>
       </p:sp>
@@ -6769,8 +8175,8 @@
         </p:nvSpPr>
         <p:spPr>
           <a:xfrm>
-            <a:off x="685800" y="1143000"/>
-            <a:ext cx="10817352" cy="25400"/>
+            <a:off x="685800" y="502920"/>
+            <a:ext cx="36576" cy="658368"/>
           </a:xfrm>
           <a:prstGeom prst="rect">
             <a:avLst/>
@@ -6804,33 +8210,295 @@
           </a:p>
         </p:txBody>
       </p:sp>
-      <p:pic>
-        <p:nvPicPr>
-          <p:cNvPr id="7" name="Picture 6" descr="image.png"/>
-          <p:cNvPicPr>
-            <a:picLocks noChangeAspect="1"/>
-          </p:cNvPicPr>
-          <p:nvPr/>
-        </p:nvPicPr>
-        <p:blipFill>
-          <a:blip r:embed="rId2"/>
-          <a:stretch>
-            <a:fillRect/>
-          </a:stretch>
-        </p:blipFill>
-        <p:spPr>
-          <a:xfrm>
-            <a:off x="2303489" y="1325880"/>
-            <a:ext cx="7581973" cy="4937760"/>
-          </a:xfrm>
-          <a:prstGeom prst="rect">
-            <a:avLst/>
-          </a:prstGeom>
-        </p:spPr>
-      </p:pic>
-      <p:sp>
-        <p:nvSpPr>
-          <p:cNvPr id="8" name="Rectangle 7"/>
+      <p:sp>
+        <p:nvSpPr>
+          <p:cNvPr id="7" name="TextBox 6"/>
+          <p:cNvSpPr txBox="1"/>
+          <p:nvPr/>
+        </p:nvSpPr>
+        <p:spPr>
+          <a:xfrm>
+            <a:off x="813816" y="502920"/>
+            <a:ext cx="10634472" cy="685800"/>
+          </a:xfrm>
+          <a:prstGeom prst="rect">
+            <a:avLst/>
+          </a:prstGeom>
+          <a:noFill/>
+        </p:spPr>
+        <p:txBody>
+          <a:bodyPr wrap="square">
+            <a:spAutoFit/>
+          </a:bodyPr>
+          <a:lstStyle/>
+          <a:p>
+            <a:pPr algn="l"/>
+            <a:r>
+              <a:rPr sz="2400" b="1" i="0">
+                <a:solidFill>
+                  <a:srgbClr val="1F2C56"/>
+                </a:solidFill>
+                <a:latin typeface="Source Serif 4"/>
+              </a:rPr>
+              <a:t>Theorie-Input 3: Risikoprofil und Sicherheitenkonzept</a:t>
+            </a:r>
+          </a:p>
+        </p:txBody>
+      </p:sp>
+      <p:sp>
+        <p:nvSpPr>
+          <p:cNvPr id="8" name="TextBox 7"/>
+          <p:cNvSpPr txBox="1"/>
+          <p:nvPr/>
+        </p:nvSpPr>
+        <p:spPr>
+          <a:xfrm>
+            <a:off x="685800" y="1417320"/>
+            <a:ext cx="10817352" cy="5029200"/>
+          </a:xfrm>
+          <a:prstGeom prst="rect">
+            <a:avLst/>
+          </a:prstGeom>
+          <a:noFill/>
+        </p:spPr>
+        <p:txBody>
+          <a:bodyPr wrap="square">
+            <a:spAutoFit/>
+          </a:bodyPr>
+          <a:lstStyle/>
+          <a:p>
+            <a:pPr>
+              <a:spcBef>
+                <a:spcPts val="1000"/>
+              </a:spcBef>
+              <a:spcAft>
+                <a:spcPts val="200"/>
+              </a:spcAft>
+            </a:pPr>
+            <a:r>
+              <a:rPr sz="800" b="1">
+                <a:solidFill>
+                  <a:srgbClr val="78808C"/>
+                </a:solidFill>
+                <a:latin typeface="JetBrains Mono"/>
+              </a:rPr>
+              <a:t>SPEZIFISCHE RISIKEN BEI HEILBERUFE-KUNDEN</a:t>
+            </a:r>
+          </a:p>
+          <a:p>
+            <a:pPr>
+              <a:spcBef>
+                <a:spcPts val="400"/>
+              </a:spcBef>
+              <a:spcAft>
+                <a:spcPts val="200"/>
+              </a:spcAft>
+            </a:pPr>
+            <a:r>
+              <a:rPr sz="1200">
+                <a:solidFill>
+                  <a:srgbClr val="3D5466"/>
+                </a:solidFill>
+                <a:latin typeface="Arial"/>
+              </a:rPr>
+              <a:t>Zulassungsrisiko:</a:t>
+            </a:r>
+          </a:p>
+          <a:p>
+            <a:pPr>
+              <a:spcBef>
+                <a:spcPts val="400"/>
+              </a:spcBef>
+              <a:spcAft>
+                <a:spcPts val="200"/>
+              </a:spcAft>
+            </a:pPr>
+            <a:r>
+              <a:rPr sz="1200">
+                <a:solidFill>
+                  <a:srgbClr val="3D5466"/>
+                </a:solidFill>
+                <a:latin typeface="Arial"/>
+              </a:rPr>
+              <a:t>Kassenarztzulassung und ihre Übertragbarkeit in der Nachfolge:</a:t>
+            </a:r>
+          </a:p>
+          <a:p>
+            <a:pPr>
+              <a:spcBef>
+                <a:spcPts val="400"/>
+              </a:spcBef>
+              <a:spcAft>
+                <a:spcPts val="200"/>
+              </a:spcAft>
+            </a:pPr>
+            <a:r>
+              <a:rPr sz="1200">
+                <a:solidFill>
+                  <a:srgbClr val="3D5466"/>
+                </a:solidFill>
+                <a:latin typeface="Arial"/>
+              </a:rPr>
+              <a:t>Regressrisiko:</a:t>
+            </a:r>
+          </a:p>
+          <a:p>
+            <a:pPr>
+              <a:spcBef>
+                <a:spcPts val="400"/>
+              </a:spcBef>
+              <a:spcAft>
+                <a:spcPts val="200"/>
+              </a:spcAft>
+            </a:pPr>
+            <a:r>
+              <a:rPr sz="1200">
+                <a:solidFill>
+                  <a:srgbClr val="3D5466"/>
+                </a:solidFill>
+                <a:latin typeface="Arial"/>
+              </a:rPr>
+              <a:t>Inhaberabhängigkeit:</a:t>
+            </a:r>
+          </a:p>
+          <a:p>
+            <a:pPr>
+              <a:spcBef>
+                <a:spcPts val="400"/>
+              </a:spcBef>
+              <a:spcAft>
+                <a:spcPts val="200"/>
+              </a:spcAft>
+            </a:pPr>
+            <a:r>
+              <a:rPr sz="1200">
+                <a:solidFill>
+                  <a:srgbClr val="3D5466"/>
+                </a:solidFill>
+                <a:latin typeface="Arial"/>
+              </a:rPr>
+              <a:t>Versorgungswerk statt gesetzliche Rentenversicherung:</a:t>
+            </a:r>
+          </a:p>
+          <a:p>
+            <a:pPr>
+              <a:spcBef>
+                <a:spcPts val="400"/>
+              </a:spcBef>
+              <a:spcAft>
+                <a:spcPts val="200"/>
+              </a:spcAft>
+            </a:pPr>
+            <a:r>
+              <a:rPr sz="1200">
+                <a:solidFill>
+                  <a:srgbClr val="3D5466"/>
+                </a:solidFill>
+                <a:latin typeface="Arial"/>
+              </a:rPr>
+              <a:t>Strukturrisiko MVZ-Konsolidierung:</a:t>
+            </a:r>
+          </a:p>
+          <a:p>
+            <a:pPr>
+              <a:spcBef>
+                <a:spcPts val="1000"/>
+              </a:spcBef>
+              <a:spcAft>
+                <a:spcPts val="200"/>
+              </a:spcAft>
+            </a:pPr>
+            <a:r>
+              <a:rPr sz="800" b="1">
+                <a:solidFill>
+                  <a:srgbClr val="78808C"/>
+                </a:solidFill>
+                <a:latin typeface="JetBrains Mono"/>
+              </a:rPr>
+              <a:t>SICHERHEITENKONZEPT BEI HEILBERUFE-FINANZIERUNGEN</a:t>
+            </a:r>
+          </a:p>
+          <a:p>
+            <a:pPr>
+              <a:spcBef>
+                <a:spcPts val="400"/>
+              </a:spcBef>
+              <a:spcAft>
+                <a:spcPts val="200"/>
+              </a:spcAft>
+            </a:pPr>
+            <a:r>
+              <a:rPr sz="1200">
+                <a:solidFill>
+                  <a:srgbClr val="3D5466"/>
+                </a:solidFill>
+                <a:latin typeface="Arial"/>
+              </a:rPr>
+              <a:t>§ 18 KWG (Offenlegungspflicht ab 750.000 EUR Kreditbetrag) ist zu beachten. Die gesamtschuldnerische Bonitätsanalyse bei Praxisübernahmen folgt MaRisk BTO 1.2.1 .</a:t>
+            </a:r>
+          </a:p>
+          <a:p>
+            <a:pPr>
+              <a:spcBef>
+                <a:spcPts val="1000"/>
+              </a:spcBef>
+              <a:spcAft>
+                <a:spcPts val="200"/>
+              </a:spcAft>
+            </a:pPr>
+            <a:r>
+              <a:rPr sz="800" b="1">
+                <a:solidFill>
+                  <a:srgbClr val="78808C"/>
+                </a:solidFill>
+                <a:latin typeface="JetBrains Mono"/>
+              </a:rPr>
+              <a:t>VERBUNDPARTNER SCHWÄBISCH HALL: PRAXISIMMOBILIEN UND TILGUNGSAUSSETZUNGSMODELL</a:t>
+            </a:r>
+          </a:p>
+          <a:p>
+            <a:pPr>
+              <a:spcBef>
+                <a:spcPts val="400"/>
+              </a:spcBef>
+              <a:spcAft>
+                <a:spcPts val="200"/>
+              </a:spcAft>
+            </a:pPr>
+            <a:r>
+              <a:rPr sz="1200">
+                <a:solidFill>
+                  <a:srgbClr val="3D5466"/>
+                </a:solidFill>
+                <a:latin typeface="Arial"/>
+              </a:rPr>
+              <a:t>Das Tilgungsaussetzungsmodell (Vorfinanzierung mit Bausparvertrag):</a:t>
+            </a:r>
+          </a:p>
+          <a:p>
+            <a:pPr>
+              <a:spcBef>
+                <a:spcPts val="400"/>
+              </a:spcBef>
+              <a:spcAft>
+                <a:spcPts val="200"/>
+              </a:spcAft>
+            </a:pPr>
+            <a:r>
+              <a:rPr sz="1200">
+                <a:solidFill>
+                  <a:srgbClr val="3D5466"/>
+                </a:solidFill>
+                <a:latin typeface="Arial"/>
+              </a:rPr>
+              <a:t>Vorteile für den Kunden:</a:t>
+            </a:r>
+          </a:p>
+        </p:txBody>
+      </p:sp>
+      <p:sp>
+        <p:nvSpPr>
+          <p:cNvPr id="9" name="Rectangle 8"/>
           <p:cNvSpPr/>
           <p:nvPr/>
         </p:nvSpPr>
@@ -6873,7 +8541,7 @@
       </p:sp>
       <p:sp>
         <p:nvSpPr>
-          <p:cNvPr id="9" name="TextBox 8"/>
+          <p:cNvPr id="10" name="TextBox 9"/>
           <p:cNvSpPr txBox="1"/>
           <p:nvPr/>
         </p:nvSpPr>
@@ -6902,41 +8570,6 @@
                 <a:latin typeface="JetBrains Mono"/>
               </a:rPr>
               <a:t>Benedikt Zoller Coaching  ·  FKB Campus  ·  M07</a:t>
-            </a:r>
-          </a:p>
-        </p:txBody>
-      </p:sp>
-      <p:sp>
-        <p:nvSpPr>
-          <p:cNvPr id="10" name="TextBox 9"/>
-          <p:cNvSpPr txBox="1"/>
-          <p:nvPr/>
-        </p:nvSpPr>
-        <p:spPr>
-          <a:xfrm>
-            <a:off x="7176211" y="6583680"/>
-            <a:ext cx="4326940" cy="256032"/>
-          </a:xfrm>
-          <a:prstGeom prst="rect">
-            <a:avLst/>
-          </a:prstGeom>
-          <a:noFill/>
-        </p:spPr>
-        <p:txBody>
-          <a:bodyPr wrap="none">
-            <a:spAutoFit/>
-          </a:bodyPr>
-          <a:lstStyle/>
-          <a:p>
-            <a:pPr algn="r"/>
-            <a:r>
-              <a:rPr sz="700">
-                <a:solidFill>
-                  <a:srgbClr val="A0B4D2"/>
-                </a:solidFill>
-                <a:latin typeface="JetBrains Mono"/>
-              </a:rPr>
-              <a:t>Schaubild</a:t>
             </a:r>
           </a:p>
         </p:txBody>
@@ -6974,7 +8607,7 @@
             <a:avLst/>
           </a:prstGeom>
           <a:solidFill>
-            <a:srgbClr val="EDEDF3"/>
+            <a:srgbClr val="FFFFFF"/>
           </a:solidFill>
           <a:ln>
             <a:noFill/>
@@ -7075,51 +8708,43 @@
                 </a:solidFill>
                 <a:latin typeface="JetBrains Mono"/>
               </a:rPr>
-              <a:t>M07  ·  INHALT</a:t>
-            </a:r>
-          </a:p>
-        </p:txBody>
-      </p:sp>
-      <p:sp>
-        <p:nvSpPr>
-          <p:cNvPr id="5" name="Rectangle 4"/>
-          <p:cNvSpPr/>
-          <p:nvPr/>
-        </p:nvSpPr>
-        <p:spPr>
-          <a:xfrm>
-            <a:off x="0" y="1234440"/>
-            <a:ext cx="12188952" cy="12700"/>
-          </a:xfrm>
-          <a:prstGeom prst="rect">
-            <a:avLst/>
-          </a:prstGeom>
-          <a:solidFill>
-            <a:srgbClr val="D8DFE4"/>
-          </a:solidFill>
-          <a:ln>
-            <a:noFill/>
-          </a:ln>
-        </p:spPr>
-        <p:style>
-          <a:lnRef idx="1">
-            <a:schemeClr val="accent1"/>
-          </a:lnRef>
-          <a:fillRef idx="3">
-            <a:schemeClr val="accent1"/>
-          </a:fillRef>
-          <a:effectRef idx="2">
-            <a:schemeClr val="accent1"/>
-          </a:effectRef>
-          <a:fontRef idx="minor">
-            <a:schemeClr val="lt1"/>
-          </a:fontRef>
-        </p:style>
-        <p:txBody>
-          <a:bodyPr rtlCol="0" anchor="ctr"/>
-          <a:lstStyle/>
-          <a:p>
-            <a:pPr algn="ctr"/>
+              <a:t>M07  ·  SCHAUBILD</a:t>
+            </a:r>
+          </a:p>
+        </p:txBody>
+      </p:sp>
+      <p:sp>
+        <p:nvSpPr>
+          <p:cNvPr id="5" name="TextBox 4"/>
+          <p:cNvSpPr txBox="1"/>
+          <p:nvPr/>
+        </p:nvSpPr>
+        <p:spPr>
+          <a:xfrm>
+            <a:off x="685800" y="502920"/>
+            <a:ext cx="10817352" cy="594360"/>
+          </a:xfrm>
+          <a:prstGeom prst="rect">
+            <a:avLst/>
+          </a:prstGeom>
+          <a:noFill/>
+        </p:spPr>
+        <p:txBody>
+          <a:bodyPr wrap="square">
+            <a:spAutoFit/>
+          </a:bodyPr>
+          <a:lstStyle/>
+          <a:p>
+            <a:pPr algn="l"/>
+            <a:r>
+              <a:rPr sz="2000" b="1" i="0">
+                <a:solidFill>
+                  <a:srgbClr val="1F2C56"/>
+                </a:solidFill>
+                <a:latin typeface="Source Serif 4"/>
+              </a:rPr>
+              <a:t>Handlungsempfehlung Heilberufe</a:t>
+            </a:r>
           </a:p>
         </p:txBody>
       </p:sp>
@@ -7131,8 +8756,8 @@
         </p:nvSpPr>
         <p:spPr>
           <a:xfrm>
-            <a:off x="685800" y="502920"/>
-            <a:ext cx="36576" cy="658368"/>
+            <a:off x="685800" y="1143000"/>
+            <a:ext cx="10817352" cy="25400"/>
           </a:xfrm>
           <a:prstGeom prst="rect">
             <a:avLst/>
@@ -7166,295 +8791,33 @@
           </a:p>
         </p:txBody>
       </p:sp>
-      <p:sp>
-        <p:nvSpPr>
-          <p:cNvPr id="7" name="TextBox 6"/>
-          <p:cNvSpPr txBox="1"/>
-          <p:nvPr/>
-        </p:nvSpPr>
-        <p:spPr>
-          <a:xfrm>
-            <a:off x="813816" y="502920"/>
-            <a:ext cx="10634472" cy="685800"/>
-          </a:xfrm>
-          <a:prstGeom prst="rect">
-            <a:avLst/>
-          </a:prstGeom>
-          <a:noFill/>
-        </p:spPr>
-        <p:txBody>
-          <a:bodyPr wrap="square">
-            <a:spAutoFit/>
-          </a:bodyPr>
-          <a:lstStyle/>
-          <a:p>
-            <a:pPr algn="l"/>
-            <a:r>
-              <a:rPr sz="2400" b="1" i="0">
-                <a:solidFill>
-                  <a:srgbClr val="1F2C56"/>
-                </a:solidFill>
-                <a:latin typeface="Source Serif 4"/>
-              </a:rPr>
-              <a:t>Praxiscase: Dr. Mayer – Zahnarztpraxis-Übernahme in Ravensburg</a:t>
-            </a:r>
-          </a:p>
-        </p:txBody>
-      </p:sp>
-      <p:sp>
-        <p:nvSpPr>
-          <p:cNvPr id="8" name="TextBox 7"/>
-          <p:cNvSpPr txBox="1"/>
-          <p:nvPr/>
-        </p:nvSpPr>
-        <p:spPr>
-          <a:xfrm>
-            <a:off x="685800" y="1417320"/>
-            <a:ext cx="10817352" cy="5029200"/>
-          </a:xfrm>
-          <a:prstGeom prst="rect">
-            <a:avLst/>
-          </a:prstGeom>
-          <a:noFill/>
-        </p:spPr>
-        <p:txBody>
-          <a:bodyPr wrap="square">
-            <a:spAutoFit/>
-          </a:bodyPr>
-          <a:lstStyle/>
-          <a:p>
-            <a:pPr>
-              <a:spcBef>
-                <a:spcPts val="1000"/>
-              </a:spcBef>
-              <a:spcAft>
-                <a:spcPts val="200"/>
-              </a:spcAft>
-            </a:pPr>
-            <a:r>
-              <a:rPr sz="800" b="1">
-                <a:solidFill>
-                  <a:srgbClr val="78808C"/>
-                </a:solidFill>
-                <a:latin typeface="JetBrains Mono"/>
-              </a:rPr>
-              <a:t>AUSGANGSSITUATION</a:t>
-            </a:r>
-          </a:p>
-          <a:p>
-            <a:pPr>
-              <a:spcBef>
-                <a:spcPts val="400"/>
-              </a:spcBef>
-              <a:spcAft>
-                <a:spcPts val="200"/>
-              </a:spcAft>
-            </a:pPr>
-            <a:r>
-              <a:rPr sz="1200">
-                <a:solidFill>
-                  <a:srgbClr val="3D5466"/>
-                </a:solidFill>
-                <a:latin typeface="Arial"/>
-              </a:rPr>
-              <a:t>Kaufpreisverhandlung:</a:t>
-            </a:r>
-          </a:p>
-          <a:p>
-            <a:pPr>
-              <a:spcBef>
-                <a:spcPts val="400"/>
-              </a:spcBef>
-              <a:spcAft>
-                <a:spcPts val="200"/>
-              </a:spcAft>
-            </a:pPr>
-            <a:r>
-              <a:rPr sz="1300">
-                <a:solidFill>
-                  <a:srgbClr val="3D5466"/>
-                </a:solidFill>
-                <a:latin typeface="Arial"/>
-              </a:rPr>
-              <a:t>▸  Substanzwert (Einrichtung, Geräte): 160.000 EUR</a:t>
-            </a:r>
-          </a:p>
-          <a:p>
-            <a:pPr>
-              <a:spcBef>
-                <a:spcPts val="400"/>
-              </a:spcBef>
-              <a:spcAft>
-                <a:spcPts val="200"/>
-              </a:spcAft>
-            </a:pPr>
-            <a:r>
-              <a:rPr sz="1300">
-                <a:solidFill>
-                  <a:srgbClr val="3D5466"/>
-                </a:solidFill>
-                <a:latin typeface="Arial"/>
-              </a:rPr>
-              <a:t>▸  Goodwill (vereinbart, auf Basis IDW S5): 220.000 EUR</a:t>
-            </a:r>
-          </a:p>
-          <a:p>
-            <a:pPr>
-              <a:spcBef>
-                <a:spcPts val="400"/>
-              </a:spcBef>
-              <a:spcAft>
-                <a:spcPts val="200"/>
-              </a:spcAft>
-            </a:pPr>
-            <a:r>
-              <a:rPr sz="1300">
-                <a:solidFill>
-                  <a:srgbClr val="3D5466"/>
-                </a:solidFill>
-                <a:latin typeface="Arial"/>
-              </a:rPr>
-              <a:t>▸  Gesamtkaufpreis: 380.000 EUR</a:t>
-            </a:r>
-          </a:p>
-          <a:p>
-            <a:pPr>
-              <a:spcBef>
-                <a:spcPts val="400"/>
-              </a:spcBef>
-              <a:spcAft>
-                <a:spcPts val="200"/>
-              </a:spcAft>
-            </a:pPr>
-            <a:r>
-              <a:rPr sz="1200">
-                <a:solidFill>
-                  <a:srgbClr val="3D5466"/>
-                </a:solidFill>
-                <a:latin typeface="Arial"/>
-              </a:rPr>
-              <a:t>Finanzdaten der Praxis (letzte 3 Jahre, EÜR Dr. Schmidt):</a:t>
-            </a:r>
-          </a:p>
-          <a:p>
-            <a:pPr>
-              <a:spcBef>
-                <a:spcPts val="400"/>
-              </a:spcBef>
-              <a:spcAft>
-                <a:spcPts val="200"/>
-              </a:spcAft>
-            </a:pPr>
-            <a:r>
-              <a:rPr sz="1200">
-                <a:solidFill>
-                  <a:srgbClr val="3D5466"/>
-                </a:solidFill>
-                <a:latin typeface="Arial"/>
-              </a:rPr>
-              <a:t>Durchschnittlicher Jahresüberschuss: 303.333 EUR</a:t>
-            </a:r>
-          </a:p>
-          <a:p>
-            <a:pPr>
-              <a:spcBef>
-                <a:spcPts val="400"/>
-              </a:spcBef>
-              <a:spcAft>
-                <a:spcPts val="200"/>
-              </a:spcAft>
-            </a:pPr>
-            <a:r>
-              <a:rPr sz="1200">
-                <a:solidFill>
-                  <a:srgbClr val="3D5466"/>
-                </a:solidFill>
-                <a:latin typeface="Arial"/>
-              </a:rPr>
-              <a:t>Finanzierungsbedarf:</a:t>
-            </a:r>
-          </a:p>
-          <a:p>
-            <a:pPr>
-              <a:spcBef>
-                <a:spcPts val="400"/>
-              </a:spcBef>
-              <a:spcAft>
-                <a:spcPts val="200"/>
-              </a:spcAft>
-            </a:pPr>
-            <a:r>
-              <a:rPr sz="1300">
-                <a:solidFill>
-                  <a:srgbClr val="3D5466"/>
-                </a:solidFill>
-                <a:latin typeface="Arial"/>
-              </a:rPr>
-              <a:t>▸  Praxiskauf: 380.000 EUR</a:t>
-            </a:r>
-          </a:p>
-          <a:p>
-            <a:pPr>
-              <a:spcBef>
-                <a:spcPts val="400"/>
-              </a:spcBef>
-              <a:spcAft>
-                <a:spcPts val="200"/>
-              </a:spcAft>
-            </a:pPr>
-            <a:r>
-              <a:rPr sz="1300">
-                <a:solidFill>
-                  <a:srgbClr val="3D5466"/>
-                </a:solidFill>
-                <a:latin typeface="Arial"/>
-              </a:rPr>
-              <a:t>▸  Betriebsmittel (Warenlager, Anlaufkosten): 30.000 EUR</a:t>
-            </a:r>
-          </a:p>
-          <a:p>
-            <a:pPr>
-              <a:spcBef>
-                <a:spcPts val="400"/>
-              </a:spcBef>
-              <a:spcAft>
-                <a:spcPts val="200"/>
-              </a:spcAft>
-            </a:pPr>
-            <a:r>
-              <a:rPr sz="1300">
-                <a:solidFill>
-                  <a:srgbClr val="3D5466"/>
-                </a:solidFill>
-                <a:latin typeface="Arial"/>
-              </a:rPr>
-              <a:t>▸  Modernisierung Röntgenanlage: 25.000 EUR</a:t>
-            </a:r>
-          </a:p>
-          <a:p>
-            <a:pPr>
-              <a:spcBef>
-                <a:spcPts val="400"/>
-              </a:spcBef>
-              <a:spcAft>
-                <a:spcPts val="200"/>
-              </a:spcAft>
-            </a:pPr>
-            <a:r>
-              <a:rPr sz="1300">
-                <a:solidFill>
-                  <a:srgbClr val="3D5466"/>
-                </a:solidFill>
-                <a:latin typeface="Arial"/>
-              </a:rPr>
-              <a:t>▸  Gesamtbedarf: 435.000 EUR</a:t>
-            </a:r>
-          </a:p>
-        </p:txBody>
-      </p:sp>
-      <p:sp>
-        <p:nvSpPr>
-          <p:cNvPr id="9" name="Rectangle 8"/>
+      <p:pic>
+        <p:nvPicPr>
+          <p:cNvPr id="7" name="Picture 6" descr="image.png"/>
+          <p:cNvPicPr>
+            <a:picLocks noChangeAspect="1"/>
+          </p:cNvPicPr>
+          <p:nvPr/>
+        </p:nvPicPr>
+        <p:blipFill>
+          <a:blip r:embed="rId2"/>
+          <a:stretch>
+            <a:fillRect/>
+          </a:stretch>
+        </p:blipFill>
+        <p:spPr>
+          <a:xfrm>
+            <a:off x="2303489" y="1325880"/>
+            <a:ext cx="7581973" cy="4937760"/>
+          </a:xfrm>
+          <a:prstGeom prst="rect">
+            <a:avLst/>
+          </a:prstGeom>
+        </p:spPr>
+      </p:pic>
+      <p:sp>
+        <p:nvSpPr>
+          <p:cNvPr id="8" name="Rectangle 7"/>
           <p:cNvSpPr/>
           <p:nvPr/>
         </p:nvSpPr>
@@ -7497,7 +8860,7 @@
       </p:sp>
       <p:sp>
         <p:nvSpPr>
-          <p:cNvPr id="10" name="TextBox 9"/>
+          <p:cNvPr id="9" name="TextBox 8"/>
           <p:cNvSpPr txBox="1"/>
           <p:nvPr/>
         </p:nvSpPr>
@@ -7526,6 +8889,41 @@
                 <a:latin typeface="JetBrains Mono"/>
               </a:rPr>
               <a:t>Benedikt Zoller Coaching  ·  FKB Campus  ·  M07</a:t>
+            </a:r>
+          </a:p>
+        </p:txBody>
+      </p:sp>
+      <p:sp>
+        <p:nvSpPr>
+          <p:cNvPr id="10" name="TextBox 9"/>
+          <p:cNvSpPr txBox="1"/>
+          <p:nvPr/>
+        </p:nvSpPr>
+        <p:spPr>
+          <a:xfrm>
+            <a:off x="7176211" y="6583680"/>
+            <a:ext cx="4326940" cy="256032"/>
+          </a:xfrm>
+          <a:prstGeom prst="rect">
+            <a:avLst/>
+          </a:prstGeom>
+          <a:noFill/>
+        </p:spPr>
+        <p:txBody>
+          <a:bodyPr wrap="none">
+            <a:spAutoFit/>
+          </a:bodyPr>
+          <a:lstStyle/>
+          <a:p>
+            <a:pPr algn="r"/>
+            <a:r>
+              <a:rPr sz="700">
+                <a:solidFill>
+                  <a:srgbClr val="A0B4D2"/>
+                </a:solidFill>
+                <a:latin typeface="JetBrains Mono"/>
+              </a:rPr>
+              <a:t>Schaubild</a:t>
             </a:r>
           </a:p>
         </p:txBody>
@@ -7785,7 +9183,7 @@
                 </a:solidFill>
                 <a:latin typeface="Source Serif 4"/>
               </a:rPr>
-              <a:t>Checkliste: Heilberufe-Erstgespräch (15 Punkte)</a:t>
+              <a:t>Praxiscase: Dr. Mayer – Zahnarztpraxis-Übernahme in Ravensburg</a:t>
             </a:r>
           </a:p>
         </p:txBody>
@@ -7811,6 +9209,25 @@
             <a:spAutoFit/>
           </a:bodyPr>
           <a:lstStyle/>
+          <a:p>
+            <a:pPr>
+              <a:spcBef>
+                <a:spcPts val="1000"/>
+              </a:spcBef>
+              <a:spcAft>
+                <a:spcPts val="200"/>
+              </a:spcAft>
+            </a:pPr>
+            <a:r>
+              <a:rPr sz="800" b="1">
+                <a:solidFill>
+                  <a:srgbClr val="78808C"/>
+                </a:solidFill>
+                <a:latin typeface="JetBrains Mono"/>
+              </a:rPr>
+              <a:t>AUSGANGSSITUATION</a:t>
+            </a:r>
+          </a:p>
           <a:p>
             <a:pPr>
               <a:spcBef>
@@ -7827,7 +9244,7 @@
                 </a:solidFill>
                 <a:latin typeface="Arial"/>
               </a:rPr>
-              <a:t>Nutzen Sie diese Checkliste zur Vorbereitung und Strukturierung von Erstgesprächen mit Heilberufe-Kunden.</a:t>
+              <a:t>Kaufpreisverhandlung:</a:t>
             </a:r>
           </a:p>
           <a:p>
@@ -7840,13 +9257,13 @@
               </a:spcAft>
             </a:pPr>
             <a:r>
-              <a:rPr sz="1200">
+              <a:rPr sz="1300">
                 <a:solidFill>
                   <a:srgbClr val="3D5466"/>
                 </a:solidFill>
                 <a:latin typeface="Arial"/>
               </a:rPr>
-              <a:t>Branche &amp; Zulassung</a:t>
+              <a:t>▸  Substanzwert (Einrichtung, Geräte): 160.000 EUR</a:t>
             </a:r>
           </a:p>
           <a:p>
@@ -7865,7 +9282,7 @@
                 </a:solidFill>
                 <a:latin typeface="Arial"/>
               </a:rPr>
-              <a:t>▸  [ ] 1. Zulassungsart: GKV-Zulassung, Privatarzt, MVZ-Anstellung?</a:t>
+              <a:t>▸  Goodwill (vereinbart, auf Basis IDW S5): 220.000 EUR</a:t>
             </a:r>
           </a:p>
           <a:p>
@@ -7884,7 +9301,7 @@
                 </a:solidFill>
                 <a:latin typeface="Arial"/>
               </a:rPr>
-              <a:t>▸  [ ] 2. KV-Bezirk und Versorgungsgebiet – überversorgt oder Mangelgebiet?</a:t>
+              <a:t>▸  Gesamtkaufpreis: 380.000 EUR</a:t>
             </a:r>
           </a:p>
           <a:p>
@@ -7897,13 +9314,13 @@
               </a:spcAft>
             </a:pPr>
             <a:r>
-              <a:rPr sz="1300">
+              <a:rPr sz="1200">
                 <a:solidFill>
                   <a:srgbClr val="3D5466"/>
                 </a:solidFill>
                 <a:latin typeface="Arial"/>
               </a:rPr>
-              <a:t>▸  [ ] 3. Berufsbezeichnung und Kammerzugehörigkeit klären</a:t>
+              <a:t>Finanzdaten der Praxis (letzte 3 Jahre, EÜR Dr. Schmidt):</a:t>
             </a:r>
           </a:p>
           <a:p>
@@ -7916,13 +9333,13 @@
               </a:spcAft>
             </a:pPr>
             <a:r>
-              <a:rPr sz="1300">
+              <a:rPr sz="1200">
                 <a:solidFill>
                   <a:srgbClr val="3D5466"/>
                 </a:solidFill>
                 <a:latin typeface="Arial"/>
               </a:rPr>
-              <a:t>▸  [ ] 4. Einzelpraxis oder BAG/Gemeinschaftspraxis? → Bei Berufsausübungsgemeinschaft (BAG): Gesellschaftsvertrag anfordern; Sicherheitenkonzept und Bonitätsprüfung gelten für alle Partner</a:t>
+              <a:t>Durchschnittlicher Jahresüberschuss: 303.333 EUR</a:t>
             </a:r>
           </a:p>
           <a:p>
@@ -7935,13 +9352,13 @@
               </a:spcAft>
             </a:pPr>
             <a:r>
-              <a:rPr sz="1300">
+              <a:rPr sz="1200">
                 <a:solidFill>
                   <a:srgbClr val="3D5466"/>
                 </a:solidFill>
                 <a:latin typeface="Arial"/>
               </a:rPr>
-              <a:t>▸  [ ] 5. Umsatzsteuer-Status klären (§ 4 Nr. 14 UStG: Heilbehandlungen grds. USt-frei; Ausnahmen: Gutachtertätigkeit, Schönheitschirurgie ohne Heilzweck → partielle USt-Pflicht möglich)</a:t>
+              <a:t>Finanzierungsbedarf:</a:t>
             </a:r>
           </a:p>
           <a:p>
@@ -7954,13 +9371,13 @@
               </a:spcAft>
             </a:pPr>
             <a:r>
-              <a:rPr sz="1200">
+              <a:rPr sz="1300">
                 <a:solidFill>
                   <a:srgbClr val="3D5466"/>
                 </a:solidFill>
                 <a:latin typeface="Arial"/>
               </a:rPr>
-              <a:t>Einkommenssituation</a:t>
+              <a:t>▸  Praxiskauf: 380.000 EUR</a:t>
             </a:r>
           </a:p>
           <a:p>
@@ -7979,7 +9396,7 @@
                 </a:solidFill>
                 <a:latin typeface="Arial"/>
               </a:rPr>
-              <a:t>▸  [ ] 6. Einnahmenquellen: GKV-Anteil / PKV-Anteil / Selbstzahler</a:t>
+              <a:t>▸  Betriebsmittel (Warenlager, Anlaufkosten): 30.000 EUR</a:t>
             </a:r>
           </a:p>
           <a:p>
@@ -7998,7 +9415,7 @@
                 </a:solidFill>
                 <a:latin typeface="Arial"/>
               </a:rPr>
-              <a:t>▸  [ ] 7. EÜR letzter 3 Jahre + Steuerbescheide anfordern</a:t>
+              <a:t>▸  Modernisierung Röntgenanlage: 25.000 EUR</a:t>
             </a:r>
           </a:p>
           <a:p>
@@ -8017,26 +9434,7 @@
                 </a:solidFill>
                 <a:latin typeface="Arial"/>
               </a:rPr>
-              <a:t>▸  [ ] 8. Rückstände oder laufende Regressverfahren erfragen</a:t>
-            </a:r>
-          </a:p>
-          <a:p>
-            <a:pPr>
-              <a:spcBef>
-                <a:spcPts val="400"/>
-              </a:spcBef>
-              <a:spcAft>
-                <a:spcPts val="200"/>
-              </a:spcAft>
-            </a:pPr>
-            <a:r>
-              <a:rPr sz="1300">
-                <a:solidFill>
-                  <a:srgbClr val="3D5466"/>
-                </a:solidFill>
-                <a:latin typeface="Arial"/>
-              </a:rPr>
-              <a:t>▸  [ ] 9. Betriebsausgaben auf Plausibilität prüfen (Personalquote, Mietquote)</a:t>
+              <a:t>▸  Gesamtbedarf: 435.000 EUR</a:t>
             </a:r>
           </a:p>
         </p:txBody>
@@ -8445,4 +9843,324 @@
   </a:objectDefaults>
   <a:extraClrSchemeLst/>
 </a:theme>
+</file>
+
+<file path=ppt/theme/theme2.xml><?xml version="1.0" encoding="utf-8"?>
+<a:theme xmlns:a="http://schemas.openxmlformats.org/drawingml/2006/main" name="Office Theme">
+  <a:themeElements>
+    <a:clrScheme name="Office">
+      <a:dk1>
+        <a:sysClr val="windowText" lastClr="000000"/>
+      </a:dk1>
+      <a:lt1>
+        <a:sysClr val="window" lastClr="FFFFFF"/>
+      </a:lt1>
+      <a:dk2>
+        <a:srgbClr val="1F497D"/>
+      </a:dk2>
+      <a:lt2>
+        <a:srgbClr val="EEECE1"/>
+      </a:lt2>
+      <a:accent1>
+        <a:srgbClr val="4F81BD"/>
+      </a:accent1>
+      <a:accent2>
+        <a:srgbClr val="C0504D"/>
+      </a:accent2>
+      <a:accent3>
+        <a:srgbClr val="9BBB59"/>
+      </a:accent3>
+      <a:accent4>
+        <a:srgbClr val="8064A2"/>
+      </a:accent4>
+      <a:accent5>
+        <a:srgbClr val="4BACC6"/>
+      </a:accent5>
+      <a:accent6>
+        <a:srgbClr val="F79646"/>
+      </a:accent6>
+      <a:hlink>
+        <a:srgbClr val="0000FF"/>
+      </a:hlink>
+      <a:folHlink>
+        <a:srgbClr val="800080"/>
+      </a:folHlink>
+    </a:clrScheme>
+    <a:fontScheme name="Office">
+      <a:majorFont>
+        <a:latin typeface="Calibri"/>
+        <a:ea typeface=""/>
+        <a:cs typeface=""/>
+        <a:font script="Jpan" typeface="ＭＳ Ｐゴシック"/>
+        <a:font script="Hang" typeface="맑은 고딕"/>
+        <a:font script="Hans" typeface="宋体"/>
+        <a:font script="Hant" typeface="新細明體"/>
+        <a:font script="Arab" typeface="Times New Roman"/>
+        <a:font script="Hebr" typeface="Times New Roman"/>
+        <a:font script="Thai" typeface="Angsana New"/>
+        <a:font script="Ethi" typeface="Nyala"/>
+        <a:font script="Beng" typeface="Vrinda"/>
+        <a:font script="Gujr" typeface="Shruti"/>
+        <a:font script="Khmr" typeface="MoolBoran"/>
+        <a:font script="Knda" typeface="Tunga"/>
+        <a:font script="Guru" typeface="Raavi"/>
+        <a:font script="Cans" typeface="Euphemia"/>
+        <a:font script="Cher" typeface="Plantagenet Cherokee"/>
+        <a:font script="Yiii" typeface="Microsoft Yi Baiti"/>
+        <a:font script="Tibt" typeface="Microsoft Himalaya"/>
+        <a:font script="Thaa" typeface="MV Boli"/>
+        <a:font script="Deva" typeface="Mangal"/>
+        <a:font script="Telu" typeface="Gautami"/>
+        <a:font script="Taml" typeface="Latha"/>
+        <a:font script="Syrc" typeface="Estrangelo Edessa"/>
+        <a:font script="Orya" typeface="Kalinga"/>
+        <a:font script="Mlym" typeface="Kartika"/>
+        <a:font script="Laoo" typeface="DokChampa"/>
+        <a:font script="Sinh" typeface="Iskoola Pota"/>
+        <a:font script="Mong" typeface="Mongolian Baiti"/>
+        <a:font script="Viet" typeface="Times New Roman"/>
+        <a:font script="Uigh" typeface="Microsoft Uighur"/>
+        <a:font script="Geor" typeface="Sylfaen"/>
+      </a:majorFont>
+      <a:minorFont>
+        <a:latin typeface="Calibri"/>
+        <a:ea typeface=""/>
+        <a:cs typeface=""/>
+        <a:font script="Jpan" typeface="ＭＳ Ｐゴシック"/>
+        <a:font script="Hang" typeface="맑은 고딕"/>
+        <a:font script="Hans" typeface="宋体"/>
+        <a:font script="Hant" typeface="新細明體"/>
+        <a:font script="Arab" typeface="Arial"/>
+        <a:font script="Hebr" typeface="Arial"/>
+        <a:font script="Thai" typeface="Cordia New"/>
+        <a:font script="Ethi" typeface="Nyala"/>
+        <a:font script="Beng" typeface="Vrinda"/>
+        <a:font script="Gujr" typeface="Shruti"/>
+        <a:font script="Khmr" typeface="DaunPenh"/>
+        <a:font script="Knda" typeface="Tunga"/>
+        <a:font script="Guru" typeface="Raavi"/>
+        <a:font script="Cans" typeface="Euphemia"/>
+        <a:font script="Cher" typeface="Plantagenet Cherokee"/>
+        <a:font script="Yiii" typeface="Microsoft Yi Baiti"/>
+        <a:font script="Tibt" typeface="Microsoft Himalaya"/>
+        <a:font script="Thaa" typeface="MV Boli"/>
+        <a:font script="Deva" typeface="Mangal"/>
+        <a:font script="Telu" typeface="Gautami"/>
+        <a:font script="Taml" typeface="Latha"/>
+        <a:font script="Syrc" typeface="Estrangelo Edessa"/>
+        <a:font script="Orya" typeface="Kalinga"/>
+        <a:font script="Mlym" typeface="Kartika"/>
+        <a:font script="Laoo" typeface="DokChampa"/>
+        <a:font script="Sinh" typeface="Iskoola Pota"/>
+        <a:font script="Mong" typeface="Mongolian Baiti"/>
+        <a:font script="Viet" typeface="Arial"/>
+        <a:font script="Uigh" typeface="Microsoft Uighur"/>
+        <a:font script="Geor" typeface="Sylfaen"/>
+      </a:minorFont>
+    </a:fontScheme>
+    <a:fmtScheme name="Office">
+      <a:fillStyleLst>
+        <a:solidFill>
+          <a:schemeClr val="phClr"/>
+        </a:solidFill>
+        <a:gradFill rotWithShape="1">
+          <a:gsLst>
+            <a:gs pos="0">
+              <a:schemeClr val="phClr">
+                <a:tint val="50000"/>
+                <a:satMod val="300000"/>
+              </a:schemeClr>
+            </a:gs>
+            <a:gs pos="35000">
+              <a:schemeClr val="phClr">
+                <a:tint val="37000"/>
+                <a:satMod val="300000"/>
+              </a:schemeClr>
+            </a:gs>
+            <a:gs pos="100000">
+              <a:schemeClr val="phClr">
+                <a:tint val="15000"/>
+                <a:satMod val="350000"/>
+              </a:schemeClr>
+            </a:gs>
+          </a:gsLst>
+          <a:lin ang="16200000" scaled="1"/>
+        </a:gradFill>
+        <a:gradFill rotWithShape="1">
+          <a:gsLst>
+            <a:gs pos="0">
+              <a:schemeClr val="phClr">
+                <a:tint val="100000"/>
+                <a:shade val="100000"/>
+                <a:satMod val="130000"/>
+              </a:schemeClr>
+            </a:gs>
+            <a:gs pos="100000">
+              <a:schemeClr val="phClr">
+                <a:tint val="50000"/>
+                <a:shade val="100000"/>
+                <a:satMod val="350000"/>
+              </a:schemeClr>
+            </a:gs>
+          </a:gsLst>
+          <a:lin ang="16200000" scaled="0"/>
+        </a:gradFill>
+      </a:fillStyleLst>
+      <a:lnStyleLst>
+        <a:ln w="9525" cap="flat" cmpd="sng" algn="ctr">
+          <a:solidFill>
+            <a:schemeClr val="phClr">
+              <a:shade val="95000"/>
+              <a:satMod val="105000"/>
+            </a:schemeClr>
+          </a:solidFill>
+          <a:prstDash val="solid"/>
+        </a:ln>
+        <a:ln w="25400" cap="flat" cmpd="sng" algn="ctr">
+          <a:solidFill>
+            <a:schemeClr val="phClr"/>
+          </a:solidFill>
+          <a:prstDash val="solid"/>
+        </a:ln>
+        <a:ln w="38100" cap="flat" cmpd="sng" algn="ctr">
+          <a:solidFill>
+            <a:schemeClr val="phClr"/>
+          </a:solidFill>
+          <a:prstDash val="solid"/>
+        </a:ln>
+      </a:lnStyleLst>
+      <a:effectStyleLst>
+        <a:effectStyle>
+          <a:effectLst>
+            <a:outerShdw blurRad="40000" dist="20000" dir="5400000" rotWithShape="0">
+              <a:srgbClr val="000000">
+                <a:alpha val="38000"/>
+              </a:srgbClr>
+            </a:outerShdw>
+          </a:effectLst>
+        </a:effectStyle>
+        <a:effectStyle>
+          <a:effectLst>
+            <a:outerShdw blurRad="40000" dist="23000" dir="5400000" rotWithShape="0">
+              <a:srgbClr val="000000">
+                <a:alpha val="35000"/>
+              </a:srgbClr>
+            </a:outerShdw>
+          </a:effectLst>
+        </a:effectStyle>
+        <a:effectStyle>
+          <a:effectLst>
+            <a:outerShdw blurRad="40000" dist="23000" dir="5400000" rotWithShape="0">
+              <a:srgbClr val="000000">
+                <a:alpha val="35000"/>
+              </a:srgbClr>
+            </a:outerShdw>
+          </a:effectLst>
+          <a:scene3d>
+            <a:camera prst="orthographicFront">
+              <a:rot lat="0" lon="0" rev="0"/>
+            </a:camera>
+            <a:lightRig rig="threePt" dir="t">
+              <a:rot lat="0" lon="0" rev="1200000"/>
+            </a:lightRig>
+          </a:scene3d>
+          <a:sp3d>
+            <a:bevelT w="63500" h="25400"/>
+          </a:sp3d>
+        </a:effectStyle>
+      </a:effectStyleLst>
+      <a:bgFillStyleLst>
+        <a:solidFill>
+          <a:schemeClr val="phClr"/>
+        </a:solidFill>
+        <a:gradFill rotWithShape="1">
+          <a:gsLst>
+            <a:gs pos="0">
+              <a:schemeClr val="phClr">
+                <a:tint val="40000"/>
+                <a:satMod val="350000"/>
+              </a:schemeClr>
+            </a:gs>
+            <a:gs pos="40000">
+              <a:schemeClr val="phClr">
+                <a:tint val="45000"/>
+                <a:shade val="99000"/>
+                <a:satMod val="350000"/>
+              </a:schemeClr>
+            </a:gs>
+            <a:gs pos="100000">
+              <a:schemeClr val="phClr">
+                <a:shade val="20000"/>
+                <a:satMod val="255000"/>
+              </a:schemeClr>
+            </a:gs>
+          </a:gsLst>
+          <a:path path="circle">
+            <a:fillToRect l="50000" t="-80000" r="50000" b="180000"/>
+          </a:path>
+        </a:gradFill>
+        <a:gradFill rotWithShape="1">
+          <a:gsLst>
+            <a:gs pos="0">
+              <a:schemeClr val="phClr">
+                <a:tint val="80000"/>
+                <a:satMod val="300000"/>
+              </a:schemeClr>
+            </a:gs>
+            <a:gs pos="100000">
+              <a:schemeClr val="phClr">
+                <a:shade val="30000"/>
+                <a:satMod val="200000"/>
+              </a:schemeClr>
+            </a:gs>
+          </a:gsLst>
+          <a:path path="circle">
+            <a:fillToRect l="50000" t="50000" r="50000" b="50000"/>
+          </a:path>
+        </a:gradFill>
+      </a:bgFillStyleLst>
+    </a:fmtScheme>
+  </a:themeElements>
+  <a:objectDefaults>
+    <a:spDef>
+      <a:spPr/>
+      <a:bodyPr/>
+      <a:lstStyle/>
+      <a:style>
+        <a:lnRef idx="1">
+          <a:schemeClr val="accent1"/>
+        </a:lnRef>
+        <a:fillRef idx="3">
+          <a:schemeClr val="accent1"/>
+        </a:fillRef>
+        <a:effectRef idx="2">
+          <a:schemeClr val="accent1"/>
+        </a:effectRef>
+        <a:fontRef idx="minor">
+          <a:schemeClr val="lt1"/>
+        </a:fontRef>
+      </a:style>
+    </a:spDef>
+    <a:lnDef>
+      <a:spPr/>
+      <a:bodyPr/>
+      <a:lstStyle/>
+      <a:style>
+        <a:lnRef idx="2">
+          <a:schemeClr val="accent1"/>
+        </a:lnRef>
+        <a:fillRef idx="0">
+          <a:schemeClr val="accent1"/>
+        </a:fillRef>
+        <a:effectRef idx="1">
+          <a:schemeClr val="accent1"/>
+        </a:effectRef>
+        <a:fontRef idx="minor">
+          <a:schemeClr val="tx1"/>
+        </a:fontRef>
+      </a:style>
+    </a:lnDef>
+  </a:objectDefaults>
+  <a:extraClrSchemeLst/>
+</a:theme>
 </file>
--- a/protected-downloads/praesentation/M07.pptx
+++ b/protected-downloads/praesentation/M07.pptx
@@ -8,7 +8,7 @@
     <p:sldId id="256" r:id="rId7"/>
     <p:sldId id="257" r:id="rId8"/>
     <p:sldId id="258" r:id="rId9"/>
-    <p:sldId id="259" r:id="rId11"/>
+    <p:sldId id="259" r:id="rId10"/>
     <p:sldId id="260" r:id="rId12"/>
     <p:sldId id="261" r:id="rId13"/>
     <p:sldId id="262" r:id="rId14"/>
@@ -16,6 +16,7 @@
     <p:sldId id="264" r:id="rId16"/>
     <p:sldId id="265" r:id="rId17"/>
     <p:sldId id="266" r:id="rId18"/>
+    <p:sldId id="267" r:id="rId19"/>
   </p:sldIdLst>
   <p:sldSz cx="12188952" cy="6858000" type="screen4x3"/>
   <p:notesSz cx="6858000" cy="9144000"/>
@@ -4875,7 +4876,7 @@
                 </a:solidFill>
                 <a:latin typeface="Source Serif 4"/>
               </a:rPr>
-              <a:t>Checkliste: Heilberufe-Erstgespräch (15 Punkte)</a:t>
+              <a:t>Praxiscase: Dr. Mayer – Zahnarztpraxis-Übernahme in Ravensburg</a:t>
             </a:r>
           </a:p>
         </p:txBody>
@@ -4901,6 +4902,25 @@
             <a:spAutoFit/>
           </a:bodyPr>
           <a:lstStyle/>
+          <a:p>
+            <a:pPr>
+              <a:spcBef>
+                <a:spcPts val="1000"/>
+              </a:spcBef>
+              <a:spcAft>
+                <a:spcPts val="200"/>
+              </a:spcAft>
+            </a:pPr>
+            <a:r>
+              <a:rPr sz="800" b="1">
+                <a:solidFill>
+                  <a:srgbClr val="78808C"/>
+                </a:solidFill>
+                <a:latin typeface="JetBrains Mono"/>
+              </a:rPr>
+              <a:t>AUSGANGSSITUATION</a:t>
+            </a:r>
+          </a:p>
           <a:p>
             <a:pPr>
               <a:spcBef>
@@ -4917,7 +4937,7 @@
                 </a:solidFill>
                 <a:latin typeface="Arial"/>
               </a:rPr>
-              <a:t>Nutzen Sie diese Checkliste zur Vorbereitung und Strukturierung von Erstgesprächen mit Heilberufe-Kunden.</a:t>
+              <a:t>Kaufpreisverhandlung:</a:t>
             </a:r>
           </a:p>
           <a:p>
@@ -4930,13 +4950,13 @@
               </a:spcAft>
             </a:pPr>
             <a:r>
-              <a:rPr sz="1200">
+              <a:rPr sz="1300">
                 <a:solidFill>
                   <a:srgbClr val="3D5466"/>
                 </a:solidFill>
                 <a:latin typeface="Arial"/>
               </a:rPr>
-              <a:t>Branche &amp; Zulassung</a:t>
+              <a:t>▸  Substanzwert (Einrichtung, Geräte): 160.000 EUR</a:t>
             </a:r>
           </a:p>
           <a:p>
@@ -4955,7 +4975,7 @@
                 </a:solidFill>
                 <a:latin typeface="Arial"/>
               </a:rPr>
-              <a:t>▸  [ ] 1. Zulassungsart: GKV-Zulassung, Privatarzt, MVZ-Anstellung?</a:t>
+              <a:t>▸  Goodwill (vereinbart, auf Basis IDW S5): 220.000 EUR</a:t>
             </a:r>
           </a:p>
           <a:p>
@@ -4974,7 +4994,7 @@
                 </a:solidFill>
                 <a:latin typeface="Arial"/>
               </a:rPr>
-              <a:t>▸  [ ] 2. KV-Bezirk und Versorgungsgebiet – überversorgt oder Mangelgebiet?</a:t>
+              <a:t>▸  Gesamtkaufpreis: 380.000 EUR</a:t>
             </a:r>
           </a:p>
           <a:p>
@@ -4987,13 +5007,13 @@
               </a:spcAft>
             </a:pPr>
             <a:r>
-              <a:rPr sz="1300">
+              <a:rPr sz="1200">
                 <a:solidFill>
                   <a:srgbClr val="3D5466"/>
                 </a:solidFill>
                 <a:latin typeface="Arial"/>
               </a:rPr>
-              <a:t>▸  [ ] 3. Berufsbezeichnung und Kammerzugehörigkeit klären</a:t>
+              <a:t>Finanzdaten der Praxis (letzte 3 Jahre, EÜR Dr. Schmidt):</a:t>
             </a:r>
           </a:p>
           <a:p>
@@ -5006,13 +5026,13 @@
               </a:spcAft>
             </a:pPr>
             <a:r>
-              <a:rPr sz="1300">
+              <a:rPr sz="1200">
                 <a:solidFill>
                   <a:srgbClr val="3D5466"/>
                 </a:solidFill>
                 <a:latin typeface="Arial"/>
               </a:rPr>
-              <a:t>▸  [ ] 4. Einzelpraxis oder BAG/Gemeinschaftspraxis? → Bei Berufsausübungsgemeinschaft (BAG): Gesellschaftsvertrag anfordern; Sicherheitenkonzept und Bonitätsprüfung gelten für alle Partner</a:t>
+              <a:t>Durchschnittlicher Jahresüberschuss: 303.333 EUR</a:t>
             </a:r>
           </a:p>
           <a:p>
@@ -5025,13 +5045,13 @@
               </a:spcAft>
             </a:pPr>
             <a:r>
-              <a:rPr sz="1300">
+              <a:rPr sz="1200">
                 <a:solidFill>
                   <a:srgbClr val="3D5466"/>
                 </a:solidFill>
                 <a:latin typeface="Arial"/>
               </a:rPr>
-              <a:t>▸  [ ] 5. Umsatzsteuer-Status klären (§ 4 Nr. 14 UStG: Heilbehandlungen grds. USt-frei; Ausnahmen: Gutachtertätigkeit, Schönheitschirurgie ohne Heilzweck → partielle USt-Pflicht möglich)</a:t>
+              <a:t>Finanzierungsbedarf:</a:t>
             </a:r>
           </a:p>
           <a:p>
@@ -5044,13 +5064,13 @@
               </a:spcAft>
             </a:pPr>
             <a:r>
-              <a:rPr sz="1200">
+              <a:rPr sz="1300">
                 <a:solidFill>
                   <a:srgbClr val="3D5466"/>
                 </a:solidFill>
                 <a:latin typeface="Arial"/>
               </a:rPr>
-              <a:t>Einkommenssituation</a:t>
+              <a:t>▸  Praxiskauf: 380.000 EUR</a:t>
             </a:r>
           </a:p>
           <a:p>
@@ -5069,7 +5089,7 @@
                 </a:solidFill>
                 <a:latin typeface="Arial"/>
               </a:rPr>
-              <a:t>▸  [ ] 6. Einnahmenquellen: GKV-Anteil / PKV-Anteil / Selbstzahler</a:t>
+              <a:t>▸  Betriebsmittel (Warenlager, Anlaufkosten): 30.000 EUR</a:t>
             </a:r>
           </a:p>
           <a:p>
@@ -5088,7 +5108,7 @@
                 </a:solidFill>
                 <a:latin typeface="Arial"/>
               </a:rPr>
-              <a:t>▸  [ ] 7. EÜR letzter 3 Jahre + Steuerbescheide anfordern</a:t>
+              <a:t>▸  Modernisierung Röntgenanlage: 25.000 EUR</a:t>
             </a:r>
           </a:p>
           <a:p>
@@ -5107,26 +5127,7 @@
                 </a:solidFill>
                 <a:latin typeface="Arial"/>
               </a:rPr>
-              <a:t>▸  [ ] 8. Rückstände oder laufende Regressverfahren erfragen</a:t>
-            </a:r>
-          </a:p>
-          <a:p>
-            <a:pPr>
-              <a:spcBef>
-                <a:spcPts val="400"/>
-              </a:spcBef>
-              <a:spcAft>
-                <a:spcPts val="200"/>
-              </a:spcAft>
-            </a:pPr>
-            <a:r>
-              <a:rPr sz="1300">
-                <a:solidFill>
-                  <a:srgbClr val="3D5466"/>
-                </a:solidFill>
-                <a:latin typeface="Arial"/>
-              </a:rPr>
-              <a:t>▸  [ ] 9. Betriebsausgaben auf Plausibilität prüfen (Personalquote, Mietquote)</a:t>
+              <a:t>▸  Gesamtbedarf: 435.000 EUR</a:t>
             </a:r>
           </a:p>
         </p:txBody>
@@ -5464,6 +5465,595 @@
                 </a:solidFill>
                 <a:latin typeface="Source Serif 4"/>
               </a:rPr>
+              <a:t>Checkliste: Heilberufe-Erstgespräch (15 Punkte)</a:t>
+            </a:r>
+          </a:p>
+        </p:txBody>
+      </p:sp>
+      <p:sp>
+        <p:nvSpPr>
+          <p:cNvPr id="8" name="TextBox 7"/>
+          <p:cNvSpPr txBox="1"/>
+          <p:nvPr/>
+        </p:nvSpPr>
+        <p:spPr>
+          <a:xfrm>
+            <a:off x="685800" y="1417320"/>
+            <a:ext cx="10817352" cy="5029200"/>
+          </a:xfrm>
+          <a:prstGeom prst="rect">
+            <a:avLst/>
+          </a:prstGeom>
+          <a:noFill/>
+        </p:spPr>
+        <p:txBody>
+          <a:bodyPr wrap="square">
+            <a:spAutoFit/>
+          </a:bodyPr>
+          <a:lstStyle/>
+          <a:p>
+            <a:pPr>
+              <a:spcBef>
+                <a:spcPts val="400"/>
+              </a:spcBef>
+              <a:spcAft>
+                <a:spcPts val="200"/>
+              </a:spcAft>
+            </a:pPr>
+            <a:r>
+              <a:rPr sz="1200">
+                <a:solidFill>
+                  <a:srgbClr val="3D5466"/>
+                </a:solidFill>
+                <a:latin typeface="Arial"/>
+              </a:rPr>
+              <a:t>Nutzen Sie diese Checkliste zur Vorbereitung und Strukturierung von Erstgesprächen mit Heilberufe-Kunden.</a:t>
+            </a:r>
+          </a:p>
+          <a:p>
+            <a:pPr>
+              <a:spcBef>
+                <a:spcPts val="400"/>
+              </a:spcBef>
+              <a:spcAft>
+                <a:spcPts val="200"/>
+              </a:spcAft>
+            </a:pPr>
+            <a:r>
+              <a:rPr sz="1200">
+                <a:solidFill>
+                  <a:srgbClr val="3D5466"/>
+                </a:solidFill>
+                <a:latin typeface="Arial"/>
+              </a:rPr>
+              <a:t>Branche &amp; Zulassung</a:t>
+            </a:r>
+          </a:p>
+          <a:p>
+            <a:pPr>
+              <a:spcBef>
+                <a:spcPts val="400"/>
+              </a:spcBef>
+              <a:spcAft>
+                <a:spcPts val="200"/>
+              </a:spcAft>
+            </a:pPr>
+            <a:r>
+              <a:rPr sz="1300">
+                <a:solidFill>
+                  <a:srgbClr val="3D5466"/>
+                </a:solidFill>
+                <a:latin typeface="Arial"/>
+              </a:rPr>
+              <a:t>▸  [ ] 1. Zulassungsart: GKV-Zulassung, Privatarzt, MVZ-Anstellung?</a:t>
+            </a:r>
+          </a:p>
+          <a:p>
+            <a:pPr>
+              <a:spcBef>
+                <a:spcPts val="400"/>
+              </a:spcBef>
+              <a:spcAft>
+                <a:spcPts val="200"/>
+              </a:spcAft>
+            </a:pPr>
+            <a:r>
+              <a:rPr sz="1300">
+                <a:solidFill>
+                  <a:srgbClr val="3D5466"/>
+                </a:solidFill>
+                <a:latin typeface="Arial"/>
+              </a:rPr>
+              <a:t>▸  [ ] 2. KV-Bezirk und Versorgungsgebiet – überversorgt oder Mangelgebiet?</a:t>
+            </a:r>
+          </a:p>
+          <a:p>
+            <a:pPr>
+              <a:spcBef>
+                <a:spcPts val="400"/>
+              </a:spcBef>
+              <a:spcAft>
+                <a:spcPts val="200"/>
+              </a:spcAft>
+            </a:pPr>
+            <a:r>
+              <a:rPr sz="1300">
+                <a:solidFill>
+                  <a:srgbClr val="3D5466"/>
+                </a:solidFill>
+                <a:latin typeface="Arial"/>
+              </a:rPr>
+              <a:t>▸  [ ] 3. Berufsbezeichnung und Kammerzugehörigkeit klären</a:t>
+            </a:r>
+          </a:p>
+          <a:p>
+            <a:pPr>
+              <a:spcBef>
+                <a:spcPts val="400"/>
+              </a:spcBef>
+              <a:spcAft>
+                <a:spcPts val="200"/>
+              </a:spcAft>
+            </a:pPr>
+            <a:r>
+              <a:rPr sz="1300">
+                <a:solidFill>
+                  <a:srgbClr val="3D5466"/>
+                </a:solidFill>
+                <a:latin typeface="Arial"/>
+              </a:rPr>
+              <a:t>▸  [ ] 4. Einzelpraxis oder BAG/Gemeinschaftspraxis? → Bei Berufsausübungsgemeinschaft (BAG): Gesellschaftsvertrag anfordern; Sicherheitenkonzept und Bonitätsprüfung gelten für alle Partner</a:t>
+            </a:r>
+          </a:p>
+          <a:p>
+            <a:pPr>
+              <a:spcBef>
+                <a:spcPts val="400"/>
+              </a:spcBef>
+              <a:spcAft>
+                <a:spcPts val="200"/>
+              </a:spcAft>
+            </a:pPr>
+            <a:r>
+              <a:rPr sz="1300">
+                <a:solidFill>
+                  <a:srgbClr val="3D5466"/>
+                </a:solidFill>
+                <a:latin typeface="Arial"/>
+              </a:rPr>
+              <a:t>▸  [ ] 5. Umsatzsteuer-Status klären (§ 4 Nr. 14 UStG: Heilbehandlungen grds. USt-frei; Ausnahmen: Gutachtertätigkeit, Schönheitschirurgie ohne Heilzweck → partielle USt-Pflicht möglich)</a:t>
+            </a:r>
+          </a:p>
+          <a:p>
+            <a:pPr>
+              <a:spcBef>
+                <a:spcPts val="400"/>
+              </a:spcBef>
+              <a:spcAft>
+                <a:spcPts val="200"/>
+              </a:spcAft>
+            </a:pPr>
+            <a:r>
+              <a:rPr sz="1200">
+                <a:solidFill>
+                  <a:srgbClr val="3D5466"/>
+                </a:solidFill>
+                <a:latin typeface="Arial"/>
+              </a:rPr>
+              <a:t>Einkommenssituation</a:t>
+            </a:r>
+          </a:p>
+          <a:p>
+            <a:pPr>
+              <a:spcBef>
+                <a:spcPts val="400"/>
+              </a:spcBef>
+              <a:spcAft>
+                <a:spcPts val="200"/>
+              </a:spcAft>
+            </a:pPr>
+            <a:r>
+              <a:rPr sz="1300">
+                <a:solidFill>
+                  <a:srgbClr val="3D5466"/>
+                </a:solidFill>
+                <a:latin typeface="Arial"/>
+              </a:rPr>
+              <a:t>▸  [ ] 6. Einnahmenquellen: GKV-Anteil / PKV-Anteil / Selbstzahler</a:t>
+            </a:r>
+          </a:p>
+          <a:p>
+            <a:pPr>
+              <a:spcBef>
+                <a:spcPts val="400"/>
+              </a:spcBef>
+              <a:spcAft>
+                <a:spcPts val="200"/>
+              </a:spcAft>
+            </a:pPr>
+            <a:r>
+              <a:rPr sz="1300">
+                <a:solidFill>
+                  <a:srgbClr val="3D5466"/>
+                </a:solidFill>
+                <a:latin typeface="Arial"/>
+              </a:rPr>
+              <a:t>▸  [ ] 7. EÜR letzter 3 Jahre + Steuerbescheide anfordern</a:t>
+            </a:r>
+          </a:p>
+          <a:p>
+            <a:pPr>
+              <a:spcBef>
+                <a:spcPts val="400"/>
+              </a:spcBef>
+              <a:spcAft>
+                <a:spcPts val="200"/>
+              </a:spcAft>
+            </a:pPr>
+            <a:r>
+              <a:rPr sz="1300">
+                <a:solidFill>
+                  <a:srgbClr val="3D5466"/>
+                </a:solidFill>
+                <a:latin typeface="Arial"/>
+              </a:rPr>
+              <a:t>▸  [ ] 8. Rückstände oder laufende Regressverfahren erfragen</a:t>
+            </a:r>
+          </a:p>
+          <a:p>
+            <a:pPr>
+              <a:spcBef>
+                <a:spcPts val="400"/>
+              </a:spcBef>
+              <a:spcAft>
+                <a:spcPts val="200"/>
+              </a:spcAft>
+            </a:pPr>
+            <a:r>
+              <a:rPr sz="1300">
+                <a:solidFill>
+                  <a:srgbClr val="3D5466"/>
+                </a:solidFill>
+                <a:latin typeface="Arial"/>
+              </a:rPr>
+              <a:t>▸  [ ] 9. Betriebsausgaben auf Plausibilität prüfen (Personalquote, Mietquote)</a:t>
+            </a:r>
+          </a:p>
+        </p:txBody>
+      </p:sp>
+      <p:sp>
+        <p:nvSpPr>
+          <p:cNvPr id="9" name="Rectangle 8"/>
+          <p:cNvSpPr/>
+          <p:nvPr/>
+        </p:nvSpPr>
+        <p:spPr>
+          <a:xfrm>
+            <a:off x="0" y="6510528"/>
+            <a:ext cx="12188952" cy="347472"/>
+          </a:xfrm>
+          <a:prstGeom prst="rect">
+            <a:avLst/>
+          </a:prstGeom>
+          <a:solidFill>
+            <a:srgbClr val="0A1937"/>
+          </a:solidFill>
+          <a:ln>
+            <a:noFill/>
+          </a:ln>
+        </p:spPr>
+        <p:style>
+          <a:lnRef idx="1">
+            <a:schemeClr val="accent1"/>
+          </a:lnRef>
+          <a:fillRef idx="3">
+            <a:schemeClr val="accent1"/>
+          </a:fillRef>
+          <a:effectRef idx="2">
+            <a:schemeClr val="accent1"/>
+          </a:effectRef>
+          <a:fontRef idx="minor">
+            <a:schemeClr val="lt1"/>
+          </a:fontRef>
+        </p:style>
+        <p:txBody>
+          <a:bodyPr rtlCol="0" anchor="ctr"/>
+          <a:lstStyle/>
+          <a:p>
+            <a:pPr algn="ctr"/>
+          </a:p>
+        </p:txBody>
+      </p:sp>
+      <p:sp>
+        <p:nvSpPr>
+          <p:cNvPr id="10" name="TextBox 9"/>
+          <p:cNvSpPr txBox="1"/>
+          <p:nvPr/>
+        </p:nvSpPr>
+        <p:spPr>
+          <a:xfrm>
+            <a:off x="685800" y="6583680"/>
+            <a:ext cx="6490411" cy="256032"/>
+          </a:xfrm>
+          <a:prstGeom prst="rect">
+            <a:avLst/>
+          </a:prstGeom>
+          <a:noFill/>
+        </p:spPr>
+        <p:txBody>
+          <a:bodyPr wrap="none">
+            <a:spAutoFit/>
+          </a:bodyPr>
+          <a:lstStyle/>
+          <a:p>
+            <a:pPr algn="l"/>
+            <a:r>
+              <a:rPr sz="700">
+                <a:solidFill>
+                  <a:srgbClr val="A0B4D2"/>
+                </a:solidFill>
+                <a:latin typeface="JetBrains Mono"/>
+              </a:rPr>
+              <a:t>Benedikt Zoller Coaching  ·  FKB Campus  ·  M07</a:t>
+            </a:r>
+          </a:p>
+        </p:txBody>
+      </p:sp>
+    </p:spTree>
+  </p:cSld>
+  <p:clrMapOvr>
+    <a:masterClrMapping/>
+  </p:clrMapOvr>
+</p:sld>
+</file>
+
+<file path=ppt/slides/slide12.xml><?xml version="1.0" encoding="utf-8"?>
+<p:sld xmlns:a="http://schemas.openxmlformats.org/drawingml/2006/main" xmlns:p="http://schemas.openxmlformats.org/presentationml/2006/main" xmlns:r="http://schemas.openxmlformats.org/officeDocument/2006/relationships">
+  <p:cSld>
+    <p:spTree>
+      <p:nvGrpSpPr>
+        <p:cNvPr id="1" name=""/>
+        <p:cNvGrpSpPr/>
+        <p:nvPr/>
+      </p:nvGrpSpPr>
+      <p:grpSpPr/>
+      <p:sp>
+        <p:nvSpPr>
+          <p:cNvPr id="2" name="Rectangle 1"/>
+          <p:cNvSpPr/>
+          <p:nvPr/>
+        </p:nvSpPr>
+        <p:spPr>
+          <a:xfrm>
+            <a:off x="0" y="0"/>
+            <a:ext cx="12188952" cy="6858000"/>
+          </a:xfrm>
+          <a:prstGeom prst="rect">
+            <a:avLst/>
+          </a:prstGeom>
+          <a:solidFill>
+            <a:srgbClr val="EDEDF3"/>
+          </a:solidFill>
+          <a:ln>
+            <a:noFill/>
+          </a:ln>
+        </p:spPr>
+        <p:style>
+          <a:lnRef idx="1">
+            <a:schemeClr val="accent1"/>
+          </a:lnRef>
+          <a:fillRef idx="3">
+            <a:schemeClr val="accent1"/>
+          </a:fillRef>
+          <a:effectRef idx="2">
+            <a:schemeClr val="accent1"/>
+          </a:effectRef>
+          <a:fontRef idx="minor">
+            <a:schemeClr val="lt1"/>
+          </a:fontRef>
+        </p:style>
+        <p:txBody>
+          <a:bodyPr rtlCol="0" anchor="ctr"/>
+          <a:lstStyle/>
+          <a:p>
+            <a:pPr algn="ctr"/>
+          </a:p>
+        </p:txBody>
+      </p:sp>
+      <p:sp>
+        <p:nvSpPr>
+          <p:cNvPr id="3" name="Rectangle 2"/>
+          <p:cNvSpPr/>
+          <p:nvPr/>
+        </p:nvSpPr>
+        <p:spPr>
+          <a:xfrm>
+            <a:off x="0" y="0"/>
+            <a:ext cx="12188952" cy="50292"/>
+          </a:xfrm>
+          <a:prstGeom prst="rect">
+            <a:avLst/>
+          </a:prstGeom>
+          <a:solidFill>
+            <a:srgbClr val="1F2C56"/>
+          </a:solidFill>
+          <a:ln>
+            <a:noFill/>
+          </a:ln>
+        </p:spPr>
+        <p:style>
+          <a:lnRef idx="1">
+            <a:schemeClr val="accent1"/>
+          </a:lnRef>
+          <a:fillRef idx="3">
+            <a:schemeClr val="accent1"/>
+          </a:fillRef>
+          <a:effectRef idx="2">
+            <a:schemeClr val="accent1"/>
+          </a:effectRef>
+          <a:fontRef idx="minor">
+            <a:schemeClr val="lt1"/>
+          </a:fontRef>
+        </p:style>
+        <p:txBody>
+          <a:bodyPr rtlCol="0" anchor="ctr"/>
+          <a:lstStyle/>
+          <a:p>
+            <a:pPr algn="ctr"/>
+          </a:p>
+        </p:txBody>
+      </p:sp>
+      <p:sp>
+        <p:nvSpPr>
+          <p:cNvPr id="4" name="TextBox 3"/>
+          <p:cNvSpPr txBox="1"/>
+          <p:nvPr/>
+        </p:nvSpPr>
+        <p:spPr>
+          <a:xfrm>
+            <a:off x="685800" y="109728"/>
+            <a:ext cx="10817352" cy="228600"/>
+          </a:xfrm>
+          <a:prstGeom prst="rect">
+            <a:avLst/>
+          </a:prstGeom>
+          <a:noFill/>
+        </p:spPr>
+        <p:txBody>
+          <a:bodyPr wrap="none">
+            <a:spAutoFit/>
+          </a:bodyPr>
+          <a:lstStyle/>
+          <a:p>
+            <a:pPr algn="l"/>
+            <a:r>
+              <a:rPr sz="750">
+                <a:solidFill>
+                  <a:srgbClr val="78808C"/>
+                </a:solidFill>
+                <a:latin typeface="JetBrains Mono"/>
+              </a:rPr>
+              <a:t>M07  ·  INHALT</a:t>
+            </a:r>
+          </a:p>
+        </p:txBody>
+      </p:sp>
+      <p:sp>
+        <p:nvSpPr>
+          <p:cNvPr id="5" name="Rectangle 4"/>
+          <p:cNvSpPr/>
+          <p:nvPr/>
+        </p:nvSpPr>
+        <p:spPr>
+          <a:xfrm>
+            <a:off x="0" y="1234440"/>
+            <a:ext cx="12188952" cy="12700"/>
+          </a:xfrm>
+          <a:prstGeom prst="rect">
+            <a:avLst/>
+          </a:prstGeom>
+          <a:solidFill>
+            <a:srgbClr val="D8DFE4"/>
+          </a:solidFill>
+          <a:ln>
+            <a:noFill/>
+          </a:ln>
+        </p:spPr>
+        <p:style>
+          <a:lnRef idx="1">
+            <a:schemeClr val="accent1"/>
+          </a:lnRef>
+          <a:fillRef idx="3">
+            <a:schemeClr val="accent1"/>
+          </a:fillRef>
+          <a:effectRef idx="2">
+            <a:schemeClr val="accent1"/>
+          </a:effectRef>
+          <a:fontRef idx="minor">
+            <a:schemeClr val="lt1"/>
+          </a:fontRef>
+        </p:style>
+        <p:txBody>
+          <a:bodyPr rtlCol="0" anchor="ctr"/>
+          <a:lstStyle/>
+          <a:p>
+            <a:pPr algn="ctr"/>
+          </a:p>
+        </p:txBody>
+      </p:sp>
+      <p:sp>
+        <p:nvSpPr>
+          <p:cNvPr id="6" name="Rectangle 5"/>
+          <p:cNvSpPr/>
+          <p:nvPr/>
+        </p:nvSpPr>
+        <p:spPr>
+          <a:xfrm>
+            <a:off x="685800" y="502920"/>
+            <a:ext cx="36576" cy="658368"/>
+          </a:xfrm>
+          <a:prstGeom prst="rect">
+            <a:avLst/>
+          </a:prstGeom>
+          <a:solidFill>
+            <a:srgbClr val="D9C089"/>
+          </a:solidFill>
+          <a:ln>
+            <a:noFill/>
+          </a:ln>
+        </p:spPr>
+        <p:style>
+          <a:lnRef idx="1">
+            <a:schemeClr val="accent1"/>
+          </a:lnRef>
+          <a:fillRef idx="3">
+            <a:schemeClr val="accent1"/>
+          </a:fillRef>
+          <a:effectRef idx="2">
+            <a:schemeClr val="accent1"/>
+          </a:effectRef>
+          <a:fontRef idx="minor">
+            <a:schemeClr val="lt1"/>
+          </a:fontRef>
+        </p:style>
+        <p:txBody>
+          <a:bodyPr rtlCol="0" anchor="ctr"/>
+          <a:lstStyle/>
+          <a:p>
+            <a:pPr algn="ctr"/>
+          </a:p>
+        </p:txBody>
+      </p:sp>
+      <p:sp>
+        <p:nvSpPr>
+          <p:cNvPr id="7" name="TextBox 6"/>
+          <p:cNvSpPr txBox="1"/>
+          <p:nvPr/>
+        </p:nvSpPr>
+        <p:spPr>
+          <a:xfrm>
+            <a:off x="813816" y="502920"/>
+            <a:ext cx="10634472" cy="685800"/>
+          </a:xfrm>
+          <a:prstGeom prst="rect">
+            <a:avLst/>
+          </a:prstGeom>
+          <a:noFill/>
+        </p:spPr>
+        <p:txBody>
+          <a:bodyPr wrap="square">
+            <a:spAutoFit/>
+          </a:bodyPr>
+          <a:lstStyle/>
+          <a:p>
+            <a:pPr algn="l"/>
+            <a:r>
+              <a:rPr sz="2400" b="1" i="0">
+                <a:solidFill>
+                  <a:srgbClr val="1F2C56"/>
+                </a:solidFill>
+                <a:latin typeface="Source Serif 4"/>
+              </a:rPr>
               <a:t>Reflexionsfragen</a:t>
             </a:r>
           </a:p>
@@ -5761,7 +6351,7 @@
                 </a:solidFill>
                 <a:latin typeface="JetBrains Mono"/>
               </a:rPr>
-              <a:t>LERNZIELE  ·  M07</a:t>
+              <a:t>ÜBERBLICK  ·  M07</a:t>
             </a:r>
           </a:p>
         </p:txBody>
@@ -5839,7 +6429,7 @@
                 </a:solidFill>
                 <a:latin typeface="Source Serif 4"/>
               </a:rPr>
-              <a:t>Was Sie heute mitnehmen</a:t>
+              <a:t>Worum geht es heute</a:t>
             </a:r>
           </a:p>
         </p:txBody>
@@ -5852,8 +6442,8 @@
         </p:nvSpPr>
         <p:spPr>
           <a:xfrm>
-            <a:off x="685800" y="1371600"/>
-            <a:ext cx="10817352" cy="5120640"/>
+            <a:off x="685800" y="1737360"/>
+            <a:ext cx="9720072" cy="4206240"/>
           </a:xfrm>
           <a:prstGeom prst="rect">
             <a:avLst/>
@@ -5867,78 +6457,50 @@
           <a:lstStyle/>
           <a:p>
             <a:pPr>
-              <a:spcBef>
-                <a:spcPts val="800"/>
-              </a:spcBef>
               <a:spcAft>
-                <a:spcPts val="200"/>
+                <a:spcPts val="1200"/>
               </a:spcAft>
             </a:pPr>
             <a:r>
-              <a:rPr sz="1400">
+              <a:rPr sz="1700">
                 <a:solidFill>
                   <a:srgbClr val="3D5466"/>
                 </a:solidFill>
                 <a:latin typeface="Arial"/>
               </a:rPr>
-              <a:t>▸  Heilberufsgruppen nach ihrer rechtlichen Einordnung als Freie Berufe gemäß § 18 EStG differenzieren und von Gewerbebetrieben abgrenzen</a:t>
+              <a:t>Ärzte, Zahnärzte und Apotheker sind gefragte Kunden – aber KV-Abrechnung, Goodwill und Praxisübernahme folgen eigenen Regeln.</a:t>
             </a:r>
           </a:p>
           <a:p>
             <a:pPr>
-              <a:spcBef>
-                <a:spcPts val="800"/>
-              </a:spcBef>
               <a:spcAft>
-                <a:spcPts val="200"/>
+                <a:spcPts val="1200"/>
               </a:spcAft>
             </a:pPr>
             <a:r>
-              <a:rPr sz="1400">
+              <a:rPr sz="1700">
                 <a:solidFill>
                   <a:srgbClr val="3D5466"/>
                 </a:solidFill>
                 <a:latin typeface="Arial"/>
               </a:rPr>
-              <a:t>▸  Eine Einnahmen-Überschuss-Rechnung (EÜR) eines Heilberufe-Kunden auf Schuldendienstfähigkeit analysieren und Besonderheiten gegenüber einer handelsrechtlichen Bilanz erläutern</a:t>
+              <a:t>Sie arbeiten die Besonderheiten der Heilberufe durch und rechnen eine Praxisübernahme-Finanzierung vollständig durch.</a:t>
             </a:r>
           </a:p>
           <a:p>
             <a:pPr>
-              <a:spcBef>
-                <a:spcPts val="800"/>
-              </a:spcBef>
               <a:spcAft>
-                <a:spcPts val="200"/>
+                <a:spcPts val="1200"/>
               </a:spcAft>
             </a:pPr>
             <a:r>
-              <a:rPr sz="1400">
+              <a:rPr sz="1700">
                 <a:solidFill>
                   <a:srgbClr val="3D5466"/>
                 </a:solidFill>
                 <a:latin typeface="Arial"/>
               </a:rPr>
-              <a:t>▸  Den Goodwill einer Arzt- oder Zahnarztpraxis nach der modifizierten Ertragswertmethode (IDW S5) berechnen und eine tragfähige Finanzierungsstruktur ableiten</a:t>
-            </a:r>
-          </a:p>
-          <a:p>
-            <a:pPr>
-              <a:spcBef>
-                <a:spcPts val="800"/>
-              </a:spcBef>
-              <a:spcAft>
-                <a:spcPts val="200"/>
-              </a:spcAft>
-            </a:pPr>
-            <a:r>
-              <a:rPr sz="1400">
-                <a:solidFill>
-                  <a:srgbClr val="3D5466"/>
-                </a:solidFill>
-                <a:latin typeface="Arial"/>
-              </a:rPr>
-              <a:t>▸  Das branchenspezifische Risikoprofil eines Heilberufe-Kunden (Zulassungsrisiken, Regressrisiken, Versorgungswerk-Effekte) bewerten und ein passendes Sicherheitenkonzept empfehlen</a:t>
+              <a:t>Danach beraten Sie Heilberufler fachkundig und beurteilen Übernahmefinanzierungen sicher.</a:t>
             </a:r>
           </a:p>
         </p:txBody>
@@ -6155,7 +6717,7 @@
                 </a:solidFill>
                 <a:latin typeface="JetBrains Mono"/>
               </a:rPr>
-              <a:t>AGENDA  ·  M07</a:t>
+              <a:t>LERNZIELE  ·  M07</a:t>
             </a:r>
           </a:p>
         </p:txBody>
@@ -6233,7 +6795,7 @@
                 </a:solidFill>
                 <a:latin typeface="Source Serif 4"/>
               </a:rPr>
-              <a:t>Agenda</a:t>
+              <a:t>Was Sie heute mitnehmen</a:t>
             </a:r>
           </a:p>
         </p:txBody>
@@ -6246,8 +6808,8 @@
         </p:nvSpPr>
         <p:spPr>
           <a:xfrm>
-            <a:off x="685800" y="1463040"/>
-            <a:ext cx="10817352" cy="4937760"/>
+            <a:off x="685800" y="1371600"/>
+            <a:ext cx="10817352" cy="5120640"/>
           </a:xfrm>
           <a:prstGeom prst="rect">
             <a:avLst/>
@@ -6269,13 +6831,13 @@
               </a:spcAft>
             </a:pPr>
             <a:r>
-              <a:rPr sz="1500">
+              <a:rPr sz="1400">
                 <a:solidFill>
                   <a:srgbClr val="3D5466"/>
                 </a:solidFill>
                 <a:latin typeface="Arial"/>
               </a:rPr>
-              <a:t>01   Theorie-Input 1: Freie Berufe – rechtliche und wirtschaftliche Grundlagen</a:t>
+              <a:t>▸  Heilberufsgruppen nach ihrer rechtlichen Einordnung als Freie Berufe gemäß § 18 EStG differenzieren und von Gewerbebetrieben abgrenzen</a:t>
             </a:r>
           </a:p>
           <a:p>
@@ -6288,13 +6850,13 @@
               </a:spcAft>
             </a:pPr>
             <a:r>
-              <a:rPr sz="1500">
+              <a:rPr sz="1400">
                 <a:solidFill>
                   <a:srgbClr val="3D5466"/>
                 </a:solidFill>
                 <a:latin typeface="Arial"/>
               </a:rPr>
-              <a:t>02   Theorie-Input 2: Praxisbewertung und Finanzierungsstruktur</a:t>
+              <a:t>▸  Eine Einnahmen-Überschuss-Rechnung (EÜR) eines Heilberufe-Kunden auf Schuldendienstfähigkeit analysieren und Besonderheiten gegenüber einer handelsrechtlichen Bilanz erläutern</a:t>
             </a:r>
           </a:p>
           <a:p>
@@ -6307,13 +6869,13 @@
               </a:spcAft>
             </a:pPr>
             <a:r>
-              <a:rPr sz="1500">
+              <a:rPr sz="1400">
                 <a:solidFill>
                   <a:srgbClr val="3D5466"/>
                 </a:solidFill>
                 <a:latin typeface="Arial"/>
               </a:rPr>
-              <a:t>03   Theorie-Input 3: Risikoprofil und Sicherheitenkonzept</a:t>
+              <a:t>▸  Den Goodwill einer Arzt- oder Zahnarztpraxis nach der modifizierten Ertragswertmethode (IDW S5) berechnen und eine tragfähige Finanzierungsstruktur ableiten</a:t>
             </a:r>
           </a:p>
           <a:p>
@@ -6326,51 +6888,13 @@
               </a:spcAft>
             </a:pPr>
             <a:r>
-              <a:rPr sz="1500">
+              <a:rPr sz="1400">
                 <a:solidFill>
                   <a:srgbClr val="3D5466"/>
                 </a:solidFill>
                 <a:latin typeface="Arial"/>
               </a:rPr>
-              <a:t>04   Praxiscase: Dr. Mayer – Zahnarztpraxis-Übernahme in Ravensburg</a:t>
-            </a:r>
-          </a:p>
-          <a:p>
-            <a:pPr>
-              <a:spcBef>
-                <a:spcPts val="800"/>
-              </a:spcBef>
-              <a:spcAft>
-                <a:spcPts val="200"/>
-              </a:spcAft>
-            </a:pPr>
-            <a:r>
-              <a:rPr sz="1500">
-                <a:solidFill>
-                  <a:srgbClr val="3D5466"/>
-                </a:solidFill>
-                <a:latin typeface="Arial"/>
-              </a:rPr>
-              <a:t>05   Checkliste: Heilberufe-Erstgespräch (15 Punkte)</a:t>
-            </a:r>
-          </a:p>
-          <a:p>
-            <a:pPr>
-              <a:spcBef>
-                <a:spcPts val="800"/>
-              </a:spcBef>
-              <a:spcAft>
-                <a:spcPts val="200"/>
-              </a:spcAft>
-            </a:pPr>
-            <a:r>
-              <a:rPr sz="1500">
-                <a:solidFill>
-                  <a:srgbClr val="3D5466"/>
-                </a:solidFill>
-                <a:latin typeface="Arial"/>
-              </a:rPr>
-              <a:t>06   Reflexionsfragen</a:t>
+              <a:t>▸  Das branchenspezifische Risikoprofil eines Heilberufe-Kunden (Zulassungsrisiken, Regressrisiken, Versorgungswerk-Effekte) bewerten und ein passendes Sicherheitenkonzept empfehlen</a:t>
             </a:r>
           </a:p>
         </p:txBody>
@@ -6587,7 +7111,7 @@
                 </a:solidFill>
                 <a:latin typeface="JetBrains Mono"/>
               </a:rPr>
-              <a:t>M07  ·  INHALT</a:t>
+              <a:t>AGENDA  ·  M07</a:t>
             </a:r>
           </a:p>
         </p:txBody>
@@ -6637,57 +7161,14 @@
       </p:sp>
       <p:sp>
         <p:nvSpPr>
-          <p:cNvPr id="6" name="Rectangle 5"/>
-          <p:cNvSpPr/>
+          <p:cNvPr id="6" name="TextBox 5"/>
+          <p:cNvSpPr txBox="1"/>
           <p:nvPr/>
         </p:nvSpPr>
         <p:spPr>
           <a:xfrm>
             <a:off x="685800" y="502920"/>
-            <a:ext cx="36576" cy="658368"/>
-          </a:xfrm>
-          <a:prstGeom prst="rect">
-            <a:avLst/>
-          </a:prstGeom>
-          <a:solidFill>
-            <a:srgbClr val="D9C089"/>
-          </a:solidFill>
-          <a:ln>
-            <a:noFill/>
-          </a:ln>
-        </p:spPr>
-        <p:style>
-          <a:lnRef idx="1">
-            <a:schemeClr val="accent1"/>
-          </a:lnRef>
-          <a:fillRef idx="3">
-            <a:schemeClr val="accent1"/>
-          </a:fillRef>
-          <a:effectRef idx="2">
-            <a:schemeClr val="accent1"/>
-          </a:effectRef>
-          <a:fontRef idx="minor">
-            <a:schemeClr val="lt1"/>
-          </a:fontRef>
-        </p:style>
-        <p:txBody>
-          <a:bodyPr rtlCol="0" anchor="ctr"/>
-          <a:lstStyle/>
-          <a:p>
-            <a:pPr algn="ctr"/>
-          </a:p>
-        </p:txBody>
-      </p:sp>
-      <p:sp>
-        <p:nvSpPr>
-          <p:cNvPr id="7" name="TextBox 6"/>
-          <p:cNvSpPr txBox="1"/>
-          <p:nvPr/>
-        </p:nvSpPr>
-        <p:spPr>
-          <a:xfrm>
-            <a:off x="813816" y="502920"/>
-            <a:ext cx="10634472" cy="685800"/>
+            <a:ext cx="10817352" cy="658368"/>
           </a:xfrm>
           <a:prstGeom prst="rect">
             <a:avLst/>
@@ -6702,27 +7183,27 @@
           <a:p>
             <a:pPr algn="l"/>
             <a:r>
-              <a:rPr sz="2400" b="1" i="0">
+              <a:rPr sz="2600" b="1" i="0">
                 <a:solidFill>
                   <a:srgbClr val="1F2C56"/>
                 </a:solidFill>
                 <a:latin typeface="Source Serif 4"/>
               </a:rPr>
-              <a:t>Theorie-Input 1: Freie Berufe – rechtliche und wirtschaftliche Grundlagen</a:t>
-            </a:r>
-          </a:p>
-        </p:txBody>
-      </p:sp>
-      <p:sp>
-        <p:nvSpPr>
-          <p:cNvPr id="8" name="TextBox 7"/>
+              <a:t>Agenda</a:t>
+            </a:r>
+          </a:p>
+        </p:txBody>
+      </p:sp>
+      <p:sp>
+        <p:nvSpPr>
+          <p:cNvPr id="7" name="TextBox 6"/>
           <p:cNvSpPr txBox="1"/>
           <p:nvPr/>
         </p:nvSpPr>
         <p:spPr>
           <a:xfrm>
-            <a:off x="685800" y="1417320"/>
-            <a:ext cx="10817352" cy="5029200"/>
+            <a:off x="685800" y="1463040"/>
+            <a:ext cx="10817352" cy="4937760"/>
           </a:xfrm>
           <a:prstGeom prst="rect">
             <a:avLst/>
@@ -6737,236 +7218,122 @@
           <a:p>
             <a:pPr>
               <a:spcBef>
-                <a:spcPts val="1000"/>
+                <a:spcPts val="800"/>
               </a:spcBef>
               <a:spcAft>
                 <a:spcPts val="200"/>
               </a:spcAft>
             </a:pPr>
             <a:r>
-              <a:rPr sz="800" b="1">
-                <a:solidFill>
-                  <a:srgbClr val="78808C"/>
-                </a:solidFill>
-                <a:latin typeface="JetBrains Mono"/>
-              </a:rPr>
-              <a:t>ABGRENZUNG: FREIER BERUF VS. GEWERBE</a:t>
+              <a:rPr sz="1500">
+                <a:solidFill>
+                  <a:srgbClr val="3D5466"/>
+                </a:solidFill>
+                <a:latin typeface="Arial"/>
+              </a:rPr>
+              <a:t>01   Theorie-Input 1: Freie Berufe – rechtliche und wirtschaftliche Grundlagen</a:t>
             </a:r>
           </a:p>
           <a:p>
             <a:pPr>
               <a:spcBef>
-                <a:spcPts val="400"/>
+                <a:spcPts val="800"/>
               </a:spcBef>
               <a:spcAft>
                 <a:spcPts val="200"/>
               </a:spcAft>
             </a:pPr>
             <a:r>
-              <a:rPr sz="1200">
+              <a:rPr sz="1500">
                 <a:solidFill>
                   <a:srgbClr val="3D5466"/>
                 </a:solidFill>
                 <a:latin typeface="Arial"/>
               </a:rPr>
-              <a:t>Die praktischen Konsequenzen für die Bankbeziehung:</a:t>
+              <a:t>02   Theorie-Input 2: Praxisbewertung und Finanzierungsstruktur</a:t>
             </a:r>
           </a:p>
           <a:p>
             <a:pPr>
               <a:spcBef>
-                <a:spcPts val="400"/>
+                <a:spcPts val="800"/>
               </a:spcBef>
               <a:spcAft>
                 <a:spcPts val="200"/>
               </a:spcAft>
             </a:pPr>
             <a:r>
-              <a:rPr sz="1200">
+              <a:rPr sz="1500">
                 <a:solidFill>
                   <a:srgbClr val="3D5466"/>
                 </a:solidFill>
                 <a:latin typeface="Arial"/>
               </a:rPr>
-              <a:t>Quellen: § 18 EStG; § 4 Abs. 3 EStG; Gumpert &amp; Kausch (2022 )</a:t>
+              <a:t>03   Theorie-Input 3: Risikoprofil und Sicherheitenkonzept</a:t>
             </a:r>
           </a:p>
           <a:p>
             <a:pPr>
               <a:spcBef>
-                <a:spcPts val="1000"/>
+                <a:spcPts val="800"/>
               </a:spcBef>
               <a:spcAft>
                 <a:spcPts val="200"/>
               </a:spcAft>
             </a:pPr>
             <a:r>
-              <a:rPr sz="800" b="1">
-                <a:solidFill>
-                  <a:srgbClr val="78808C"/>
-                </a:solidFill>
-                <a:latin typeface="JetBrains Mono"/>
-              </a:rPr>
-              <a:t>PRAXISRELEVANZ: EINZELPRAXIS, BERUFSAUSÜBUNGSGEMEINSCHAFT (BAG) UND MVZ IM VERGLEICH</a:t>
+              <a:rPr sz="1500">
+                <a:solidFill>
+                  <a:srgbClr val="3D5466"/>
+                </a:solidFill>
+                <a:latin typeface="Arial"/>
+              </a:rPr>
+              <a:t>04   Praxiscase: Dr. Mayer – Zahnarztpraxis-Übernahme in Ravensburg</a:t>
             </a:r>
           </a:p>
           <a:p>
             <a:pPr>
               <a:spcBef>
-                <a:spcPts val="400"/>
+                <a:spcPts val="800"/>
               </a:spcBef>
               <a:spcAft>
                 <a:spcPts val="200"/>
               </a:spcAft>
             </a:pPr>
             <a:r>
-              <a:rPr sz="1200">
+              <a:rPr sz="1500">
                 <a:solidFill>
                   <a:srgbClr val="3D5466"/>
                 </a:solidFill>
                 <a:latin typeface="Arial"/>
               </a:rPr>
-              <a:t>Die bloße Abgrenzung „Freier Beruf vs. Gewerbe" greift in der Beratungspraxis zu kurz. Entscheidend für die Kreditanalyse ist auch die Organisationsform, in der der Heilberuf ausgeübt wird:</a:t>
+              <a:t>05   Checkliste: Heilberufe-Erstgespräch (15 Punkte)</a:t>
             </a:r>
           </a:p>
           <a:p>
             <a:pPr>
               <a:spcBef>
-                <a:spcPts val="400"/>
+                <a:spcPts val="800"/>
               </a:spcBef>
               <a:spcAft>
                 <a:spcPts val="200"/>
               </a:spcAft>
             </a:pPr>
             <a:r>
-              <a:rPr sz="1200">
+              <a:rPr sz="1500">
                 <a:solidFill>
                   <a:srgbClr val="3D5466"/>
                 </a:solidFill>
                 <a:latin typeface="Arial"/>
               </a:rPr>
-              <a:t>Für den Berater – Daumenregel:</a:t>
-            </a:r>
-          </a:p>
-          <a:p>
-            <a:pPr>
-              <a:spcBef>
-                <a:spcPts val="400"/>
-              </a:spcBef>
-              <a:spcAft>
-                <a:spcPts val="200"/>
-              </a:spcAft>
-            </a:pPr>
-            <a:r>
-              <a:rPr sz="1300">
-                <a:solidFill>
-                  <a:srgbClr val="3D5466"/>
-                </a:solidFill>
-                <a:latin typeface="Arial"/>
-              </a:rPr>
-              <a:t>▸  Einzelpraxis: Standardvorgehen gemäß M07</a:t>
-            </a:r>
-          </a:p>
-          <a:p>
-            <a:pPr>
-              <a:spcBef>
-                <a:spcPts val="400"/>
-              </a:spcBef>
-              <a:spcAft>
-                <a:spcPts val="200"/>
-              </a:spcAft>
-            </a:pPr>
-            <a:r>
-              <a:rPr sz="1300">
-                <a:solidFill>
-                  <a:srgbClr val="3D5466"/>
-                </a:solidFill>
-                <a:latin typeface="Arial"/>
-              </a:rPr>
-              <a:t>▸  BAG mit 2–3 Partnern: immer Gesellschaftsvertrag anfordern, Bonitätsprüfung aller Partner, Regelung bei Ausscheiden eines Partners klären</a:t>
-            </a:r>
-          </a:p>
-          <a:p>
-            <a:pPr>
-              <a:spcBef>
-                <a:spcPts val="400"/>
-              </a:spcBef>
-              <a:spcAft>
-                <a:spcPts val="200"/>
-              </a:spcAft>
-            </a:pPr>
-            <a:r>
-              <a:rPr sz="1300">
-                <a:solidFill>
-                  <a:srgbClr val="3D5466"/>
-                </a:solidFill>
-                <a:latin typeface="Arial"/>
-              </a:rPr>
-              <a:t>▸  MVZ: Spezialisten einbinden (DZ BANK Corporate Finance oder internen gewerblichen Spezialisten) – das ist keine klassische Freiberufler-Finanzierung mehr</a:t>
-            </a:r>
-          </a:p>
-          <a:p>
-            <a:pPr>
-              <a:spcBef>
-                <a:spcPts val="400"/>
-              </a:spcBef>
-              <a:spcAft>
-                <a:spcPts val="200"/>
-              </a:spcAft>
-            </a:pPr>
-            <a:r>
-              <a:rPr sz="1200">
-                <a:solidFill>
-                  <a:srgbClr val="3D5466"/>
-                </a:solidFill>
-                <a:latin typeface="Arial"/>
-              </a:rPr>
-              <a:t>Quelle: Gumpert &amp; Kausch (2022 )</a:t>
-            </a:r>
-          </a:p>
-          <a:p>
-            <a:pPr>
-              <a:spcBef>
-                <a:spcPts val="1000"/>
-              </a:spcBef>
-              <a:spcAft>
-                <a:spcPts val="200"/>
-              </a:spcAft>
-            </a:pPr>
-            <a:r>
-              <a:rPr sz="800" b="1">
-                <a:solidFill>
-                  <a:srgbClr val="78808C"/>
-                </a:solidFill>
-                <a:latin typeface="JetBrains Mono"/>
-              </a:rPr>
-              <a:t>EÜR VS. BILANZ: WAS DER BERATER WISSEN MUSS</a:t>
-            </a:r>
-          </a:p>
-          <a:p>
-            <a:pPr>
-              <a:spcBef>
-                <a:spcPts val="400"/>
-              </a:spcBef>
-              <a:spcAft>
-                <a:spcPts val="200"/>
-              </a:spcAft>
-            </a:pPr>
-            <a:r>
-              <a:rPr sz="1200">
-                <a:solidFill>
-                  <a:srgbClr val="3D5466"/>
-                </a:solidFill>
-                <a:latin typeface="Arial"/>
-              </a:rPr>
-              <a:t>Keine Abgrenzung von Anlagevermögen in der EÜR: Investitionen erscheinen als sofortiger Aufwand oder werden über AfA-Listen abgeschrieben; eine bilanzielle Kapitalstruktur fehlt.</a:t>
-            </a:r>
-          </a:p>
-        </p:txBody>
-      </p:sp>
-      <p:sp>
-        <p:nvSpPr>
-          <p:cNvPr id="9" name="Rectangle 8"/>
+              <a:t>06   Reflexionsfragen</a:t>
+            </a:r>
+          </a:p>
+        </p:txBody>
+      </p:sp>
+      <p:sp>
+        <p:nvSpPr>
+          <p:cNvPr id="8" name="Rectangle 7"/>
           <p:cNvSpPr/>
           <p:nvPr/>
         </p:nvSpPr>
@@ -7009,7 +7376,7 @@
       </p:sp>
       <p:sp>
         <p:nvSpPr>
-          <p:cNvPr id="10" name="TextBox 9"/>
+          <p:cNvPr id="9" name="TextBox 8"/>
           <p:cNvSpPr txBox="1"/>
           <p:nvPr/>
         </p:nvSpPr>
@@ -7297,7 +7664,7 @@
                 </a:solidFill>
                 <a:latin typeface="Source Serif 4"/>
               </a:rPr>
-              <a:t>Theorie-Input 2: Praxisbewertung und Finanzierungsstruktur</a:t>
+              <a:t>Theorie-Input 1: Freie Berufe – rechtliche und wirtschaftliche Grundlagen</a:t>
             </a:r>
           </a:p>
         </p:txBody>
@@ -7339,7 +7706,7 @@
                 </a:solidFill>
                 <a:latin typeface="JetBrains Mono"/>
               </a:rPr>
-              <a:t>PRAXISÜBERNAHME VS. PRAXISGRÜNDUNG</a:t>
+              <a:t>ABGRENZUNG: FREIER BERUF VS. GEWERBE</a:t>
             </a:r>
           </a:p>
           <a:p>
@@ -7358,7 +7725,7 @@
                 </a:solidFill>
                 <a:latin typeface="Arial"/>
               </a:rPr>
-              <a:t>Bewertungsverfahren nach IDW S5:</a:t>
+              <a:t>Die praktischen Konsequenzen für die Bankbeziehung:</a:t>
             </a:r>
           </a:p>
           <a:p>
@@ -7377,7 +7744,26 @@
                 </a:solidFill>
                 <a:latin typeface="Arial"/>
               </a:rPr>
-              <a:t>Substanzwert: Zeitwert aller materiellen Wirtschaftsgüter (Praxiseinrichtung, Medizintechnik, IT, Vorräte). Dieser Anteil ist relativ unproblematisch zu finanzieren und gut beleihbar.</a:t>
+              <a:t>Quellen: § 18 EStG; § 4 Abs. 3 EStG; Gumpert &amp; Kausch (2022 )</a:t>
+            </a:r>
+          </a:p>
+          <a:p>
+            <a:pPr>
+              <a:spcBef>
+                <a:spcPts val="1000"/>
+              </a:spcBef>
+              <a:spcAft>
+                <a:spcPts val="200"/>
+              </a:spcAft>
+            </a:pPr>
+            <a:r>
+              <a:rPr sz="800" b="1">
+                <a:solidFill>
+                  <a:srgbClr val="78808C"/>
+                </a:solidFill>
+                <a:latin typeface="JetBrains Mono"/>
+              </a:rPr>
+              <a:t>PRAXISRELEVANZ: EINZELPRAXIS, BERUFSAUSÜBUNGSGEMEINSCHAFT (BAG) UND MVZ IM VERGLEICH</a:t>
             </a:r>
           </a:p>
           <a:p>
@@ -7396,7 +7782,7 @@
                 </a:solidFill>
                 <a:latin typeface="Arial"/>
               </a:rPr>
-              <a:t>```</a:t>
+              <a:t>Die bloße Abgrenzung „Freier Beruf vs. Gewerbe" greift in der Beratungspraxis zu kurz. Entscheidend für die Kreditanalyse ist auch die Organisationsform, in der der Heilberuf ausgeübt wird:</a:t>
             </a:r>
           </a:p>
           <a:p>
@@ -7415,7 +7801,7 @@
                 </a:solidFill>
                 <a:latin typeface="Arial"/>
               </a:rPr>
-              <a:t>Modifizierte Ertragswertmethode (IDW S5):</a:t>
+              <a:t>Für den Berater – Daumenregel:</a:t>
             </a:r>
           </a:p>
           <a:p>
@@ -7434,7 +7820,7 @@
                 </a:solidFill>
                 <a:latin typeface="Arial"/>
               </a:rPr>
-              <a:t>▸  ./. Risikoabschlag (Zulassungsrisiko, Inhaberabhängigkeit) ca. 20–30 %</a:t>
+              <a:t>▸  Einzelpraxis: Standardvorgehen gemäß M07</a:t>
             </a:r>
           </a:p>
           <a:p>
@@ -7453,7 +7839,7 @@
                 </a:solidFill>
                 <a:latin typeface="Arial"/>
               </a:rPr>
-              <a:t>▸  × Kapitalisierungsfaktor (ca. 2,0–3,5×, je nach Fach/Lage)</a:t>
+              <a:t>▸  BAG mit 2–3 Partnern: immer Gesellschaftsvertrag anfordern, Bonitätsprüfung aller Partner, Regelung bei Ausscheiden eines Partners klären</a:t>
             </a:r>
           </a:p>
           <a:p>
@@ -7466,13 +7852,13 @@
               </a:spcAft>
             </a:pPr>
             <a:r>
-              <a:rPr sz="1200">
+              <a:rPr sz="1300">
                 <a:solidFill>
                   <a:srgbClr val="3D5466"/>
                 </a:solidFill>
                 <a:latin typeface="Arial"/>
               </a:rPr>
-              <a:t>Praxiswert gesamt = Substanzwert + Goodwill</a:t>
+              <a:t>▸  MVZ: Spezialisten einbinden (DZ BANK Corporate Finance oder internen gewerblichen Spezialisten) – das ist keine klassische Freiberufler-Finanzierung mehr</a:t>
             </a:r>
           </a:p>
           <a:p>
@@ -7491,7 +7877,26 @@
                 </a:solidFill>
                 <a:latin typeface="Arial"/>
               </a:rPr>
-              <a:t>```</a:t>
+              <a:t>Quelle: Gumpert &amp; Kausch (2022 )</a:t>
+            </a:r>
+          </a:p>
+          <a:p>
+            <a:pPr>
+              <a:spcBef>
+                <a:spcPts val="1000"/>
+              </a:spcBef>
+              <a:spcAft>
+                <a:spcPts val="200"/>
+              </a:spcAft>
+            </a:pPr>
+            <a:r>
+              <a:rPr sz="800" b="1">
+                <a:solidFill>
+                  <a:srgbClr val="78808C"/>
+                </a:solidFill>
+                <a:latin typeface="JetBrains Mono"/>
+              </a:rPr>
+              <a:t>EÜR VS. BILANZ: WAS DER BERATER WISSEN MUSS</a:t>
             </a:r>
           </a:p>
           <a:p>
@@ -7510,45 +7915,7 @@
                 </a:solidFill>
                 <a:latin typeface="Arial"/>
               </a:rPr>
-              <a:t>Quelle: IDW S5 (2021 ); Frodl (2019 )</a:t>
-            </a:r>
-          </a:p>
-          <a:p>
-            <a:pPr>
-              <a:spcBef>
-                <a:spcPts val="1000"/>
-              </a:spcBef>
-              <a:spcAft>
-                <a:spcPts val="200"/>
-              </a:spcAft>
-            </a:pPr>
-            <a:r>
-              <a:rPr sz="800" b="1">
-                <a:solidFill>
-                  <a:srgbClr val="78808C"/>
-                </a:solidFill>
-                <a:latin typeface="JetBrains Mono"/>
-              </a:rPr>
-              <a:t>TYPISCHE INVESTITIONSANLÄSSE IM ÜBERBLICK</a:t>
-            </a:r>
-          </a:p>
-          <a:p>
-            <a:pPr>
-              <a:spcBef>
-                <a:spcPts val="400"/>
-              </a:spcBef>
-              <a:spcAft>
-                <a:spcPts val="200"/>
-              </a:spcAft>
-            </a:pPr>
-            <a:r>
-              <a:rPr sz="1200">
-                <a:solidFill>
-                  <a:srgbClr val="3D5466"/>
-                </a:solidFill>
-                <a:latin typeface="Arial"/>
-              </a:rPr>
-              <a:t>Medizinische Versorgungszentren (MVZ):</a:t>
+              <a:t>Keine Abgrenzung von Anlagevermögen in der EÜR: Investitionen erscheinen als sofortiger Aufwand oder werden über AfA-Listen abgeschrieben; eine bilanzielle Kapitalstruktur fehlt.</a:t>
             </a:r>
           </a:p>
         </p:txBody>
@@ -7664,7 +8031,7 @@
             <a:avLst/>
           </a:prstGeom>
           <a:solidFill>
-            <a:srgbClr val="FFFFFF"/>
+            <a:srgbClr val="EDEDF3"/>
           </a:solidFill>
           <a:ln>
             <a:noFill/>
@@ -7765,43 +8132,51 @@
                 </a:solidFill>
                 <a:latin typeface="JetBrains Mono"/>
               </a:rPr>
-              <a:t>M07  ·  SCHAUBILD</a:t>
-            </a:r>
-          </a:p>
-        </p:txBody>
-      </p:sp>
-      <p:sp>
-        <p:nvSpPr>
-          <p:cNvPr id="5" name="TextBox 4"/>
-          <p:cNvSpPr txBox="1"/>
-          <p:nvPr/>
-        </p:nvSpPr>
-        <p:spPr>
-          <a:xfrm>
-            <a:off x="685800" y="502920"/>
-            <a:ext cx="10817352" cy="594360"/>
-          </a:xfrm>
-          <a:prstGeom prst="rect">
-            <a:avLst/>
-          </a:prstGeom>
-          <a:noFill/>
-        </p:spPr>
-        <p:txBody>
-          <a:bodyPr wrap="square">
-            <a:spAutoFit/>
-          </a:bodyPr>
-          <a:lstStyle/>
-          <a:p>
-            <a:pPr algn="l"/>
-            <a:r>
-              <a:rPr sz="2000" b="1" i="0">
-                <a:solidFill>
-                  <a:srgbClr val="1F2C56"/>
-                </a:solidFill>
-                <a:latin typeface="Source Serif 4"/>
-              </a:rPr>
-              <a:t>Praxiswert-Ermittlung nach IDW S5</a:t>
-            </a:r>
+              <a:t>M07  ·  INHALT</a:t>
+            </a:r>
+          </a:p>
+        </p:txBody>
+      </p:sp>
+      <p:sp>
+        <p:nvSpPr>
+          <p:cNvPr id="5" name="Rectangle 4"/>
+          <p:cNvSpPr/>
+          <p:nvPr/>
+        </p:nvSpPr>
+        <p:spPr>
+          <a:xfrm>
+            <a:off x="0" y="1234440"/>
+            <a:ext cx="12188952" cy="12700"/>
+          </a:xfrm>
+          <a:prstGeom prst="rect">
+            <a:avLst/>
+          </a:prstGeom>
+          <a:solidFill>
+            <a:srgbClr val="D8DFE4"/>
+          </a:solidFill>
+          <a:ln>
+            <a:noFill/>
+          </a:ln>
+        </p:spPr>
+        <p:style>
+          <a:lnRef idx="1">
+            <a:schemeClr val="accent1"/>
+          </a:lnRef>
+          <a:fillRef idx="3">
+            <a:schemeClr val="accent1"/>
+          </a:fillRef>
+          <a:effectRef idx="2">
+            <a:schemeClr val="accent1"/>
+          </a:effectRef>
+          <a:fontRef idx="minor">
+            <a:schemeClr val="lt1"/>
+          </a:fontRef>
+        </p:style>
+        <p:txBody>
+          <a:bodyPr rtlCol="0" anchor="ctr"/>
+          <a:lstStyle/>
+          <a:p>
+            <a:pPr algn="ctr"/>
           </a:p>
         </p:txBody>
       </p:sp>
@@ -7813,8 +8188,8 @@
         </p:nvSpPr>
         <p:spPr>
           <a:xfrm>
-            <a:off x="685800" y="1143000"/>
-            <a:ext cx="10817352" cy="25400"/>
+            <a:off x="685800" y="502920"/>
+            <a:ext cx="36576" cy="658368"/>
           </a:xfrm>
           <a:prstGeom prst="rect">
             <a:avLst/>
@@ -7848,33 +8223,295 @@
           </a:p>
         </p:txBody>
       </p:sp>
-      <p:pic>
-        <p:nvPicPr>
-          <p:cNvPr id="7" name="Picture 6" descr="image.png"/>
-          <p:cNvPicPr>
-            <a:picLocks noChangeAspect="1"/>
-          </p:cNvPicPr>
-          <p:nvPr/>
-        </p:nvPicPr>
-        <p:blipFill>
-          <a:blip r:embed="rId2"/>
-          <a:stretch>
-            <a:fillRect/>
-          </a:stretch>
-        </p:blipFill>
-        <p:spPr>
-          <a:xfrm>
-            <a:off x="2303489" y="1325880"/>
-            <a:ext cx="7581973" cy="4937760"/>
-          </a:xfrm>
-          <a:prstGeom prst="rect">
-            <a:avLst/>
-          </a:prstGeom>
-        </p:spPr>
-      </p:pic>
-      <p:sp>
-        <p:nvSpPr>
-          <p:cNvPr id="8" name="Rectangle 7"/>
+      <p:sp>
+        <p:nvSpPr>
+          <p:cNvPr id="7" name="TextBox 6"/>
+          <p:cNvSpPr txBox="1"/>
+          <p:nvPr/>
+        </p:nvSpPr>
+        <p:spPr>
+          <a:xfrm>
+            <a:off x="813816" y="502920"/>
+            <a:ext cx="10634472" cy="685800"/>
+          </a:xfrm>
+          <a:prstGeom prst="rect">
+            <a:avLst/>
+          </a:prstGeom>
+          <a:noFill/>
+        </p:spPr>
+        <p:txBody>
+          <a:bodyPr wrap="square">
+            <a:spAutoFit/>
+          </a:bodyPr>
+          <a:lstStyle/>
+          <a:p>
+            <a:pPr algn="l"/>
+            <a:r>
+              <a:rPr sz="2400" b="1" i="0">
+                <a:solidFill>
+                  <a:srgbClr val="1F2C56"/>
+                </a:solidFill>
+                <a:latin typeface="Source Serif 4"/>
+              </a:rPr>
+              <a:t>Theorie-Input 2: Praxisbewertung und Finanzierungsstruktur</a:t>
+            </a:r>
+          </a:p>
+        </p:txBody>
+      </p:sp>
+      <p:sp>
+        <p:nvSpPr>
+          <p:cNvPr id="8" name="TextBox 7"/>
+          <p:cNvSpPr txBox="1"/>
+          <p:nvPr/>
+        </p:nvSpPr>
+        <p:spPr>
+          <a:xfrm>
+            <a:off x="685800" y="1417320"/>
+            <a:ext cx="10817352" cy="5029200"/>
+          </a:xfrm>
+          <a:prstGeom prst="rect">
+            <a:avLst/>
+          </a:prstGeom>
+          <a:noFill/>
+        </p:spPr>
+        <p:txBody>
+          <a:bodyPr wrap="square">
+            <a:spAutoFit/>
+          </a:bodyPr>
+          <a:lstStyle/>
+          <a:p>
+            <a:pPr>
+              <a:spcBef>
+                <a:spcPts val="1000"/>
+              </a:spcBef>
+              <a:spcAft>
+                <a:spcPts val="200"/>
+              </a:spcAft>
+            </a:pPr>
+            <a:r>
+              <a:rPr sz="800" b="1">
+                <a:solidFill>
+                  <a:srgbClr val="78808C"/>
+                </a:solidFill>
+                <a:latin typeface="JetBrains Mono"/>
+              </a:rPr>
+              <a:t>PRAXISÜBERNAHME VS. PRAXISGRÜNDUNG</a:t>
+            </a:r>
+          </a:p>
+          <a:p>
+            <a:pPr>
+              <a:spcBef>
+                <a:spcPts val="400"/>
+              </a:spcBef>
+              <a:spcAft>
+                <a:spcPts val="200"/>
+              </a:spcAft>
+            </a:pPr>
+            <a:r>
+              <a:rPr sz="1200">
+                <a:solidFill>
+                  <a:srgbClr val="3D5466"/>
+                </a:solidFill>
+                <a:latin typeface="Arial"/>
+              </a:rPr>
+              <a:t>Bewertungsverfahren nach IDW S5:</a:t>
+            </a:r>
+          </a:p>
+          <a:p>
+            <a:pPr>
+              <a:spcBef>
+                <a:spcPts val="400"/>
+              </a:spcBef>
+              <a:spcAft>
+                <a:spcPts val="200"/>
+              </a:spcAft>
+            </a:pPr>
+            <a:r>
+              <a:rPr sz="1200">
+                <a:solidFill>
+                  <a:srgbClr val="3D5466"/>
+                </a:solidFill>
+                <a:latin typeface="Arial"/>
+              </a:rPr>
+              <a:t>Substanzwert: Zeitwert aller materiellen Wirtschaftsgüter (Praxiseinrichtung, Medizintechnik, IT, Vorräte). Dieser Anteil ist relativ unproblematisch zu finanzieren und gut beleihbar.</a:t>
+            </a:r>
+          </a:p>
+          <a:p>
+            <a:pPr>
+              <a:spcBef>
+                <a:spcPts val="400"/>
+              </a:spcBef>
+              <a:spcAft>
+                <a:spcPts val="200"/>
+              </a:spcAft>
+            </a:pPr>
+            <a:r>
+              <a:rPr sz="1200">
+                <a:solidFill>
+                  <a:srgbClr val="3D5466"/>
+                </a:solidFill>
+                <a:latin typeface="Arial"/>
+              </a:rPr>
+              <a:t>```</a:t>
+            </a:r>
+          </a:p>
+          <a:p>
+            <a:pPr>
+              <a:spcBef>
+                <a:spcPts val="400"/>
+              </a:spcBef>
+              <a:spcAft>
+                <a:spcPts val="200"/>
+              </a:spcAft>
+            </a:pPr>
+            <a:r>
+              <a:rPr sz="1200">
+                <a:solidFill>
+                  <a:srgbClr val="3D5466"/>
+                </a:solidFill>
+                <a:latin typeface="Arial"/>
+              </a:rPr>
+              <a:t>Modifizierte Ertragswertmethode (IDW S5):</a:t>
+            </a:r>
+          </a:p>
+          <a:p>
+            <a:pPr>
+              <a:spcBef>
+                <a:spcPts val="400"/>
+              </a:spcBef>
+              <a:spcAft>
+                <a:spcPts val="200"/>
+              </a:spcAft>
+            </a:pPr>
+            <a:r>
+              <a:rPr sz="1300">
+                <a:solidFill>
+                  <a:srgbClr val="3D5466"/>
+                </a:solidFill>
+                <a:latin typeface="Arial"/>
+              </a:rPr>
+              <a:t>▸  ./. Risikoabschlag (Zulassungsrisiko, Inhaberabhängigkeit) ca. 20–30 %</a:t>
+            </a:r>
+          </a:p>
+          <a:p>
+            <a:pPr>
+              <a:spcBef>
+                <a:spcPts val="400"/>
+              </a:spcBef>
+              <a:spcAft>
+                <a:spcPts val="200"/>
+              </a:spcAft>
+            </a:pPr>
+            <a:r>
+              <a:rPr sz="1300">
+                <a:solidFill>
+                  <a:srgbClr val="3D5466"/>
+                </a:solidFill>
+                <a:latin typeface="Arial"/>
+              </a:rPr>
+              <a:t>▸  × Kapitalisierungsfaktor (ca. 2,0–3,5×, je nach Fach/Lage)</a:t>
+            </a:r>
+          </a:p>
+          <a:p>
+            <a:pPr>
+              <a:spcBef>
+                <a:spcPts val="400"/>
+              </a:spcBef>
+              <a:spcAft>
+                <a:spcPts val="200"/>
+              </a:spcAft>
+            </a:pPr>
+            <a:r>
+              <a:rPr sz="1200">
+                <a:solidFill>
+                  <a:srgbClr val="3D5466"/>
+                </a:solidFill>
+                <a:latin typeface="Arial"/>
+              </a:rPr>
+              <a:t>Praxiswert gesamt = Substanzwert + Goodwill</a:t>
+            </a:r>
+          </a:p>
+          <a:p>
+            <a:pPr>
+              <a:spcBef>
+                <a:spcPts val="400"/>
+              </a:spcBef>
+              <a:spcAft>
+                <a:spcPts val="200"/>
+              </a:spcAft>
+            </a:pPr>
+            <a:r>
+              <a:rPr sz="1200">
+                <a:solidFill>
+                  <a:srgbClr val="3D5466"/>
+                </a:solidFill>
+                <a:latin typeface="Arial"/>
+              </a:rPr>
+              <a:t>```</a:t>
+            </a:r>
+          </a:p>
+          <a:p>
+            <a:pPr>
+              <a:spcBef>
+                <a:spcPts val="400"/>
+              </a:spcBef>
+              <a:spcAft>
+                <a:spcPts val="200"/>
+              </a:spcAft>
+            </a:pPr>
+            <a:r>
+              <a:rPr sz="1200">
+                <a:solidFill>
+                  <a:srgbClr val="3D5466"/>
+                </a:solidFill>
+                <a:latin typeface="Arial"/>
+              </a:rPr>
+              <a:t>Quelle: IDW S5 (2021 ); Frodl (2019 )</a:t>
+            </a:r>
+          </a:p>
+          <a:p>
+            <a:pPr>
+              <a:spcBef>
+                <a:spcPts val="1000"/>
+              </a:spcBef>
+              <a:spcAft>
+                <a:spcPts val="200"/>
+              </a:spcAft>
+            </a:pPr>
+            <a:r>
+              <a:rPr sz="800" b="1">
+                <a:solidFill>
+                  <a:srgbClr val="78808C"/>
+                </a:solidFill>
+                <a:latin typeface="JetBrains Mono"/>
+              </a:rPr>
+              <a:t>TYPISCHE INVESTITIONSANLÄSSE IM ÜBERBLICK</a:t>
+            </a:r>
+          </a:p>
+          <a:p>
+            <a:pPr>
+              <a:spcBef>
+                <a:spcPts val="400"/>
+              </a:spcBef>
+              <a:spcAft>
+                <a:spcPts val="200"/>
+              </a:spcAft>
+            </a:pPr>
+            <a:r>
+              <a:rPr sz="1200">
+                <a:solidFill>
+                  <a:srgbClr val="3D5466"/>
+                </a:solidFill>
+                <a:latin typeface="Arial"/>
+              </a:rPr>
+              <a:t>Medizinische Versorgungszentren (MVZ):</a:t>
+            </a:r>
+          </a:p>
+        </p:txBody>
+      </p:sp>
+      <p:sp>
+        <p:nvSpPr>
+          <p:cNvPr id="9" name="Rectangle 8"/>
           <p:cNvSpPr/>
           <p:nvPr/>
         </p:nvSpPr>
@@ -7917,7 +8554,7 @@
       </p:sp>
       <p:sp>
         <p:nvSpPr>
-          <p:cNvPr id="9" name="TextBox 8"/>
+          <p:cNvPr id="10" name="TextBox 9"/>
           <p:cNvSpPr txBox="1"/>
           <p:nvPr/>
         </p:nvSpPr>
@@ -7946,41 +8583,6 @@
                 <a:latin typeface="JetBrains Mono"/>
               </a:rPr>
               <a:t>Benedikt Zoller Coaching  ·  FKB Campus  ·  M07</a:t>
-            </a:r>
-          </a:p>
-        </p:txBody>
-      </p:sp>
-      <p:sp>
-        <p:nvSpPr>
-          <p:cNvPr id="10" name="TextBox 9"/>
-          <p:cNvSpPr txBox="1"/>
-          <p:nvPr/>
-        </p:nvSpPr>
-        <p:spPr>
-          <a:xfrm>
-            <a:off x="7176211" y="6583680"/>
-            <a:ext cx="4326940" cy="256032"/>
-          </a:xfrm>
-          <a:prstGeom prst="rect">
-            <a:avLst/>
-          </a:prstGeom>
-          <a:noFill/>
-        </p:spPr>
-        <p:txBody>
-          <a:bodyPr wrap="none">
-            <a:spAutoFit/>
-          </a:bodyPr>
-          <a:lstStyle/>
-          <a:p>
-            <a:pPr algn="r"/>
-            <a:r>
-              <a:rPr sz="700">
-                <a:solidFill>
-                  <a:srgbClr val="A0B4D2"/>
-                </a:solidFill>
-                <a:latin typeface="JetBrains Mono"/>
-              </a:rPr>
-              <a:t>Schaubild</a:t>
             </a:r>
           </a:p>
         </p:txBody>
@@ -8018,7 +8620,7 @@
             <a:avLst/>
           </a:prstGeom>
           <a:solidFill>
-            <a:srgbClr val="EDEDF3"/>
+            <a:srgbClr val="FFFFFF"/>
           </a:solidFill>
           <a:ln>
             <a:noFill/>
@@ -8119,51 +8721,43 @@
                 </a:solidFill>
                 <a:latin typeface="JetBrains Mono"/>
               </a:rPr>
-              <a:t>M07  ·  INHALT</a:t>
-            </a:r>
-          </a:p>
-        </p:txBody>
-      </p:sp>
-      <p:sp>
-        <p:nvSpPr>
-          <p:cNvPr id="5" name="Rectangle 4"/>
-          <p:cNvSpPr/>
-          <p:nvPr/>
-        </p:nvSpPr>
-        <p:spPr>
-          <a:xfrm>
-            <a:off x="0" y="1234440"/>
-            <a:ext cx="12188952" cy="12700"/>
-          </a:xfrm>
-          <a:prstGeom prst="rect">
-            <a:avLst/>
-          </a:prstGeom>
-          <a:solidFill>
-            <a:srgbClr val="D8DFE4"/>
-          </a:solidFill>
-          <a:ln>
-            <a:noFill/>
-          </a:ln>
-        </p:spPr>
-        <p:style>
-          <a:lnRef idx="1">
-            <a:schemeClr val="accent1"/>
-          </a:lnRef>
-          <a:fillRef idx="3">
-            <a:schemeClr val="accent1"/>
-          </a:fillRef>
-          <a:effectRef idx="2">
-            <a:schemeClr val="accent1"/>
-          </a:effectRef>
-          <a:fontRef idx="minor">
-            <a:schemeClr val="lt1"/>
-          </a:fontRef>
-        </p:style>
-        <p:txBody>
-          <a:bodyPr rtlCol="0" anchor="ctr"/>
-          <a:lstStyle/>
-          <a:p>
-            <a:pPr algn="ctr"/>
+              <a:t>M07  ·  SCHAUBILD</a:t>
+            </a:r>
+          </a:p>
+        </p:txBody>
+      </p:sp>
+      <p:sp>
+        <p:nvSpPr>
+          <p:cNvPr id="5" name="TextBox 4"/>
+          <p:cNvSpPr txBox="1"/>
+          <p:nvPr/>
+        </p:nvSpPr>
+        <p:spPr>
+          <a:xfrm>
+            <a:off x="685800" y="502920"/>
+            <a:ext cx="10817352" cy="594360"/>
+          </a:xfrm>
+          <a:prstGeom prst="rect">
+            <a:avLst/>
+          </a:prstGeom>
+          <a:noFill/>
+        </p:spPr>
+        <p:txBody>
+          <a:bodyPr wrap="square">
+            <a:spAutoFit/>
+          </a:bodyPr>
+          <a:lstStyle/>
+          <a:p>
+            <a:pPr algn="l"/>
+            <a:r>
+              <a:rPr sz="2000" b="1" i="0">
+                <a:solidFill>
+                  <a:srgbClr val="1F2C56"/>
+                </a:solidFill>
+                <a:latin typeface="Source Serif 4"/>
+              </a:rPr>
+              <a:t>Praxiswert-Ermittlung nach IDW S5</a:t>
+            </a:r>
           </a:p>
         </p:txBody>
       </p:sp>
@@ -8175,8 +8769,8 @@
         </p:nvSpPr>
         <p:spPr>
           <a:xfrm>
-            <a:off x="685800" y="502920"/>
-            <a:ext cx="36576" cy="658368"/>
+            <a:off x="685800" y="1143000"/>
+            <a:ext cx="10817352" cy="25400"/>
           </a:xfrm>
           <a:prstGeom prst="rect">
             <a:avLst/>
@@ -8210,295 +8804,33 @@
           </a:p>
         </p:txBody>
       </p:sp>
-      <p:sp>
-        <p:nvSpPr>
-          <p:cNvPr id="7" name="TextBox 6"/>
-          <p:cNvSpPr txBox="1"/>
-          <p:nvPr/>
-        </p:nvSpPr>
-        <p:spPr>
-          <a:xfrm>
-            <a:off x="813816" y="502920"/>
-            <a:ext cx="10634472" cy="685800"/>
-          </a:xfrm>
-          <a:prstGeom prst="rect">
-            <a:avLst/>
-          </a:prstGeom>
-          <a:noFill/>
-        </p:spPr>
-        <p:txBody>
-          <a:bodyPr wrap="square">
-            <a:spAutoFit/>
-          </a:bodyPr>
-          <a:lstStyle/>
-          <a:p>
-            <a:pPr algn="l"/>
-            <a:r>
-              <a:rPr sz="2400" b="1" i="0">
-                <a:solidFill>
-                  <a:srgbClr val="1F2C56"/>
-                </a:solidFill>
-                <a:latin typeface="Source Serif 4"/>
-              </a:rPr>
-              <a:t>Theorie-Input 3: Risikoprofil und Sicherheitenkonzept</a:t>
-            </a:r>
-          </a:p>
-        </p:txBody>
-      </p:sp>
-      <p:sp>
-        <p:nvSpPr>
-          <p:cNvPr id="8" name="TextBox 7"/>
-          <p:cNvSpPr txBox="1"/>
-          <p:nvPr/>
-        </p:nvSpPr>
-        <p:spPr>
-          <a:xfrm>
-            <a:off x="685800" y="1417320"/>
-            <a:ext cx="10817352" cy="5029200"/>
-          </a:xfrm>
-          <a:prstGeom prst="rect">
-            <a:avLst/>
-          </a:prstGeom>
-          <a:noFill/>
-        </p:spPr>
-        <p:txBody>
-          <a:bodyPr wrap="square">
-            <a:spAutoFit/>
-          </a:bodyPr>
-          <a:lstStyle/>
-          <a:p>
-            <a:pPr>
-              <a:spcBef>
-                <a:spcPts val="1000"/>
-              </a:spcBef>
-              <a:spcAft>
-                <a:spcPts val="200"/>
-              </a:spcAft>
-            </a:pPr>
-            <a:r>
-              <a:rPr sz="800" b="1">
-                <a:solidFill>
-                  <a:srgbClr val="78808C"/>
-                </a:solidFill>
-                <a:latin typeface="JetBrains Mono"/>
-              </a:rPr>
-              <a:t>SPEZIFISCHE RISIKEN BEI HEILBERUFE-KUNDEN</a:t>
-            </a:r>
-          </a:p>
-          <a:p>
-            <a:pPr>
-              <a:spcBef>
-                <a:spcPts val="400"/>
-              </a:spcBef>
-              <a:spcAft>
-                <a:spcPts val="200"/>
-              </a:spcAft>
-            </a:pPr>
-            <a:r>
-              <a:rPr sz="1200">
-                <a:solidFill>
-                  <a:srgbClr val="3D5466"/>
-                </a:solidFill>
-                <a:latin typeface="Arial"/>
-              </a:rPr>
-              <a:t>Zulassungsrisiko:</a:t>
-            </a:r>
-          </a:p>
-          <a:p>
-            <a:pPr>
-              <a:spcBef>
-                <a:spcPts val="400"/>
-              </a:spcBef>
-              <a:spcAft>
-                <a:spcPts val="200"/>
-              </a:spcAft>
-            </a:pPr>
-            <a:r>
-              <a:rPr sz="1200">
-                <a:solidFill>
-                  <a:srgbClr val="3D5466"/>
-                </a:solidFill>
-                <a:latin typeface="Arial"/>
-              </a:rPr>
-              <a:t>Kassenarztzulassung und ihre Übertragbarkeit in der Nachfolge:</a:t>
-            </a:r>
-          </a:p>
-          <a:p>
-            <a:pPr>
-              <a:spcBef>
-                <a:spcPts val="400"/>
-              </a:spcBef>
-              <a:spcAft>
-                <a:spcPts val="200"/>
-              </a:spcAft>
-            </a:pPr>
-            <a:r>
-              <a:rPr sz="1200">
-                <a:solidFill>
-                  <a:srgbClr val="3D5466"/>
-                </a:solidFill>
-                <a:latin typeface="Arial"/>
-              </a:rPr>
-              <a:t>Regressrisiko:</a:t>
-            </a:r>
-          </a:p>
-          <a:p>
-            <a:pPr>
-              <a:spcBef>
-                <a:spcPts val="400"/>
-              </a:spcBef>
-              <a:spcAft>
-                <a:spcPts val="200"/>
-              </a:spcAft>
-            </a:pPr>
-            <a:r>
-              <a:rPr sz="1200">
-                <a:solidFill>
-                  <a:srgbClr val="3D5466"/>
-                </a:solidFill>
-                <a:latin typeface="Arial"/>
-              </a:rPr>
-              <a:t>Inhaberabhängigkeit:</a:t>
-            </a:r>
-          </a:p>
-          <a:p>
-            <a:pPr>
-              <a:spcBef>
-                <a:spcPts val="400"/>
-              </a:spcBef>
-              <a:spcAft>
-                <a:spcPts val="200"/>
-              </a:spcAft>
-            </a:pPr>
-            <a:r>
-              <a:rPr sz="1200">
-                <a:solidFill>
-                  <a:srgbClr val="3D5466"/>
-                </a:solidFill>
-                <a:latin typeface="Arial"/>
-              </a:rPr>
-              <a:t>Versorgungswerk statt gesetzliche Rentenversicherung:</a:t>
-            </a:r>
-          </a:p>
-          <a:p>
-            <a:pPr>
-              <a:spcBef>
-                <a:spcPts val="400"/>
-              </a:spcBef>
-              <a:spcAft>
-                <a:spcPts val="200"/>
-              </a:spcAft>
-            </a:pPr>
-            <a:r>
-              <a:rPr sz="1200">
-                <a:solidFill>
-                  <a:srgbClr val="3D5466"/>
-                </a:solidFill>
-                <a:latin typeface="Arial"/>
-              </a:rPr>
-              <a:t>Strukturrisiko MVZ-Konsolidierung:</a:t>
-            </a:r>
-          </a:p>
-          <a:p>
-            <a:pPr>
-              <a:spcBef>
-                <a:spcPts val="1000"/>
-              </a:spcBef>
-              <a:spcAft>
-                <a:spcPts val="200"/>
-              </a:spcAft>
-            </a:pPr>
-            <a:r>
-              <a:rPr sz="800" b="1">
-                <a:solidFill>
-                  <a:srgbClr val="78808C"/>
-                </a:solidFill>
-                <a:latin typeface="JetBrains Mono"/>
-              </a:rPr>
-              <a:t>SICHERHEITENKONZEPT BEI HEILBERUFE-FINANZIERUNGEN</a:t>
-            </a:r>
-          </a:p>
-          <a:p>
-            <a:pPr>
-              <a:spcBef>
-                <a:spcPts val="400"/>
-              </a:spcBef>
-              <a:spcAft>
-                <a:spcPts val="200"/>
-              </a:spcAft>
-            </a:pPr>
-            <a:r>
-              <a:rPr sz="1200">
-                <a:solidFill>
-                  <a:srgbClr val="3D5466"/>
-                </a:solidFill>
-                <a:latin typeface="Arial"/>
-              </a:rPr>
-              <a:t>§ 18 KWG (Offenlegungspflicht ab 750.000 EUR Kreditbetrag) ist zu beachten. Die gesamtschuldnerische Bonitätsanalyse bei Praxisübernahmen folgt MaRisk BTO 1.2.1 .</a:t>
-            </a:r>
-          </a:p>
-          <a:p>
-            <a:pPr>
-              <a:spcBef>
-                <a:spcPts val="1000"/>
-              </a:spcBef>
-              <a:spcAft>
-                <a:spcPts val="200"/>
-              </a:spcAft>
-            </a:pPr>
-            <a:r>
-              <a:rPr sz="800" b="1">
-                <a:solidFill>
-                  <a:srgbClr val="78808C"/>
-                </a:solidFill>
-                <a:latin typeface="JetBrains Mono"/>
-              </a:rPr>
-              <a:t>VERBUNDPARTNER SCHWÄBISCH HALL: PRAXISIMMOBILIEN UND TILGUNGSAUSSETZUNGSMODELL</a:t>
-            </a:r>
-          </a:p>
-          <a:p>
-            <a:pPr>
-              <a:spcBef>
-                <a:spcPts val="400"/>
-              </a:spcBef>
-              <a:spcAft>
-                <a:spcPts val="200"/>
-              </a:spcAft>
-            </a:pPr>
-            <a:r>
-              <a:rPr sz="1200">
-                <a:solidFill>
-                  <a:srgbClr val="3D5466"/>
-                </a:solidFill>
-                <a:latin typeface="Arial"/>
-              </a:rPr>
-              <a:t>Das Tilgungsaussetzungsmodell (Vorfinanzierung mit Bausparvertrag):</a:t>
-            </a:r>
-          </a:p>
-          <a:p>
-            <a:pPr>
-              <a:spcBef>
-                <a:spcPts val="400"/>
-              </a:spcBef>
-              <a:spcAft>
-                <a:spcPts val="200"/>
-              </a:spcAft>
-            </a:pPr>
-            <a:r>
-              <a:rPr sz="1200">
-                <a:solidFill>
-                  <a:srgbClr val="3D5466"/>
-                </a:solidFill>
-                <a:latin typeface="Arial"/>
-              </a:rPr>
-              <a:t>Vorteile für den Kunden:</a:t>
-            </a:r>
-          </a:p>
-        </p:txBody>
-      </p:sp>
-      <p:sp>
-        <p:nvSpPr>
-          <p:cNvPr id="9" name="Rectangle 8"/>
+      <p:pic>
+        <p:nvPicPr>
+          <p:cNvPr id="7" name="Picture 6" descr="image.png"/>
+          <p:cNvPicPr>
+            <a:picLocks noChangeAspect="1"/>
+          </p:cNvPicPr>
+          <p:nvPr/>
+        </p:nvPicPr>
+        <p:blipFill>
+          <a:blip r:embed="rId2"/>
+          <a:stretch>
+            <a:fillRect/>
+          </a:stretch>
+        </p:blipFill>
+        <p:spPr>
+          <a:xfrm>
+            <a:off x="2303489" y="1325880"/>
+            <a:ext cx="7581973" cy="4937760"/>
+          </a:xfrm>
+          <a:prstGeom prst="rect">
+            <a:avLst/>
+          </a:prstGeom>
+        </p:spPr>
+      </p:pic>
+      <p:sp>
+        <p:nvSpPr>
+          <p:cNvPr id="8" name="Rectangle 7"/>
           <p:cNvSpPr/>
           <p:nvPr/>
         </p:nvSpPr>
@@ -8541,7 +8873,7 @@
       </p:sp>
       <p:sp>
         <p:nvSpPr>
-          <p:cNvPr id="10" name="TextBox 9"/>
+          <p:cNvPr id="9" name="TextBox 8"/>
           <p:cNvSpPr txBox="1"/>
           <p:nvPr/>
         </p:nvSpPr>
@@ -8570,6 +8902,41 @@
                 <a:latin typeface="JetBrains Mono"/>
               </a:rPr>
               <a:t>Benedikt Zoller Coaching  ·  FKB Campus  ·  M07</a:t>
+            </a:r>
+          </a:p>
+        </p:txBody>
+      </p:sp>
+      <p:sp>
+        <p:nvSpPr>
+          <p:cNvPr id="10" name="TextBox 9"/>
+          <p:cNvSpPr txBox="1"/>
+          <p:nvPr/>
+        </p:nvSpPr>
+        <p:spPr>
+          <a:xfrm>
+            <a:off x="7176211" y="6583680"/>
+            <a:ext cx="4326940" cy="256032"/>
+          </a:xfrm>
+          <a:prstGeom prst="rect">
+            <a:avLst/>
+          </a:prstGeom>
+          <a:noFill/>
+        </p:spPr>
+        <p:txBody>
+          <a:bodyPr wrap="none">
+            <a:spAutoFit/>
+          </a:bodyPr>
+          <a:lstStyle/>
+          <a:p>
+            <a:pPr algn="r"/>
+            <a:r>
+              <a:rPr sz="700">
+                <a:solidFill>
+                  <a:srgbClr val="A0B4D2"/>
+                </a:solidFill>
+                <a:latin typeface="JetBrains Mono"/>
+              </a:rPr>
+              <a:t>Schaubild</a:t>
             </a:r>
           </a:p>
         </p:txBody>
@@ -8607,7 +8974,7 @@
             <a:avLst/>
           </a:prstGeom>
           <a:solidFill>
-            <a:srgbClr val="FFFFFF"/>
+            <a:srgbClr val="EDEDF3"/>
           </a:solidFill>
           <a:ln>
             <a:noFill/>
@@ -8708,43 +9075,51 @@
                 </a:solidFill>
                 <a:latin typeface="JetBrains Mono"/>
               </a:rPr>
-              <a:t>M07  ·  SCHAUBILD</a:t>
-            </a:r>
-          </a:p>
-        </p:txBody>
-      </p:sp>
-      <p:sp>
-        <p:nvSpPr>
-          <p:cNvPr id="5" name="TextBox 4"/>
-          <p:cNvSpPr txBox="1"/>
-          <p:nvPr/>
-        </p:nvSpPr>
-        <p:spPr>
-          <a:xfrm>
-            <a:off x="685800" y="502920"/>
-            <a:ext cx="10817352" cy="594360"/>
-          </a:xfrm>
-          <a:prstGeom prst="rect">
-            <a:avLst/>
-          </a:prstGeom>
-          <a:noFill/>
-        </p:spPr>
-        <p:txBody>
-          <a:bodyPr wrap="square">
-            <a:spAutoFit/>
-          </a:bodyPr>
-          <a:lstStyle/>
-          <a:p>
-            <a:pPr algn="l"/>
-            <a:r>
-              <a:rPr sz="2000" b="1" i="0">
-                <a:solidFill>
-                  <a:srgbClr val="1F2C56"/>
-                </a:solidFill>
-                <a:latin typeface="Source Serif 4"/>
-              </a:rPr>
-              <a:t>Handlungsempfehlung Heilberufe</a:t>
-            </a:r>
+              <a:t>M07  ·  INHALT</a:t>
+            </a:r>
+          </a:p>
+        </p:txBody>
+      </p:sp>
+      <p:sp>
+        <p:nvSpPr>
+          <p:cNvPr id="5" name="Rectangle 4"/>
+          <p:cNvSpPr/>
+          <p:nvPr/>
+        </p:nvSpPr>
+        <p:spPr>
+          <a:xfrm>
+            <a:off x="0" y="1234440"/>
+            <a:ext cx="12188952" cy="12700"/>
+          </a:xfrm>
+          <a:prstGeom prst="rect">
+            <a:avLst/>
+          </a:prstGeom>
+          <a:solidFill>
+            <a:srgbClr val="D8DFE4"/>
+          </a:solidFill>
+          <a:ln>
+            <a:noFill/>
+          </a:ln>
+        </p:spPr>
+        <p:style>
+          <a:lnRef idx="1">
+            <a:schemeClr val="accent1"/>
+          </a:lnRef>
+          <a:fillRef idx="3">
+            <a:schemeClr val="accent1"/>
+          </a:fillRef>
+          <a:effectRef idx="2">
+            <a:schemeClr val="accent1"/>
+          </a:effectRef>
+          <a:fontRef idx="minor">
+            <a:schemeClr val="lt1"/>
+          </a:fontRef>
+        </p:style>
+        <p:txBody>
+          <a:bodyPr rtlCol="0" anchor="ctr"/>
+          <a:lstStyle/>
+          <a:p>
+            <a:pPr algn="ctr"/>
           </a:p>
         </p:txBody>
       </p:sp>
@@ -8756,8 +9131,8 @@
         </p:nvSpPr>
         <p:spPr>
           <a:xfrm>
-            <a:off x="685800" y="1143000"/>
-            <a:ext cx="10817352" cy="25400"/>
+            <a:off x="685800" y="502920"/>
+            <a:ext cx="36576" cy="658368"/>
           </a:xfrm>
           <a:prstGeom prst="rect">
             <a:avLst/>
@@ -8791,33 +9166,295 @@
           </a:p>
         </p:txBody>
       </p:sp>
-      <p:pic>
-        <p:nvPicPr>
-          <p:cNvPr id="7" name="Picture 6" descr="image.png"/>
-          <p:cNvPicPr>
-            <a:picLocks noChangeAspect="1"/>
-          </p:cNvPicPr>
-          <p:nvPr/>
-        </p:nvPicPr>
-        <p:blipFill>
-          <a:blip r:embed="rId2"/>
-          <a:stretch>
-            <a:fillRect/>
-          </a:stretch>
-        </p:blipFill>
-        <p:spPr>
-          <a:xfrm>
-            <a:off x="2303489" y="1325880"/>
-            <a:ext cx="7581973" cy="4937760"/>
-          </a:xfrm>
-          <a:prstGeom prst="rect">
-            <a:avLst/>
-          </a:prstGeom>
-        </p:spPr>
-      </p:pic>
-      <p:sp>
-        <p:nvSpPr>
-          <p:cNvPr id="8" name="Rectangle 7"/>
+      <p:sp>
+        <p:nvSpPr>
+          <p:cNvPr id="7" name="TextBox 6"/>
+          <p:cNvSpPr txBox="1"/>
+          <p:nvPr/>
+        </p:nvSpPr>
+        <p:spPr>
+          <a:xfrm>
+            <a:off x="813816" y="502920"/>
+            <a:ext cx="10634472" cy="685800"/>
+          </a:xfrm>
+          <a:prstGeom prst="rect">
+            <a:avLst/>
+          </a:prstGeom>
+          <a:noFill/>
+        </p:spPr>
+        <p:txBody>
+          <a:bodyPr wrap="square">
+            <a:spAutoFit/>
+          </a:bodyPr>
+          <a:lstStyle/>
+          <a:p>
+            <a:pPr algn="l"/>
+            <a:r>
+              <a:rPr sz="2400" b="1" i="0">
+                <a:solidFill>
+                  <a:srgbClr val="1F2C56"/>
+                </a:solidFill>
+                <a:latin typeface="Source Serif 4"/>
+              </a:rPr>
+              <a:t>Theorie-Input 3: Risikoprofil und Sicherheitenkonzept</a:t>
+            </a:r>
+          </a:p>
+        </p:txBody>
+      </p:sp>
+      <p:sp>
+        <p:nvSpPr>
+          <p:cNvPr id="8" name="TextBox 7"/>
+          <p:cNvSpPr txBox="1"/>
+          <p:nvPr/>
+        </p:nvSpPr>
+        <p:spPr>
+          <a:xfrm>
+            <a:off x="685800" y="1417320"/>
+            <a:ext cx="10817352" cy="5029200"/>
+          </a:xfrm>
+          <a:prstGeom prst="rect">
+            <a:avLst/>
+          </a:prstGeom>
+          <a:noFill/>
+        </p:spPr>
+        <p:txBody>
+          <a:bodyPr wrap="square">
+            <a:spAutoFit/>
+          </a:bodyPr>
+          <a:lstStyle/>
+          <a:p>
+            <a:pPr>
+              <a:spcBef>
+                <a:spcPts val="1000"/>
+              </a:spcBef>
+              <a:spcAft>
+                <a:spcPts val="200"/>
+              </a:spcAft>
+            </a:pPr>
+            <a:r>
+              <a:rPr sz="800" b="1">
+                <a:solidFill>
+                  <a:srgbClr val="78808C"/>
+                </a:solidFill>
+                <a:latin typeface="JetBrains Mono"/>
+              </a:rPr>
+              <a:t>SPEZIFISCHE RISIKEN BEI HEILBERUFE-KUNDEN</a:t>
+            </a:r>
+          </a:p>
+          <a:p>
+            <a:pPr>
+              <a:spcBef>
+                <a:spcPts val="400"/>
+              </a:spcBef>
+              <a:spcAft>
+                <a:spcPts val="200"/>
+              </a:spcAft>
+            </a:pPr>
+            <a:r>
+              <a:rPr sz="1200">
+                <a:solidFill>
+                  <a:srgbClr val="3D5466"/>
+                </a:solidFill>
+                <a:latin typeface="Arial"/>
+              </a:rPr>
+              <a:t>Zulassungsrisiko:</a:t>
+            </a:r>
+          </a:p>
+          <a:p>
+            <a:pPr>
+              <a:spcBef>
+                <a:spcPts val="400"/>
+              </a:spcBef>
+              <a:spcAft>
+                <a:spcPts val="200"/>
+              </a:spcAft>
+            </a:pPr>
+            <a:r>
+              <a:rPr sz="1200">
+                <a:solidFill>
+                  <a:srgbClr val="3D5466"/>
+                </a:solidFill>
+                <a:latin typeface="Arial"/>
+              </a:rPr>
+              <a:t>Kassenarztzulassung und ihre Übertragbarkeit in der Nachfolge:</a:t>
+            </a:r>
+          </a:p>
+          <a:p>
+            <a:pPr>
+              <a:spcBef>
+                <a:spcPts val="400"/>
+              </a:spcBef>
+              <a:spcAft>
+                <a:spcPts val="200"/>
+              </a:spcAft>
+            </a:pPr>
+            <a:r>
+              <a:rPr sz="1200">
+                <a:solidFill>
+                  <a:srgbClr val="3D5466"/>
+                </a:solidFill>
+                <a:latin typeface="Arial"/>
+              </a:rPr>
+              <a:t>Regressrisiko:</a:t>
+            </a:r>
+          </a:p>
+          <a:p>
+            <a:pPr>
+              <a:spcBef>
+                <a:spcPts val="400"/>
+              </a:spcBef>
+              <a:spcAft>
+                <a:spcPts val="200"/>
+              </a:spcAft>
+            </a:pPr>
+            <a:r>
+              <a:rPr sz="1200">
+                <a:solidFill>
+                  <a:srgbClr val="3D5466"/>
+                </a:solidFill>
+                <a:latin typeface="Arial"/>
+              </a:rPr>
+              <a:t>Inhaberabhängigkeit:</a:t>
+            </a:r>
+          </a:p>
+          <a:p>
+            <a:pPr>
+              <a:spcBef>
+                <a:spcPts val="400"/>
+              </a:spcBef>
+              <a:spcAft>
+                <a:spcPts val="200"/>
+              </a:spcAft>
+            </a:pPr>
+            <a:r>
+              <a:rPr sz="1200">
+                <a:solidFill>
+                  <a:srgbClr val="3D5466"/>
+                </a:solidFill>
+                <a:latin typeface="Arial"/>
+              </a:rPr>
+              <a:t>Versorgungswerk statt gesetzliche Rentenversicherung:</a:t>
+            </a:r>
+          </a:p>
+          <a:p>
+            <a:pPr>
+              <a:spcBef>
+                <a:spcPts val="400"/>
+              </a:spcBef>
+              <a:spcAft>
+                <a:spcPts val="200"/>
+              </a:spcAft>
+            </a:pPr>
+            <a:r>
+              <a:rPr sz="1200">
+                <a:solidFill>
+                  <a:srgbClr val="3D5466"/>
+                </a:solidFill>
+                <a:latin typeface="Arial"/>
+              </a:rPr>
+              <a:t>Strukturrisiko MVZ-Konsolidierung:</a:t>
+            </a:r>
+          </a:p>
+          <a:p>
+            <a:pPr>
+              <a:spcBef>
+                <a:spcPts val="1000"/>
+              </a:spcBef>
+              <a:spcAft>
+                <a:spcPts val="200"/>
+              </a:spcAft>
+            </a:pPr>
+            <a:r>
+              <a:rPr sz="800" b="1">
+                <a:solidFill>
+                  <a:srgbClr val="78808C"/>
+                </a:solidFill>
+                <a:latin typeface="JetBrains Mono"/>
+              </a:rPr>
+              <a:t>SICHERHEITENKONZEPT BEI HEILBERUFE-FINANZIERUNGEN</a:t>
+            </a:r>
+          </a:p>
+          <a:p>
+            <a:pPr>
+              <a:spcBef>
+                <a:spcPts val="400"/>
+              </a:spcBef>
+              <a:spcAft>
+                <a:spcPts val="200"/>
+              </a:spcAft>
+            </a:pPr>
+            <a:r>
+              <a:rPr sz="1200">
+                <a:solidFill>
+                  <a:srgbClr val="3D5466"/>
+                </a:solidFill>
+                <a:latin typeface="Arial"/>
+              </a:rPr>
+              <a:t>§ 18 KWG (Offenlegungspflicht ab 750.000 EUR Kreditbetrag) ist zu beachten. Die gesamtschuldnerische Bonitätsanalyse bei Praxisübernahmen folgt MaRisk BTO 1.2.1 .</a:t>
+            </a:r>
+          </a:p>
+          <a:p>
+            <a:pPr>
+              <a:spcBef>
+                <a:spcPts val="1000"/>
+              </a:spcBef>
+              <a:spcAft>
+                <a:spcPts val="200"/>
+              </a:spcAft>
+            </a:pPr>
+            <a:r>
+              <a:rPr sz="800" b="1">
+                <a:solidFill>
+                  <a:srgbClr val="78808C"/>
+                </a:solidFill>
+                <a:latin typeface="JetBrains Mono"/>
+              </a:rPr>
+              <a:t>VERBUNDPARTNER SCHWÄBISCH HALL: PRAXISIMMOBILIEN UND TILGUNGSAUSSETZUNGSMODELL</a:t>
+            </a:r>
+          </a:p>
+          <a:p>
+            <a:pPr>
+              <a:spcBef>
+                <a:spcPts val="400"/>
+              </a:spcBef>
+              <a:spcAft>
+                <a:spcPts val="200"/>
+              </a:spcAft>
+            </a:pPr>
+            <a:r>
+              <a:rPr sz="1200">
+                <a:solidFill>
+                  <a:srgbClr val="3D5466"/>
+                </a:solidFill>
+                <a:latin typeface="Arial"/>
+              </a:rPr>
+              <a:t>Das Tilgungsaussetzungsmodell (Vorfinanzierung mit Bausparvertrag):</a:t>
+            </a:r>
+          </a:p>
+          <a:p>
+            <a:pPr>
+              <a:spcBef>
+                <a:spcPts val="400"/>
+              </a:spcBef>
+              <a:spcAft>
+                <a:spcPts val="200"/>
+              </a:spcAft>
+            </a:pPr>
+            <a:r>
+              <a:rPr sz="1200">
+                <a:solidFill>
+                  <a:srgbClr val="3D5466"/>
+                </a:solidFill>
+                <a:latin typeface="Arial"/>
+              </a:rPr>
+              <a:t>Vorteile für den Kunden:</a:t>
+            </a:r>
+          </a:p>
+        </p:txBody>
+      </p:sp>
+      <p:sp>
+        <p:nvSpPr>
+          <p:cNvPr id="9" name="Rectangle 8"/>
           <p:cNvSpPr/>
           <p:nvPr/>
         </p:nvSpPr>
@@ -8860,7 +9497,7 @@
       </p:sp>
       <p:sp>
         <p:nvSpPr>
-          <p:cNvPr id="9" name="TextBox 8"/>
+          <p:cNvPr id="10" name="TextBox 9"/>
           <p:cNvSpPr txBox="1"/>
           <p:nvPr/>
         </p:nvSpPr>
@@ -8889,41 +9526,6 @@
                 <a:latin typeface="JetBrains Mono"/>
               </a:rPr>
               <a:t>Benedikt Zoller Coaching  ·  FKB Campus  ·  M07</a:t>
-            </a:r>
-          </a:p>
-        </p:txBody>
-      </p:sp>
-      <p:sp>
-        <p:nvSpPr>
-          <p:cNvPr id="10" name="TextBox 9"/>
-          <p:cNvSpPr txBox="1"/>
-          <p:nvPr/>
-        </p:nvSpPr>
-        <p:spPr>
-          <a:xfrm>
-            <a:off x="7176211" y="6583680"/>
-            <a:ext cx="4326940" cy="256032"/>
-          </a:xfrm>
-          <a:prstGeom prst="rect">
-            <a:avLst/>
-          </a:prstGeom>
-          <a:noFill/>
-        </p:spPr>
-        <p:txBody>
-          <a:bodyPr wrap="none">
-            <a:spAutoFit/>
-          </a:bodyPr>
-          <a:lstStyle/>
-          <a:p>
-            <a:pPr algn="r"/>
-            <a:r>
-              <a:rPr sz="700">
-                <a:solidFill>
-                  <a:srgbClr val="A0B4D2"/>
-                </a:solidFill>
-                <a:latin typeface="JetBrains Mono"/>
-              </a:rPr>
-              <a:t>Schaubild</a:t>
             </a:r>
           </a:p>
         </p:txBody>
@@ -8961,7 +9563,7 @@
             <a:avLst/>
           </a:prstGeom>
           <a:solidFill>
-            <a:srgbClr val="EDEDF3"/>
+            <a:srgbClr val="FFFFFF"/>
           </a:solidFill>
           <a:ln>
             <a:noFill/>
@@ -9062,51 +9664,43 @@
                 </a:solidFill>
                 <a:latin typeface="JetBrains Mono"/>
               </a:rPr>
-              <a:t>M07  ·  INHALT</a:t>
-            </a:r>
-          </a:p>
-        </p:txBody>
-      </p:sp>
-      <p:sp>
-        <p:nvSpPr>
-          <p:cNvPr id="5" name="Rectangle 4"/>
-          <p:cNvSpPr/>
-          <p:nvPr/>
-        </p:nvSpPr>
-        <p:spPr>
-          <a:xfrm>
-            <a:off x="0" y="1234440"/>
-            <a:ext cx="12188952" cy="12700"/>
-          </a:xfrm>
-          <a:prstGeom prst="rect">
-            <a:avLst/>
-          </a:prstGeom>
-          <a:solidFill>
-            <a:srgbClr val="D8DFE4"/>
-          </a:solidFill>
-          <a:ln>
-            <a:noFill/>
-          </a:ln>
-        </p:spPr>
-        <p:style>
-          <a:lnRef idx="1">
-            <a:schemeClr val="accent1"/>
-          </a:lnRef>
-          <a:fillRef idx="3">
-            <a:schemeClr val="accent1"/>
-          </a:fillRef>
-          <a:effectRef idx="2">
-            <a:schemeClr val="accent1"/>
-          </a:effectRef>
-          <a:fontRef idx="minor">
-            <a:schemeClr val="lt1"/>
-          </a:fontRef>
-        </p:style>
-        <p:txBody>
-          <a:bodyPr rtlCol="0" anchor="ctr"/>
-          <a:lstStyle/>
-          <a:p>
-            <a:pPr algn="ctr"/>
+              <a:t>M07  ·  SCHAUBILD</a:t>
+            </a:r>
+          </a:p>
+        </p:txBody>
+      </p:sp>
+      <p:sp>
+        <p:nvSpPr>
+          <p:cNvPr id="5" name="TextBox 4"/>
+          <p:cNvSpPr txBox="1"/>
+          <p:nvPr/>
+        </p:nvSpPr>
+        <p:spPr>
+          <a:xfrm>
+            <a:off x="685800" y="502920"/>
+            <a:ext cx="10817352" cy="594360"/>
+          </a:xfrm>
+          <a:prstGeom prst="rect">
+            <a:avLst/>
+          </a:prstGeom>
+          <a:noFill/>
+        </p:spPr>
+        <p:txBody>
+          <a:bodyPr wrap="square">
+            <a:spAutoFit/>
+          </a:bodyPr>
+          <a:lstStyle/>
+          <a:p>
+            <a:pPr algn="l"/>
+            <a:r>
+              <a:rPr sz="2000" b="1" i="0">
+                <a:solidFill>
+                  <a:srgbClr val="1F2C56"/>
+                </a:solidFill>
+                <a:latin typeface="Source Serif 4"/>
+              </a:rPr>
+              <a:t>Handlungsempfehlung Heilberufe</a:t>
+            </a:r>
           </a:p>
         </p:txBody>
       </p:sp>
@@ -9118,8 +9712,8 @@
         </p:nvSpPr>
         <p:spPr>
           <a:xfrm>
-            <a:off x="685800" y="502920"/>
-            <a:ext cx="36576" cy="658368"/>
+            <a:off x="685800" y="1143000"/>
+            <a:ext cx="10817352" cy="25400"/>
           </a:xfrm>
           <a:prstGeom prst="rect">
             <a:avLst/>
@@ -9153,295 +9747,33 @@
           </a:p>
         </p:txBody>
       </p:sp>
-      <p:sp>
-        <p:nvSpPr>
-          <p:cNvPr id="7" name="TextBox 6"/>
-          <p:cNvSpPr txBox="1"/>
-          <p:nvPr/>
-        </p:nvSpPr>
-        <p:spPr>
-          <a:xfrm>
-            <a:off x="813816" y="502920"/>
-            <a:ext cx="10634472" cy="685800"/>
-          </a:xfrm>
-          <a:prstGeom prst="rect">
-            <a:avLst/>
-          </a:prstGeom>
-          <a:noFill/>
-        </p:spPr>
-        <p:txBody>
-          <a:bodyPr wrap="square">
-            <a:spAutoFit/>
-          </a:bodyPr>
-          <a:lstStyle/>
-          <a:p>
-            <a:pPr algn="l"/>
-            <a:r>
-              <a:rPr sz="2400" b="1" i="0">
-                <a:solidFill>
-                  <a:srgbClr val="1F2C56"/>
-                </a:solidFill>
-                <a:latin typeface="Source Serif 4"/>
-              </a:rPr>
-              <a:t>Praxiscase: Dr. Mayer – Zahnarztpraxis-Übernahme in Ravensburg</a:t>
-            </a:r>
-          </a:p>
-        </p:txBody>
-      </p:sp>
-      <p:sp>
-        <p:nvSpPr>
-          <p:cNvPr id="8" name="TextBox 7"/>
-          <p:cNvSpPr txBox="1"/>
-          <p:nvPr/>
-        </p:nvSpPr>
-        <p:spPr>
-          <a:xfrm>
-            <a:off x="685800" y="1417320"/>
-            <a:ext cx="10817352" cy="5029200"/>
-          </a:xfrm>
-          <a:prstGeom prst="rect">
-            <a:avLst/>
-          </a:prstGeom>
-          <a:noFill/>
-        </p:spPr>
-        <p:txBody>
-          <a:bodyPr wrap="square">
-            <a:spAutoFit/>
-          </a:bodyPr>
-          <a:lstStyle/>
-          <a:p>
-            <a:pPr>
-              <a:spcBef>
-                <a:spcPts val="1000"/>
-              </a:spcBef>
-              <a:spcAft>
-                <a:spcPts val="200"/>
-              </a:spcAft>
-            </a:pPr>
-            <a:r>
-              <a:rPr sz="800" b="1">
-                <a:solidFill>
-                  <a:srgbClr val="78808C"/>
-                </a:solidFill>
-                <a:latin typeface="JetBrains Mono"/>
-              </a:rPr>
-              <a:t>AUSGANGSSITUATION</a:t>
-            </a:r>
-          </a:p>
-          <a:p>
-            <a:pPr>
-              <a:spcBef>
-                <a:spcPts val="400"/>
-              </a:spcBef>
-              <a:spcAft>
-                <a:spcPts val="200"/>
-              </a:spcAft>
-            </a:pPr>
-            <a:r>
-              <a:rPr sz="1200">
-                <a:solidFill>
-                  <a:srgbClr val="3D5466"/>
-                </a:solidFill>
-                <a:latin typeface="Arial"/>
-              </a:rPr>
-              <a:t>Kaufpreisverhandlung:</a:t>
-            </a:r>
-          </a:p>
-          <a:p>
-            <a:pPr>
-              <a:spcBef>
-                <a:spcPts val="400"/>
-              </a:spcBef>
-              <a:spcAft>
-                <a:spcPts val="200"/>
-              </a:spcAft>
-            </a:pPr>
-            <a:r>
-              <a:rPr sz="1300">
-                <a:solidFill>
-                  <a:srgbClr val="3D5466"/>
-                </a:solidFill>
-                <a:latin typeface="Arial"/>
-              </a:rPr>
-              <a:t>▸  Substanzwert (Einrichtung, Geräte): 160.000 EUR</a:t>
-            </a:r>
-          </a:p>
-          <a:p>
-            <a:pPr>
-              <a:spcBef>
-                <a:spcPts val="400"/>
-              </a:spcBef>
-              <a:spcAft>
-                <a:spcPts val="200"/>
-              </a:spcAft>
-            </a:pPr>
-            <a:r>
-              <a:rPr sz="1300">
-                <a:solidFill>
-                  <a:srgbClr val="3D5466"/>
-                </a:solidFill>
-                <a:latin typeface="Arial"/>
-              </a:rPr>
-              <a:t>▸  Goodwill (vereinbart, auf Basis IDW S5): 220.000 EUR</a:t>
-            </a:r>
-          </a:p>
-          <a:p>
-            <a:pPr>
-              <a:spcBef>
-                <a:spcPts val="400"/>
-              </a:spcBef>
-              <a:spcAft>
-                <a:spcPts val="200"/>
-              </a:spcAft>
-            </a:pPr>
-            <a:r>
-              <a:rPr sz="1300">
-                <a:solidFill>
-                  <a:srgbClr val="3D5466"/>
-                </a:solidFill>
-                <a:latin typeface="Arial"/>
-              </a:rPr>
-              <a:t>▸  Gesamtkaufpreis: 380.000 EUR</a:t>
-            </a:r>
-          </a:p>
-          <a:p>
-            <a:pPr>
-              <a:spcBef>
-                <a:spcPts val="400"/>
-              </a:spcBef>
-              <a:spcAft>
-                <a:spcPts val="200"/>
-              </a:spcAft>
-            </a:pPr>
-            <a:r>
-              <a:rPr sz="1200">
-                <a:solidFill>
-                  <a:srgbClr val="3D5466"/>
-                </a:solidFill>
-                <a:latin typeface="Arial"/>
-              </a:rPr>
-              <a:t>Finanzdaten der Praxis (letzte 3 Jahre, EÜR Dr. Schmidt):</a:t>
-            </a:r>
-          </a:p>
-          <a:p>
-            <a:pPr>
-              <a:spcBef>
-                <a:spcPts val="400"/>
-              </a:spcBef>
-              <a:spcAft>
-                <a:spcPts val="200"/>
-              </a:spcAft>
-            </a:pPr>
-            <a:r>
-              <a:rPr sz="1200">
-                <a:solidFill>
-                  <a:srgbClr val="3D5466"/>
-                </a:solidFill>
-                <a:latin typeface="Arial"/>
-              </a:rPr>
-              <a:t>Durchschnittlicher Jahresüberschuss: 303.333 EUR</a:t>
-            </a:r>
-          </a:p>
-          <a:p>
-            <a:pPr>
-              <a:spcBef>
-                <a:spcPts val="400"/>
-              </a:spcBef>
-              <a:spcAft>
-                <a:spcPts val="200"/>
-              </a:spcAft>
-            </a:pPr>
-            <a:r>
-              <a:rPr sz="1200">
-                <a:solidFill>
-                  <a:srgbClr val="3D5466"/>
-                </a:solidFill>
-                <a:latin typeface="Arial"/>
-              </a:rPr>
-              <a:t>Finanzierungsbedarf:</a:t>
-            </a:r>
-          </a:p>
-          <a:p>
-            <a:pPr>
-              <a:spcBef>
-                <a:spcPts val="400"/>
-              </a:spcBef>
-              <a:spcAft>
-                <a:spcPts val="200"/>
-              </a:spcAft>
-            </a:pPr>
-            <a:r>
-              <a:rPr sz="1300">
-                <a:solidFill>
-                  <a:srgbClr val="3D5466"/>
-                </a:solidFill>
-                <a:latin typeface="Arial"/>
-              </a:rPr>
-              <a:t>▸  Praxiskauf: 380.000 EUR</a:t>
-            </a:r>
-          </a:p>
-          <a:p>
-            <a:pPr>
-              <a:spcBef>
-                <a:spcPts val="400"/>
-              </a:spcBef>
-              <a:spcAft>
-                <a:spcPts val="200"/>
-              </a:spcAft>
-            </a:pPr>
-            <a:r>
-              <a:rPr sz="1300">
-                <a:solidFill>
-                  <a:srgbClr val="3D5466"/>
-                </a:solidFill>
-                <a:latin typeface="Arial"/>
-              </a:rPr>
-              <a:t>▸  Betriebsmittel (Warenlager, Anlaufkosten): 30.000 EUR</a:t>
-            </a:r>
-          </a:p>
-          <a:p>
-            <a:pPr>
-              <a:spcBef>
-                <a:spcPts val="400"/>
-              </a:spcBef>
-              <a:spcAft>
-                <a:spcPts val="200"/>
-              </a:spcAft>
-            </a:pPr>
-            <a:r>
-              <a:rPr sz="1300">
-                <a:solidFill>
-                  <a:srgbClr val="3D5466"/>
-                </a:solidFill>
-                <a:latin typeface="Arial"/>
-              </a:rPr>
-              <a:t>▸  Modernisierung Röntgenanlage: 25.000 EUR</a:t>
-            </a:r>
-          </a:p>
-          <a:p>
-            <a:pPr>
-              <a:spcBef>
-                <a:spcPts val="400"/>
-              </a:spcBef>
-              <a:spcAft>
-                <a:spcPts val="200"/>
-              </a:spcAft>
-            </a:pPr>
-            <a:r>
-              <a:rPr sz="1300">
-                <a:solidFill>
-                  <a:srgbClr val="3D5466"/>
-                </a:solidFill>
-                <a:latin typeface="Arial"/>
-              </a:rPr>
-              <a:t>▸  Gesamtbedarf: 435.000 EUR</a:t>
-            </a:r>
-          </a:p>
-        </p:txBody>
-      </p:sp>
-      <p:sp>
-        <p:nvSpPr>
-          <p:cNvPr id="9" name="Rectangle 8"/>
+      <p:pic>
+        <p:nvPicPr>
+          <p:cNvPr id="7" name="Picture 6" descr="image.png"/>
+          <p:cNvPicPr>
+            <a:picLocks noChangeAspect="1"/>
+          </p:cNvPicPr>
+          <p:nvPr/>
+        </p:nvPicPr>
+        <p:blipFill>
+          <a:blip r:embed="rId2"/>
+          <a:stretch>
+            <a:fillRect/>
+          </a:stretch>
+        </p:blipFill>
+        <p:spPr>
+          <a:xfrm>
+            <a:off x="2303489" y="1325880"/>
+            <a:ext cx="7581973" cy="4937760"/>
+          </a:xfrm>
+          <a:prstGeom prst="rect">
+            <a:avLst/>
+          </a:prstGeom>
+        </p:spPr>
+      </p:pic>
+      <p:sp>
+        <p:nvSpPr>
+          <p:cNvPr id="8" name="Rectangle 7"/>
           <p:cNvSpPr/>
           <p:nvPr/>
         </p:nvSpPr>
@@ -9484,7 +9816,7 @@
       </p:sp>
       <p:sp>
         <p:nvSpPr>
-          <p:cNvPr id="10" name="TextBox 9"/>
+          <p:cNvPr id="9" name="TextBox 8"/>
           <p:cNvSpPr txBox="1"/>
           <p:nvPr/>
         </p:nvSpPr>
@@ -9513,6 +9845,41 @@
                 <a:latin typeface="JetBrains Mono"/>
               </a:rPr>
               <a:t>Benedikt Zoller Coaching  ·  FKB Campus  ·  M07</a:t>
+            </a:r>
+          </a:p>
+        </p:txBody>
+      </p:sp>
+      <p:sp>
+        <p:nvSpPr>
+          <p:cNvPr id="10" name="TextBox 9"/>
+          <p:cNvSpPr txBox="1"/>
+          <p:nvPr/>
+        </p:nvSpPr>
+        <p:spPr>
+          <a:xfrm>
+            <a:off x="7176211" y="6583680"/>
+            <a:ext cx="4326940" cy="256032"/>
+          </a:xfrm>
+          <a:prstGeom prst="rect">
+            <a:avLst/>
+          </a:prstGeom>
+          <a:noFill/>
+        </p:spPr>
+        <p:txBody>
+          <a:bodyPr wrap="none">
+            <a:spAutoFit/>
+          </a:bodyPr>
+          <a:lstStyle/>
+          <a:p>
+            <a:pPr algn="r"/>
+            <a:r>
+              <a:rPr sz="700">
+                <a:solidFill>
+                  <a:srgbClr val="A0B4D2"/>
+                </a:solidFill>
+                <a:latin typeface="JetBrains Mono"/>
+              </a:rPr>
+              <a:t>Schaubild</a:t>
             </a:r>
           </a:p>
         </p:txBody>

--- a/protected-downloads/praesentation/M07.pptx
+++ b/protected-downloads/praesentation/M07.pptx
@@ -17,6 +17,7 @@
     <p:sldId id="265" r:id="rId17"/>
     <p:sldId id="266" r:id="rId18"/>
     <p:sldId id="267" r:id="rId19"/>
+    <p:sldId id="268" r:id="rId20"/>
   </p:sldIdLst>
   <p:sldSz cx="12188952" cy="6858000" type="screen4x3"/>
   <p:notesSz cx="6858000" cy="9144000"/>
@@ -513,7 +514,7 @@
           <a:lstStyle/>
           <a:p>
             <a:r>
-              <a:t>Agenda-Überblick. Timing und Pausen siehe Ablaufplan im Trainerhandbuch (Sektion 3).</a:t>
+              <a:t>Agenda aus dem Ablaufplan (Sektion 3.1). Timing und Pausen siehe Trainerhandbuch.</a:t>
             </a:r>
           </a:p>
         </p:txBody>
@@ -4931,13 +4932,13 @@
               </a:spcAft>
             </a:pPr>
             <a:r>
-              <a:rPr sz="1200">
+              <a:rPr sz="1300">
                 <a:solidFill>
                   <a:srgbClr val="3D5466"/>
                 </a:solidFill>
                 <a:latin typeface="Arial"/>
               </a:rPr>
-              <a:t>Kaufpreisverhandlung:</a:t>
+              <a:t>▸  Kaufpreisverhandlung:</a:t>
             </a:r>
           </a:p>
           <a:p>
@@ -5007,13 +5008,13 @@
               </a:spcAft>
             </a:pPr>
             <a:r>
-              <a:rPr sz="1200">
+              <a:rPr sz="1300">
                 <a:solidFill>
                   <a:srgbClr val="3D5466"/>
                 </a:solidFill>
                 <a:latin typeface="Arial"/>
               </a:rPr>
-              <a:t>Finanzdaten der Praxis (letzte 3 Jahre, EÜR Dr. Schmidt):</a:t>
+              <a:t>▸  Finanzdaten der Praxis (letzte 3 Jahre, EÜR Dr. Schmidt):</a:t>
             </a:r>
           </a:p>
           <a:p>
@@ -5026,13 +5027,13 @@
               </a:spcAft>
             </a:pPr>
             <a:r>
-              <a:rPr sz="1200">
+              <a:rPr sz="1300">
                 <a:solidFill>
                   <a:srgbClr val="3D5466"/>
                 </a:solidFill>
                 <a:latin typeface="Arial"/>
               </a:rPr>
-              <a:t>Durchschnittlicher Jahresüberschuss: 303.333 EUR</a:t>
+              <a:t>▸  Durchschnittlicher Jahresüberschuss: 303.333 EUR</a:t>
             </a:r>
           </a:p>
           <a:p>
@@ -5045,13 +5046,13 @@
               </a:spcAft>
             </a:pPr>
             <a:r>
-              <a:rPr sz="1200">
+              <a:rPr sz="1300">
                 <a:solidFill>
                   <a:srgbClr val="3D5466"/>
                 </a:solidFill>
                 <a:latin typeface="Arial"/>
               </a:rPr>
-              <a:t>Finanzierungsbedarf:</a:t>
+              <a:t>▸  Finanzierungsbedarf:</a:t>
             </a:r>
           </a:p>
           <a:p>
@@ -5243,7 +5244,7 @@
             <a:avLst/>
           </a:prstGeom>
           <a:solidFill>
-            <a:srgbClr val="EDEDF3"/>
+            <a:srgbClr val="FFFFFF"/>
           </a:solidFill>
           <a:ln>
             <a:noFill/>
@@ -5344,51 +5345,43 @@
                 </a:solidFill>
                 <a:latin typeface="JetBrains Mono"/>
               </a:rPr>
-              <a:t>M07  ·  INHALT</a:t>
-            </a:r>
-          </a:p>
-        </p:txBody>
-      </p:sp>
-      <p:sp>
-        <p:nvSpPr>
-          <p:cNvPr id="5" name="Rectangle 4"/>
-          <p:cNvSpPr/>
-          <p:nvPr/>
-        </p:nvSpPr>
-        <p:spPr>
-          <a:xfrm>
-            <a:off x="0" y="1234440"/>
-            <a:ext cx="12188952" cy="12700"/>
-          </a:xfrm>
-          <a:prstGeom prst="rect">
-            <a:avLst/>
-          </a:prstGeom>
-          <a:solidFill>
-            <a:srgbClr val="D8DFE4"/>
-          </a:solidFill>
-          <a:ln>
-            <a:noFill/>
-          </a:ln>
-        </p:spPr>
-        <p:style>
-          <a:lnRef idx="1">
-            <a:schemeClr val="accent1"/>
-          </a:lnRef>
-          <a:fillRef idx="3">
-            <a:schemeClr val="accent1"/>
-          </a:fillRef>
-          <a:effectRef idx="2">
-            <a:schemeClr val="accent1"/>
-          </a:effectRef>
-          <a:fontRef idx="minor">
-            <a:schemeClr val="lt1"/>
-          </a:fontRef>
-        </p:style>
-        <p:txBody>
-          <a:bodyPr rtlCol="0" anchor="ctr"/>
-          <a:lstStyle/>
-          <a:p>
-            <a:pPr algn="ctr"/>
+              <a:t>M07  ·  ÜBERSICHT</a:t>
+            </a:r>
+          </a:p>
+        </p:txBody>
+      </p:sp>
+      <p:sp>
+        <p:nvSpPr>
+          <p:cNvPr id="5" name="TextBox 4"/>
+          <p:cNvSpPr txBox="1"/>
+          <p:nvPr/>
+        </p:nvSpPr>
+        <p:spPr>
+          <a:xfrm>
+            <a:off x="685800" y="502920"/>
+            <a:ext cx="10817352" cy="594360"/>
+          </a:xfrm>
+          <a:prstGeom prst="rect">
+            <a:avLst/>
+          </a:prstGeom>
+          <a:noFill/>
+        </p:spPr>
+        <p:txBody>
+          <a:bodyPr wrap="square">
+            <a:spAutoFit/>
+          </a:bodyPr>
+          <a:lstStyle/>
+          <a:p>
+            <a:pPr algn="l"/>
+            <a:r>
+              <a:rPr sz="2000" b="1" i="0">
+                <a:solidFill>
+                  <a:srgbClr val="1F2C56"/>
+                </a:solidFill>
+                <a:latin typeface="Source Serif 4"/>
+              </a:rPr>
+              <a:t>Praxiscase: Dr. Mayer – Zahnarztpraxis-Übernahme in Ravensburg</a:t>
+            </a:r>
           </a:p>
         </p:txBody>
       </p:sp>
@@ -5400,8 +5393,8 @@
         </p:nvSpPr>
         <p:spPr>
           <a:xfrm>
-            <a:off x="685800" y="502920"/>
-            <a:ext cx="36576" cy="658368"/>
+            <a:off x="685800" y="1143000"/>
+            <a:ext cx="10817352" cy="25400"/>
           </a:xfrm>
           <a:prstGeom prst="rect">
             <a:avLst/>
@@ -5435,295 +5428,349 @@
           </a:p>
         </p:txBody>
       </p:sp>
-      <p:sp>
-        <p:nvSpPr>
-          <p:cNvPr id="7" name="TextBox 6"/>
-          <p:cNvSpPr txBox="1"/>
-          <p:nvPr/>
-        </p:nvSpPr>
-        <p:spPr>
-          <a:xfrm>
-            <a:off x="813816" y="502920"/>
-            <a:ext cx="10634472" cy="685800"/>
-          </a:xfrm>
-          <a:prstGeom prst="rect">
-            <a:avLst/>
-          </a:prstGeom>
-          <a:noFill/>
-        </p:spPr>
-        <p:txBody>
-          <a:bodyPr wrap="square">
-            <a:spAutoFit/>
-          </a:bodyPr>
-          <a:lstStyle/>
-          <a:p>
-            <a:pPr algn="l"/>
-            <a:r>
-              <a:rPr sz="2400" b="1" i="0">
-                <a:solidFill>
-                  <a:srgbClr val="1F2C56"/>
-                </a:solidFill>
-                <a:latin typeface="Source Serif 4"/>
-              </a:rPr>
-              <a:t>Checkliste: Heilberufe-Erstgespräch (15 Punkte)</a:t>
-            </a:r>
-          </a:p>
-        </p:txBody>
-      </p:sp>
-      <p:sp>
-        <p:nvSpPr>
-          <p:cNvPr id="8" name="TextBox 7"/>
-          <p:cNvSpPr txBox="1"/>
-          <p:nvPr/>
-        </p:nvSpPr>
-        <p:spPr>
-          <a:xfrm>
-            <a:off x="685800" y="1417320"/>
-            <a:ext cx="10817352" cy="5029200"/>
-          </a:xfrm>
-          <a:prstGeom prst="rect">
-            <a:avLst/>
-          </a:prstGeom>
-          <a:noFill/>
-        </p:spPr>
-        <p:txBody>
-          <a:bodyPr wrap="square">
-            <a:spAutoFit/>
-          </a:bodyPr>
-          <a:lstStyle/>
-          <a:p>
-            <a:pPr>
-              <a:spcBef>
-                <a:spcPts val="400"/>
-              </a:spcBef>
-              <a:spcAft>
-                <a:spcPts val="200"/>
-              </a:spcAft>
-            </a:pPr>
-            <a:r>
-              <a:rPr sz="1200">
-                <a:solidFill>
-                  <a:srgbClr val="3D5466"/>
-                </a:solidFill>
-                <a:latin typeface="Arial"/>
-              </a:rPr>
-              <a:t>Nutzen Sie diese Checkliste zur Vorbereitung und Strukturierung von Erstgesprächen mit Heilberufe-Kunden.</a:t>
-            </a:r>
-          </a:p>
-          <a:p>
-            <a:pPr>
-              <a:spcBef>
-                <a:spcPts val="400"/>
-              </a:spcBef>
-              <a:spcAft>
-                <a:spcPts val="200"/>
-              </a:spcAft>
-            </a:pPr>
-            <a:r>
-              <a:rPr sz="1200">
-                <a:solidFill>
-                  <a:srgbClr val="3D5466"/>
-                </a:solidFill>
-                <a:latin typeface="Arial"/>
-              </a:rPr>
-              <a:t>Branche &amp; Zulassung</a:t>
-            </a:r>
-          </a:p>
-          <a:p>
-            <a:pPr>
-              <a:spcBef>
-                <a:spcPts val="400"/>
-              </a:spcBef>
-              <a:spcAft>
-                <a:spcPts val="200"/>
-              </a:spcAft>
-            </a:pPr>
-            <a:r>
-              <a:rPr sz="1300">
-                <a:solidFill>
-                  <a:srgbClr val="3D5466"/>
-                </a:solidFill>
-                <a:latin typeface="Arial"/>
-              </a:rPr>
-              <a:t>▸  [ ] 1. Zulassungsart: GKV-Zulassung, Privatarzt, MVZ-Anstellung?</a:t>
-            </a:r>
-          </a:p>
-          <a:p>
-            <a:pPr>
-              <a:spcBef>
-                <a:spcPts val="400"/>
-              </a:spcBef>
-              <a:spcAft>
-                <a:spcPts val="200"/>
-              </a:spcAft>
-            </a:pPr>
-            <a:r>
-              <a:rPr sz="1300">
-                <a:solidFill>
-                  <a:srgbClr val="3D5466"/>
-                </a:solidFill>
-                <a:latin typeface="Arial"/>
-              </a:rPr>
-              <a:t>▸  [ ] 2. KV-Bezirk und Versorgungsgebiet – überversorgt oder Mangelgebiet?</a:t>
-            </a:r>
-          </a:p>
-          <a:p>
-            <a:pPr>
-              <a:spcBef>
-                <a:spcPts val="400"/>
-              </a:spcBef>
-              <a:spcAft>
-                <a:spcPts val="200"/>
-              </a:spcAft>
-            </a:pPr>
-            <a:r>
-              <a:rPr sz="1300">
-                <a:solidFill>
-                  <a:srgbClr val="3D5466"/>
-                </a:solidFill>
-                <a:latin typeface="Arial"/>
-              </a:rPr>
-              <a:t>▸  [ ] 3. Berufsbezeichnung und Kammerzugehörigkeit klären</a:t>
-            </a:r>
-          </a:p>
-          <a:p>
-            <a:pPr>
-              <a:spcBef>
-                <a:spcPts val="400"/>
-              </a:spcBef>
-              <a:spcAft>
-                <a:spcPts val="200"/>
-              </a:spcAft>
-            </a:pPr>
-            <a:r>
-              <a:rPr sz="1300">
-                <a:solidFill>
-                  <a:srgbClr val="3D5466"/>
-                </a:solidFill>
-                <a:latin typeface="Arial"/>
-              </a:rPr>
-              <a:t>▸  [ ] 4. Einzelpraxis oder BAG/Gemeinschaftspraxis? → Bei Berufsausübungsgemeinschaft (BAG): Gesellschaftsvertrag anfordern; Sicherheitenkonzept und Bonitätsprüfung gelten für alle Partner</a:t>
-            </a:r>
-          </a:p>
-          <a:p>
-            <a:pPr>
-              <a:spcBef>
-                <a:spcPts val="400"/>
-              </a:spcBef>
-              <a:spcAft>
-                <a:spcPts val="200"/>
-              </a:spcAft>
-            </a:pPr>
-            <a:r>
-              <a:rPr sz="1300">
-                <a:solidFill>
-                  <a:srgbClr val="3D5466"/>
-                </a:solidFill>
-                <a:latin typeface="Arial"/>
-              </a:rPr>
-              <a:t>▸  [ ] 5. Umsatzsteuer-Status klären (§ 4 Nr. 14 UStG: Heilbehandlungen grds. USt-frei; Ausnahmen: Gutachtertätigkeit, Schönheitschirurgie ohne Heilzweck → partielle USt-Pflicht möglich)</a:t>
-            </a:r>
-          </a:p>
-          <a:p>
-            <a:pPr>
-              <a:spcBef>
-                <a:spcPts val="400"/>
-              </a:spcBef>
-              <a:spcAft>
-                <a:spcPts val="200"/>
-              </a:spcAft>
-            </a:pPr>
-            <a:r>
-              <a:rPr sz="1200">
-                <a:solidFill>
-                  <a:srgbClr val="3D5466"/>
-                </a:solidFill>
-                <a:latin typeface="Arial"/>
-              </a:rPr>
-              <a:t>Einkommenssituation</a:t>
-            </a:r>
-          </a:p>
-          <a:p>
-            <a:pPr>
-              <a:spcBef>
-                <a:spcPts val="400"/>
-              </a:spcBef>
-              <a:spcAft>
-                <a:spcPts val="200"/>
-              </a:spcAft>
-            </a:pPr>
-            <a:r>
-              <a:rPr sz="1300">
-                <a:solidFill>
-                  <a:srgbClr val="3D5466"/>
-                </a:solidFill>
-                <a:latin typeface="Arial"/>
-              </a:rPr>
-              <a:t>▸  [ ] 6. Einnahmenquellen: GKV-Anteil / PKV-Anteil / Selbstzahler</a:t>
-            </a:r>
-          </a:p>
-          <a:p>
-            <a:pPr>
-              <a:spcBef>
-                <a:spcPts val="400"/>
-              </a:spcBef>
-              <a:spcAft>
-                <a:spcPts val="200"/>
-              </a:spcAft>
-            </a:pPr>
-            <a:r>
-              <a:rPr sz="1300">
-                <a:solidFill>
-                  <a:srgbClr val="3D5466"/>
-                </a:solidFill>
-                <a:latin typeface="Arial"/>
-              </a:rPr>
-              <a:t>▸  [ ] 7. EÜR letzter 3 Jahre + Steuerbescheide anfordern</a:t>
-            </a:r>
-          </a:p>
-          <a:p>
-            <a:pPr>
-              <a:spcBef>
-                <a:spcPts val="400"/>
-              </a:spcBef>
-              <a:spcAft>
-                <a:spcPts val="200"/>
-              </a:spcAft>
-            </a:pPr>
-            <a:r>
-              <a:rPr sz="1300">
-                <a:solidFill>
-                  <a:srgbClr val="3D5466"/>
-                </a:solidFill>
-                <a:latin typeface="Arial"/>
-              </a:rPr>
-              <a:t>▸  [ ] 8. Rückstände oder laufende Regressverfahren erfragen</a:t>
-            </a:r>
-          </a:p>
-          <a:p>
-            <a:pPr>
-              <a:spcBef>
-                <a:spcPts val="400"/>
-              </a:spcBef>
-              <a:spcAft>
-                <a:spcPts val="200"/>
-              </a:spcAft>
-            </a:pPr>
-            <a:r>
-              <a:rPr sz="1300">
-                <a:solidFill>
-                  <a:srgbClr val="3D5466"/>
-                </a:solidFill>
-                <a:latin typeface="Arial"/>
-              </a:rPr>
-              <a:t>▸  [ ] 9. Betriebsausgaben auf Plausibilität prüfen (Personalquote, Mietquote)</a:t>
-            </a:r>
-          </a:p>
-        </p:txBody>
-      </p:sp>
-      <p:sp>
-        <p:nvSpPr>
-          <p:cNvPr id="9" name="Rectangle 8"/>
+      <p:graphicFrame>
+        <p:nvGraphicFramePr>
+          <p:cNvPr id="7" name="Table 6"/>
+          <p:cNvGraphicFramePr>
+            <a:graphicFrameLocks noGrp="1"/>
+          </p:cNvGraphicFramePr>
+          <p:nvPr/>
+        </p:nvGraphicFramePr>
+        <p:xfrm>
+          <a:off x="685800" y="1417320"/>
+          <a:ext cx="10817352" cy="1536192"/>
+        </p:xfrm>
+        <a:graphic>
+          <a:graphicData uri="http://schemas.openxmlformats.org/drawingml/2006/table">
+            <a:tbl>
+              <a:tblPr firstRow="1" bandRow="1">
+                <a:tableStyleId>{5C22544A-7EE6-4342-B048-85BDC9FD1C3A}</a:tableStyleId>
+              </a:tblPr>
+              <a:tblGrid>
+                <a:gridCol w="2704338"/>
+                <a:gridCol w="2704338"/>
+                <a:gridCol w="2704338"/>
+                <a:gridCol w="2704338"/>
+              </a:tblGrid>
+              <a:tr h="384048">
+                <a:tc>
+                  <a:txBody>
+                    <a:bodyPr/>
+                    <a:lstStyle/>
+                    <a:p>
+                      <a:r>
+                        <a:rPr sz="1100" b="1">
+                          <a:solidFill>
+                            <a:srgbClr val="FFFFFF"/>
+                          </a:solidFill>
+                          <a:latin typeface="Arial"/>
+                        </a:rPr>
+                        <a:t>Jahr</a:t>
+                      </a:r>
+                    </a:p>
+                  </a:txBody>
+                  <a:tcPr>
+                    <a:solidFill>
+                      <a:srgbClr val="1F2C56"/>
+                    </a:solidFill>
+                  </a:tcPr>
+                </a:tc>
+                <a:tc>
+                  <a:txBody>
+                    <a:bodyPr/>
+                    <a:lstStyle/>
+                    <a:p>
+                      <a:r>
+                        <a:rPr sz="1100" b="1">
+                          <a:solidFill>
+                            <a:srgbClr val="FFFFFF"/>
+                          </a:solidFill>
+                          <a:latin typeface="Arial"/>
+                        </a:rPr>
+                        <a:t>Betriebseinnahmen</a:t>
+                      </a:r>
+                    </a:p>
+                  </a:txBody>
+                  <a:tcPr>
+                    <a:solidFill>
+                      <a:srgbClr val="1F2C56"/>
+                    </a:solidFill>
+                  </a:tcPr>
+                </a:tc>
+                <a:tc>
+                  <a:txBody>
+                    <a:bodyPr/>
+                    <a:lstStyle/>
+                    <a:p>
+                      <a:r>
+                        <a:rPr sz="1100" b="1">
+                          <a:solidFill>
+                            <a:srgbClr val="FFFFFF"/>
+                          </a:solidFill>
+                          <a:latin typeface="Arial"/>
+                        </a:rPr>
+                        <a:t>Betriebsausgaben</a:t>
+                      </a:r>
+                    </a:p>
+                  </a:txBody>
+                  <a:tcPr>
+                    <a:solidFill>
+                      <a:srgbClr val="1F2C56"/>
+                    </a:solidFill>
+                  </a:tcPr>
+                </a:tc>
+                <a:tc>
+                  <a:txBody>
+                    <a:bodyPr/>
+                    <a:lstStyle/>
+                    <a:p>
+                      <a:r>
+                        <a:rPr sz="1100" b="1">
+                          <a:solidFill>
+                            <a:srgbClr val="FFFFFF"/>
+                          </a:solidFill>
+                          <a:latin typeface="Arial"/>
+                        </a:rPr>
+                        <a:t>Jahresüberschuss</a:t>
+                      </a:r>
+                    </a:p>
+                  </a:txBody>
+                  <a:tcPr>
+                    <a:solidFill>
+                      <a:srgbClr val="1F2C56"/>
+                    </a:solidFill>
+                  </a:tcPr>
+                </a:tc>
+              </a:tr>
+              <a:tr h="384048">
+                <a:tc>
+                  <a:txBody>
+                    <a:bodyPr/>
+                    <a:lstStyle/>
+                    <a:p>
+                      <a:r>
+                        <a:rPr sz="1050">
+                          <a:solidFill>
+                            <a:srgbClr val="3D5466"/>
+                          </a:solidFill>
+                          <a:latin typeface="Arial"/>
+                        </a:rPr>
+                        <a:t>2023</a:t>
+                      </a:r>
+                    </a:p>
+                  </a:txBody>
+                  <a:tcPr/>
+                </a:tc>
+                <a:tc>
+                  <a:txBody>
+                    <a:bodyPr/>
+                    <a:lstStyle/>
+                    <a:p>
+                      <a:r>
+                        <a:rPr sz="1050">
+                          <a:solidFill>
+                            <a:srgbClr val="3D5466"/>
+                          </a:solidFill>
+                          <a:latin typeface="Arial"/>
+                        </a:rPr>
+                        <a:t>680.000 EUR</a:t>
+                      </a:r>
+                    </a:p>
+                  </a:txBody>
+                  <a:tcPr/>
+                </a:tc>
+                <a:tc>
+                  <a:txBody>
+                    <a:bodyPr/>
+                    <a:lstStyle/>
+                    <a:p>
+                      <a:r>
+                        <a:rPr sz="1050">
+                          <a:solidFill>
+                            <a:srgbClr val="3D5466"/>
+                          </a:solidFill>
+                          <a:latin typeface="Arial"/>
+                        </a:rPr>
+                        <a:t>390.000 EUR</a:t>
+                      </a:r>
+                    </a:p>
+                  </a:txBody>
+                  <a:tcPr/>
+                </a:tc>
+                <a:tc>
+                  <a:txBody>
+                    <a:bodyPr/>
+                    <a:lstStyle/>
+                    <a:p>
+                      <a:r>
+                        <a:rPr sz="1050">
+                          <a:solidFill>
+                            <a:srgbClr val="3D5466"/>
+                          </a:solidFill>
+                          <a:latin typeface="Arial"/>
+                        </a:rPr>
+                        <a:t>290.000 EUR</a:t>
+                      </a:r>
+                    </a:p>
+                  </a:txBody>
+                  <a:tcPr/>
+                </a:tc>
+              </a:tr>
+              <a:tr h="384048">
+                <a:tc>
+                  <a:txBody>
+                    <a:bodyPr/>
+                    <a:lstStyle/>
+                    <a:p>
+                      <a:r>
+                        <a:rPr sz="1050">
+                          <a:solidFill>
+                            <a:srgbClr val="3D5466"/>
+                          </a:solidFill>
+                          <a:latin typeface="Arial"/>
+                        </a:rPr>
+                        <a:t>2024</a:t>
+                      </a:r>
+                    </a:p>
+                  </a:txBody>
+                  <a:tcPr/>
+                </a:tc>
+                <a:tc>
+                  <a:txBody>
+                    <a:bodyPr/>
+                    <a:lstStyle/>
+                    <a:p>
+                      <a:r>
+                        <a:rPr sz="1050">
+                          <a:solidFill>
+                            <a:srgbClr val="3D5466"/>
+                          </a:solidFill>
+                          <a:latin typeface="Arial"/>
+                        </a:rPr>
+                        <a:t>710.000 EUR</a:t>
+                      </a:r>
+                    </a:p>
+                  </a:txBody>
+                  <a:tcPr/>
+                </a:tc>
+                <a:tc>
+                  <a:txBody>
+                    <a:bodyPr/>
+                    <a:lstStyle/>
+                    <a:p>
+                      <a:r>
+                        <a:rPr sz="1050">
+                          <a:solidFill>
+                            <a:srgbClr val="3D5466"/>
+                          </a:solidFill>
+                          <a:latin typeface="Arial"/>
+                        </a:rPr>
+                        <a:t>400.000 EUR</a:t>
+                      </a:r>
+                    </a:p>
+                  </a:txBody>
+                  <a:tcPr/>
+                </a:tc>
+                <a:tc>
+                  <a:txBody>
+                    <a:bodyPr/>
+                    <a:lstStyle/>
+                    <a:p>
+                      <a:r>
+                        <a:rPr sz="1050">
+                          <a:solidFill>
+                            <a:srgbClr val="3D5466"/>
+                          </a:solidFill>
+                          <a:latin typeface="Arial"/>
+                        </a:rPr>
+                        <a:t>310.000 EUR</a:t>
+                      </a:r>
+                    </a:p>
+                  </a:txBody>
+                  <a:tcPr/>
+                </a:tc>
+              </a:tr>
+              <a:tr h="384048">
+                <a:tc>
+                  <a:txBody>
+                    <a:bodyPr/>
+                    <a:lstStyle/>
+                    <a:p>
+                      <a:r>
+                        <a:rPr sz="1050">
+                          <a:solidFill>
+                            <a:srgbClr val="3D5466"/>
+                          </a:solidFill>
+                          <a:latin typeface="Arial"/>
+                        </a:rPr>
+                        <a:t>2025</a:t>
+                      </a:r>
+                    </a:p>
+                  </a:txBody>
+                  <a:tcPr/>
+                </a:tc>
+                <a:tc>
+                  <a:txBody>
+                    <a:bodyPr/>
+                    <a:lstStyle/>
+                    <a:p>
+                      <a:r>
+                        <a:rPr sz="1050">
+                          <a:solidFill>
+                            <a:srgbClr val="3D5466"/>
+                          </a:solidFill>
+                          <a:latin typeface="Arial"/>
+                        </a:rPr>
+                        <a:t>700.000 EUR</a:t>
+                      </a:r>
+                    </a:p>
+                  </a:txBody>
+                  <a:tcPr/>
+                </a:tc>
+                <a:tc>
+                  <a:txBody>
+                    <a:bodyPr/>
+                    <a:lstStyle/>
+                    <a:p>
+                      <a:r>
+                        <a:rPr sz="1050">
+                          <a:solidFill>
+                            <a:srgbClr val="3D5466"/>
+                          </a:solidFill>
+                          <a:latin typeface="Arial"/>
+                        </a:rPr>
+                        <a:t>390.000 EUR</a:t>
+                      </a:r>
+                    </a:p>
+                  </a:txBody>
+                  <a:tcPr/>
+                </a:tc>
+                <a:tc>
+                  <a:txBody>
+                    <a:bodyPr/>
+                    <a:lstStyle/>
+                    <a:p>
+                      <a:r>
+                        <a:rPr sz="1050">
+                          <a:solidFill>
+                            <a:srgbClr val="3D5466"/>
+                          </a:solidFill>
+                          <a:latin typeface="Arial"/>
+                        </a:rPr>
+                        <a:t>310.000 EUR</a:t>
+                      </a:r>
+                    </a:p>
+                  </a:txBody>
+                  <a:tcPr/>
+                </a:tc>
+              </a:tr>
+            </a:tbl>
+          </a:graphicData>
+        </a:graphic>
+      </p:graphicFrame>
+      <p:sp>
+        <p:nvSpPr>
+          <p:cNvPr id="8" name="Rectangle 7"/>
           <p:cNvSpPr/>
           <p:nvPr/>
         </p:nvSpPr>
@@ -5766,7 +5813,7 @@
       </p:sp>
       <p:sp>
         <p:nvSpPr>
-          <p:cNvPr id="10" name="TextBox 9"/>
+          <p:cNvPr id="9" name="TextBox 8"/>
           <p:cNvSpPr txBox="1"/>
           <p:nvPr/>
         </p:nvSpPr>
@@ -5795,6 +5842,41 @@
                 <a:latin typeface="JetBrains Mono"/>
               </a:rPr>
               <a:t>Benedikt Zoller Coaching  ·  FKB Campus  ·  M07</a:t>
+            </a:r>
+          </a:p>
+        </p:txBody>
+      </p:sp>
+      <p:sp>
+        <p:nvSpPr>
+          <p:cNvPr id="10" name="TextBox 9"/>
+          <p:cNvSpPr txBox="1"/>
+          <p:nvPr/>
+        </p:nvSpPr>
+        <p:spPr>
+          <a:xfrm>
+            <a:off x="7176211" y="6583680"/>
+            <a:ext cx="4326940" cy="256032"/>
+          </a:xfrm>
+          <a:prstGeom prst="rect">
+            <a:avLst/>
+          </a:prstGeom>
+          <a:noFill/>
+        </p:spPr>
+        <p:txBody>
+          <a:bodyPr wrap="none">
+            <a:spAutoFit/>
+          </a:bodyPr>
+          <a:lstStyle/>
+          <a:p>
+            <a:pPr algn="r"/>
+            <a:r>
+              <a:rPr sz="700">
+                <a:solidFill>
+                  <a:srgbClr val="A0B4D2"/>
+                </a:solidFill>
+                <a:latin typeface="JetBrains Mono"/>
+              </a:rPr>
+              <a:t>Übersicht</a:t>
             </a:r>
           </a:p>
         </p:txBody>
@@ -6054,6 +6136,595 @@
                 </a:solidFill>
                 <a:latin typeface="Source Serif 4"/>
               </a:rPr>
+              <a:t>Checkliste: Heilberufe-Erstgespräch (15 Punkte)</a:t>
+            </a:r>
+          </a:p>
+        </p:txBody>
+      </p:sp>
+      <p:sp>
+        <p:nvSpPr>
+          <p:cNvPr id="8" name="TextBox 7"/>
+          <p:cNvSpPr txBox="1"/>
+          <p:nvPr/>
+        </p:nvSpPr>
+        <p:spPr>
+          <a:xfrm>
+            <a:off x="685800" y="1417320"/>
+            <a:ext cx="10817352" cy="5029200"/>
+          </a:xfrm>
+          <a:prstGeom prst="rect">
+            <a:avLst/>
+          </a:prstGeom>
+          <a:noFill/>
+        </p:spPr>
+        <p:txBody>
+          <a:bodyPr wrap="square">
+            <a:spAutoFit/>
+          </a:bodyPr>
+          <a:lstStyle/>
+          <a:p>
+            <a:pPr>
+              <a:spcBef>
+                <a:spcPts val="400"/>
+              </a:spcBef>
+              <a:spcAft>
+                <a:spcPts val="200"/>
+              </a:spcAft>
+            </a:pPr>
+            <a:r>
+              <a:rPr sz="1300">
+                <a:solidFill>
+                  <a:srgbClr val="3D5466"/>
+                </a:solidFill>
+                <a:latin typeface="Arial"/>
+              </a:rPr>
+              <a:t>▸  Nutzen Sie diese Checkliste zur Vorbereitung und Strukturierung von Erstgesprächen mit Heilberufe-Kunden.</a:t>
+            </a:r>
+          </a:p>
+          <a:p>
+            <a:pPr>
+              <a:spcBef>
+                <a:spcPts val="400"/>
+              </a:spcBef>
+              <a:spcAft>
+                <a:spcPts val="200"/>
+              </a:spcAft>
+            </a:pPr>
+            <a:r>
+              <a:rPr sz="1300">
+                <a:solidFill>
+                  <a:srgbClr val="3D5466"/>
+                </a:solidFill>
+                <a:latin typeface="Arial"/>
+              </a:rPr>
+              <a:t>▸  Branche &amp; Zulassung</a:t>
+            </a:r>
+          </a:p>
+          <a:p>
+            <a:pPr>
+              <a:spcBef>
+                <a:spcPts val="400"/>
+              </a:spcBef>
+              <a:spcAft>
+                <a:spcPts val="200"/>
+              </a:spcAft>
+            </a:pPr>
+            <a:r>
+              <a:rPr sz="1300">
+                <a:solidFill>
+                  <a:srgbClr val="3D5466"/>
+                </a:solidFill>
+                <a:latin typeface="Arial"/>
+              </a:rPr>
+              <a:t>▸  [ ] 1. Zulassungsart: GKV-Zulassung, Privatarzt, MVZ-Anstellung?</a:t>
+            </a:r>
+          </a:p>
+          <a:p>
+            <a:pPr>
+              <a:spcBef>
+                <a:spcPts val="400"/>
+              </a:spcBef>
+              <a:spcAft>
+                <a:spcPts val="200"/>
+              </a:spcAft>
+            </a:pPr>
+            <a:r>
+              <a:rPr sz="1300">
+                <a:solidFill>
+                  <a:srgbClr val="3D5466"/>
+                </a:solidFill>
+                <a:latin typeface="Arial"/>
+              </a:rPr>
+              <a:t>▸  [ ] 2. KV-Bezirk und Versorgungsgebiet – überversorgt oder Mangelgebiet?</a:t>
+            </a:r>
+          </a:p>
+          <a:p>
+            <a:pPr>
+              <a:spcBef>
+                <a:spcPts val="400"/>
+              </a:spcBef>
+              <a:spcAft>
+                <a:spcPts val="200"/>
+              </a:spcAft>
+            </a:pPr>
+            <a:r>
+              <a:rPr sz="1300">
+                <a:solidFill>
+                  <a:srgbClr val="3D5466"/>
+                </a:solidFill>
+                <a:latin typeface="Arial"/>
+              </a:rPr>
+              <a:t>▸  [ ] 3. Berufsbezeichnung und Kammerzugehörigkeit klären</a:t>
+            </a:r>
+          </a:p>
+          <a:p>
+            <a:pPr>
+              <a:spcBef>
+                <a:spcPts val="400"/>
+              </a:spcBef>
+              <a:spcAft>
+                <a:spcPts val="200"/>
+              </a:spcAft>
+            </a:pPr>
+            <a:r>
+              <a:rPr sz="1300">
+                <a:solidFill>
+                  <a:srgbClr val="3D5466"/>
+                </a:solidFill>
+                <a:latin typeface="Arial"/>
+              </a:rPr>
+              <a:t>▸  [ ] 4. Einzelpraxis oder BAG/Gemeinschaftspraxis? → Bei Berufsausübungsgemeinschaft (BAG): Gesellschaftsvertrag anfordern; Sicherheitenkonzept und Bonitätsprüfung gelten für alle Partner</a:t>
+            </a:r>
+          </a:p>
+          <a:p>
+            <a:pPr>
+              <a:spcBef>
+                <a:spcPts val="400"/>
+              </a:spcBef>
+              <a:spcAft>
+                <a:spcPts val="200"/>
+              </a:spcAft>
+            </a:pPr>
+            <a:r>
+              <a:rPr sz="1300">
+                <a:solidFill>
+                  <a:srgbClr val="3D5466"/>
+                </a:solidFill>
+                <a:latin typeface="Arial"/>
+              </a:rPr>
+              <a:t>▸  [ ] 5. Umsatzsteuer-Status klären (§ 4 Nr. 14 UStG: Heilbehandlungen grds. USt-frei; Ausnahmen: Gutachtertätigkeit, Schönheitschirurgie ohne Heilzweck → partielle USt-Pflicht möglich)</a:t>
+            </a:r>
+          </a:p>
+          <a:p>
+            <a:pPr>
+              <a:spcBef>
+                <a:spcPts val="400"/>
+              </a:spcBef>
+              <a:spcAft>
+                <a:spcPts val="200"/>
+              </a:spcAft>
+            </a:pPr>
+            <a:r>
+              <a:rPr sz="1300">
+                <a:solidFill>
+                  <a:srgbClr val="3D5466"/>
+                </a:solidFill>
+                <a:latin typeface="Arial"/>
+              </a:rPr>
+              <a:t>▸  Einkommenssituation</a:t>
+            </a:r>
+          </a:p>
+          <a:p>
+            <a:pPr>
+              <a:spcBef>
+                <a:spcPts val="400"/>
+              </a:spcBef>
+              <a:spcAft>
+                <a:spcPts val="200"/>
+              </a:spcAft>
+            </a:pPr>
+            <a:r>
+              <a:rPr sz="1300">
+                <a:solidFill>
+                  <a:srgbClr val="3D5466"/>
+                </a:solidFill>
+                <a:latin typeface="Arial"/>
+              </a:rPr>
+              <a:t>▸  [ ] 6. Einnahmenquellen: GKV-Anteil / PKV-Anteil / Selbstzahler</a:t>
+            </a:r>
+          </a:p>
+          <a:p>
+            <a:pPr>
+              <a:spcBef>
+                <a:spcPts val="400"/>
+              </a:spcBef>
+              <a:spcAft>
+                <a:spcPts val="200"/>
+              </a:spcAft>
+            </a:pPr>
+            <a:r>
+              <a:rPr sz="1300">
+                <a:solidFill>
+                  <a:srgbClr val="3D5466"/>
+                </a:solidFill>
+                <a:latin typeface="Arial"/>
+              </a:rPr>
+              <a:t>▸  [ ] 7. EÜR letzter 3 Jahre + Steuerbescheide anfordern</a:t>
+            </a:r>
+          </a:p>
+          <a:p>
+            <a:pPr>
+              <a:spcBef>
+                <a:spcPts val="400"/>
+              </a:spcBef>
+              <a:spcAft>
+                <a:spcPts val="200"/>
+              </a:spcAft>
+            </a:pPr>
+            <a:r>
+              <a:rPr sz="1300">
+                <a:solidFill>
+                  <a:srgbClr val="3D5466"/>
+                </a:solidFill>
+                <a:latin typeface="Arial"/>
+              </a:rPr>
+              <a:t>▸  [ ] 8. Rückstände oder laufende Regressverfahren erfragen</a:t>
+            </a:r>
+          </a:p>
+          <a:p>
+            <a:pPr>
+              <a:spcBef>
+                <a:spcPts val="400"/>
+              </a:spcBef>
+              <a:spcAft>
+                <a:spcPts val="200"/>
+              </a:spcAft>
+            </a:pPr>
+            <a:r>
+              <a:rPr sz="1300">
+                <a:solidFill>
+                  <a:srgbClr val="3D5466"/>
+                </a:solidFill>
+                <a:latin typeface="Arial"/>
+              </a:rPr>
+              <a:t>▸  [ ] 9. Betriebsausgaben auf Plausibilität prüfen (Personalquote, Mietquote)</a:t>
+            </a:r>
+          </a:p>
+        </p:txBody>
+      </p:sp>
+      <p:sp>
+        <p:nvSpPr>
+          <p:cNvPr id="9" name="Rectangle 8"/>
+          <p:cNvSpPr/>
+          <p:nvPr/>
+        </p:nvSpPr>
+        <p:spPr>
+          <a:xfrm>
+            <a:off x="0" y="6510528"/>
+            <a:ext cx="12188952" cy="347472"/>
+          </a:xfrm>
+          <a:prstGeom prst="rect">
+            <a:avLst/>
+          </a:prstGeom>
+          <a:solidFill>
+            <a:srgbClr val="0A1937"/>
+          </a:solidFill>
+          <a:ln>
+            <a:noFill/>
+          </a:ln>
+        </p:spPr>
+        <p:style>
+          <a:lnRef idx="1">
+            <a:schemeClr val="accent1"/>
+          </a:lnRef>
+          <a:fillRef idx="3">
+            <a:schemeClr val="accent1"/>
+          </a:fillRef>
+          <a:effectRef idx="2">
+            <a:schemeClr val="accent1"/>
+          </a:effectRef>
+          <a:fontRef idx="minor">
+            <a:schemeClr val="lt1"/>
+          </a:fontRef>
+        </p:style>
+        <p:txBody>
+          <a:bodyPr rtlCol="0" anchor="ctr"/>
+          <a:lstStyle/>
+          <a:p>
+            <a:pPr algn="ctr"/>
+          </a:p>
+        </p:txBody>
+      </p:sp>
+      <p:sp>
+        <p:nvSpPr>
+          <p:cNvPr id="10" name="TextBox 9"/>
+          <p:cNvSpPr txBox="1"/>
+          <p:nvPr/>
+        </p:nvSpPr>
+        <p:spPr>
+          <a:xfrm>
+            <a:off x="685800" y="6583680"/>
+            <a:ext cx="6490411" cy="256032"/>
+          </a:xfrm>
+          <a:prstGeom prst="rect">
+            <a:avLst/>
+          </a:prstGeom>
+          <a:noFill/>
+        </p:spPr>
+        <p:txBody>
+          <a:bodyPr wrap="none">
+            <a:spAutoFit/>
+          </a:bodyPr>
+          <a:lstStyle/>
+          <a:p>
+            <a:pPr algn="l"/>
+            <a:r>
+              <a:rPr sz="700">
+                <a:solidFill>
+                  <a:srgbClr val="A0B4D2"/>
+                </a:solidFill>
+                <a:latin typeface="JetBrains Mono"/>
+              </a:rPr>
+              <a:t>Benedikt Zoller Coaching  ·  FKB Campus  ·  M07</a:t>
+            </a:r>
+          </a:p>
+        </p:txBody>
+      </p:sp>
+    </p:spTree>
+  </p:cSld>
+  <p:clrMapOvr>
+    <a:masterClrMapping/>
+  </p:clrMapOvr>
+</p:sld>
+</file>
+
+<file path=ppt/slides/slide13.xml><?xml version="1.0" encoding="utf-8"?>
+<p:sld xmlns:a="http://schemas.openxmlformats.org/drawingml/2006/main" xmlns:p="http://schemas.openxmlformats.org/presentationml/2006/main" xmlns:r="http://schemas.openxmlformats.org/officeDocument/2006/relationships">
+  <p:cSld>
+    <p:spTree>
+      <p:nvGrpSpPr>
+        <p:cNvPr id="1" name=""/>
+        <p:cNvGrpSpPr/>
+        <p:nvPr/>
+      </p:nvGrpSpPr>
+      <p:grpSpPr/>
+      <p:sp>
+        <p:nvSpPr>
+          <p:cNvPr id="2" name="Rectangle 1"/>
+          <p:cNvSpPr/>
+          <p:nvPr/>
+        </p:nvSpPr>
+        <p:spPr>
+          <a:xfrm>
+            <a:off x="0" y="0"/>
+            <a:ext cx="12188952" cy="6858000"/>
+          </a:xfrm>
+          <a:prstGeom prst="rect">
+            <a:avLst/>
+          </a:prstGeom>
+          <a:solidFill>
+            <a:srgbClr val="EDEDF3"/>
+          </a:solidFill>
+          <a:ln>
+            <a:noFill/>
+          </a:ln>
+        </p:spPr>
+        <p:style>
+          <a:lnRef idx="1">
+            <a:schemeClr val="accent1"/>
+          </a:lnRef>
+          <a:fillRef idx="3">
+            <a:schemeClr val="accent1"/>
+          </a:fillRef>
+          <a:effectRef idx="2">
+            <a:schemeClr val="accent1"/>
+          </a:effectRef>
+          <a:fontRef idx="minor">
+            <a:schemeClr val="lt1"/>
+          </a:fontRef>
+        </p:style>
+        <p:txBody>
+          <a:bodyPr rtlCol="0" anchor="ctr"/>
+          <a:lstStyle/>
+          <a:p>
+            <a:pPr algn="ctr"/>
+          </a:p>
+        </p:txBody>
+      </p:sp>
+      <p:sp>
+        <p:nvSpPr>
+          <p:cNvPr id="3" name="Rectangle 2"/>
+          <p:cNvSpPr/>
+          <p:nvPr/>
+        </p:nvSpPr>
+        <p:spPr>
+          <a:xfrm>
+            <a:off x="0" y="0"/>
+            <a:ext cx="12188952" cy="50292"/>
+          </a:xfrm>
+          <a:prstGeom prst="rect">
+            <a:avLst/>
+          </a:prstGeom>
+          <a:solidFill>
+            <a:srgbClr val="1F2C56"/>
+          </a:solidFill>
+          <a:ln>
+            <a:noFill/>
+          </a:ln>
+        </p:spPr>
+        <p:style>
+          <a:lnRef idx="1">
+            <a:schemeClr val="accent1"/>
+          </a:lnRef>
+          <a:fillRef idx="3">
+            <a:schemeClr val="accent1"/>
+          </a:fillRef>
+          <a:effectRef idx="2">
+            <a:schemeClr val="accent1"/>
+          </a:effectRef>
+          <a:fontRef idx="minor">
+            <a:schemeClr val="lt1"/>
+          </a:fontRef>
+        </p:style>
+        <p:txBody>
+          <a:bodyPr rtlCol="0" anchor="ctr"/>
+          <a:lstStyle/>
+          <a:p>
+            <a:pPr algn="ctr"/>
+          </a:p>
+        </p:txBody>
+      </p:sp>
+      <p:sp>
+        <p:nvSpPr>
+          <p:cNvPr id="4" name="TextBox 3"/>
+          <p:cNvSpPr txBox="1"/>
+          <p:nvPr/>
+        </p:nvSpPr>
+        <p:spPr>
+          <a:xfrm>
+            <a:off x="685800" y="109728"/>
+            <a:ext cx="10817352" cy="228600"/>
+          </a:xfrm>
+          <a:prstGeom prst="rect">
+            <a:avLst/>
+          </a:prstGeom>
+          <a:noFill/>
+        </p:spPr>
+        <p:txBody>
+          <a:bodyPr wrap="none">
+            <a:spAutoFit/>
+          </a:bodyPr>
+          <a:lstStyle/>
+          <a:p>
+            <a:pPr algn="l"/>
+            <a:r>
+              <a:rPr sz="750">
+                <a:solidFill>
+                  <a:srgbClr val="78808C"/>
+                </a:solidFill>
+                <a:latin typeface="JetBrains Mono"/>
+              </a:rPr>
+              <a:t>M07  ·  INHALT</a:t>
+            </a:r>
+          </a:p>
+        </p:txBody>
+      </p:sp>
+      <p:sp>
+        <p:nvSpPr>
+          <p:cNvPr id="5" name="Rectangle 4"/>
+          <p:cNvSpPr/>
+          <p:nvPr/>
+        </p:nvSpPr>
+        <p:spPr>
+          <a:xfrm>
+            <a:off x="0" y="1234440"/>
+            <a:ext cx="12188952" cy="12700"/>
+          </a:xfrm>
+          <a:prstGeom prst="rect">
+            <a:avLst/>
+          </a:prstGeom>
+          <a:solidFill>
+            <a:srgbClr val="D8DFE4"/>
+          </a:solidFill>
+          <a:ln>
+            <a:noFill/>
+          </a:ln>
+        </p:spPr>
+        <p:style>
+          <a:lnRef idx="1">
+            <a:schemeClr val="accent1"/>
+          </a:lnRef>
+          <a:fillRef idx="3">
+            <a:schemeClr val="accent1"/>
+          </a:fillRef>
+          <a:effectRef idx="2">
+            <a:schemeClr val="accent1"/>
+          </a:effectRef>
+          <a:fontRef idx="minor">
+            <a:schemeClr val="lt1"/>
+          </a:fontRef>
+        </p:style>
+        <p:txBody>
+          <a:bodyPr rtlCol="0" anchor="ctr"/>
+          <a:lstStyle/>
+          <a:p>
+            <a:pPr algn="ctr"/>
+          </a:p>
+        </p:txBody>
+      </p:sp>
+      <p:sp>
+        <p:nvSpPr>
+          <p:cNvPr id="6" name="Rectangle 5"/>
+          <p:cNvSpPr/>
+          <p:nvPr/>
+        </p:nvSpPr>
+        <p:spPr>
+          <a:xfrm>
+            <a:off x="685800" y="502920"/>
+            <a:ext cx="36576" cy="658368"/>
+          </a:xfrm>
+          <a:prstGeom prst="rect">
+            <a:avLst/>
+          </a:prstGeom>
+          <a:solidFill>
+            <a:srgbClr val="D9C089"/>
+          </a:solidFill>
+          <a:ln>
+            <a:noFill/>
+          </a:ln>
+        </p:spPr>
+        <p:style>
+          <a:lnRef idx="1">
+            <a:schemeClr val="accent1"/>
+          </a:lnRef>
+          <a:fillRef idx="3">
+            <a:schemeClr val="accent1"/>
+          </a:fillRef>
+          <a:effectRef idx="2">
+            <a:schemeClr val="accent1"/>
+          </a:effectRef>
+          <a:fontRef idx="minor">
+            <a:schemeClr val="lt1"/>
+          </a:fontRef>
+        </p:style>
+        <p:txBody>
+          <a:bodyPr rtlCol="0" anchor="ctr"/>
+          <a:lstStyle/>
+          <a:p>
+            <a:pPr algn="ctr"/>
+          </a:p>
+        </p:txBody>
+      </p:sp>
+      <p:sp>
+        <p:nvSpPr>
+          <p:cNvPr id="7" name="TextBox 6"/>
+          <p:cNvSpPr txBox="1"/>
+          <p:nvPr/>
+        </p:nvSpPr>
+        <p:spPr>
+          <a:xfrm>
+            <a:off x="813816" y="502920"/>
+            <a:ext cx="10634472" cy="685800"/>
+          </a:xfrm>
+          <a:prstGeom prst="rect">
+            <a:avLst/>
+          </a:prstGeom>
+          <a:noFill/>
+        </p:spPr>
+        <p:txBody>
+          <a:bodyPr wrap="square">
+            <a:spAutoFit/>
+          </a:bodyPr>
+          <a:lstStyle/>
+          <a:p>
+            <a:pPr algn="l"/>
+            <a:r>
+              <a:rPr sz="2400" b="1" i="0">
+                <a:solidFill>
+                  <a:srgbClr val="1F2C56"/>
+                </a:solidFill>
+                <a:latin typeface="Source Serif 4"/>
+              </a:rPr>
               <a:t>Reflexionsfragen</a:t>
             </a:r>
           </a:p>
@@ -7189,7 +7860,7 @@
                 </a:solidFill>
                 <a:latin typeface="Source Serif 4"/>
               </a:rPr>
-              <a:t>Agenda</a:t>
+              <a:t>So läuft das Modul</a:t>
             </a:r>
           </a:p>
         </p:txBody>
@@ -7218,115 +7889,427 @@
           <a:p>
             <a:pPr>
               <a:spcBef>
-                <a:spcPts val="800"/>
+                <a:spcPts val="400"/>
               </a:spcBef>
               <a:spcAft>
-                <a:spcPts val="200"/>
+                <a:spcPts val="100"/>
               </a:spcAft>
             </a:pPr>
             <a:r>
-              <a:rPr sz="1500">
+              <a:rPr sz="900">
+                <a:solidFill>
+                  <a:srgbClr val="78808C"/>
+                </a:solidFill>
+                <a:latin typeface="Consolas"/>
+              </a:rPr>
+              <a:t/>
+            </a:r>
+            <a:r>
+              <a:rPr sz="1200" b="1">
                 <a:solidFill>
                   <a:srgbClr val="3D5466"/>
                 </a:solidFill>
                 <a:latin typeface="Arial"/>
               </a:rPr>
-              <a:t>01   Theorie-Input 1: Freie Berufe – rechtliche und wirtschaftliche Grundlagen</a:t>
+              <a:t>  Einstieg</a:t>
+            </a:r>
+            <a:r>
+              <a:rPr sz="900">
+                <a:solidFill>
+                  <a:srgbClr val="78808C"/>
+                </a:solidFill>
+                <a:latin typeface="Arial"/>
+              </a:rPr>
+              <a:t>  ·  Plenum, Blitzlicht</a:t>
             </a:r>
           </a:p>
           <a:p>
             <a:pPr>
               <a:spcBef>
-                <a:spcPts val="800"/>
+                <a:spcPts val="400"/>
               </a:spcBef>
               <a:spcAft>
-                <a:spcPts val="200"/>
+                <a:spcPts val="100"/>
               </a:spcAft>
             </a:pPr>
             <a:r>
-              <a:rPr sz="1500">
+              <a:rPr sz="900">
+                <a:solidFill>
+                  <a:srgbClr val="78808C"/>
+                </a:solidFill>
+                <a:latin typeface="Consolas"/>
+              </a:rPr>
+              <a:t/>
+            </a:r>
+            <a:r>
+              <a:rPr sz="1200" b="1">
                 <a:solidFill>
                   <a:srgbClr val="3D5466"/>
                 </a:solidFill>
                 <a:latin typeface="Arial"/>
               </a:rPr>
-              <a:t>02   Theorie-Input 2: Praxisbewertung und Finanzierungsstruktur</a:t>
+              <a:t>  Theorie-Input 1</a:t>
+            </a:r>
+            <a:r>
+              <a:rPr sz="900">
+                <a:solidFill>
+                  <a:srgbClr val="78808C"/>
+                </a:solidFill>
+                <a:latin typeface="Arial"/>
+              </a:rPr>
+              <a:t>  ·  Trainer-Vortrag mit Visualisierung</a:t>
             </a:r>
           </a:p>
           <a:p>
             <a:pPr>
               <a:spcBef>
-                <a:spcPts val="800"/>
+                <a:spcPts val="400"/>
               </a:spcBef>
               <a:spcAft>
-                <a:spcPts val="200"/>
+                <a:spcPts val="100"/>
               </a:spcAft>
             </a:pPr>
             <a:r>
-              <a:rPr sz="1500">
+              <a:rPr sz="900">
+                <a:solidFill>
+                  <a:srgbClr val="78808C"/>
+                </a:solidFill>
+                <a:latin typeface="Consolas"/>
+              </a:rPr>
+              <a:t/>
+            </a:r>
+            <a:r>
+              <a:rPr sz="1200" b="1">
                 <a:solidFill>
                   <a:srgbClr val="3D5466"/>
                 </a:solidFill>
                 <a:latin typeface="Arial"/>
               </a:rPr>
-              <a:t>03   Theorie-Input 3: Risikoprofil und Sicherheitenkonzept</a:t>
+              <a:t>  Gruppenarbeit 1</a:t>
+            </a:r>
+            <a:r>
+              <a:rPr sz="900">
+                <a:solidFill>
+                  <a:srgbClr val="78808C"/>
+                </a:solidFill>
+                <a:latin typeface="Arial"/>
+              </a:rPr>
+              <a:t>  ·  Kleingruppen (3–4 TN)</a:t>
             </a:r>
           </a:p>
           <a:p>
             <a:pPr>
               <a:spcBef>
-                <a:spcPts val="800"/>
+                <a:spcPts val="400"/>
               </a:spcBef>
               <a:spcAft>
-                <a:spcPts val="200"/>
+                <a:spcPts val="100"/>
               </a:spcAft>
             </a:pPr>
             <a:r>
-              <a:rPr sz="1500">
+              <a:rPr sz="900">
+                <a:solidFill>
+                  <a:srgbClr val="78808C"/>
+                </a:solidFill>
+                <a:latin typeface="Consolas"/>
+              </a:rPr>
+              <a:t/>
+            </a:r>
+            <a:r>
+              <a:rPr sz="1200" b="1">
                 <a:solidFill>
                   <a:srgbClr val="3D5466"/>
                 </a:solidFill>
                 <a:latin typeface="Arial"/>
               </a:rPr>
-              <a:t>04   Praxiscase: Dr. Mayer – Zahnarztpraxis-Übernahme in Ravensburg</a:t>
+              <a:t>  Pause 1</a:t>
             </a:r>
           </a:p>
           <a:p>
             <a:pPr>
               <a:spcBef>
-                <a:spcPts val="800"/>
+                <a:spcPts val="400"/>
               </a:spcBef>
               <a:spcAft>
-                <a:spcPts val="200"/>
+                <a:spcPts val="100"/>
               </a:spcAft>
             </a:pPr>
             <a:r>
-              <a:rPr sz="1500">
+              <a:rPr sz="900">
+                <a:solidFill>
+                  <a:srgbClr val="78808C"/>
+                </a:solidFill>
+                <a:latin typeface="Consolas"/>
+              </a:rPr>
+              <a:t/>
+            </a:r>
+            <a:r>
+              <a:rPr sz="1200" b="1">
                 <a:solidFill>
                   <a:srgbClr val="3D5466"/>
                 </a:solidFill>
                 <a:latin typeface="Arial"/>
               </a:rPr>
-              <a:t>05   Checkliste: Heilberufe-Erstgespräch (15 Punkte)</a:t>
+              <a:t>  Theorie-Input 2</a:t>
+            </a:r>
+            <a:r>
+              <a:rPr sz="900">
+                <a:solidFill>
+                  <a:srgbClr val="78808C"/>
+                </a:solidFill>
+                <a:latin typeface="Arial"/>
+              </a:rPr>
+              <a:t>  ·  Trainer-Vortrag mit Rechenbeispiel</a:t>
             </a:r>
           </a:p>
           <a:p>
             <a:pPr>
               <a:spcBef>
-                <a:spcPts val="800"/>
+                <a:spcPts val="400"/>
               </a:spcBef>
               <a:spcAft>
-                <a:spcPts val="200"/>
+                <a:spcPts val="100"/>
               </a:spcAft>
             </a:pPr>
             <a:r>
-              <a:rPr sz="1500">
+              <a:rPr sz="900">
+                <a:solidFill>
+                  <a:srgbClr val="78808C"/>
+                </a:solidFill>
+                <a:latin typeface="Consolas"/>
+              </a:rPr>
+              <a:t/>
+            </a:r>
+            <a:r>
+              <a:rPr sz="1200" b="1">
                 <a:solidFill>
                   <a:srgbClr val="3D5466"/>
                 </a:solidFill>
                 <a:latin typeface="Arial"/>
               </a:rPr>
-              <a:t>06   Reflexionsfragen</a:t>
+              <a:t>  Rechenübung</a:t>
+            </a:r>
+            <a:r>
+              <a:rPr sz="900">
+                <a:solidFill>
+                  <a:srgbClr val="78808C"/>
+                </a:solidFill>
+                <a:latin typeface="Arial"/>
+              </a:rPr>
+              <a:t>  ·  Einzelarbeit, dann Besprechung</a:t>
+            </a:r>
+          </a:p>
+          <a:p>
+            <a:pPr>
+              <a:spcBef>
+                <a:spcPts val="400"/>
+              </a:spcBef>
+              <a:spcAft>
+                <a:spcPts val="100"/>
+              </a:spcAft>
+            </a:pPr>
+            <a:r>
+              <a:rPr sz="900">
+                <a:solidFill>
+                  <a:srgbClr val="78808C"/>
+                </a:solidFill>
+                <a:latin typeface="Consolas"/>
+              </a:rPr>
+              <a:t/>
+            </a:r>
+            <a:r>
+              <a:rPr sz="1200" b="1">
+                <a:solidFill>
+                  <a:srgbClr val="3D5466"/>
+                </a:solidFill>
+                <a:latin typeface="Arial"/>
+              </a:rPr>
+              <a:t>  Pause 2</a:t>
+            </a:r>
+          </a:p>
+          <a:p>
+            <a:pPr>
+              <a:spcBef>
+                <a:spcPts val="400"/>
+              </a:spcBef>
+              <a:spcAft>
+                <a:spcPts val="100"/>
+              </a:spcAft>
+            </a:pPr>
+            <a:r>
+              <a:rPr sz="900">
+                <a:solidFill>
+                  <a:srgbClr val="78808C"/>
+                </a:solidFill>
+                <a:latin typeface="Consolas"/>
+              </a:rPr>
+              <a:t/>
+            </a:r>
+            <a:r>
+              <a:rPr sz="1200" b="1">
+                <a:solidFill>
+                  <a:srgbClr val="3D5466"/>
+                </a:solidFill>
+                <a:latin typeface="Arial"/>
+              </a:rPr>
+              <a:t>  Theorie-Input 3</a:t>
+            </a:r>
+            <a:r>
+              <a:rPr sz="900">
+                <a:solidFill>
+                  <a:srgbClr val="78808C"/>
+                </a:solidFill>
+                <a:latin typeface="Arial"/>
+              </a:rPr>
+              <a:t>  ·  Trainer-Vortrag</a:t>
+            </a:r>
+          </a:p>
+          <a:p>
+            <a:pPr>
+              <a:spcBef>
+                <a:spcPts val="400"/>
+              </a:spcBef>
+              <a:spcAft>
+                <a:spcPts val="100"/>
+              </a:spcAft>
+            </a:pPr>
+            <a:r>
+              <a:rPr sz="900">
+                <a:solidFill>
+                  <a:srgbClr val="78808C"/>
+                </a:solidFill>
+                <a:latin typeface="Consolas"/>
+              </a:rPr>
+              <a:t/>
+            </a:r>
+            <a:r>
+              <a:rPr sz="1200" b="1">
+                <a:solidFill>
+                  <a:srgbClr val="3D5466"/>
+                </a:solidFill>
+                <a:latin typeface="Arial"/>
+              </a:rPr>
+              <a:t>  Hauptfall</a:t>
+            </a:r>
+            <a:r>
+              <a:rPr sz="900">
+                <a:solidFill>
+                  <a:srgbClr val="78808C"/>
+                </a:solidFill>
+                <a:latin typeface="Arial"/>
+              </a:rPr>
+              <a:t>  ·  Kleingruppenarbeit (3–4 TN)</a:t>
+            </a:r>
+          </a:p>
+          <a:p>
+            <a:pPr>
+              <a:spcBef>
+                <a:spcPts val="400"/>
+              </a:spcBef>
+              <a:spcAft>
+                <a:spcPts val="100"/>
+              </a:spcAft>
+            </a:pPr>
+            <a:r>
+              <a:rPr sz="900">
+                <a:solidFill>
+                  <a:srgbClr val="78808C"/>
+                </a:solidFill>
+                <a:latin typeface="Consolas"/>
+              </a:rPr>
+              <a:t/>
+            </a:r>
+            <a:r>
+              <a:rPr sz="1200" b="1">
+                <a:solidFill>
+                  <a:srgbClr val="3D5466"/>
+                </a:solidFill>
+                <a:latin typeface="Arial"/>
+              </a:rPr>
+              <a:t>  Präsentation</a:t>
+            </a:r>
+            <a:r>
+              <a:rPr sz="900">
+                <a:solidFill>
+                  <a:srgbClr val="78808C"/>
+                </a:solidFill>
+                <a:latin typeface="Arial"/>
+              </a:rPr>
+              <a:t>  ·  Plenum</a:t>
+            </a:r>
+          </a:p>
+          <a:p>
+            <a:pPr>
+              <a:spcBef>
+                <a:spcPts val="400"/>
+              </a:spcBef>
+              <a:spcAft>
+                <a:spcPts val="100"/>
+              </a:spcAft>
+            </a:pPr>
+            <a:r>
+              <a:rPr sz="900">
+                <a:solidFill>
+                  <a:srgbClr val="78808C"/>
+                </a:solidFill>
+                <a:latin typeface="Consolas"/>
+              </a:rPr>
+              <a:t/>
+            </a:r>
+            <a:r>
+              <a:rPr sz="1200" b="1">
+                <a:solidFill>
+                  <a:srgbClr val="3D5466"/>
+                </a:solidFill>
+                <a:latin typeface="Arial"/>
+              </a:rPr>
+              <a:t>  Wissenstest + Transfer</a:t>
+            </a:r>
+            <a:r>
+              <a:rPr sz="900">
+                <a:solidFill>
+                  <a:srgbClr val="78808C"/>
+                </a:solidFill>
+                <a:latin typeface="Arial"/>
+              </a:rPr>
+              <a:t>  ·  Einzelarbeit</a:t>
+            </a:r>
+          </a:p>
+          <a:p>
+            <a:pPr>
+              <a:spcBef>
+                <a:spcPts val="400"/>
+              </a:spcBef>
+              <a:spcAft>
+                <a:spcPts val="100"/>
+              </a:spcAft>
+            </a:pPr>
+            <a:r>
+              <a:rPr sz="900">
+                <a:solidFill>
+                  <a:srgbClr val="78808C"/>
+                </a:solidFill>
+                <a:latin typeface="Consolas"/>
+              </a:rPr>
+              <a:t/>
+            </a:r>
+            <a:r>
+              <a:rPr sz="1200" b="1">
+                <a:solidFill>
+                  <a:srgbClr val="3D5466"/>
+                </a:solidFill>
+                <a:latin typeface="Arial"/>
+              </a:rPr>
+              <a:t>  Abschluss</a:t>
+            </a:r>
+            <a:r>
+              <a:rPr sz="900">
+                <a:solidFill>
+                  <a:srgbClr val="78808C"/>
+                </a:solidFill>
+                <a:latin typeface="Arial"/>
+              </a:rPr>
+              <a:t>  ·  Plenum</a:t>
             </a:r>
           </a:p>
         </p:txBody>
@@ -7719,13 +8702,13 @@
               </a:spcAft>
             </a:pPr>
             <a:r>
-              <a:rPr sz="1200">
+              <a:rPr sz="1300">
                 <a:solidFill>
                   <a:srgbClr val="3D5466"/>
                 </a:solidFill>
                 <a:latin typeface="Arial"/>
               </a:rPr>
-              <a:t>Die praktischen Konsequenzen für die Bankbeziehung:</a:t>
+              <a:t>▸  Die praktischen Konsequenzen für die Bankbeziehung:</a:t>
             </a:r>
           </a:p>
           <a:p>
@@ -7738,13 +8721,13 @@
               </a:spcAft>
             </a:pPr>
             <a:r>
-              <a:rPr sz="1200">
+              <a:rPr sz="1300">
                 <a:solidFill>
                   <a:srgbClr val="3D5466"/>
                 </a:solidFill>
                 <a:latin typeface="Arial"/>
               </a:rPr>
-              <a:t>Quellen: § 18 EStG; § 4 Abs. 3 EStG; Gumpert &amp; Kausch (2022 )</a:t>
+              <a:t>▸  Quellen: § 18 EStG; § 4 Abs. 3 EStG; Gumpert &amp; Kausch (2022 )</a:t>
             </a:r>
           </a:p>
           <a:p>
@@ -7776,13 +8759,13 @@
               </a:spcAft>
             </a:pPr>
             <a:r>
-              <a:rPr sz="1200">
+              <a:rPr sz="1300">
                 <a:solidFill>
                   <a:srgbClr val="3D5466"/>
                 </a:solidFill>
                 <a:latin typeface="Arial"/>
               </a:rPr>
-              <a:t>Die bloße Abgrenzung „Freier Beruf vs. Gewerbe" greift in der Beratungspraxis zu kurz. Entscheidend für die Kreditanalyse ist auch die Organisationsform, in der der Heilberuf ausgeübt wird:</a:t>
+              <a:t>▸  Die bloße Abgrenzung „Freier Beruf vs. Gewerbe" greift in der Beratungspraxis zu kurz. Entscheidend für die Kreditanalyse ist auch die Organisationsform, in der der Heilberuf ausgeübt wird:</a:t>
             </a:r>
           </a:p>
           <a:p>
@@ -7795,13 +8778,13 @@
               </a:spcAft>
             </a:pPr>
             <a:r>
-              <a:rPr sz="1200">
+              <a:rPr sz="1300">
                 <a:solidFill>
                   <a:srgbClr val="3D5466"/>
                 </a:solidFill>
                 <a:latin typeface="Arial"/>
               </a:rPr>
-              <a:t>Für den Berater – Daumenregel:</a:t>
+              <a:t>▸  Für den Berater – Daumenregel:</a:t>
             </a:r>
           </a:p>
           <a:p>
@@ -7871,13 +8854,13 @@
               </a:spcAft>
             </a:pPr>
             <a:r>
-              <a:rPr sz="1200">
+              <a:rPr sz="1300">
                 <a:solidFill>
                   <a:srgbClr val="3D5466"/>
                 </a:solidFill>
                 <a:latin typeface="Arial"/>
               </a:rPr>
-              <a:t>Quelle: Gumpert &amp; Kausch (2022 )</a:t>
+              <a:t>▸  Quelle: Gumpert &amp; Kausch (2022 )</a:t>
             </a:r>
           </a:p>
           <a:p>
@@ -7909,13 +8892,13 @@
               </a:spcAft>
             </a:pPr>
             <a:r>
-              <a:rPr sz="1200">
+              <a:rPr sz="1300">
                 <a:solidFill>
                   <a:srgbClr val="3D5466"/>
                 </a:solidFill>
                 <a:latin typeface="Arial"/>
               </a:rPr>
-              <a:t>Keine Abgrenzung von Anlagevermögen in der EÜR: Investitionen erscheinen als sofortiger Aufwand oder werden über AfA-Listen abgeschrieben; eine bilanzielle Kapitalstruktur fehlt.</a:t>
+              <a:t>▸  Keine Abgrenzung von Anlagevermögen in der EÜR: Investitionen erscheinen als sofortiger Aufwand oder werden über AfA-Listen abgeschrieben; eine bilanzielle Kapitalstruktur fehlt.</a:t>
             </a:r>
           </a:p>
         </p:txBody>
@@ -8308,13 +9291,13 @@
               </a:spcAft>
             </a:pPr>
             <a:r>
-              <a:rPr sz="1200">
+              <a:rPr sz="1300">
                 <a:solidFill>
                   <a:srgbClr val="3D5466"/>
                 </a:solidFill>
                 <a:latin typeface="Arial"/>
               </a:rPr>
-              <a:t>Bewertungsverfahren nach IDW S5:</a:t>
+              <a:t>▸  Bewertungsverfahren nach IDW S5:</a:t>
             </a:r>
           </a:p>
           <a:p>
@@ -8327,13 +9310,13 @@
               </a:spcAft>
             </a:pPr>
             <a:r>
-              <a:rPr sz="1200">
+              <a:rPr sz="1300">
                 <a:solidFill>
                   <a:srgbClr val="3D5466"/>
                 </a:solidFill>
                 <a:latin typeface="Arial"/>
               </a:rPr>
-              <a:t>Substanzwert: Zeitwert aller materiellen Wirtschaftsgüter (Praxiseinrichtung, Medizintechnik, IT, Vorräte). Dieser Anteil ist relativ unproblematisch zu finanzieren und gut beleihbar.</a:t>
+              <a:t>▸  Substanzwert: Zeitwert aller materiellen Wirtschaftsgüter (Praxiseinrichtung, Medizintechnik, IT, Vorräte). Dieser Anteil ist relativ unproblematisch zu finanzieren und gut beleihbar.</a:t>
             </a:r>
           </a:p>
           <a:p>
@@ -8346,13 +9329,13 @@
               </a:spcAft>
             </a:pPr>
             <a:r>
-              <a:rPr sz="1200">
+              <a:rPr sz="1300">
                 <a:solidFill>
                   <a:srgbClr val="3D5466"/>
                 </a:solidFill>
                 <a:latin typeface="Arial"/>
               </a:rPr>
-              <a:t>```</a:t>
+              <a:t>▸  ```</a:t>
             </a:r>
           </a:p>
           <a:p>
@@ -8365,13 +9348,13 @@
               </a:spcAft>
             </a:pPr>
             <a:r>
-              <a:rPr sz="1200">
+              <a:rPr sz="1300">
                 <a:solidFill>
                   <a:srgbClr val="3D5466"/>
                 </a:solidFill>
                 <a:latin typeface="Arial"/>
               </a:rPr>
-              <a:t>Modifizierte Ertragswertmethode (IDW S5):</a:t>
+              <a:t>▸  Modifizierte Ertragswertmethode (IDW S5):</a:t>
             </a:r>
           </a:p>
           <a:p>
@@ -8422,13 +9405,13 @@
               </a:spcAft>
             </a:pPr>
             <a:r>
-              <a:rPr sz="1200">
+              <a:rPr sz="1300">
                 <a:solidFill>
                   <a:srgbClr val="3D5466"/>
                 </a:solidFill>
                 <a:latin typeface="Arial"/>
               </a:rPr>
-              <a:t>Praxiswert gesamt = Substanzwert + Goodwill</a:t>
+              <a:t>▸  Praxiswert gesamt = Substanzwert + Goodwill</a:t>
             </a:r>
           </a:p>
           <a:p>
@@ -8441,13 +9424,13 @@
               </a:spcAft>
             </a:pPr>
             <a:r>
-              <a:rPr sz="1200">
+              <a:rPr sz="1300">
                 <a:solidFill>
                   <a:srgbClr val="3D5466"/>
                 </a:solidFill>
                 <a:latin typeface="Arial"/>
               </a:rPr>
-              <a:t>```</a:t>
+              <a:t>▸  ```</a:t>
             </a:r>
           </a:p>
           <a:p>
@@ -8460,13 +9443,13 @@
               </a:spcAft>
             </a:pPr>
             <a:r>
-              <a:rPr sz="1200">
+              <a:rPr sz="1300">
                 <a:solidFill>
                   <a:srgbClr val="3D5466"/>
                 </a:solidFill>
                 <a:latin typeface="Arial"/>
               </a:rPr>
-              <a:t>Quelle: IDW S5 (2021 ); Frodl (2019 )</a:t>
+              <a:t>▸  Quelle: IDW S5 (2021 ); Frodl (2019 )</a:t>
             </a:r>
           </a:p>
           <a:p>
@@ -8498,13 +9481,13 @@
               </a:spcAft>
             </a:pPr>
             <a:r>
-              <a:rPr sz="1200">
+              <a:rPr sz="1300">
                 <a:solidFill>
                   <a:srgbClr val="3D5466"/>
                 </a:solidFill>
                 <a:latin typeface="Arial"/>
               </a:rPr>
-              <a:t>Medizinische Versorgungszentren (MVZ):</a:t>
+              <a:t>▸  Medizinische Versorgungszentren (MVZ):</a:t>
             </a:r>
           </a:p>
         </p:txBody>
@@ -9251,13 +10234,13 @@
               </a:spcAft>
             </a:pPr>
             <a:r>
-              <a:rPr sz="1200">
+              <a:rPr sz="1300">
                 <a:solidFill>
                   <a:srgbClr val="3D5466"/>
                 </a:solidFill>
                 <a:latin typeface="Arial"/>
               </a:rPr>
-              <a:t>Zulassungsrisiko:</a:t>
+              <a:t>▸  Zulassungsrisiko:</a:t>
             </a:r>
           </a:p>
           <a:p>
@@ -9270,13 +10253,13 @@
               </a:spcAft>
             </a:pPr>
             <a:r>
-              <a:rPr sz="1200">
+              <a:rPr sz="1300">
                 <a:solidFill>
                   <a:srgbClr val="3D5466"/>
                 </a:solidFill>
                 <a:latin typeface="Arial"/>
               </a:rPr>
-              <a:t>Kassenarztzulassung und ihre Übertragbarkeit in der Nachfolge:</a:t>
+              <a:t>▸  Kassenarztzulassung und ihre Übertragbarkeit in der Nachfolge:</a:t>
             </a:r>
           </a:p>
           <a:p>
@@ -9289,13 +10272,13 @@
               </a:spcAft>
             </a:pPr>
             <a:r>
-              <a:rPr sz="1200">
+              <a:rPr sz="1300">
                 <a:solidFill>
                   <a:srgbClr val="3D5466"/>
                 </a:solidFill>
                 <a:latin typeface="Arial"/>
               </a:rPr>
-              <a:t>Regressrisiko:</a:t>
+              <a:t>▸  Regressrisiko:</a:t>
             </a:r>
           </a:p>
           <a:p>
@@ -9308,13 +10291,13 @@
               </a:spcAft>
             </a:pPr>
             <a:r>
-              <a:rPr sz="1200">
+              <a:rPr sz="1300">
                 <a:solidFill>
                   <a:srgbClr val="3D5466"/>
                 </a:solidFill>
                 <a:latin typeface="Arial"/>
               </a:rPr>
-              <a:t>Inhaberabhängigkeit:</a:t>
+              <a:t>▸  Inhaberabhängigkeit:</a:t>
             </a:r>
           </a:p>
           <a:p>
@@ -9327,13 +10310,13 @@
               </a:spcAft>
             </a:pPr>
             <a:r>
-              <a:rPr sz="1200">
+              <a:rPr sz="1300">
                 <a:solidFill>
                   <a:srgbClr val="3D5466"/>
                 </a:solidFill>
                 <a:latin typeface="Arial"/>
               </a:rPr>
-              <a:t>Versorgungswerk statt gesetzliche Rentenversicherung:</a:t>
+              <a:t>▸  Versorgungswerk statt gesetzliche Rentenversicherung:</a:t>
             </a:r>
           </a:p>
           <a:p>
@@ -9346,13 +10329,13 @@
               </a:spcAft>
             </a:pPr>
             <a:r>
-              <a:rPr sz="1200">
+              <a:rPr sz="1300">
                 <a:solidFill>
                   <a:srgbClr val="3D5466"/>
                 </a:solidFill>
                 <a:latin typeface="Arial"/>
               </a:rPr>
-              <a:t>Strukturrisiko MVZ-Konsolidierung:</a:t>
+              <a:t>▸  Strukturrisiko MVZ-Konsolidierung:</a:t>
             </a:r>
           </a:p>
           <a:p>
@@ -9384,13 +10367,13 @@
               </a:spcAft>
             </a:pPr>
             <a:r>
-              <a:rPr sz="1200">
+              <a:rPr sz="1300">
                 <a:solidFill>
                   <a:srgbClr val="3D5466"/>
                 </a:solidFill>
                 <a:latin typeface="Arial"/>
               </a:rPr>
-              <a:t>§ 18 KWG (Offenlegungspflicht ab 750.000 EUR Kreditbetrag) ist zu beachten. Die gesamtschuldnerische Bonitätsanalyse bei Praxisübernahmen folgt MaRisk BTO 1.2.1 .</a:t>
+              <a:t>▸  § 18 KWG (Offenlegungspflicht ab 750.000 EUR Kreditbetrag) ist zu beachten. Die gesamtschuldnerische Bonitätsanalyse bei Praxisübernahmen folgt MaRisk BTO 1.2.1 .</a:t>
             </a:r>
           </a:p>
           <a:p>
@@ -9422,13 +10405,13 @@
               </a:spcAft>
             </a:pPr>
             <a:r>
-              <a:rPr sz="1200">
+              <a:rPr sz="1300">
                 <a:solidFill>
                   <a:srgbClr val="3D5466"/>
                 </a:solidFill>
                 <a:latin typeface="Arial"/>
               </a:rPr>
-              <a:t>Das Tilgungsaussetzungsmodell (Vorfinanzierung mit Bausparvertrag):</a:t>
+              <a:t>▸  Das Tilgungsaussetzungsmodell (Vorfinanzierung mit Bausparvertrag):</a:t>
             </a:r>
           </a:p>
           <a:p>
@@ -9441,13 +10424,13 @@
               </a:spcAft>
             </a:pPr>
             <a:r>
-              <a:rPr sz="1200">
+              <a:rPr sz="1300">
                 <a:solidFill>
                   <a:srgbClr val="3D5466"/>
                 </a:solidFill>
                 <a:latin typeface="Arial"/>
               </a:rPr>
-              <a:t>Vorteile für den Kunden:</a:t>
+              <a:t>▸  Vorteile für den Kunden:</a:t>
             </a:r>
           </a:p>
         </p:txBody>

--- a/protected-downloads/praesentation/M07.pptx
+++ b/protected-downloads/praesentation/M07.pptx
@@ -4582,7 +4582,7 @@
                 </a:solidFill>
                 <a:latin typeface="JetBrains Mono"/>
               </a:rPr>
-              <a:t>Benedikt Zoller Coaching  ·  FKB Campus  ·  2026</a:t>
+              <a:t>FKB Campus  ·  2026</a:t>
             </a:r>
           </a:p>
         </p:txBody>
@@ -5206,7 +5206,7 @@
                 </a:solidFill>
                 <a:latin typeface="JetBrains Mono"/>
               </a:rPr>
-              <a:t>Benedikt Zoller Coaching  ·  FKB Campus  ·  M07</a:t>
+              <a:t>FKB Campus  ·  M07</a:t>
             </a:r>
           </a:p>
         </p:txBody>
@@ -5841,7 +5841,7 @@
                 </a:solidFill>
                 <a:latin typeface="JetBrains Mono"/>
               </a:rPr>
-              <a:t>Benedikt Zoller Coaching  ·  FKB Campus  ·  M07</a:t>
+              <a:t>FKB Campus  ·  M07</a:t>
             </a:r>
           </a:p>
         </p:txBody>
@@ -6465,7 +6465,7 @@
                 </a:solidFill>
                 <a:latin typeface="JetBrains Mono"/>
               </a:rPr>
-              <a:t>Benedikt Zoller Coaching  ·  FKB Campus  ·  M07</a:t>
+              <a:t>FKB Campus  ·  M07</a:t>
             </a:r>
           </a:p>
         </p:txBody>
@@ -6883,7 +6883,7 @@
                 </a:solidFill>
                 <a:latin typeface="JetBrains Mono"/>
               </a:rPr>
-              <a:t>Benedikt Zoller Coaching  ·  FKB Campus  ·  M07</a:t>
+              <a:t>FKB Campus  ·  M07</a:t>
             </a:r>
           </a:p>
         </p:txBody>
@@ -7249,7 +7249,7 @@
                 </a:solidFill>
                 <a:latin typeface="JetBrains Mono"/>
               </a:rPr>
-              <a:t>Benedikt Zoller Coaching  ·  FKB Campus  ·  M07</a:t>
+              <a:t>FKB Campus  ·  M07</a:t>
             </a:r>
           </a:p>
         </p:txBody>
@@ -7643,7 +7643,7 @@
                 </a:solidFill>
                 <a:latin typeface="JetBrains Mono"/>
               </a:rPr>
-              <a:t>Benedikt Zoller Coaching  ·  FKB Campus  ·  M07</a:t>
+              <a:t>FKB Campus  ·  M07</a:t>
             </a:r>
           </a:p>
         </p:txBody>
@@ -8387,7 +8387,7 @@
                 </a:solidFill>
                 <a:latin typeface="JetBrains Mono"/>
               </a:rPr>
-              <a:t>Benedikt Zoller Coaching  ·  FKB Campus  ·  M07</a:t>
+              <a:t>FKB Campus  ·  M07</a:t>
             </a:r>
           </a:p>
         </p:txBody>
@@ -8976,7 +8976,7 @@
                 </a:solidFill>
                 <a:latin typeface="JetBrains Mono"/>
               </a:rPr>
-              <a:t>Benedikt Zoller Coaching  ·  FKB Campus  ·  M07</a:t>
+              <a:t>FKB Campus  ·  M07</a:t>
             </a:r>
           </a:p>
         </p:txBody>
@@ -9565,7 +9565,7 @@
                 </a:solidFill>
                 <a:latin typeface="JetBrains Mono"/>
               </a:rPr>
-              <a:t>Benedikt Zoller Coaching  ·  FKB Campus  ·  M07</a:t>
+              <a:t>FKB Campus  ·  M07</a:t>
             </a:r>
           </a:p>
         </p:txBody>
@@ -9884,7 +9884,7 @@
                 </a:solidFill>
                 <a:latin typeface="JetBrains Mono"/>
               </a:rPr>
-              <a:t>Benedikt Zoller Coaching  ·  FKB Campus  ·  M07</a:t>
+              <a:t>FKB Campus  ·  M07</a:t>
             </a:r>
           </a:p>
         </p:txBody>
@@ -10508,7 +10508,7 @@
                 </a:solidFill>
                 <a:latin typeface="JetBrains Mono"/>
               </a:rPr>
-              <a:t>Benedikt Zoller Coaching  ·  FKB Campus  ·  M07</a:t>
+              <a:t>FKB Campus  ·  M07</a:t>
             </a:r>
           </a:p>
         </p:txBody>
@@ -10827,7 +10827,7 @@
                 </a:solidFill>
                 <a:latin typeface="JetBrains Mono"/>
               </a:rPr>
-              <a:t>Benedikt Zoller Coaching  ·  FKB Campus  ·  M07</a:t>
+              <a:t>FKB Campus  ·  M07</a:t>
             </a:r>
           </a:p>
         </p:txBody>

--- a/protected-downloads/praesentation/M07.pptx
+++ b/protected-downloads/praesentation/M07.pptx
@@ -4504,7 +4504,7 @@
                 </a:solidFill>
                 <a:latin typeface="Arial"/>
               </a:rPr>
-              <a:t>v0.3</a:t>
+              <a:t>v1.0</a:t>
             </a:r>
           </a:p>
         </p:txBody>

--- a/protected-downloads/praesentation/M07.pptx
+++ b/protected-downloads/praesentation/M07.pptx
@@ -6136,7 +6136,7 @@
                 </a:solidFill>
                 <a:latin typeface="Source Serif 4"/>
               </a:rPr>
-              <a:t>Checkliste: Heilberufe-Erstgespräch (15 Punkte)</a:t>
+              <a:t>AB-2: Checkliste Heilberufe-Erstgespräch (15 Punkte)</a:t>
             </a:r>
           </a:p>
         </p:txBody>

--- a/protected-downloads/praesentation/M07.pptx
+++ b/protected-downloads/praesentation/M07.pptx
@@ -4179,7 +4179,7 @@
                 <a:solidFill>
                   <a:srgbClr val="C8D2E6"/>
                 </a:solidFill>
-                <a:latin typeface="JetBrains Mono"/>
+                <a:latin typeface="Consolas"/>
               </a:rPr>
               <a:t>FKB CAMPUS  ·  FIRMENKUNDENAKADEMIE  ·  M07</a:t>
             </a:r>
@@ -4214,7 +4214,7 @@
                 <a:solidFill>
                   <a:srgbClr val="FFFFFF"/>
                 </a:solidFill>
-                <a:latin typeface="Source Serif 4"/>
+                <a:latin typeface="Arial"/>
               </a:rPr>
               <a:t>Branchenvertiefung Heilberufe</a:t>
             </a:r>
@@ -4249,7 +4249,7 @@
                 <a:solidFill>
                   <a:srgbClr val="BECDE6"/>
                 </a:solidFill>
-                <a:latin typeface="Source Serif 4"/>
+                <a:latin typeface="Arial"/>
               </a:rPr>
               <a:t>Arztpraxen, Apotheken und Heilberufe als Firmenkundensegment</a:t>
             </a:r>
@@ -4327,7 +4327,7 @@
                 <a:solidFill>
                   <a:srgbClr val="A0B4D2"/>
                 </a:solidFill>
-                <a:latin typeface="JetBrains Mono"/>
+                <a:latin typeface="Consolas"/>
               </a:rPr>
               <a:t>KOMPETENZFELD</a:t>
             </a:r>
@@ -4397,7 +4397,7 @@
                 <a:solidFill>
                   <a:srgbClr val="A0B4D2"/>
                 </a:solidFill>
-                <a:latin typeface="JetBrains Mono"/>
+                <a:latin typeface="Consolas"/>
               </a:rPr>
               <a:t>KOMPETENZSTUFE</a:t>
             </a:r>
@@ -4467,7 +4467,7 @@
                 <a:solidFill>
                   <a:srgbClr val="A0B4D2"/>
                 </a:solidFill>
-                <a:latin typeface="JetBrains Mono"/>
+                <a:latin typeface="Consolas"/>
               </a:rPr>
               <a:t>VERSION</a:t>
             </a:r>
@@ -4580,7 +4580,7 @@
                 <a:solidFill>
                   <a:srgbClr val="96A5BE"/>
                 </a:solidFill>
-                <a:latin typeface="JetBrains Mono"/>
+                <a:latin typeface="Consolas"/>
               </a:rPr>
               <a:t>FKB Campus  ·  2026</a:t>
             </a:r>
@@ -4615,7 +4615,7 @@
                 <a:solidFill>
                   <a:srgbClr val="96A5BE"/>
                 </a:solidFill>
-                <a:latin typeface="JetBrains Mono"/>
+                <a:latin typeface="Consolas"/>
               </a:rPr>
               <a:t>Trainer-Präsentation</a:t>
             </a:r>
@@ -4754,7 +4754,7 @@
                 <a:solidFill>
                   <a:srgbClr val="78808C"/>
                 </a:solidFill>
-                <a:latin typeface="JetBrains Mono"/>
+                <a:latin typeface="Consolas"/>
               </a:rPr>
               <a:t>M07  ·  INHALT</a:t>
             </a:r>
@@ -4875,7 +4875,7 @@
                 <a:solidFill>
                   <a:srgbClr val="1F2C56"/>
                 </a:solidFill>
-                <a:latin typeface="Source Serif 4"/>
+                <a:latin typeface="Arial"/>
               </a:rPr>
               <a:t>Praxiscase: Dr. Mayer – Zahnarztpraxis-Übernahme in Ravensburg</a:t>
             </a:r>
@@ -4891,7 +4891,7 @@
         <p:spPr>
           <a:xfrm>
             <a:off x="685800" y="1417320"/>
-            <a:ext cx="10817352" cy="5029200"/>
+            <a:ext cx="10817352" cy="4892040"/>
           </a:xfrm>
           <a:prstGeom prst="rect">
             <a:avLst/>
@@ -4917,13 +4917,13 @@
                 <a:solidFill>
                   <a:srgbClr val="78808C"/>
                 </a:solidFill>
-                <a:latin typeface="JetBrains Mono"/>
+                <a:latin typeface="Consolas"/>
               </a:rPr>
               <a:t>AUSGANGSSITUATION</a:t>
             </a:r>
           </a:p>
           <a:p>
-            <a:pPr>
+            <a:pPr marL="190500" indent="-190500">
               <a:spcBef>
                 <a:spcPts val="400"/>
               </a:spcBef>
@@ -4942,7 +4942,7 @@
             </a:r>
           </a:p>
           <a:p>
-            <a:pPr>
+            <a:pPr marL="190500" indent="-190500">
               <a:spcBef>
                 <a:spcPts val="400"/>
               </a:spcBef>
@@ -4961,7 +4961,7 @@
             </a:r>
           </a:p>
           <a:p>
-            <a:pPr>
+            <a:pPr marL="190500" indent="-190500">
               <a:spcBef>
                 <a:spcPts val="400"/>
               </a:spcBef>
@@ -4980,7 +4980,7 @@
             </a:r>
           </a:p>
           <a:p>
-            <a:pPr>
+            <a:pPr marL="190500" indent="-190500">
               <a:spcBef>
                 <a:spcPts val="400"/>
               </a:spcBef>
@@ -4999,7 +4999,7 @@
             </a:r>
           </a:p>
           <a:p>
-            <a:pPr>
+            <a:pPr marL="190500" indent="-190500">
               <a:spcBef>
                 <a:spcPts val="400"/>
               </a:spcBef>
@@ -5018,7 +5018,7 @@
             </a:r>
           </a:p>
           <a:p>
-            <a:pPr>
+            <a:pPr marL="190500" indent="-190500">
               <a:spcBef>
                 <a:spcPts val="400"/>
               </a:spcBef>
@@ -5037,7 +5037,7 @@
             </a:r>
           </a:p>
           <a:p>
-            <a:pPr>
+            <a:pPr marL="190500" indent="-190500">
               <a:spcBef>
                 <a:spcPts val="400"/>
               </a:spcBef>
@@ -5056,7 +5056,7 @@
             </a:r>
           </a:p>
           <a:p>
-            <a:pPr>
+            <a:pPr marL="190500" indent="-190500">
               <a:spcBef>
                 <a:spcPts val="400"/>
               </a:spcBef>
@@ -5075,7 +5075,7 @@
             </a:r>
           </a:p>
           <a:p>
-            <a:pPr>
+            <a:pPr marL="190500" indent="-190500">
               <a:spcBef>
                 <a:spcPts val="400"/>
               </a:spcBef>
@@ -5094,7 +5094,7 @@
             </a:r>
           </a:p>
           <a:p>
-            <a:pPr>
+            <a:pPr marL="190500" indent="-190500">
               <a:spcBef>
                 <a:spcPts val="400"/>
               </a:spcBef>
@@ -5113,7 +5113,7 @@
             </a:r>
           </a:p>
           <a:p>
-            <a:pPr>
+            <a:pPr marL="190500" indent="-190500">
               <a:spcBef>
                 <a:spcPts val="400"/>
               </a:spcBef>
@@ -5204,7 +5204,7 @@
                 <a:solidFill>
                   <a:srgbClr val="A0B4D2"/>
                 </a:solidFill>
-                <a:latin typeface="JetBrains Mono"/>
+                <a:latin typeface="Consolas"/>
               </a:rPr>
               <a:t>FKB Campus  ·  M07</a:t>
             </a:r>
@@ -5343,7 +5343,7 @@
                 <a:solidFill>
                   <a:srgbClr val="78808C"/>
                 </a:solidFill>
-                <a:latin typeface="JetBrains Mono"/>
+                <a:latin typeface="Consolas"/>
               </a:rPr>
               <a:t>M07  ·  ÜBERSICHT</a:t>
             </a:r>
@@ -5378,7 +5378,7 @@
                 <a:solidFill>
                   <a:srgbClr val="1F2C56"/>
                 </a:solidFill>
-                <a:latin typeface="Source Serif 4"/>
+                <a:latin typeface="Arial"/>
               </a:rPr>
               <a:t>Praxiscase: Dr. Mayer – Zahnarztpraxis-Übernahme in Ravensburg</a:t>
             </a:r>
@@ -5839,7 +5839,7 @@
                 <a:solidFill>
                   <a:srgbClr val="A0B4D2"/>
                 </a:solidFill>
-                <a:latin typeface="JetBrains Mono"/>
+                <a:latin typeface="Consolas"/>
               </a:rPr>
               <a:t>FKB Campus  ·  M07</a:t>
             </a:r>
@@ -5874,7 +5874,7 @@
                 <a:solidFill>
                   <a:srgbClr val="A0B4D2"/>
                 </a:solidFill>
-                <a:latin typeface="JetBrains Mono"/>
+                <a:latin typeface="Consolas"/>
               </a:rPr>
               <a:t>Übersicht</a:t>
             </a:r>
@@ -6013,7 +6013,7 @@
                 <a:solidFill>
                   <a:srgbClr val="78808C"/>
                 </a:solidFill>
-                <a:latin typeface="JetBrains Mono"/>
+                <a:latin typeface="Consolas"/>
               </a:rPr>
               <a:t>M07  ·  INHALT</a:t>
             </a:r>
@@ -6134,7 +6134,7 @@
                 <a:solidFill>
                   <a:srgbClr val="1F2C56"/>
                 </a:solidFill>
-                <a:latin typeface="Source Serif 4"/>
+                <a:latin typeface="Arial"/>
               </a:rPr>
               <a:t>AB-2: Checkliste Heilberufe-Erstgespräch (15 Punkte)</a:t>
             </a:r>
@@ -6150,7 +6150,7 @@
         <p:spPr>
           <a:xfrm>
             <a:off x="685800" y="1417320"/>
-            <a:ext cx="10817352" cy="5029200"/>
+            <a:ext cx="10817352" cy="4892040"/>
           </a:xfrm>
           <a:prstGeom prst="rect">
             <a:avLst/>
@@ -6163,7 +6163,7 @@
           </a:bodyPr>
           <a:lstStyle/>
           <a:p>
-            <a:pPr>
+            <a:pPr marL="190500" indent="-190500">
               <a:spcBef>
                 <a:spcPts val="400"/>
               </a:spcBef>
@@ -6182,7 +6182,7 @@
             </a:r>
           </a:p>
           <a:p>
-            <a:pPr>
+            <a:pPr marL="190500" indent="-190500">
               <a:spcBef>
                 <a:spcPts val="400"/>
               </a:spcBef>
@@ -6201,7 +6201,7 @@
             </a:r>
           </a:p>
           <a:p>
-            <a:pPr>
+            <a:pPr marL="190500" indent="-190500">
               <a:spcBef>
                 <a:spcPts val="400"/>
               </a:spcBef>
@@ -6220,7 +6220,7 @@
             </a:r>
           </a:p>
           <a:p>
-            <a:pPr>
+            <a:pPr marL="190500" indent="-190500">
               <a:spcBef>
                 <a:spcPts val="400"/>
               </a:spcBef>
@@ -6239,7 +6239,7 @@
             </a:r>
           </a:p>
           <a:p>
-            <a:pPr>
+            <a:pPr marL="190500" indent="-190500">
               <a:spcBef>
                 <a:spcPts val="400"/>
               </a:spcBef>
@@ -6258,7 +6258,7 @@
             </a:r>
           </a:p>
           <a:p>
-            <a:pPr>
+            <a:pPr marL="190500" indent="-190500">
               <a:spcBef>
                 <a:spcPts val="400"/>
               </a:spcBef>
@@ -6277,7 +6277,7 @@
             </a:r>
           </a:p>
           <a:p>
-            <a:pPr>
+            <a:pPr marL="190500" indent="-190500">
               <a:spcBef>
                 <a:spcPts val="400"/>
               </a:spcBef>
@@ -6296,7 +6296,7 @@
             </a:r>
           </a:p>
           <a:p>
-            <a:pPr>
+            <a:pPr marL="190500" indent="-190500">
               <a:spcBef>
                 <a:spcPts val="400"/>
               </a:spcBef>
@@ -6315,7 +6315,7 @@
             </a:r>
           </a:p>
           <a:p>
-            <a:pPr>
+            <a:pPr marL="190500" indent="-190500">
               <a:spcBef>
                 <a:spcPts val="400"/>
               </a:spcBef>
@@ -6334,7 +6334,7 @@
             </a:r>
           </a:p>
           <a:p>
-            <a:pPr>
+            <a:pPr marL="190500" indent="-190500">
               <a:spcBef>
                 <a:spcPts val="400"/>
               </a:spcBef>
@@ -6353,7 +6353,7 @@
             </a:r>
           </a:p>
           <a:p>
-            <a:pPr>
+            <a:pPr marL="190500" indent="-190500">
               <a:spcBef>
                 <a:spcPts val="400"/>
               </a:spcBef>
@@ -6372,7 +6372,7 @@
             </a:r>
           </a:p>
           <a:p>
-            <a:pPr>
+            <a:pPr marL="190500" indent="-190500">
               <a:spcBef>
                 <a:spcPts val="400"/>
               </a:spcBef>
@@ -6463,7 +6463,7 @@
                 <a:solidFill>
                   <a:srgbClr val="A0B4D2"/>
                 </a:solidFill>
-                <a:latin typeface="JetBrains Mono"/>
+                <a:latin typeface="Consolas"/>
               </a:rPr>
               <a:t>FKB Campus  ·  M07</a:t>
             </a:r>
@@ -6602,7 +6602,7 @@
                 <a:solidFill>
                   <a:srgbClr val="78808C"/>
                 </a:solidFill>
-                <a:latin typeface="JetBrains Mono"/>
+                <a:latin typeface="Consolas"/>
               </a:rPr>
               <a:t>M07  ·  INHALT</a:t>
             </a:r>
@@ -6723,7 +6723,7 @@
                 <a:solidFill>
                   <a:srgbClr val="1F2C56"/>
                 </a:solidFill>
-                <a:latin typeface="Source Serif 4"/>
+                <a:latin typeface="Arial"/>
               </a:rPr>
               <a:t>Reflexionsfragen</a:t>
             </a:r>
@@ -6739,7 +6739,7 @@
         <p:spPr>
           <a:xfrm>
             <a:off x="685800" y="1417320"/>
-            <a:ext cx="10817352" cy="5029200"/>
+            <a:ext cx="10817352" cy="4892040"/>
           </a:xfrm>
           <a:prstGeom prst="rect">
             <a:avLst/>
@@ -6747,12 +6747,12 @@
           <a:noFill/>
         </p:spPr>
         <p:txBody>
-          <a:bodyPr wrap="square">
+          <a:bodyPr wrap="square" anchor="ctr">
             <a:spAutoFit/>
           </a:bodyPr>
           <a:lstStyle/>
           <a:p>
-            <a:pPr>
+            <a:pPr marL="190500" indent="-190500">
               <a:spcBef>
                 <a:spcPts val="400"/>
               </a:spcBef>
@@ -6771,7 +6771,7 @@
             </a:r>
           </a:p>
           <a:p>
-            <a:pPr>
+            <a:pPr marL="190500" indent="-190500">
               <a:spcBef>
                 <a:spcPts val="400"/>
               </a:spcBef>
@@ -6790,7 +6790,7 @@
             </a:r>
           </a:p>
           <a:p>
-            <a:pPr>
+            <a:pPr marL="190500" indent="-190500">
               <a:spcBef>
                 <a:spcPts val="400"/>
               </a:spcBef>
@@ -6881,7 +6881,7 @@
                 <a:solidFill>
                   <a:srgbClr val="A0B4D2"/>
                 </a:solidFill>
-                <a:latin typeface="JetBrains Mono"/>
+                <a:latin typeface="Consolas"/>
               </a:rPr>
               <a:t>FKB Campus  ·  M07</a:t>
             </a:r>
@@ -7020,7 +7020,7 @@
                 <a:solidFill>
                   <a:srgbClr val="78808C"/>
                 </a:solidFill>
-                <a:latin typeface="JetBrains Mono"/>
+                <a:latin typeface="Consolas"/>
               </a:rPr>
               <a:t>ÜBERBLICK  ·  M07</a:t>
             </a:r>
@@ -7098,7 +7098,7 @@
                 <a:solidFill>
                   <a:srgbClr val="1F2C56"/>
                 </a:solidFill>
-                <a:latin typeface="Source Serif 4"/>
+                <a:latin typeface="Arial"/>
               </a:rPr>
               <a:t>Worum geht es heute</a:t>
             </a:r>
@@ -7247,7 +7247,7 @@
                 <a:solidFill>
                   <a:srgbClr val="A0B4D2"/>
                 </a:solidFill>
-                <a:latin typeface="JetBrains Mono"/>
+                <a:latin typeface="Consolas"/>
               </a:rPr>
               <a:t>FKB Campus  ·  M07</a:t>
             </a:r>
@@ -7386,7 +7386,7 @@
                 <a:solidFill>
                   <a:srgbClr val="78808C"/>
                 </a:solidFill>
-                <a:latin typeface="JetBrains Mono"/>
+                <a:latin typeface="Consolas"/>
               </a:rPr>
               <a:t>LERNZIELE  ·  M07</a:t>
             </a:r>
@@ -7464,7 +7464,7 @@
                 <a:solidFill>
                   <a:srgbClr val="1F2C56"/>
                 </a:solidFill>
-                <a:latin typeface="Source Serif 4"/>
+                <a:latin typeface="Arial"/>
               </a:rPr>
               <a:t>Was Sie heute mitnehmen</a:t>
             </a:r>
@@ -7641,7 +7641,7 @@
                 <a:solidFill>
                   <a:srgbClr val="A0B4D2"/>
                 </a:solidFill>
-                <a:latin typeface="JetBrains Mono"/>
+                <a:latin typeface="Consolas"/>
               </a:rPr>
               <a:t>FKB Campus  ·  M07</a:t>
             </a:r>
@@ -7780,7 +7780,7 @@
                 <a:solidFill>
                   <a:srgbClr val="78808C"/>
                 </a:solidFill>
-                <a:latin typeface="JetBrains Mono"/>
+                <a:latin typeface="Consolas"/>
               </a:rPr>
               <a:t>AGENDA  ·  M07</a:t>
             </a:r>
@@ -7858,7 +7858,7 @@
                 <a:solidFill>
                   <a:srgbClr val="1F2C56"/>
                 </a:solidFill>
-                <a:latin typeface="Source Serif 4"/>
+                <a:latin typeface="Arial"/>
               </a:rPr>
               <a:t>So läuft das Modul</a:t>
             </a:r>
@@ -8385,7 +8385,7 @@
                 <a:solidFill>
                   <a:srgbClr val="A0B4D2"/>
                 </a:solidFill>
-                <a:latin typeface="JetBrains Mono"/>
+                <a:latin typeface="Consolas"/>
               </a:rPr>
               <a:t>FKB Campus  ·  M07</a:t>
             </a:r>
@@ -8524,7 +8524,7 @@
                 <a:solidFill>
                   <a:srgbClr val="78808C"/>
                 </a:solidFill>
-                <a:latin typeface="JetBrains Mono"/>
+                <a:latin typeface="Consolas"/>
               </a:rPr>
               <a:t>M07  ·  INHALT</a:t>
             </a:r>
@@ -8645,7 +8645,7 @@
                 <a:solidFill>
                   <a:srgbClr val="1F2C56"/>
                 </a:solidFill>
-                <a:latin typeface="Source Serif 4"/>
+                <a:latin typeface="Arial"/>
               </a:rPr>
               <a:t>Theorie-Input 1: Freie Berufe – rechtliche und wirtschaftliche Grundlagen</a:t>
             </a:r>
@@ -8661,7 +8661,7 @@
         <p:spPr>
           <a:xfrm>
             <a:off x="685800" y="1417320"/>
-            <a:ext cx="10817352" cy="5029200"/>
+            <a:ext cx="10817352" cy="4892040"/>
           </a:xfrm>
           <a:prstGeom prst="rect">
             <a:avLst/>
@@ -8687,13 +8687,13 @@
                 <a:solidFill>
                   <a:srgbClr val="78808C"/>
                 </a:solidFill>
-                <a:latin typeface="JetBrains Mono"/>
+                <a:latin typeface="Consolas"/>
               </a:rPr>
               <a:t>ABGRENZUNG: FREIER BERUF VS. GEWERBE</a:t>
             </a:r>
           </a:p>
           <a:p>
-            <a:pPr>
+            <a:pPr marL="190500" indent="-190500">
               <a:spcBef>
                 <a:spcPts val="400"/>
               </a:spcBef>
@@ -8712,7 +8712,7 @@
             </a:r>
           </a:p>
           <a:p>
-            <a:pPr>
+            <a:pPr marL="190500" indent="-190500">
               <a:spcBef>
                 <a:spcPts val="400"/>
               </a:spcBef>
@@ -8744,13 +8744,13 @@
                 <a:solidFill>
                   <a:srgbClr val="78808C"/>
                 </a:solidFill>
-                <a:latin typeface="JetBrains Mono"/>
+                <a:latin typeface="Consolas"/>
               </a:rPr>
               <a:t>PRAXISRELEVANZ: EINZELPRAXIS, BERUFSAUSÜBUNGSGEMEINSCHAFT (BAG) UND MVZ IM VERGLEICH</a:t>
             </a:r>
           </a:p>
           <a:p>
-            <a:pPr>
+            <a:pPr marL="190500" indent="-190500">
               <a:spcBef>
                 <a:spcPts val="400"/>
               </a:spcBef>
@@ -8769,7 +8769,7 @@
             </a:r>
           </a:p>
           <a:p>
-            <a:pPr>
+            <a:pPr marL="190500" indent="-190500">
               <a:spcBef>
                 <a:spcPts val="400"/>
               </a:spcBef>
@@ -8788,7 +8788,7 @@
             </a:r>
           </a:p>
           <a:p>
-            <a:pPr>
+            <a:pPr marL="190500" indent="-190500">
               <a:spcBef>
                 <a:spcPts val="400"/>
               </a:spcBef>
@@ -8807,7 +8807,7 @@
             </a:r>
           </a:p>
           <a:p>
-            <a:pPr>
+            <a:pPr marL="190500" indent="-190500">
               <a:spcBef>
                 <a:spcPts val="400"/>
               </a:spcBef>
@@ -8826,7 +8826,7 @@
             </a:r>
           </a:p>
           <a:p>
-            <a:pPr>
+            <a:pPr marL="190500" indent="-190500">
               <a:spcBef>
                 <a:spcPts val="400"/>
               </a:spcBef>
@@ -8845,7 +8845,7 @@
             </a:r>
           </a:p>
           <a:p>
-            <a:pPr>
+            <a:pPr marL="190500" indent="-190500">
               <a:spcBef>
                 <a:spcPts val="400"/>
               </a:spcBef>
@@ -8877,13 +8877,13 @@
                 <a:solidFill>
                   <a:srgbClr val="78808C"/>
                 </a:solidFill>
-                <a:latin typeface="JetBrains Mono"/>
+                <a:latin typeface="Consolas"/>
               </a:rPr>
               <a:t>EÜR VS. BILANZ: WAS DER BERATER WISSEN MUSS</a:t>
             </a:r>
           </a:p>
           <a:p>
-            <a:pPr>
+            <a:pPr marL="190500" indent="-190500">
               <a:spcBef>
                 <a:spcPts val="400"/>
               </a:spcBef>
@@ -8974,7 +8974,7 @@
                 <a:solidFill>
                   <a:srgbClr val="A0B4D2"/>
                 </a:solidFill>
-                <a:latin typeface="JetBrains Mono"/>
+                <a:latin typeface="Consolas"/>
               </a:rPr>
               <a:t>FKB Campus  ·  M07</a:t>
             </a:r>
@@ -9113,7 +9113,7 @@
                 <a:solidFill>
                   <a:srgbClr val="78808C"/>
                 </a:solidFill>
-                <a:latin typeface="JetBrains Mono"/>
+                <a:latin typeface="Consolas"/>
               </a:rPr>
               <a:t>M07  ·  INHALT</a:t>
             </a:r>
@@ -9234,7 +9234,7 @@
                 <a:solidFill>
                   <a:srgbClr val="1F2C56"/>
                 </a:solidFill>
-                <a:latin typeface="Source Serif 4"/>
+                <a:latin typeface="Arial"/>
               </a:rPr>
               <a:t>Theorie-Input 2: Praxisbewertung und Finanzierungsstruktur</a:t>
             </a:r>
@@ -9250,7 +9250,7 @@
         <p:spPr>
           <a:xfrm>
             <a:off x="685800" y="1417320"/>
-            <a:ext cx="10817352" cy="5029200"/>
+            <a:ext cx="10817352" cy="4892040"/>
           </a:xfrm>
           <a:prstGeom prst="rect">
             <a:avLst/>
@@ -9276,13 +9276,13 @@
                 <a:solidFill>
                   <a:srgbClr val="78808C"/>
                 </a:solidFill>
-                <a:latin typeface="JetBrains Mono"/>
+                <a:latin typeface="Consolas"/>
               </a:rPr>
               <a:t>PRAXISÜBERNAHME VS. PRAXISGRÜNDUNG</a:t>
             </a:r>
           </a:p>
           <a:p>
-            <a:pPr>
+            <a:pPr marL="190500" indent="-190500">
               <a:spcBef>
                 <a:spcPts val="400"/>
               </a:spcBef>
@@ -9301,7 +9301,7 @@
             </a:r>
           </a:p>
           <a:p>
-            <a:pPr>
+            <a:pPr marL="190500" indent="-190500">
               <a:spcBef>
                 <a:spcPts val="400"/>
               </a:spcBef>
@@ -9320,7 +9320,7 @@
             </a:r>
           </a:p>
           <a:p>
-            <a:pPr>
+            <a:pPr marL="190500" indent="-190500">
               <a:spcBef>
                 <a:spcPts val="400"/>
               </a:spcBef>
@@ -9339,7 +9339,7 @@
             </a:r>
           </a:p>
           <a:p>
-            <a:pPr>
+            <a:pPr marL="190500" indent="-190500">
               <a:spcBef>
                 <a:spcPts val="400"/>
               </a:spcBef>
@@ -9358,7 +9358,7 @@
             </a:r>
           </a:p>
           <a:p>
-            <a:pPr>
+            <a:pPr marL="190500" indent="-190500">
               <a:spcBef>
                 <a:spcPts val="400"/>
               </a:spcBef>
@@ -9377,7 +9377,7 @@
             </a:r>
           </a:p>
           <a:p>
-            <a:pPr>
+            <a:pPr marL="190500" indent="-190500">
               <a:spcBef>
                 <a:spcPts val="400"/>
               </a:spcBef>
@@ -9396,7 +9396,7 @@
             </a:r>
           </a:p>
           <a:p>
-            <a:pPr>
+            <a:pPr marL="190500" indent="-190500">
               <a:spcBef>
                 <a:spcPts val="400"/>
               </a:spcBef>
@@ -9415,7 +9415,7 @@
             </a:r>
           </a:p>
           <a:p>
-            <a:pPr>
+            <a:pPr marL="190500" indent="-190500">
               <a:spcBef>
                 <a:spcPts val="400"/>
               </a:spcBef>
@@ -9434,7 +9434,7 @@
             </a:r>
           </a:p>
           <a:p>
-            <a:pPr>
+            <a:pPr marL="190500" indent="-190500">
               <a:spcBef>
                 <a:spcPts val="400"/>
               </a:spcBef>
@@ -9466,13 +9466,13 @@
                 <a:solidFill>
                   <a:srgbClr val="78808C"/>
                 </a:solidFill>
-                <a:latin typeface="JetBrains Mono"/>
+                <a:latin typeface="Consolas"/>
               </a:rPr>
               <a:t>TYPISCHE INVESTITIONSANLÄSSE IM ÜBERBLICK</a:t>
             </a:r>
           </a:p>
           <a:p>
-            <a:pPr>
+            <a:pPr marL="190500" indent="-190500">
               <a:spcBef>
                 <a:spcPts val="400"/>
               </a:spcBef>
@@ -9563,7 +9563,7 @@
                 <a:solidFill>
                   <a:srgbClr val="A0B4D2"/>
                 </a:solidFill>
-                <a:latin typeface="JetBrains Mono"/>
+                <a:latin typeface="Consolas"/>
               </a:rPr>
               <a:t>FKB Campus  ·  M07</a:t>
             </a:r>
@@ -9702,7 +9702,7 @@
                 <a:solidFill>
                   <a:srgbClr val="78808C"/>
                 </a:solidFill>
-                <a:latin typeface="JetBrains Mono"/>
+                <a:latin typeface="Consolas"/>
               </a:rPr>
               <a:t>M07  ·  SCHAUBILD</a:t>
             </a:r>
@@ -9737,7 +9737,7 @@
                 <a:solidFill>
                   <a:srgbClr val="1F2C56"/>
                 </a:solidFill>
-                <a:latin typeface="Source Serif 4"/>
+                <a:latin typeface="Arial"/>
               </a:rPr>
               <a:t>Praxiswert-Ermittlung nach IDW S5</a:t>
             </a:r>
@@ -9882,7 +9882,7 @@
                 <a:solidFill>
                   <a:srgbClr val="A0B4D2"/>
                 </a:solidFill>
-                <a:latin typeface="JetBrains Mono"/>
+                <a:latin typeface="Consolas"/>
               </a:rPr>
               <a:t>FKB Campus  ·  M07</a:t>
             </a:r>
@@ -9917,7 +9917,7 @@
                 <a:solidFill>
                   <a:srgbClr val="A0B4D2"/>
                 </a:solidFill>
-                <a:latin typeface="JetBrains Mono"/>
+                <a:latin typeface="Consolas"/>
               </a:rPr>
               <a:t>Schaubild</a:t>
             </a:r>
@@ -10056,7 +10056,7 @@
                 <a:solidFill>
                   <a:srgbClr val="78808C"/>
                 </a:solidFill>
-                <a:latin typeface="JetBrains Mono"/>
+                <a:latin typeface="Consolas"/>
               </a:rPr>
               <a:t>M07  ·  INHALT</a:t>
             </a:r>
@@ -10177,7 +10177,7 @@
                 <a:solidFill>
                   <a:srgbClr val="1F2C56"/>
                 </a:solidFill>
-                <a:latin typeface="Source Serif 4"/>
+                <a:latin typeface="Arial"/>
               </a:rPr>
               <a:t>Theorie-Input 3: Risikoprofil und Sicherheitenkonzept</a:t>
             </a:r>
@@ -10193,7 +10193,7 @@
         <p:spPr>
           <a:xfrm>
             <a:off x="685800" y="1417320"/>
-            <a:ext cx="10817352" cy="5029200"/>
+            <a:ext cx="10817352" cy="4892040"/>
           </a:xfrm>
           <a:prstGeom prst="rect">
             <a:avLst/>
@@ -10219,13 +10219,13 @@
                 <a:solidFill>
                   <a:srgbClr val="78808C"/>
                 </a:solidFill>
-                <a:latin typeface="JetBrains Mono"/>
+                <a:latin typeface="Consolas"/>
               </a:rPr>
               <a:t>SPEZIFISCHE RISIKEN BEI HEILBERUFE-KUNDEN</a:t>
             </a:r>
           </a:p>
           <a:p>
-            <a:pPr>
+            <a:pPr marL="190500" indent="-190500">
               <a:spcBef>
                 <a:spcPts val="400"/>
               </a:spcBef>
@@ -10244,7 +10244,7 @@
             </a:r>
           </a:p>
           <a:p>
-            <a:pPr>
+            <a:pPr marL="190500" indent="-190500">
               <a:spcBef>
                 <a:spcPts val="400"/>
               </a:spcBef>
@@ -10263,7 +10263,7 @@
             </a:r>
           </a:p>
           <a:p>
-            <a:pPr>
+            <a:pPr marL="190500" indent="-190500">
               <a:spcBef>
                 <a:spcPts val="400"/>
               </a:spcBef>
@@ -10282,7 +10282,7 @@
             </a:r>
           </a:p>
           <a:p>
-            <a:pPr>
+            <a:pPr marL="190500" indent="-190500">
               <a:spcBef>
                 <a:spcPts val="400"/>
               </a:spcBef>
@@ -10301,7 +10301,7 @@
             </a:r>
           </a:p>
           <a:p>
-            <a:pPr>
+            <a:pPr marL="190500" indent="-190500">
               <a:spcBef>
                 <a:spcPts val="400"/>
               </a:spcBef>
@@ -10320,7 +10320,7 @@
             </a:r>
           </a:p>
           <a:p>
-            <a:pPr>
+            <a:pPr marL="190500" indent="-190500">
               <a:spcBef>
                 <a:spcPts val="400"/>
               </a:spcBef>
@@ -10352,13 +10352,13 @@
                 <a:solidFill>
                   <a:srgbClr val="78808C"/>
                 </a:solidFill>
-                <a:latin typeface="JetBrains Mono"/>
+                <a:latin typeface="Consolas"/>
               </a:rPr>
               <a:t>SICHERHEITENKONZEPT BEI HEILBERUFE-FINANZIERUNGEN</a:t>
             </a:r>
           </a:p>
           <a:p>
-            <a:pPr>
+            <a:pPr marL="190500" indent="-190500">
               <a:spcBef>
                 <a:spcPts val="400"/>
               </a:spcBef>
@@ -10390,13 +10390,13 @@
                 <a:solidFill>
                   <a:srgbClr val="78808C"/>
                 </a:solidFill>
-                <a:latin typeface="JetBrains Mono"/>
+                <a:latin typeface="Consolas"/>
               </a:rPr>
               <a:t>VERBUNDPARTNER SCHWÄBISCH HALL: PRAXISIMMOBILIEN UND TILGUNGSAUSSETZUNGSMODELL</a:t>
             </a:r>
           </a:p>
           <a:p>
-            <a:pPr>
+            <a:pPr marL="190500" indent="-190500">
               <a:spcBef>
                 <a:spcPts val="400"/>
               </a:spcBef>
@@ -10415,7 +10415,7 @@
             </a:r>
           </a:p>
           <a:p>
-            <a:pPr>
+            <a:pPr marL="190500" indent="-190500">
               <a:spcBef>
                 <a:spcPts val="400"/>
               </a:spcBef>
@@ -10506,7 +10506,7 @@
                 <a:solidFill>
                   <a:srgbClr val="A0B4D2"/>
                 </a:solidFill>
-                <a:latin typeface="JetBrains Mono"/>
+                <a:latin typeface="Consolas"/>
               </a:rPr>
               <a:t>FKB Campus  ·  M07</a:t>
             </a:r>
@@ -10645,7 +10645,7 @@
                 <a:solidFill>
                   <a:srgbClr val="78808C"/>
                 </a:solidFill>
-                <a:latin typeface="JetBrains Mono"/>
+                <a:latin typeface="Consolas"/>
               </a:rPr>
               <a:t>M07  ·  SCHAUBILD</a:t>
             </a:r>
@@ -10680,7 +10680,7 @@
                 <a:solidFill>
                   <a:srgbClr val="1F2C56"/>
                 </a:solidFill>
-                <a:latin typeface="Source Serif 4"/>
+                <a:latin typeface="Arial"/>
               </a:rPr>
               <a:t>Handlungsempfehlung Heilberufe</a:t>
             </a:r>
@@ -10825,7 +10825,7 @@
                 <a:solidFill>
                   <a:srgbClr val="A0B4D2"/>
                 </a:solidFill>
-                <a:latin typeface="JetBrains Mono"/>
+                <a:latin typeface="Consolas"/>
               </a:rPr>
               <a:t>FKB Campus  ·  M07</a:t>
             </a:r>
@@ -10860,7 +10860,7 @@
                 <a:solidFill>
                   <a:srgbClr val="A0B4D2"/>
                 </a:solidFill>
-                <a:latin typeface="JetBrains Mono"/>
+                <a:latin typeface="Consolas"/>
               </a:rPr>
               <a:t>Schaubild</a:t>
             </a:r>

--- a/protected-downloads/praesentation/M07.pptx
+++ b/protected-downloads/praesentation/M07.pptx
@@ -18,6 +18,9 @@
     <p:sldId id="266" r:id="rId18"/>
     <p:sldId id="267" r:id="rId19"/>
     <p:sldId id="268" r:id="rId20"/>
+    <p:sldId id="269" r:id="rId21"/>
+    <p:sldId id="270" r:id="rId22"/>
+    <p:sldId id="271" r:id="rId23"/>
   </p:sldIdLst>
   <p:sldSz cx="12188952" cy="6858000" type="screen4x3"/>
   <p:notesSz cx="6858000" cy="9144000"/>
@@ -584,7 +587,7 @@
           <a:lstStyle/>
           <a:p>
             <a:r>
-              <a:t>Siehe Trainerhandbuch (Sektion 3) für Moderationshinweise, Timing und erwartete Teilnehmerreaktionen.</a:t>
+              <a:t>Einstieg: „Warum ist eine Zahnarztpraxis mit 500 TEUR Umsatz mehr wert als ein Handwerksbetrieb mit gleichem Umsatz?"</a:t>
             </a:r>
           </a:p>
         </p:txBody>
@@ -654,7 +657,7 @@
           <a:lstStyle/>
           <a:p>
             <a:r>
-              <a:t>Siehe Trainerhandbuch (Sektion 3) für Moderationshinweise, Timing und erwartete Teilnehmerreaktionen.</a:t>
+              <a:t>Der Berater muss die EÜR lesen können und die Honorarlogik verstehen – sonst bewertet er falsch.</a:t>
             </a:r>
           </a:p>
         </p:txBody>
@@ -724,7 +727,7 @@
           <a:lstStyle/>
           <a:p>
             <a:r>
-              <a:t>Siehe Trainerhandbuch (Sektion 3) für Moderationshinweise, Timing und erwartete Teilnehmerreaktionen.</a:t>
+              <a:t>Das XLSX-Praxisbewertungsmodell (M07) rechnet Goodwill und Substanzwert und zeigt die Kaufpreis-Ampel.</a:t>
             </a:r>
           </a:p>
         </p:txBody>
@@ -794,132 +797,7 @@
           <a:lstStyle/>
           <a:p>
             <a:r>
-              <a:t>Musterlösung (Trainer-Referenz)</a:t>
-            </a:r>
-          </a:p>
-          <a:p>
-            <a:r>
-              <a:t>Aufgabe 1 – IDW S5:</a:t>
-            </a:r>
-          </a:p>
-          <a:p>
-            <a:r>
-              <a:t>Ø Jahresüberschuss:          303.333 EUR</a:t>
-            </a:r>
-          </a:p>
-          <a:p>
-            <a:r>
-              <a:t>./. Unternehmerlohn:         130.000 EUR</a:t>
-            </a:r>
-          </a:p>
-          <a:p>
-            <a:r>
-              <a:t>= Ertrag vor Risiko:         173.333 EUR</a:t>
-            </a:r>
-          </a:p>
-          <a:p>
-            <a:r>
-              <a:t>./. Risikoabschlag 25 %:     - 43.333 EUR</a:t>
-            </a:r>
-          </a:p>
-          <a:p>
-            <a:r>
-              <a:t>= Nachhaltiger Jahresertrag: 130.000 EUR</a:t>
-            </a:r>
-          </a:p>
-          <a:p>
-            <a:r>
-              <a:t>× Kapitalisierungsfaktor 3,0:</a:t>
-            </a:r>
-          </a:p>
-          <a:p>
-            <a:r>
-              <a:t>= Goodwill (rechnerisch):    390.000 EUR</a:t>
-            </a:r>
-          </a:p>
-          <a:p>
-            <a:r>
-              <a:t>Der vereinbarte Goodwill von 220.000 EUR liegt deutlich unter dem rechnerischen Wert (Differenz: 170.000 EUR). Die Übernahme erscheint aus Käuferperspektive günstig bewertet.</a:t>
-            </a:r>
-          </a:p>
-          <a:p>
-            <a:r>
-              <a:t>Trainer-Hinweis – Vertiefungsfragen zum Gap: Dieser Unterschied von 170.000 EUR ist erklärungsbedürftig. Regen Sie folgende Diskussion an:</a:t>
-            </a:r>
-          </a:p>
-          <a:p>
-            <a:r>
-              <a:t>1. Warum akzeptiert Dr. Schmidt einen Goodwill von nur 220.000 EUR statt der rechnerischen 390.000 EUR? Mögliche Antworten: Zeitdruck beim Verkäufer (gesundheitliche Gründe), begrenzte Zahl qualifizierter Käufer in der Region, Patientenstamm-Risiko durch hohen Anteil an Stammkunden älterer Patienten, persönliche Sympathie für den Nachfolger.</a:t>
-            </a:r>
-          </a:p>
-          <a:p>
-            <a:r>
-              <a:t>2. Ist der niedrige Kaufpreis für die Bank ein Signal oder ein Vorteil? Ein Käufer, der günstig einkauft, hat einen besseren DSCR – aber: Warum wird so günstig verkauft? Hat Dr. Schmidt Informationen, die Dr. Mayer (und die Bank) nicht haben? → Asymmetrische Information ist das zentrale Risiko.</a:t>
-            </a:r>
-          </a:p>
-          <a:p>
-            <a:r>
-              <a:t>3. Was sollte die Bank zusätzlich prüfen? Laufende Regressverfahren, Abrechnungsauffälligkeiten bei der KV, Patientenstamm-Altersstruktur (wie viele Patienten sind unter 60 und bleiben der Praxis erhalten?), lokale Wettbewerbssituation (neues MVZ in der Nähe?).</a:t>
-            </a:r>
-          </a:p>
-          <a:p>
-            <a:r>
-              <a:t>Fazit: Der günstige Kaufpreis ist aus DSCR-Sicht attraktiv – rechtfertigt aber intensivere Due Diligence, nicht weniger.</a:t>
-            </a:r>
-          </a:p>
-          <a:p>
-            <a:r>
-              <a:t>Aufgabe 2 – DSCR:</a:t>
-            </a:r>
-          </a:p>
-          <a:p>
-            <a:r>
-              <a:t>380.000 EUR / 10 Jahre = 38.000 EUR Tilgung p.a.</a:t>
-            </a:r>
-          </a:p>
-          <a:p>
-            <a:r>
-              <a:t>Zinsen Anfangsjahr: 380.000 × 5,5 % = 20.900 EUR</a:t>
-            </a:r>
-          </a:p>
-          <a:p>
-            <a:r>
-              <a:t>Zinsen Endjahr: 38.000 × 5,5 % = 2.090 EUR</a:t>
-            </a:r>
-          </a:p>
-          <a:p>
-            <a:r>
-              <a:t>Ø Zinsen: (20.900 + 2.090) / 2 = 11.495 EUR p.a.</a:t>
-            </a:r>
-          </a:p>
-          <a:p>
-            <a:r>
-              <a:t>Kapitaldienst gesamt: 38.000 + 11.495 = 49.495 EUR p.a.</a:t>
-            </a:r>
-          </a:p>
-          <a:p>
-            <a:r>
-              <a:t>DSCR: 75.000 / 49.495 = 1,52</a:t>
-            </a:r>
-          </a:p>
-          <a:p>
-            <a:r>
-              <a:t>Trainer-Hinweis – Kritische Diskussion: DSCR 1,52 liegt rechnerisch über der Mindestanforderung (1,20) – aber ist er bei diesem Risikoniveau wirklich ausreichend? Folgende Argumente sprechen dafür, ihn kritisch zu hinterfragen:</a:t>
-            </a:r>
-          </a:p>
-          <a:p>
-            <a:r>
-              <a:t>1. Anlaufrisiko: Die 65 %-Patientenübernahme ist eine Prognose, kein gesicherter Wert. Historisch werden in den ersten 12 Monaten nach Übernahme teils nur 50–60 % erreicht. Sinkt die Patientenquote auf 55 %, bricht der Cashflow auf ca. 55.000 EUR – DSCR dann unter 1,20.</a:t>
-            </a:r>
-          </a:p>
-          <a:p>
-            <a:r>
-              <a:t>2. Kein Puffer für unvorhergesehene Ausgaben: Bei einer einzigen größeren Reparatur oder einem KV-Regressverfahren fehlt der Puffer.</a:t>
-            </a:r>
-          </a:p>
-          <a:p>
-            <a:r>
-              <a:t>3. Empfehlung: Tilgungsfreie Anlaufzeit (12 Monate nur Zinsen: 11.495 EUR p.a.) deutlich beantragen – reduziert den Kapitaldienst im ersten Jahr auf ca. 23 % des freien Cashflows und schafft echten Sicherheits</a:t>
+              <a:t>Tilgungsaussetzungsmodell und BU-/Risikoabsicherung als Verbundimpuls aus der Risikoanalyse.</a:t>
             </a:r>
           </a:p>
         </p:txBody>
@@ -989,7 +867,7 @@
           <a:lstStyle/>
           <a:p>
             <a:r>
-              <a:t>Siehe Trainerhandbuch (Sektion 3) für Moderationshinweise, Timing und erwartete Teilnehmerreaktionen.</a:t>
+              <a:t>Dr. Mayer: rechnerischer Goodwill 390 TEUR gegen 220 TEUR Kaufpreis – günstiger Einstieg; DSCR Ø 1,52 trägt den Kapitaldienst.</a:t>
             </a:r>
           </a:p>
         </p:txBody>
@@ -1059,7 +937,147 @@
           <a:lstStyle/>
           <a:p>
             <a:r>
-              <a:t>Siehe Trainerhandbuch (Sektion 3) für Moderationshinweise, Timing und erwartete Teilnehmerreaktionen.</a:t>
+              <a:t>Goodwill 390 vs. Kaufpreis 220 TEUR → günstig. Sicherheiten dünn – Absicherung der Person und ggf. Schwäbisch Hall für die Praxisimmobilie.</a:t>
+            </a:r>
+          </a:p>
+        </p:txBody>
+      </p:sp>
+      <p:sp>
+        <p:nvSpPr>
+          <p:cNvPr id="4" name="Slide Number Placeholder 3"/>
+          <p:cNvSpPr>
+            <a:spLocks noGrp="1"/>
+          </p:cNvSpPr>
+          <p:nvPr>
+            <p:ph type="sldNum" idx="5" sz="quarter"/>
+          </p:nvPr>
+        </p:nvSpPr>
+        <p:spPr/>
+      </p:sp>
+    </p:spTree>
+  </p:cSld>
+  <p:clrMapOvr>
+    <a:masterClrMapping/>
+  </p:clrMapOvr>
+</p:notes>
+</file>
+
+<file path=ppt/notesSlides/notesSlide8.xml><?xml version="1.0" encoding="utf-8"?>
+<p:notes xmlns:a="http://schemas.openxmlformats.org/drawingml/2006/main" xmlns:p="http://schemas.openxmlformats.org/presentationml/2006/main" xmlns:r="http://schemas.openxmlformats.org/officeDocument/2006/relationships">
+  <p:cSld>
+    <p:spTree>
+      <p:nvGrpSpPr>
+        <p:cNvPr id="1" name=""/>
+        <p:cNvGrpSpPr/>
+        <p:nvPr/>
+      </p:nvGrpSpPr>
+      <p:grpSpPr>
+        <a:xfrm>
+          <a:off x="0" y="0"/>
+          <a:ext cx="0" cy="0"/>
+          <a:chOff x="0" y="0"/>
+          <a:chExt cx="0" cy="0"/>
+        </a:xfrm>
+      </p:grpSpPr>
+      <p:sp>
+        <p:nvSpPr>
+          <p:cNvPr id="2" name="Slide Image Placeholder 1"/>
+          <p:cNvSpPr>
+            <a:spLocks noGrp="1"/>
+          </p:cNvSpPr>
+          <p:nvPr>
+            <p:ph type="sldImg" idx="2"/>
+          </p:nvPr>
+        </p:nvSpPr>
+        <p:spPr/>
+      </p:sp>
+      <p:sp>
+        <p:nvSpPr>
+          <p:cNvPr id="3" name="Notes Placeholder 2"/>
+          <p:cNvSpPr>
+            <a:spLocks noGrp="1"/>
+          </p:cNvSpPr>
+          <p:nvPr>
+            <p:ph type="body" idx="3" sz="quarter"/>
+          </p:nvPr>
+        </p:nvSpPr>
+        <p:spPr/>
+        <p:txBody>
+          <a:bodyPr/>
+          <a:lstStyle/>
+          <a:p>
+            <a:r>
+              <a:t>Überleitung zum Selbstcheck.</a:t>
+            </a:r>
+          </a:p>
+        </p:txBody>
+      </p:sp>
+      <p:sp>
+        <p:nvSpPr>
+          <p:cNvPr id="4" name="Slide Number Placeholder 3"/>
+          <p:cNvSpPr>
+            <a:spLocks noGrp="1"/>
+          </p:cNvSpPr>
+          <p:nvPr>
+            <p:ph type="sldNum" idx="5" sz="quarter"/>
+          </p:nvPr>
+        </p:nvSpPr>
+        <p:spPr/>
+      </p:sp>
+    </p:spTree>
+  </p:cSld>
+  <p:clrMapOvr>
+    <a:masterClrMapping/>
+  </p:clrMapOvr>
+</p:notes>
+</file>
+
+<file path=ppt/notesSlides/notesSlide9.xml><?xml version="1.0" encoding="utf-8"?>
+<p:notes xmlns:a="http://schemas.openxmlformats.org/drawingml/2006/main" xmlns:p="http://schemas.openxmlformats.org/presentationml/2006/main" xmlns:r="http://schemas.openxmlformats.org/officeDocument/2006/relationships">
+  <p:cSld>
+    <p:spTree>
+      <p:nvGrpSpPr>
+        <p:cNvPr id="1" name=""/>
+        <p:cNvGrpSpPr/>
+        <p:nvPr/>
+      </p:nvGrpSpPr>
+      <p:grpSpPr>
+        <a:xfrm>
+          <a:off x="0" y="0"/>
+          <a:ext cx="0" cy="0"/>
+          <a:chOff x="0" y="0"/>
+          <a:chExt cx="0" cy="0"/>
+        </a:xfrm>
+      </p:grpSpPr>
+      <p:sp>
+        <p:nvSpPr>
+          <p:cNvPr id="2" name="Slide Image Placeholder 1"/>
+          <p:cNvSpPr>
+            <a:spLocks noGrp="1"/>
+          </p:cNvSpPr>
+          <p:nvPr>
+            <p:ph type="sldImg" idx="2"/>
+          </p:nvPr>
+        </p:nvSpPr>
+        <p:spPr/>
+      </p:sp>
+      <p:sp>
+        <p:nvSpPr>
+          <p:cNvPr id="3" name="Notes Placeholder 2"/>
+          <p:cNvSpPr>
+            <a:spLocks noGrp="1"/>
+          </p:cNvSpPr>
+          <p:nvPr>
+            <p:ph type="body" idx="3" sz="quarter"/>
+          </p:nvPr>
+        </p:nvSpPr>
+        <p:spPr/>
+        <p:txBody>
+          <a:bodyPr/>
+          <a:lstStyle/>
+          <a:p>
+            <a:r>
+              <a:t>Selbstcheck als Transferanker.</a:t>
             </a:r>
           </a:p>
         </p:txBody>
@@ -4877,7 +4895,7 @@
                 </a:solidFill>
                 <a:latin typeface="Arial"/>
               </a:rPr>
-              <a:t>Praxiscase: Dr. Mayer – Zahnarztpraxis-Übernahme in Ravensburg</a:t>
+              <a:t>Risikoprofil und Sicherheitenkonzept</a:t>
             </a:r>
           </a:p>
         </p:txBody>
@@ -4899,27 +4917,27 @@
           <a:noFill/>
         </p:spPr>
         <p:txBody>
-          <a:bodyPr wrap="square">
+          <a:bodyPr wrap="square" anchor="ctr">
             <a:spAutoFit/>
           </a:bodyPr>
           <a:lstStyle/>
           <a:p>
-            <a:pPr>
+            <a:pPr marL="177800" indent="-177800">
               <a:spcBef>
-                <a:spcPts val="1000"/>
+                <a:spcPts val="600"/>
               </a:spcBef>
               <a:spcAft>
                 <a:spcPts val="200"/>
               </a:spcAft>
             </a:pPr>
             <a:r>
-              <a:rPr sz="800" b="1">
-                <a:solidFill>
-                  <a:srgbClr val="78808C"/>
-                </a:solidFill>
-                <a:latin typeface="Consolas"/>
-              </a:rPr>
-              <a:t>AUSGANGSSITUATION</a:t>
+              <a:rPr sz="1200" i="1">
+                <a:solidFill>
+                  <a:srgbClr val="3D5466"/>
+                </a:solidFill>
+                <a:latin typeface="Arial"/>
+              </a:rPr>
+              <a:t>→  Bei Heilberufen ist die Person die Sicherheit – der Ausfall des Praxisinhabers ist das zentrale Risiko.</a:t>
             </a:r>
           </a:p>
           <a:p>
@@ -4938,7 +4956,7 @@
                 </a:solidFill>
                 <a:latin typeface="Arial"/>
               </a:rPr>
-              <a:t>▸  Kaufpreisverhandlung:</a:t>
+              <a:t>▸  Spezifische Risiken: Personenabhängigkeit, Zulassungsrecht, Honorarentwicklung.</a:t>
             </a:r>
           </a:p>
           <a:p>
@@ -4957,178 +4975,7 @@
                 </a:solidFill>
                 <a:latin typeface="Arial"/>
               </a:rPr>
-              <a:t>▸  Substanzwert (Einrichtung, Geräte): 160.000 EUR</a:t>
-            </a:r>
-          </a:p>
-          <a:p>
-            <a:pPr marL="190500" indent="-190500">
-              <a:spcBef>
-                <a:spcPts val="400"/>
-              </a:spcBef>
-              <a:spcAft>
-                <a:spcPts val="200"/>
-              </a:spcAft>
-            </a:pPr>
-            <a:r>
-              <a:rPr sz="1300">
-                <a:solidFill>
-                  <a:srgbClr val="3D5466"/>
-                </a:solidFill>
-                <a:latin typeface="Arial"/>
-              </a:rPr>
-              <a:t>▸  Goodwill (vereinbart, auf Basis IDW S5): 220.000 EUR</a:t>
-            </a:r>
-          </a:p>
-          <a:p>
-            <a:pPr marL="190500" indent="-190500">
-              <a:spcBef>
-                <a:spcPts val="400"/>
-              </a:spcBef>
-              <a:spcAft>
-                <a:spcPts val="200"/>
-              </a:spcAft>
-            </a:pPr>
-            <a:r>
-              <a:rPr sz="1300">
-                <a:solidFill>
-                  <a:srgbClr val="3D5466"/>
-                </a:solidFill>
-                <a:latin typeface="Arial"/>
-              </a:rPr>
-              <a:t>▸  Gesamtkaufpreis: 380.000 EUR</a:t>
-            </a:r>
-          </a:p>
-          <a:p>
-            <a:pPr marL="190500" indent="-190500">
-              <a:spcBef>
-                <a:spcPts val="400"/>
-              </a:spcBef>
-              <a:spcAft>
-                <a:spcPts val="200"/>
-              </a:spcAft>
-            </a:pPr>
-            <a:r>
-              <a:rPr sz="1300">
-                <a:solidFill>
-                  <a:srgbClr val="3D5466"/>
-                </a:solidFill>
-                <a:latin typeface="Arial"/>
-              </a:rPr>
-              <a:t>▸  Finanzdaten der Praxis (letzte 3 Jahre, EÜR Dr. Schmidt):</a:t>
-            </a:r>
-          </a:p>
-          <a:p>
-            <a:pPr marL="190500" indent="-190500">
-              <a:spcBef>
-                <a:spcPts val="400"/>
-              </a:spcBef>
-              <a:spcAft>
-                <a:spcPts val="200"/>
-              </a:spcAft>
-            </a:pPr>
-            <a:r>
-              <a:rPr sz="1300">
-                <a:solidFill>
-                  <a:srgbClr val="3D5466"/>
-                </a:solidFill>
-                <a:latin typeface="Arial"/>
-              </a:rPr>
-              <a:t>▸  Durchschnittlicher Jahresüberschuss: 303.333 EUR</a:t>
-            </a:r>
-          </a:p>
-          <a:p>
-            <a:pPr marL="190500" indent="-190500">
-              <a:spcBef>
-                <a:spcPts val="400"/>
-              </a:spcBef>
-              <a:spcAft>
-                <a:spcPts val="200"/>
-              </a:spcAft>
-            </a:pPr>
-            <a:r>
-              <a:rPr sz="1300">
-                <a:solidFill>
-                  <a:srgbClr val="3D5466"/>
-                </a:solidFill>
-                <a:latin typeface="Arial"/>
-              </a:rPr>
-              <a:t>▸  Finanzierungsbedarf:</a:t>
-            </a:r>
-          </a:p>
-          <a:p>
-            <a:pPr marL="190500" indent="-190500">
-              <a:spcBef>
-                <a:spcPts val="400"/>
-              </a:spcBef>
-              <a:spcAft>
-                <a:spcPts val="200"/>
-              </a:spcAft>
-            </a:pPr>
-            <a:r>
-              <a:rPr sz="1300">
-                <a:solidFill>
-                  <a:srgbClr val="3D5466"/>
-                </a:solidFill>
-                <a:latin typeface="Arial"/>
-              </a:rPr>
-              <a:t>▸  Praxiskauf: 380.000 EUR</a:t>
-            </a:r>
-          </a:p>
-          <a:p>
-            <a:pPr marL="190500" indent="-190500">
-              <a:spcBef>
-                <a:spcPts val="400"/>
-              </a:spcBef>
-              <a:spcAft>
-                <a:spcPts val="200"/>
-              </a:spcAft>
-            </a:pPr>
-            <a:r>
-              <a:rPr sz="1300">
-                <a:solidFill>
-                  <a:srgbClr val="3D5466"/>
-                </a:solidFill>
-                <a:latin typeface="Arial"/>
-              </a:rPr>
-              <a:t>▸  Betriebsmittel (Warenlager, Anlaufkosten): 30.000 EUR</a:t>
-            </a:r>
-          </a:p>
-          <a:p>
-            <a:pPr marL="190500" indent="-190500">
-              <a:spcBef>
-                <a:spcPts val="400"/>
-              </a:spcBef>
-              <a:spcAft>
-                <a:spcPts val="200"/>
-              </a:spcAft>
-            </a:pPr>
-            <a:r>
-              <a:rPr sz="1300">
-                <a:solidFill>
-                  <a:srgbClr val="3D5466"/>
-                </a:solidFill>
-                <a:latin typeface="Arial"/>
-              </a:rPr>
-              <a:t>▸  Modernisierung Röntgenanlage: 25.000 EUR</a:t>
-            </a:r>
-          </a:p>
-          <a:p>
-            <a:pPr marL="190500" indent="-190500">
-              <a:spcBef>
-                <a:spcPts val="400"/>
-              </a:spcBef>
-              <a:spcAft>
-                <a:spcPts val="200"/>
-              </a:spcAft>
-            </a:pPr>
-            <a:r>
-              <a:rPr sz="1300">
-                <a:solidFill>
-                  <a:srgbClr val="3D5466"/>
-                </a:solidFill>
-                <a:latin typeface="Arial"/>
-              </a:rPr>
-              <a:t>▸  Gesamtbedarf: 435.000 EUR</a:t>
+              <a:t>▸  Sicherheitenkonzept oft dünn (wenig Substanz) – Verbundpartner Schwäbisch Hall für Praxisimmobilien.</a:t>
             </a:r>
           </a:p>
         </p:txBody>
@@ -5345,7 +5192,7 @@
                 </a:solidFill>
                 <a:latin typeface="Consolas"/>
               </a:rPr>
-              <a:t>M07  ·  ÜBERSICHT</a:t>
+              <a:t>M07  ·  SCHAUBILD</a:t>
             </a:r>
           </a:p>
         </p:txBody>
@@ -5380,7 +5227,605 @@
                 </a:solidFill>
                 <a:latin typeface="Arial"/>
               </a:rPr>
-              <a:t>Praxiscase: Dr. Mayer – Zahnarztpraxis-Übernahme in Ravensburg</a:t>
+              <a:t>Handlungsempfehlung: Heilberufe-Finanzierung</a:t>
+            </a:r>
+          </a:p>
+        </p:txBody>
+      </p:sp>
+      <p:sp>
+        <p:nvSpPr>
+          <p:cNvPr id="6" name="Rectangle 5"/>
+          <p:cNvSpPr/>
+          <p:nvPr/>
+        </p:nvSpPr>
+        <p:spPr>
+          <a:xfrm>
+            <a:off x="685800" y="1143000"/>
+            <a:ext cx="10817352" cy="25400"/>
+          </a:xfrm>
+          <a:prstGeom prst="rect">
+            <a:avLst/>
+          </a:prstGeom>
+          <a:solidFill>
+            <a:srgbClr val="D9C089"/>
+          </a:solidFill>
+          <a:ln>
+            <a:noFill/>
+          </a:ln>
+        </p:spPr>
+        <p:style>
+          <a:lnRef idx="1">
+            <a:schemeClr val="accent1"/>
+          </a:lnRef>
+          <a:fillRef idx="3">
+            <a:schemeClr val="accent1"/>
+          </a:fillRef>
+          <a:effectRef idx="2">
+            <a:schemeClr val="accent1"/>
+          </a:effectRef>
+          <a:fontRef idx="minor">
+            <a:schemeClr val="lt1"/>
+          </a:fontRef>
+        </p:style>
+        <p:txBody>
+          <a:bodyPr rtlCol="0" anchor="ctr"/>
+          <a:lstStyle/>
+          <a:p>
+            <a:pPr algn="ctr"/>
+          </a:p>
+        </p:txBody>
+      </p:sp>
+      <p:pic>
+        <p:nvPicPr>
+          <p:cNvPr id="7" name="Picture 6" descr="image.png"/>
+          <p:cNvPicPr>
+            <a:picLocks noChangeAspect="1"/>
+          </p:cNvPicPr>
+          <p:nvPr/>
+        </p:nvPicPr>
+        <p:blipFill>
+          <a:blip r:embed="rId2"/>
+          <a:stretch>
+            <a:fillRect/>
+          </a:stretch>
+        </p:blipFill>
+        <p:spPr>
+          <a:xfrm>
+            <a:off x="2303489" y="1325880"/>
+            <a:ext cx="7581973" cy="4937760"/>
+          </a:xfrm>
+          <a:prstGeom prst="rect">
+            <a:avLst/>
+          </a:prstGeom>
+        </p:spPr>
+      </p:pic>
+      <p:sp>
+        <p:nvSpPr>
+          <p:cNvPr id="8" name="Rectangle 7"/>
+          <p:cNvSpPr/>
+          <p:nvPr/>
+        </p:nvSpPr>
+        <p:spPr>
+          <a:xfrm>
+            <a:off x="0" y="6510528"/>
+            <a:ext cx="12188952" cy="347472"/>
+          </a:xfrm>
+          <a:prstGeom prst="rect">
+            <a:avLst/>
+          </a:prstGeom>
+          <a:solidFill>
+            <a:srgbClr val="0A1937"/>
+          </a:solidFill>
+          <a:ln>
+            <a:noFill/>
+          </a:ln>
+        </p:spPr>
+        <p:style>
+          <a:lnRef idx="1">
+            <a:schemeClr val="accent1"/>
+          </a:lnRef>
+          <a:fillRef idx="3">
+            <a:schemeClr val="accent1"/>
+          </a:fillRef>
+          <a:effectRef idx="2">
+            <a:schemeClr val="accent1"/>
+          </a:effectRef>
+          <a:fontRef idx="minor">
+            <a:schemeClr val="lt1"/>
+          </a:fontRef>
+        </p:style>
+        <p:txBody>
+          <a:bodyPr rtlCol="0" anchor="ctr"/>
+          <a:lstStyle/>
+          <a:p>
+            <a:pPr algn="ctr"/>
+          </a:p>
+        </p:txBody>
+      </p:sp>
+      <p:sp>
+        <p:nvSpPr>
+          <p:cNvPr id="9" name="TextBox 8"/>
+          <p:cNvSpPr txBox="1"/>
+          <p:nvPr/>
+        </p:nvSpPr>
+        <p:spPr>
+          <a:xfrm>
+            <a:off x="685800" y="6583680"/>
+            <a:ext cx="6490411" cy="256032"/>
+          </a:xfrm>
+          <a:prstGeom prst="rect">
+            <a:avLst/>
+          </a:prstGeom>
+          <a:noFill/>
+        </p:spPr>
+        <p:txBody>
+          <a:bodyPr wrap="none">
+            <a:spAutoFit/>
+          </a:bodyPr>
+          <a:lstStyle/>
+          <a:p>
+            <a:pPr algn="l"/>
+            <a:r>
+              <a:rPr sz="700">
+                <a:solidFill>
+                  <a:srgbClr val="A0B4D2"/>
+                </a:solidFill>
+                <a:latin typeface="Consolas"/>
+              </a:rPr>
+              <a:t>FKB Campus  ·  M07</a:t>
+            </a:r>
+          </a:p>
+        </p:txBody>
+      </p:sp>
+      <p:sp>
+        <p:nvSpPr>
+          <p:cNvPr id="10" name="TextBox 9"/>
+          <p:cNvSpPr txBox="1"/>
+          <p:nvPr/>
+        </p:nvSpPr>
+        <p:spPr>
+          <a:xfrm>
+            <a:off x="7176211" y="6583680"/>
+            <a:ext cx="4326940" cy="256032"/>
+          </a:xfrm>
+          <a:prstGeom prst="rect">
+            <a:avLst/>
+          </a:prstGeom>
+          <a:noFill/>
+        </p:spPr>
+        <p:txBody>
+          <a:bodyPr wrap="none">
+            <a:spAutoFit/>
+          </a:bodyPr>
+          <a:lstStyle/>
+          <a:p>
+            <a:pPr algn="r"/>
+            <a:r>
+              <a:rPr sz="700">
+                <a:solidFill>
+                  <a:srgbClr val="A0B4D2"/>
+                </a:solidFill>
+                <a:latin typeface="Consolas"/>
+              </a:rPr>
+              <a:t>Schaubild</a:t>
+            </a:r>
+          </a:p>
+        </p:txBody>
+      </p:sp>
+    </p:spTree>
+  </p:cSld>
+  <p:clrMapOvr>
+    <a:masterClrMapping/>
+  </p:clrMapOvr>
+</p:sld>
+</file>
+
+<file path=ppt/slides/slide12.xml><?xml version="1.0" encoding="utf-8"?>
+<p:sld xmlns:a="http://schemas.openxmlformats.org/drawingml/2006/main" xmlns:p="http://schemas.openxmlformats.org/presentationml/2006/main" xmlns:r="http://schemas.openxmlformats.org/officeDocument/2006/relationships">
+  <p:cSld>
+    <p:spTree>
+      <p:nvGrpSpPr>
+        <p:cNvPr id="1" name=""/>
+        <p:cNvGrpSpPr/>
+        <p:nvPr/>
+      </p:nvGrpSpPr>
+      <p:grpSpPr/>
+      <p:sp>
+        <p:nvSpPr>
+          <p:cNvPr id="2" name="Rectangle 1"/>
+          <p:cNvSpPr/>
+          <p:nvPr/>
+        </p:nvSpPr>
+        <p:spPr>
+          <a:xfrm>
+            <a:off x="0" y="0"/>
+            <a:ext cx="12188952" cy="6858000"/>
+          </a:xfrm>
+          <a:prstGeom prst="rect">
+            <a:avLst/>
+          </a:prstGeom>
+          <a:solidFill>
+            <a:srgbClr val="1F2C56"/>
+          </a:solidFill>
+          <a:ln>
+            <a:noFill/>
+          </a:ln>
+        </p:spPr>
+        <p:style>
+          <a:lnRef idx="1">
+            <a:schemeClr val="accent1"/>
+          </a:lnRef>
+          <a:fillRef idx="3">
+            <a:schemeClr val="accent1"/>
+          </a:fillRef>
+          <a:effectRef idx="2">
+            <a:schemeClr val="accent1"/>
+          </a:effectRef>
+          <a:fontRef idx="minor">
+            <a:schemeClr val="lt1"/>
+          </a:fontRef>
+        </p:style>
+        <p:txBody>
+          <a:bodyPr rtlCol="0" anchor="ctr"/>
+          <a:lstStyle/>
+          <a:p>
+            <a:pPr algn="ctr"/>
+          </a:p>
+        </p:txBody>
+      </p:sp>
+      <p:sp>
+        <p:nvSpPr>
+          <p:cNvPr id="3" name="TextBox 2"/>
+          <p:cNvSpPr txBox="1"/>
+          <p:nvPr/>
+        </p:nvSpPr>
+        <p:spPr>
+          <a:xfrm>
+            <a:off x="685800" y="2377440"/>
+            <a:ext cx="10817352" cy="365760"/>
+          </a:xfrm>
+          <a:prstGeom prst="rect">
+            <a:avLst/>
+          </a:prstGeom>
+          <a:noFill/>
+        </p:spPr>
+        <p:txBody>
+          <a:bodyPr wrap="none">
+            <a:spAutoFit/>
+          </a:bodyPr>
+          <a:lstStyle/>
+          <a:p>
+            <a:pPr algn="l"/>
+            <a:r>
+              <a:rPr sz="1200">
+                <a:solidFill>
+                  <a:srgbClr val="D9C089"/>
+                </a:solidFill>
+                <a:latin typeface="Consolas"/>
+              </a:rPr>
+              <a:t>FALLARBEIT</a:t>
+            </a:r>
+          </a:p>
+        </p:txBody>
+      </p:sp>
+      <p:sp>
+        <p:nvSpPr>
+          <p:cNvPr id="4" name="Rectangle 3"/>
+          <p:cNvSpPr/>
+          <p:nvPr/>
+        </p:nvSpPr>
+        <p:spPr>
+          <a:xfrm>
+            <a:off x="685800" y="2788920"/>
+            <a:ext cx="548640" cy="38100"/>
+          </a:xfrm>
+          <a:prstGeom prst="rect">
+            <a:avLst/>
+          </a:prstGeom>
+          <a:solidFill>
+            <a:srgbClr val="D9C089"/>
+          </a:solidFill>
+          <a:ln>
+            <a:noFill/>
+          </a:ln>
+        </p:spPr>
+        <p:style>
+          <a:lnRef idx="1">
+            <a:schemeClr val="accent1"/>
+          </a:lnRef>
+          <a:fillRef idx="3">
+            <a:schemeClr val="accent1"/>
+          </a:fillRef>
+          <a:effectRef idx="2">
+            <a:schemeClr val="accent1"/>
+          </a:effectRef>
+          <a:fontRef idx="minor">
+            <a:schemeClr val="lt1"/>
+          </a:fontRef>
+        </p:style>
+        <p:txBody>
+          <a:bodyPr rtlCol="0" anchor="ctr"/>
+          <a:lstStyle/>
+          <a:p>
+            <a:pPr algn="ctr"/>
+          </a:p>
+        </p:txBody>
+      </p:sp>
+      <p:sp>
+        <p:nvSpPr>
+          <p:cNvPr id="5" name="TextBox 4"/>
+          <p:cNvSpPr txBox="1"/>
+          <p:nvPr/>
+        </p:nvSpPr>
+        <p:spPr>
+          <a:xfrm>
+            <a:off x="685800" y="3017520"/>
+            <a:ext cx="10817352" cy="1463040"/>
+          </a:xfrm>
+          <a:prstGeom prst="rect">
+            <a:avLst/>
+          </a:prstGeom>
+          <a:noFill/>
+        </p:spPr>
+        <p:txBody>
+          <a:bodyPr wrap="square">
+            <a:spAutoFit/>
+          </a:bodyPr>
+          <a:lstStyle/>
+          <a:p>
+            <a:pPr algn="l"/>
+            <a:r>
+              <a:rPr sz="4000" b="1" i="0">
+                <a:solidFill>
+                  <a:srgbClr val="FFFFFF"/>
+                </a:solidFill>
+                <a:latin typeface="Arial"/>
+              </a:rPr>
+              <a:t>Praxiscase Dr. Mayer</a:t>
+            </a:r>
+          </a:p>
+        </p:txBody>
+      </p:sp>
+      <p:sp>
+        <p:nvSpPr>
+          <p:cNvPr id="6" name="TextBox 5"/>
+          <p:cNvSpPr txBox="1"/>
+          <p:nvPr/>
+        </p:nvSpPr>
+        <p:spPr>
+          <a:xfrm>
+            <a:off x="685800" y="4480560"/>
+            <a:ext cx="8653881" cy="1280160"/>
+          </a:xfrm>
+          <a:prstGeom prst="rect">
+            <a:avLst/>
+          </a:prstGeom>
+          <a:noFill/>
+        </p:spPr>
+        <p:txBody>
+          <a:bodyPr wrap="square">
+            <a:spAutoFit/>
+          </a:bodyPr>
+          <a:lstStyle/>
+          <a:p>
+            <a:pPr algn="l"/>
+            <a:r>
+              <a:rPr sz="1600" b="0" i="0">
+                <a:solidFill>
+                  <a:srgbClr val="C8D2E6"/>
+                </a:solidFill>
+                <a:latin typeface="Arial"/>
+              </a:rPr>
+              <a:t>Eine Zahnarztpraxis-Übernahme bewerten und finanzieren.</a:t>
+            </a:r>
+          </a:p>
+        </p:txBody>
+      </p:sp>
+      <p:sp>
+        <p:nvSpPr>
+          <p:cNvPr id="7" name="TextBox 6"/>
+          <p:cNvSpPr txBox="1"/>
+          <p:nvPr/>
+        </p:nvSpPr>
+        <p:spPr>
+          <a:xfrm>
+            <a:off x="685800" y="6355080"/>
+            <a:ext cx="10817352" cy="274320"/>
+          </a:xfrm>
+          <a:prstGeom prst="rect">
+            <a:avLst/>
+          </a:prstGeom>
+          <a:noFill/>
+        </p:spPr>
+        <p:txBody>
+          <a:bodyPr wrap="none">
+            <a:spAutoFit/>
+          </a:bodyPr>
+          <a:lstStyle/>
+          <a:p>
+            <a:pPr algn="l"/>
+            <a:r>
+              <a:rPr sz="700">
+                <a:solidFill>
+                  <a:srgbClr val="8CA0C3"/>
+                </a:solidFill>
+                <a:latin typeface="Consolas"/>
+              </a:rPr>
+              <a:t>FKB Campus  ·  M07</a:t>
+            </a:r>
+          </a:p>
+        </p:txBody>
+      </p:sp>
+    </p:spTree>
+  </p:cSld>
+  <p:clrMapOvr>
+    <a:masterClrMapping/>
+  </p:clrMapOvr>
+</p:sld>
+</file>
+
+<file path=ppt/slides/slide13.xml><?xml version="1.0" encoding="utf-8"?>
+<p:sld xmlns:a="http://schemas.openxmlformats.org/drawingml/2006/main" xmlns:p="http://schemas.openxmlformats.org/presentationml/2006/main" xmlns:r="http://schemas.openxmlformats.org/officeDocument/2006/relationships">
+  <p:cSld>
+    <p:spTree>
+      <p:nvGrpSpPr>
+        <p:cNvPr id="1" name=""/>
+        <p:cNvGrpSpPr/>
+        <p:nvPr/>
+      </p:nvGrpSpPr>
+      <p:grpSpPr/>
+      <p:sp>
+        <p:nvSpPr>
+          <p:cNvPr id="2" name="Rectangle 1"/>
+          <p:cNvSpPr/>
+          <p:nvPr/>
+        </p:nvSpPr>
+        <p:spPr>
+          <a:xfrm>
+            <a:off x="0" y="0"/>
+            <a:ext cx="12188952" cy="6858000"/>
+          </a:xfrm>
+          <a:prstGeom prst="rect">
+            <a:avLst/>
+          </a:prstGeom>
+          <a:solidFill>
+            <a:srgbClr val="FFFFFF"/>
+          </a:solidFill>
+          <a:ln>
+            <a:noFill/>
+          </a:ln>
+        </p:spPr>
+        <p:style>
+          <a:lnRef idx="1">
+            <a:schemeClr val="accent1"/>
+          </a:lnRef>
+          <a:fillRef idx="3">
+            <a:schemeClr val="accent1"/>
+          </a:fillRef>
+          <a:effectRef idx="2">
+            <a:schemeClr val="accent1"/>
+          </a:effectRef>
+          <a:fontRef idx="minor">
+            <a:schemeClr val="lt1"/>
+          </a:fontRef>
+        </p:style>
+        <p:txBody>
+          <a:bodyPr rtlCol="0" anchor="ctr"/>
+          <a:lstStyle/>
+          <a:p>
+            <a:pPr algn="ctr"/>
+          </a:p>
+        </p:txBody>
+      </p:sp>
+      <p:sp>
+        <p:nvSpPr>
+          <p:cNvPr id="3" name="Rectangle 2"/>
+          <p:cNvSpPr/>
+          <p:nvPr/>
+        </p:nvSpPr>
+        <p:spPr>
+          <a:xfrm>
+            <a:off x="0" y="0"/>
+            <a:ext cx="12188952" cy="50292"/>
+          </a:xfrm>
+          <a:prstGeom prst="rect">
+            <a:avLst/>
+          </a:prstGeom>
+          <a:solidFill>
+            <a:srgbClr val="1F2C56"/>
+          </a:solidFill>
+          <a:ln>
+            <a:noFill/>
+          </a:ln>
+        </p:spPr>
+        <p:style>
+          <a:lnRef idx="1">
+            <a:schemeClr val="accent1"/>
+          </a:lnRef>
+          <a:fillRef idx="3">
+            <a:schemeClr val="accent1"/>
+          </a:fillRef>
+          <a:effectRef idx="2">
+            <a:schemeClr val="accent1"/>
+          </a:effectRef>
+          <a:fontRef idx="minor">
+            <a:schemeClr val="lt1"/>
+          </a:fontRef>
+        </p:style>
+        <p:txBody>
+          <a:bodyPr rtlCol="0" anchor="ctr"/>
+          <a:lstStyle/>
+          <a:p>
+            <a:pPr algn="ctr"/>
+          </a:p>
+        </p:txBody>
+      </p:sp>
+      <p:sp>
+        <p:nvSpPr>
+          <p:cNvPr id="4" name="TextBox 3"/>
+          <p:cNvSpPr txBox="1"/>
+          <p:nvPr/>
+        </p:nvSpPr>
+        <p:spPr>
+          <a:xfrm>
+            <a:off x="685800" y="109728"/>
+            <a:ext cx="10817352" cy="228600"/>
+          </a:xfrm>
+          <a:prstGeom prst="rect">
+            <a:avLst/>
+          </a:prstGeom>
+          <a:noFill/>
+        </p:spPr>
+        <p:txBody>
+          <a:bodyPr wrap="none">
+            <a:spAutoFit/>
+          </a:bodyPr>
+          <a:lstStyle/>
+          <a:p>
+            <a:pPr algn="l"/>
+            <a:r>
+              <a:rPr sz="750">
+                <a:solidFill>
+                  <a:srgbClr val="78808C"/>
+                </a:solidFill>
+                <a:latin typeface="Consolas"/>
+              </a:rPr>
+              <a:t>M07  ·  ÜBERSICHT</a:t>
+            </a:r>
+          </a:p>
+        </p:txBody>
+      </p:sp>
+      <p:sp>
+        <p:nvSpPr>
+          <p:cNvPr id="5" name="TextBox 4"/>
+          <p:cNvSpPr txBox="1"/>
+          <p:nvPr/>
+        </p:nvSpPr>
+        <p:spPr>
+          <a:xfrm>
+            <a:off x="685800" y="502920"/>
+            <a:ext cx="10817352" cy="594360"/>
+          </a:xfrm>
+          <a:prstGeom prst="rect">
+            <a:avLst/>
+          </a:prstGeom>
+          <a:noFill/>
+        </p:spPr>
+        <p:txBody>
+          <a:bodyPr wrap="square">
+            <a:spAutoFit/>
+          </a:bodyPr>
+          <a:lstStyle/>
+          <a:p>
+            <a:pPr algn="l"/>
+            <a:r>
+              <a:rPr sz="2000" b="1" i="0">
+                <a:solidFill>
+                  <a:srgbClr val="1F2C56"/>
+                </a:solidFill>
+                <a:latin typeface="Arial"/>
+              </a:rPr>
+              <a:t>Praxisfall Dr. Mayer: Bewertung im Überblick</a:t>
             </a:r>
           </a:p>
         </p:txBody>
@@ -5447,10 +5892,9 @@
                 <a:tableStyleId>{5C22544A-7EE6-4342-B048-85BDC9FD1C3A}</a:tableStyleId>
               </a:tblPr>
               <a:tblGrid>
-                <a:gridCol w="2704338"/>
-                <a:gridCol w="2704338"/>
-                <a:gridCol w="2704338"/>
-                <a:gridCol w="2704338"/>
+                <a:gridCol w="3605784"/>
+                <a:gridCol w="3605784"/>
+                <a:gridCol w="3605784"/>
               </a:tblGrid>
               <a:tr h="384048">
                 <a:tc>
@@ -5465,7 +5909,7 @@
                           </a:solidFill>
                           <a:latin typeface="Arial"/>
                         </a:rPr>
-                        <a:t>Jahr</a:t>
+                        <a:t>Größe</a:t>
                       </a:r>
                     </a:p>
                   </a:txBody>
@@ -5487,7 +5931,7 @@
                           </a:solidFill>
                           <a:latin typeface="Arial"/>
                         </a:rPr>
-                        <a:t>Betriebseinnahmen</a:t>
+                        <a:t>Wert</a:t>
                       </a:r>
                     </a:p>
                   </a:txBody>
@@ -5509,29 +5953,7 @@
                           </a:solidFill>
                           <a:latin typeface="Arial"/>
                         </a:rPr>
-                        <a:t>Betriebsausgaben</a:t>
-                      </a:r>
-                    </a:p>
-                  </a:txBody>
-                  <a:tcPr>
-                    <a:solidFill>
-                      <a:srgbClr val="1F2C56"/>
-                    </a:solidFill>
-                  </a:tcPr>
-                </a:tc>
-                <a:tc>
-                  <a:txBody>
-                    <a:bodyPr/>
-                    <a:lstStyle/>
-                    <a:p>
-                      <a:r>
-                        <a:rPr sz="1100" b="1">
-                          <a:solidFill>
-                            <a:srgbClr val="FFFFFF"/>
-                          </a:solidFill>
-                          <a:latin typeface="Arial"/>
-                        </a:rPr>
-                        <a:t>Jahresüberschuss</a:t>
+                        <a:t>Bewertung</a:t>
                       </a:r>
                     </a:p>
                   </a:txBody>
@@ -5555,7 +5977,7 @@
                           </a:solidFill>
                           <a:latin typeface="Arial"/>
                         </a:rPr>
-                        <a:t>2023</a:t>
+                        <a:t>Goodwill (rechnerisch)</a:t>
                       </a:r>
                     </a:p>
                   </a:txBody>
@@ -5573,7 +5995,7 @@
                           </a:solidFill>
                           <a:latin typeface="Arial"/>
                         </a:rPr>
-                        <a:t>680.000 EUR</a:t>
+                        <a:t>390 TEUR</a:t>
                       </a:r>
                     </a:p>
                   </a:txBody>
@@ -5591,25 +6013,7 @@
                           </a:solidFill>
                           <a:latin typeface="Arial"/>
                         </a:rPr>
-                        <a:t>390.000 EUR</a:t>
-                      </a:r>
-                    </a:p>
-                  </a:txBody>
-                  <a:tcPr/>
-                </a:tc>
-                <a:tc>
-                  <a:txBody>
-                    <a:bodyPr/>
-                    <a:lstStyle/>
-                    <a:p>
-                      <a:r>
-                        <a:rPr sz="1050">
-                          <a:solidFill>
-                            <a:srgbClr val="3D5466"/>
-                          </a:solidFill>
-                          <a:latin typeface="Arial"/>
-                        </a:rPr>
-                        <a:t>290.000 EUR</a:t>
+                        <a:t>nach IDW S5</a:t>
                       </a:r>
                     </a:p>
                   </a:txBody>
@@ -5629,7 +6033,7 @@
                           </a:solidFill>
                           <a:latin typeface="Arial"/>
                         </a:rPr>
-                        <a:t>2024</a:t>
+                        <a:t>Vereinbarter Kaufpreis</a:t>
                       </a:r>
                     </a:p>
                   </a:txBody>
@@ -5647,7 +6051,7 @@
                           </a:solidFill>
                           <a:latin typeface="Arial"/>
                         </a:rPr>
-                        <a:t>710.000 EUR</a:t>
+                        <a:t>220 TEUR</a:t>
                       </a:r>
                     </a:p>
                   </a:txBody>
@@ -5665,25 +6069,7 @@
                           </a:solidFill>
                           <a:latin typeface="Arial"/>
                         </a:rPr>
-                        <a:t>400.000 EUR</a:t>
-                      </a:r>
-                    </a:p>
-                  </a:txBody>
-                  <a:tcPr/>
-                </a:tc>
-                <a:tc>
-                  <a:txBody>
-                    <a:bodyPr/>
-                    <a:lstStyle/>
-                    <a:p>
-                      <a:r>
-                        <a:rPr sz="1050">
-                          <a:solidFill>
-                            <a:srgbClr val="3D5466"/>
-                          </a:solidFill>
-                          <a:latin typeface="Arial"/>
-                        </a:rPr>
-                        <a:t>310.000 EUR</a:t>
+                        <a:t>günstig</a:t>
                       </a:r>
                     </a:p>
                   </a:txBody>
@@ -5703,7 +6089,7 @@
                           </a:solidFill>
                           <a:latin typeface="Arial"/>
                         </a:rPr>
-                        <a:t>2025</a:t>
+                        <a:t>DSCR (Ø)</a:t>
                       </a:r>
                     </a:p>
                   </a:txBody>
@@ -5721,7 +6107,7 @@
                           </a:solidFill>
                           <a:latin typeface="Arial"/>
                         </a:rPr>
-                        <a:t>700.000 EUR</a:t>
+                        <a:t>1,52</a:t>
                       </a:r>
                     </a:p>
                   </a:txBody>
@@ -5739,25 +6125,7 @@
                           </a:solidFill>
                           <a:latin typeface="Arial"/>
                         </a:rPr>
-                        <a:t>390.000 EUR</a:t>
-                      </a:r>
-                    </a:p>
-                  </a:txBody>
-                  <a:tcPr/>
-                </a:tc>
-                <a:tc>
-                  <a:txBody>
-                    <a:bodyPr/>
-                    <a:lstStyle/>
-                    <a:p>
-                      <a:r>
-                        <a:rPr sz="1050">
-                          <a:solidFill>
-                            <a:srgbClr val="3D5466"/>
-                          </a:solidFill>
-                          <a:latin typeface="Arial"/>
-                        </a:rPr>
-                        <a:t>310.000 EUR</a:t>
+                        <a:t>tragfähig</a:t>
                       </a:r>
                     </a:p>
                   </a:txBody>
@@ -5889,7 +6257,7 @@
 </p:sld>
 </file>
 
-<file path=ppt/slides/slide12.xml><?xml version="1.0" encoding="utf-8"?>
+<file path=ppt/slides/slide14.xml><?xml version="1.0" encoding="utf-8"?>
 <p:sld xmlns:a="http://schemas.openxmlformats.org/drawingml/2006/main" xmlns:p="http://schemas.openxmlformats.org/presentationml/2006/main" xmlns:r="http://schemas.openxmlformats.org/officeDocument/2006/relationships">
   <p:cSld>
     <p:spTree>
@@ -6015,7 +6383,7 @@
                 </a:solidFill>
                 <a:latin typeface="Consolas"/>
               </a:rPr>
-              <a:t>M07  ·  INHALT</a:t>
+              <a:t>M07  ·  ARBEITSBLATT</a:t>
             </a:r>
           </a:p>
         </p:txBody>
@@ -6136,7 +6504,7 @@
                 </a:solidFill>
                 <a:latin typeface="Arial"/>
               </a:rPr>
-              <a:t>AB-2: Checkliste Heilberufe-Erstgespräch (15 Punkte)</a:t>
+              <a:t>Praxisübernahme Dr. Mayer bearbeiten</a:t>
             </a:r>
           </a:p>
         </p:txBody>
@@ -6149,8 +6517,8 @@
         </p:nvSpPr>
         <p:spPr>
           <a:xfrm>
-            <a:off x="685800" y="1417320"/>
-            <a:ext cx="10817352" cy="4892040"/>
+            <a:off x="685800" y="1554480"/>
+            <a:ext cx="10817352" cy="3840480"/>
           </a:xfrm>
           <a:prstGeom prst="rect">
             <a:avLst/>
@@ -6172,13 +6540,13 @@
               </a:spcAft>
             </a:pPr>
             <a:r>
-              <a:rPr sz="1300">
+              <a:rPr sz="1400">
                 <a:solidFill>
                   <a:srgbClr val="3D5466"/>
                 </a:solidFill>
                 <a:latin typeface="Arial"/>
               </a:rPr>
-              <a:t>▸  Nutzen Sie diese Checkliste zur Vorbereitung und Strukturierung von Erstgesprächen mit Heilberufe-Kunden.</a:t>
+              <a:t>▸  Bewerten Sie die Zahnarztpraxis mit dem IDW-S5-Modell (XLSX-Praxisbewertung).</a:t>
             </a:r>
           </a:p>
           <a:p>
@@ -6191,13 +6559,13 @@
               </a:spcAft>
             </a:pPr>
             <a:r>
-              <a:rPr sz="1300">
+              <a:rPr sz="1400">
                 <a:solidFill>
                   <a:srgbClr val="3D5466"/>
                 </a:solidFill>
                 <a:latin typeface="Arial"/>
               </a:rPr>
-              <a:t>▸  Branche &amp; Zulassung</a:t>
+              <a:t>▸  Beurteilen Sie den Kaufpreis und die Finanzierungsstruktur (DSCR).</a:t>
             </a:r>
           </a:p>
           <a:p>
@@ -6210,191 +6578,98 @@
               </a:spcAft>
             </a:pPr>
             <a:r>
-              <a:rPr sz="1300">
+              <a:rPr sz="1400">
                 <a:solidFill>
                   <a:srgbClr val="3D5466"/>
                 </a:solidFill>
                 <a:latin typeface="Arial"/>
               </a:rPr>
-              <a:t>▸  [ ] 1. Zulassungsart: GKV-Zulassung, Privatarzt, MVZ-Anstellung?</a:t>
-            </a:r>
-          </a:p>
-          <a:p>
-            <a:pPr marL="190500" indent="-190500">
-              <a:spcBef>
-                <a:spcPts val="400"/>
-              </a:spcBef>
-              <a:spcAft>
-                <a:spcPts val="200"/>
-              </a:spcAft>
-            </a:pPr>
-            <a:r>
-              <a:rPr sz="1300">
-                <a:solidFill>
-                  <a:srgbClr val="3D5466"/>
+              <a:t>▸  Nutzen Sie die Checkliste Heilberufe-Erstgespräch (AB-2).</a:t>
+            </a:r>
+          </a:p>
+        </p:txBody>
+      </p:sp>
+      <p:sp>
+        <p:nvSpPr>
+          <p:cNvPr id="9" name="Rectangle 8"/>
+          <p:cNvSpPr/>
+          <p:nvPr/>
+        </p:nvSpPr>
+        <p:spPr>
+          <a:xfrm>
+            <a:off x="685800" y="5486400"/>
+            <a:ext cx="10817352" cy="640080"/>
+          </a:xfrm>
+          <a:prstGeom prst="rect">
+            <a:avLst/>
+          </a:prstGeom>
+          <a:solidFill>
+            <a:srgbClr val="1F2C56"/>
+          </a:solidFill>
+          <a:ln>
+            <a:noFill/>
+          </a:ln>
+        </p:spPr>
+        <p:style>
+          <a:lnRef idx="1">
+            <a:schemeClr val="accent1"/>
+          </a:lnRef>
+          <a:fillRef idx="3">
+            <a:schemeClr val="accent1"/>
+          </a:fillRef>
+          <a:effectRef idx="2">
+            <a:schemeClr val="accent1"/>
+          </a:effectRef>
+          <a:fontRef idx="minor">
+            <a:schemeClr val="lt1"/>
+          </a:fontRef>
+        </p:style>
+        <p:txBody>
+          <a:bodyPr rtlCol="0" anchor="ctr"/>
+          <a:lstStyle/>
+          <a:p>
+            <a:pPr algn="ctr"/>
+          </a:p>
+        </p:txBody>
+      </p:sp>
+      <p:sp>
+        <p:nvSpPr>
+          <p:cNvPr id="10" name="TextBox 9"/>
+          <p:cNvSpPr txBox="1"/>
+          <p:nvPr/>
+        </p:nvSpPr>
+        <p:spPr>
+          <a:xfrm>
+            <a:off x="868680" y="5596128"/>
+            <a:ext cx="10451592" cy="457200"/>
+          </a:xfrm>
+          <a:prstGeom prst="rect">
+            <a:avLst/>
+          </a:prstGeom>
+          <a:noFill/>
+        </p:spPr>
+        <p:txBody>
+          <a:bodyPr wrap="square">
+            <a:spAutoFit/>
+          </a:bodyPr>
+          <a:lstStyle/>
+          <a:p>
+            <a:pPr algn="l"/>
+            <a:r>
+              <a:rPr sz="1300" b="1" i="0">
+                <a:solidFill>
+                  <a:srgbClr val="FFFFFF"/>
                 </a:solidFill>
                 <a:latin typeface="Arial"/>
               </a:rPr>
-              <a:t>▸  [ ] 2. KV-Bezirk und Versorgungsgebiet – überversorgt oder Mangelgebiet?</a:t>
-            </a:r>
-          </a:p>
-          <a:p>
-            <a:pPr marL="190500" indent="-190500">
-              <a:spcBef>
-                <a:spcPts val="400"/>
-              </a:spcBef>
-              <a:spcAft>
-                <a:spcPts val="200"/>
-              </a:spcAft>
-            </a:pPr>
-            <a:r>
-              <a:rPr sz="1300">
-                <a:solidFill>
-                  <a:srgbClr val="3D5466"/>
-                </a:solidFill>
-                <a:latin typeface="Arial"/>
-              </a:rPr>
-              <a:t>▸  [ ] 3. Berufsbezeichnung und Kammerzugehörigkeit klären</a:t>
-            </a:r>
-          </a:p>
-          <a:p>
-            <a:pPr marL="190500" indent="-190500">
-              <a:spcBef>
-                <a:spcPts val="400"/>
-              </a:spcBef>
-              <a:spcAft>
-                <a:spcPts val="200"/>
-              </a:spcAft>
-            </a:pPr>
-            <a:r>
-              <a:rPr sz="1300">
-                <a:solidFill>
-                  <a:srgbClr val="3D5466"/>
-                </a:solidFill>
-                <a:latin typeface="Arial"/>
-              </a:rPr>
-              <a:t>▸  [ ] 4. Einzelpraxis oder BAG/Gemeinschaftspraxis? → Bei Berufsausübungsgemeinschaft (BAG): Gesellschaftsvertrag anfordern; Sicherheitenkonzept und Bonitätsprüfung gelten für alle Partner</a:t>
-            </a:r>
-          </a:p>
-          <a:p>
-            <a:pPr marL="190500" indent="-190500">
-              <a:spcBef>
-                <a:spcPts val="400"/>
-              </a:spcBef>
-              <a:spcAft>
-                <a:spcPts val="200"/>
-              </a:spcAft>
-            </a:pPr>
-            <a:r>
-              <a:rPr sz="1300">
-                <a:solidFill>
-                  <a:srgbClr val="3D5466"/>
-                </a:solidFill>
-                <a:latin typeface="Arial"/>
-              </a:rPr>
-              <a:t>▸  [ ] 5. Umsatzsteuer-Status klären (§ 4 Nr. 14 UStG: Heilbehandlungen grds. USt-frei; Ausnahmen: Gutachtertätigkeit, Schönheitschirurgie ohne Heilzweck → partielle USt-Pflicht möglich)</a:t>
-            </a:r>
-          </a:p>
-          <a:p>
-            <a:pPr marL="190500" indent="-190500">
-              <a:spcBef>
-                <a:spcPts val="400"/>
-              </a:spcBef>
-              <a:spcAft>
-                <a:spcPts val="200"/>
-              </a:spcAft>
-            </a:pPr>
-            <a:r>
-              <a:rPr sz="1300">
-                <a:solidFill>
-                  <a:srgbClr val="3D5466"/>
-                </a:solidFill>
-                <a:latin typeface="Arial"/>
-              </a:rPr>
-              <a:t>▸  Einkommenssituation</a:t>
-            </a:r>
-          </a:p>
-          <a:p>
-            <a:pPr marL="190500" indent="-190500">
-              <a:spcBef>
-                <a:spcPts val="400"/>
-              </a:spcBef>
-              <a:spcAft>
-                <a:spcPts val="200"/>
-              </a:spcAft>
-            </a:pPr>
-            <a:r>
-              <a:rPr sz="1300">
-                <a:solidFill>
-                  <a:srgbClr val="3D5466"/>
-                </a:solidFill>
-                <a:latin typeface="Arial"/>
-              </a:rPr>
-              <a:t>▸  [ ] 6. Einnahmenquellen: GKV-Anteil / PKV-Anteil / Selbstzahler</a:t>
-            </a:r>
-          </a:p>
-          <a:p>
-            <a:pPr marL="190500" indent="-190500">
-              <a:spcBef>
-                <a:spcPts val="400"/>
-              </a:spcBef>
-              <a:spcAft>
-                <a:spcPts val="200"/>
-              </a:spcAft>
-            </a:pPr>
-            <a:r>
-              <a:rPr sz="1300">
-                <a:solidFill>
-                  <a:srgbClr val="3D5466"/>
-                </a:solidFill>
-                <a:latin typeface="Arial"/>
-              </a:rPr>
-              <a:t>▸  [ ] 7. EÜR letzter 3 Jahre + Steuerbescheide anfordern</a:t>
-            </a:r>
-          </a:p>
-          <a:p>
-            <a:pPr marL="190500" indent="-190500">
-              <a:spcBef>
-                <a:spcPts val="400"/>
-              </a:spcBef>
-              <a:spcAft>
-                <a:spcPts val="200"/>
-              </a:spcAft>
-            </a:pPr>
-            <a:r>
-              <a:rPr sz="1300">
-                <a:solidFill>
-                  <a:srgbClr val="3D5466"/>
-                </a:solidFill>
-                <a:latin typeface="Arial"/>
-              </a:rPr>
-              <a:t>▸  [ ] 8. Rückstände oder laufende Regressverfahren erfragen</a:t>
-            </a:r>
-          </a:p>
-          <a:p>
-            <a:pPr marL="190500" indent="-190500">
-              <a:spcBef>
-                <a:spcPts val="400"/>
-              </a:spcBef>
-              <a:spcAft>
-                <a:spcPts val="200"/>
-              </a:spcAft>
-            </a:pPr>
-            <a:r>
-              <a:rPr sz="1300">
-                <a:solidFill>
-                  <a:srgbClr val="3D5466"/>
-                </a:solidFill>
-                <a:latin typeface="Arial"/>
-              </a:rPr>
-              <a:t>▸  [ ] 9. Betriebsausgaben auf Plausibilität prüfen (Personalquote, Mietquote)</a:t>
-            </a:r>
-          </a:p>
-        </p:txBody>
-      </p:sp>
-      <p:sp>
-        <p:nvSpPr>
-          <p:cNvPr id="9" name="Rectangle 8"/>
+              <a:t>→  Bearbeitung im Teilnehmer-Workbook (Arbeitsblatt mit Ausfüllfeldern)</a:t>
+            </a:r>
+          </a:p>
+        </p:txBody>
+      </p:sp>
+      <p:sp>
+        <p:nvSpPr>
+          <p:cNvPr id="11" name="Rectangle 10"/>
           <p:cNvSpPr/>
           <p:nvPr/>
         </p:nvSpPr>
@@ -6437,7 +6712,7 @@
       </p:sp>
       <p:sp>
         <p:nvSpPr>
-          <p:cNvPr id="10" name="TextBox 9"/>
+          <p:cNvPr id="12" name="TextBox 11"/>
           <p:cNvSpPr txBox="1"/>
           <p:nvPr/>
         </p:nvSpPr>
@@ -6478,7 +6753,7 @@
 </p:sld>
 </file>
 
-<file path=ppt/slides/slide13.xml><?xml version="1.0" encoding="utf-8"?>
+<file path=ppt/slides/slide15.xml><?xml version="1.0" encoding="utf-8"?>
 <p:sld xmlns:a="http://schemas.openxmlformats.org/drawingml/2006/main" xmlns:p="http://schemas.openxmlformats.org/presentationml/2006/main" xmlns:r="http://schemas.openxmlformats.org/officeDocument/2006/relationships">
   <p:cSld>
     <p:spTree>
@@ -6725,7 +7000,7 @@
                 </a:solidFill>
                 <a:latin typeface="Arial"/>
               </a:rPr>
-              <a:t>Reflexionsfragen</a:t>
+              <a:t>Prinzip dieses Moduls</a:t>
             </a:r>
           </a:p>
         </p:txBody>
@@ -6751,6 +7026,25 @@
             <a:spAutoFit/>
           </a:bodyPr>
           <a:lstStyle/>
+          <a:p>
+            <a:pPr marL="177800" indent="-177800">
+              <a:spcBef>
+                <a:spcPts val="600"/>
+              </a:spcBef>
+              <a:spcAft>
+                <a:spcPts val="200"/>
+              </a:spcAft>
+            </a:pPr>
+            <a:r>
+              <a:rPr sz="1200" i="1">
+                <a:solidFill>
+                  <a:srgbClr val="3D5466"/>
+                </a:solidFill>
+                <a:latin typeface="Arial"/>
+              </a:rPr>
+              <a:t>→  Kenne die Spielregeln der Branche, bevor du über Finanzierung sprichst.</a:t>
+            </a:r>
+          </a:p>
           <a:p>
             <a:pPr marL="190500" indent="-190500">
               <a:spcBef>
@@ -6767,9 +7061,370 @@
                 </a:solidFill>
                 <a:latin typeface="Arial"/>
               </a:rPr>
-              <a:t>▸  Welche drei Informationen fehlen Ihnen typischerweise beim ersten Gespräch mit einem Heilberufe-Kunden, und wie würden Sie diese strukturiert erfragen?</a:t>
-            </a:r>
-          </a:p>
+              <a:t>▸  Freier Beruf ≠ Gewerbe, EÜR ≠ Bilanz, Praxiswert ≠ Substanzwert – branchenfremde Maßstäbe führen in die Irre.</a:t>
+            </a:r>
+          </a:p>
+        </p:txBody>
+      </p:sp>
+      <p:sp>
+        <p:nvSpPr>
+          <p:cNvPr id="9" name="Rectangle 8"/>
+          <p:cNvSpPr/>
+          <p:nvPr/>
+        </p:nvSpPr>
+        <p:spPr>
+          <a:xfrm>
+            <a:off x="0" y="6510528"/>
+            <a:ext cx="12188952" cy="347472"/>
+          </a:xfrm>
+          <a:prstGeom prst="rect">
+            <a:avLst/>
+          </a:prstGeom>
+          <a:solidFill>
+            <a:srgbClr val="0A1937"/>
+          </a:solidFill>
+          <a:ln>
+            <a:noFill/>
+          </a:ln>
+        </p:spPr>
+        <p:style>
+          <a:lnRef idx="1">
+            <a:schemeClr val="accent1"/>
+          </a:lnRef>
+          <a:fillRef idx="3">
+            <a:schemeClr val="accent1"/>
+          </a:fillRef>
+          <a:effectRef idx="2">
+            <a:schemeClr val="accent1"/>
+          </a:effectRef>
+          <a:fontRef idx="minor">
+            <a:schemeClr val="lt1"/>
+          </a:fontRef>
+        </p:style>
+        <p:txBody>
+          <a:bodyPr rtlCol="0" anchor="ctr"/>
+          <a:lstStyle/>
+          <a:p>
+            <a:pPr algn="ctr"/>
+          </a:p>
+        </p:txBody>
+      </p:sp>
+      <p:sp>
+        <p:nvSpPr>
+          <p:cNvPr id="10" name="TextBox 9"/>
+          <p:cNvSpPr txBox="1"/>
+          <p:nvPr/>
+        </p:nvSpPr>
+        <p:spPr>
+          <a:xfrm>
+            <a:off x="685800" y="6583680"/>
+            <a:ext cx="6490411" cy="256032"/>
+          </a:xfrm>
+          <a:prstGeom prst="rect">
+            <a:avLst/>
+          </a:prstGeom>
+          <a:noFill/>
+        </p:spPr>
+        <p:txBody>
+          <a:bodyPr wrap="none">
+            <a:spAutoFit/>
+          </a:bodyPr>
+          <a:lstStyle/>
+          <a:p>
+            <a:pPr algn="l"/>
+            <a:r>
+              <a:rPr sz="700">
+                <a:solidFill>
+                  <a:srgbClr val="A0B4D2"/>
+                </a:solidFill>
+                <a:latin typeface="Consolas"/>
+              </a:rPr>
+              <a:t>FKB Campus  ·  M07</a:t>
+            </a:r>
+          </a:p>
+        </p:txBody>
+      </p:sp>
+    </p:spTree>
+  </p:cSld>
+  <p:clrMapOvr>
+    <a:masterClrMapping/>
+  </p:clrMapOvr>
+</p:sld>
+</file>
+
+<file path=ppt/slides/slide16.xml><?xml version="1.0" encoding="utf-8"?>
+<p:sld xmlns:a="http://schemas.openxmlformats.org/drawingml/2006/main" xmlns:p="http://schemas.openxmlformats.org/presentationml/2006/main" xmlns:r="http://schemas.openxmlformats.org/officeDocument/2006/relationships">
+  <p:cSld>
+    <p:spTree>
+      <p:nvGrpSpPr>
+        <p:cNvPr id="1" name=""/>
+        <p:cNvGrpSpPr/>
+        <p:nvPr/>
+      </p:nvGrpSpPr>
+      <p:grpSpPr/>
+      <p:sp>
+        <p:nvSpPr>
+          <p:cNvPr id="2" name="Rectangle 1"/>
+          <p:cNvSpPr/>
+          <p:nvPr/>
+        </p:nvSpPr>
+        <p:spPr>
+          <a:xfrm>
+            <a:off x="0" y="0"/>
+            <a:ext cx="12188952" cy="6858000"/>
+          </a:xfrm>
+          <a:prstGeom prst="rect">
+            <a:avLst/>
+          </a:prstGeom>
+          <a:solidFill>
+            <a:srgbClr val="EDEDF3"/>
+          </a:solidFill>
+          <a:ln>
+            <a:noFill/>
+          </a:ln>
+        </p:spPr>
+        <p:style>
+          <a:lnRef idx="1">
+            <a:schemeClr val="accent1"/>
+          </a:lnRef>
+          <a:fillRef idx="3">
+            <a:schemeClr val="accent1"/>
+          </a:fillRef>
+          <a:effectRef idx="2">
+            <a:schemeClr val="accent1"/>
+          </a:effectRef>
+          <a:fontRef idx="minor">
+            <a:schemeClr val="lt1"/>
+          </a:fontRef>
+        </p:style>
+        <p:txBody>
+          <a:bodyPr rtlCol="0" anchor="ctr"/>
+          <a:lstStyle/>
+          <a:p>
+            <a:pPr algn="ctr"/>
+          </a:p>
+        </p:txBody>
+      </p:sp>
+      <p:sp>
+        <p:nvSpPr>
+          <p:cNvPr id="3" name="Rectangle 2"/>
+          <p:cNvSpPr/>
+          <p:nvPr/>
+        </p:nvSpPr>
+        <p:spPr>
+          <a:xfrm>
+            <a:off x="0" y="0"/>
+            <a:ext cx="12188952" cy="50292"/>
+          </a:xfrm>
+          <a:prstGeom prst="rect">
+            <a:avLst/>
+          </a:prstGeom>
+          <a:solidFill>
+            <a:srgbClr val="1F2C56"/>
+          </a:solidFill>
+          <a:ln>
+            <a:noFill/>
+          </a:ln>
+        </p:spPr>
+        <p:style>
+          <a:lnRef idx="1">
+            <a:schemeClr val="accent1"/>
+          </a:lnRef>
+          <a:fillRef idx="3">
+            <a:schemeClr val="accent1"/>
+          </a:fillRef>
+          <a:effectRef idx="2">
+            <a:schemeClr val="accent1"/>
+          </a:effectRef>
+          <a:fontRef idx="minor">
+            <a:schemeClr val="lt1"/>
+          </a:fontRef>
+        </p:style>
+        <p:txBody>
+          <a:bodyPr rtlCol="0" anchor="ctr"/>
+          <a:lstStyle/>
+          <a:p>
+            <a:pPr algn="ctr"/>
+          </a:p>
+        </p:txBody>
+      </p:sp>
+      <p:sp>
+        <p:nvSpPr>
+          <p:cNvPr id="4" name="TextBox 3"/>
+          <p:cNvSpPr txBox="1"/>
+          <p:nvPr/>
+        </p:nvSpPr>
+        <p:spPr>
+          <a:xfrm>
+            <a:off x="685800" y="109728"/>
+            <a:ext cx="10817352" cy="228600"/>
+          </a:xfrm>
+          <a:prstGeom prst="rect">
+            <a:avLst/>
+          </a:prstGeom>
+          <a:noFill/>
+        </p:spPr>
+        <p:txBody>
+          <a:bodyPr wrap="none">
+            <a:spAutoFit/>
+          </a:bodyPr>
+          <a:lstStyle/>
+          <a:p>
+            <a:pPr algn="l"/>
+            <a:r>
+              <a:rPr sz="750">
+                <a:solidFill>
+                  <a:srgbClr val="78808C"/>
+                </a:solidFill>
+                <a:latin typeface="Consolas"/>
+              </a:rPr>
+              <a:t>M07  ·  INHALT</a:t>
+            </a:r>
+          </a:p>
+        </p:txBody>
+      </p:sp>
+      <p:sp>
+        <p:nvSpPr>
+          <p:cNvPr id="5" name="Rectangle 4"/>
+          <p:cNvSpPr/>
+          <p:nvPr/>
+        </p:nvSpPr>
+        <p:spPr>
+          <a:xfrm>
+            <a:off x="0" y="1234440"/>
+            <a:ext cx="12188952" cy="12700"/>
+          </a:xfrm>
+          <a:prstGeom prst="rect">
+            <a:avLst/>
+          </a:prstGeom>
+          <a:solidFill>
+            <a:srgbClr val="D8DFE4"/>
+          </a:solidFill>
+          <a:ln>
+            <a:noFill/>
+          </a:ln>
+        </p:spPr>
+        <p:style>
+          <a:lnRef idx="1">
+            <a:schemeClr val="accent1"/>
+          </a:lnRef>
+          <a:fillRef idx="3">
+            <a:schemeClr val="accent1"/>
+          </a:fillRef>
+          <a:effectRef idx="2">
+            <a:schemeClr val="accent1"/>
+          </a:effectRef>
+          <a:fontRef idx="minor">
+            <a:schemeClr val="lt1"/>
+          </a:fontRef>
+        </p:style>
+        <p:txBody>
+          <a:bodyPr rtlCol="0" anchor="ctr"/>
+          <a:lstStyle/>
+          <a:p>
+            <a:pPr algn="ctr"/>
+          </a:p>
+        </p:txBody>
+      </p:sp>
+      <p:sp>
+        <p:nvSpPr>
+          <p:cNvPr id="6" name="Rectangle 5"/>
+          <p:cNvSpPr/>
+          <p:nvPr/>
+        </p:nvSpPr>
+        <p:spPr>
+          <a:xfrm>
+            <a:off x="685800" y="502920"/>
+            <a:ext cx="36576" cy="658368"/>
+          </a:xfrm>
+          <a:prstGeom prst="rect">
+            <a:avLst/>
+          </a:prstGeom>
+          <a:solidFill>
+            <a:srgbClr val="D9C089"/>
+          </a:solidFill>
+          <a:ln>
+            <a:noFill/>
+          </a:ln>
+        </p:spPr>
+        <p:style>
+          <a:lnRef idx="1">
+            <a:schemeClr val="accent1"/>
+          </a:lnRef>
+          <a:fillRef idx="3">
+            <a:schemeClr val="accent1"/>
+          </a:fillRef>
+          <a:effectRef idx="2">
+            <a:schemeClr val="accent1"/>
+          </a:effectRef>
+          <a:fontRef idx="minor">
+            <a:schemeClr val="lt1"/>
+          </a:fontRef>
+        </p:style>
+        <p:txBody>
+          <a:bodyPr rtlCol="0" anchor="ctr"/>
+          <a:lstStyle/>
+          <a:p>
+            <a:pPr algn="ctr"/>
+          </a:p>
+        </p:txBody>
+      </p:sp>
+      <p:sp>
+        <p:nvSpPr>
+          <p:cNvPr id="7" name="TextBox 6"/>
+          <p:cNvSpPr txBox="1"/>
+          <p:nvPr/>
+        </p:nvSpPr>
+        <p:spPr>
+          <a:xfrm>
+            <a:off x="813816" y="502920"/>
+            <a:ext cx="10634472" cy="685800"/>
+          </a:xfrm>
+          <a:prstGeom prst="rect">
+            <a:avLst/>
+          </a:prstGeom>
+          <a:noFill/>
+        </p:spPr>
+        <p:txBody>
+          <a:bodyPr wrap="square">
+            <a:spAutoFit/>
+          </a:bodyPr>
+          <a:lstStyle/>
+          <a:p>
+            <a:pPr algn="l"/>
+            <a:r>
+              <a:rPr sz="2400" b="1" i="0">
+                <a:solidFill>
+                  <a:srgbClr val="1F2C56"/>
+                </a:solidFill>
+                <a:latin typeface="Arial"/>
+              </a:rPr>
+              <a:t>Reflexion und Selbstcheck</a:t>
+            </a:r>
+          </a:p>
+        </p:txBody>
+      </p:sp>
+      <p:sp>
+        <p:nvSpPr>
+          <p:cNvPr id="8" name="TextBox 7"/>
+          <p:cNvSpPr txBox="1"/>
+          <p:nvPr/>
+        </p:nvSpPr>
+        <p:spPr>
+          <a:xfrm>
+            <a:off x="685800" y="1417320"/>
+            <a:ext cx="10817352" cy="4892040"/>
+          </a:xfrm>
+          <a:prstGeom prst="rect">
+            <a:avLst/>
+          </a:prstGeom>
+          <a:noFill/>
+        </p:spPr>
+        <p:txBody>
+          <a:bodyPr wrap="square" anchor="ctr">
+            <a:spAutoFit/>
+          </a:bodyPr>
+          <a:lstStyle/>
           <a:p>
             <a:pPr marL="190500" indent="-190500">
               <a:spcBef>
@@ -6786,7 +7441,7 @@
                 </a:solidFill>
                 <a:latin typeface="Arial"/>
               </a:rPr>
-              <a:t>▸  Ein Arzt zeigt eine EÜR mit 500.000 EUR Betriebseinnahmen und 350.000 EUR Betriebsausgaben. Was müssen Sie zusätzlich zum Jahresüberschuss wissen, um eine fundierte Kreditentscheidung treffen zu können?</a:t>
+              <a:t>▸  Welchen Heilberufe-Kunden haben Sie bisher mit gewerblichen Maßstäben bewertet?</a:t>
             </a:r>
           </a:p>
           <a:p>
@@ -6805,7 +7460,26 @@
                 </a:solidFill>
                 <a:latin typeface="Arial"/>
               </a:rPr>
-              <a:t>▸  Wo liegt der wesentliche Unterschied zwischen der Finanzierung einer Zahnarztpraxis und der Finanzierung eines KMU-Betriebs? Was bedeutet das für Ihre Sicherheitenstrategie?</a:t>
+              <a:t>▸  Woran erkennen Sie im Erstgespräch, ob ein Praxiswert realistisch angesetzt ist?</a:t>
+            </a:r>
+          </a:p>
+          <a:p>
+            <a:pPr marL="190500" indent="-190500">
+              <a:spcBef>
+                <a:spcPts val="400"/>
+              </a:spcBef>
+              <a:spcAft>
+                <a:spcPts val="200"/>
+              </a:spcAft>
+            </a:pPr>
+            <a:r>
+              <a:rPr sz="1300">
+                <a:solidFill>
+                  <a:srgbClr val="3D5466"/>
+                </a:solidFill>
+                <a:latin typeface="Arial"/>
+              </a:rPr>
+              <a:t>▸  Welche Absicherung sprechen Sie bei einer Praxisübernahme als Erstes an?</a:t>
             </a:r>
           </a:p>
         </p:txBody>
@@ -8647,7 +9321,7 @@
                 </a:solidFill>
                 <a:latin typeface="Arial"/>
               </a:rPr>
-              <a:t>Theorie-Input 1: Freie Berufe – rechtliche und wirtschaftliche Grundlagen</a:t>
+              <a:t>Kenne die Spielregeln der Branche</a:t>
             </a:r>
           </a:p>
         </p:txBody>
@@ -8669,27 +9343,27 @@
           <a:noFill/>
         </p:spPr>
         <p:txBody>
-          <a:bodyPr wrap="square">
+          <a:bodyPr wrap="square" anchor="ctr">
             <a:spAutoFit/>
           </a:bodyPr>
           <a:lstStyle/>
           <a:p>
-            <a:pPr>
+            <a:pPr marL="177800" indent="-177800">
               <a:spcBef>
-                <a:spcPts val="1000"/>
+                <a:spcPts val="600"/>
               </a:spcBef>
               <a:spcAft>
                 <a:spcPts val="200"/>
               </a:spcAft>
             </a:pPr>
             <a:r>
-              <a:rPr sz="800" b="1">
-                <a:solidFill>
-                  <a:srgbClr val="78808C"/>
-                </a:solidFill>
-                <a:latin typeface="Consolas"/>
-              </a:rPr>
-              <a:t>ABGRENZUNG: FREIER BERUF VS. GEWERBE</a:t>
+              <a:rPr sz="1200" i="1">
+                <a:solidFill>
+                  <a:srgbClr val="3D5466"/>
+                </a:solidFill>
+                <a:latin typeface="Arial"/>
+              </a:rPr>
+              <a:t>→  Kenne die Spielregeln der Branche, bevor du über Finanzierung sprichst.</a:t>
             </a:r>
           </a:p>
           <a:p>
@@ -8708,7 +9382,7 @@
                 </a:solidFill>
                 <a:latin typeface="Arial"/>
               </a:rPr>
-              <a:t>▸  Die praktischen Konsequenzen für die Bankbeziehung:</a:t>
+              <a:t>▸  Freier Beruf ist nicht Gewerbe, EÜR ist nicht Bilanz, Praxiswert ist nicht Substanzwert.</a:t>
             </a:r>
           </a:p>
           <a:p>
@@ -8727,178 +9401,7 @@
                 </a:solidFill>
                 <a:latin typeface="Arial"/>
               </a:rPr>
-              <a:t>▸  Quellen: § 18 EStG; § 4 Abs. 3 EStG; Gumpert &amp; Kausch (2022 )</a:t>
-            </a:r>
-          </a:p>
-          <a:p>
-            <a:pPr>
-              <a:spcBef>
-                <a:spcPts val="1000"/>
-              </a:spcBef>
-              <a:spcAft>
-                <a:spcPts val="200"/>
-              </a:spcAft>
-            </a:pPr>
-            <a:r>
-              <a:rPr sz="800" b="1">
-                <a:solidFill>
-                  <a:srgbClr val="78808C"/>
-                </a:solidFill>
-                <a:latin typeface="Consolas"/>
-              </a:rPr>
-              <a:t>PRAXISRELEVANZ: EINZELPRAXIS, BERUFSAUSÜBUNGSGEMEINSCHAFT (BAG) UND MVZ IM VERGLEICH</a:t>
-            </a:r>
-          </a:p>
-          <a:p>
-            <a:pPr marL="190500" indent="-190500">
-              <a:spcBef>
-                <a:spcPts val="400"/>
-              </a:spcBef>
-              <a:spcAft>
-                <a:spcPts val="200"/>
-              </a:spcAft>
-            </a:pPr>
-            <a:r>
-              <a:rPr sz="1300">
-                <a:solidFill>
-                  <a:srgbClr val="3D5466"/>
-                </a:solidFill>
-                <a:latin typeface="Arial"/>
-              </a:rPr>
-              <a:t>▸  Die bloße Abgrenzung „Freier Beruf vs. Gewerbe" greift in der Beratungspraxis zu kurz. Entscheidend für die Kreditanalyse ist auch die Organisationsform, in der der Heilberuf ausgeübt wird:</a:t>
-            </a:r>
-          </a:p>
-          <a:p>
-            <a:pPr marL="190500" indent="-190500">
-              <a:spcBef>
-                <a:spcPts val="400"/>
-              </a:spcBef>
-              <a:spcAft>
-                <a:spcPts val="200"/>
-              </a:spcAft>
-            </a:pPr>
-            <a:r>
-              <a:rPr sz="1300">
-                <a:solidFill>
-                  <a:srgbClr val="3D5466"/>
-                </a:solidFill>
-                <a:latin typeface="Arial"/>
-              </a:rPr>
-              <a:t>▸  Für den Berater – Daumenregel:</a:t>
-            </a:r>
-          </a:p>
-          <a:p>
-            <a:pPr marL="190500" indent="-190500">
-              <a:spcBef>
-                <a:spcPts val="400"/>
-              </a:spcBef>
-              <a:spcAft>
-                <a:spcPts val="200"/>
-              </a:spcAft>
-            </a:pPr>
-            <a:r>
-              <a:rPr sz="1300">
-                <a:solidFill>
-                  <a:srgbClr val="3D5466"/>
-                </a:solidFill>
-                <a:latin typeface="Arial"/>
-              </a:rPr>
-              <a:t>▸  Einzelpraxis: Standardvorgehen gemäß M07</a:t>
-            </a:r>
-          </a:p>
-          <a:p>
-            <a:pPr marL="190500" indent="-190500">
-              <a:spcBef>
-                <a:spcPts val="400"/>
-              </a:spcBef>
-              <a:spcAft>
-                <a:spcPts val="200"/>
-              </a:spcAft>
-            </a:pPr>
-            <a:r>
-              <a:rPr sz="1300">
-                <a:solidFill>
-                  <a:srgbClr val="3D5466"/>
-                </a:solidFill>
-                <a:latin typeface="Arial"/>
-              </a:rPr>
-              <a:t>▸  BAG mit 2–3 Partnern: immer Gesellschaftsvertrag anfordern, Bonitätsprüfung aller Partner, Regelung bei Ausscheiden eines Partners klären</a:t>
-            </a:r>
-          </a:p>
-          <a:p>
-            <a:pPr marL="190500" indent="-190500">
-              <a:spcBef>
-                <a:spcPts val="400"/>
-              </a:spcBef>
-              <a:spcAft>
-                <a:spcPts val="200"/>
-              </a:spcAft>
-            </a:pPr>
-            <a:r>
-              <a:rPr sz="1300">
-                <a:solidFill>
-                  <a:srgbClr val="3D5466"/>
-                </a:solidFill>
-                <a:latin typeface="Arial"/>
-              </a:rPr>
-              <a:t>▸  MVZ: Spezialisten einbinden (DZ BANK Corporate Finance oder internen gewerblichen Spezialisten) – das ist keine klassische Freiberufler-Finanzierung mehr</a:t>
-            </a:r>
-          </a:p>
-          <a:p>
-            <a:pPr marL="190500" indent="-190500">
-              <a:spcBef>
-                <a:spcPts val="400"/>
-              </a:spcBef>
-              <a:spcAft>
-                <a:spcPts val="200"/>
-              </a:spcAft>
-            </a:pPr>
-            <a:r>
-              <a:rPr sz="1300">
-                <a:solidFill>
-                  <a:srgbClr val="3D5466"/>
-                </a:solidFill>
-                <a:latin typeface="Arial"/>
-              </a:rPr>
-              <a:t>▸  Quelle: Gumpert &amp; Kausch (2022 )</a:t>
-            </a:r>
-          </a:p>
-          <a:p>
-            <a:pPr>
-              <a:spcBef>
-                <a:spcPts val="1000"/>
-              </a:spcBef>
-              <a:spcAft>
-                <a:spcPts val="200"/>
-              </a:spcAft>
-            </a:pPr>
-            <a:r>
-              <a:rPr sz="800" b="1">
-                <a:solidFill>
-                  <a:srgbClr val="78808C"/>
-                </a:solidFill>
-                <a:latin typeface="Consolas"/>
-              </a:rPr>
-              <a:t>EÜR VS. BILANZ: WAS DER BERATER WISSEN MUSS</a:t>
-            </a:r>
-          </a:p>
-          <a:p>
-            <a:pPr marL="190500" indent="-190500">
-              <a:spcBef>
-                <a:spcPts val="400"/>
-              </a:spcBef>
-              <a:spcAft>
-                <a:spcPts val="200"/>
-              </a:spcAft>
-            </a:pPr>
-            <a:r>
-              <a:rPr sz="1300">
-                <a:solidFill>
-                  <a:srgbClr val="3D5466"/>
-                </a:solidFill>
-                <a:latin typeface="Arial"/>
-              </a:rPr>
-              <a:t>▸  Keine Abgrenzung von Anlagevermögen in der EÜR: Investitionen erscheinen als sofortiger Aufwand oder werden über AfA-Listen abgeschrieben; eine bilanzielle Kapitalstruktur fehlt.</a:t>
+              <a:t>▸  Branchenfremde Maßstäbe führen bei Heilberufen systematisch in die Irre.</a:t>
             </a:r>
           </a:p>
         </p:txBody>
@@ -9236,7 +9739,7 @@
                 </a:solidFill>
                 <a:latin typeface="Arial"/>
               </a:rPr>
-              <a:t>Theorie-Input 2: Praxisbewertung und Finanzierungsstruktur</a:t>
+              <a:t>Freie Berufe: rechtliche und wirtschaftliche Grundlagen</a:t>
             </a:r>
           </a:p>
         </p:txBody>
@@ -9258,27 +9761,27 @@
           <a:noFill/>
         </p:spPr>
         <p:txBody>
-          <a:bodyPr wrap="square">
+          <a:bodyPr wrap="square" anchor="ctr">
             <a:spAutoFit/>
           </a:bodyPr>
           <a:lstStyle/>
           <a:p>
-            <a:pPr>
+            <a:pPr marL="177800" indent="-177800">
               <a:spcBef>
-                <a:spcPts val="1000"/>
+                <a:spcPts val="600"/>
               </a:spcBef>
               <a:spcAft>
                 <a:spcPts val="200"/>
               </a:spcAft>
             </a:pPr>
             <a:r>
-              <a:rPr sz="800" b="1">
-                <a:solidFill>
-                  <a:srgbClr val="78808C"/>
-                </a:solidFill>
-                <a:latin typeface="Consolas"/>
-              </a:rPr>
-              <a:t>PRAXISÜBERNAHME VS. PRAXISGRÜNDUNG</a:t>
+              <a:rPr sz="1200" i="1">
+                <a:solidFill>
+                  <a:srgbClr val="3D5466"/>
+                </a:solidFill>
+                <a:latin typeface="Arial"/>
+              </a:rPr>
+              <a:t>→  Der Wert einer Praxis liegt im Patientenstamm und der Zulassung – nicht in Maschinen und Grundstücken.</a:t>
             </a:r>
           </a:p>
           <a:p>
@@ -9297,7 +9800,7 @@
                 </a:solidFill>
                 <a:latin typeface="Arial"/>
               </a:rPr>
-              <a:t>▸  Bewertungsverfahren nach IDW S5:</a:t>
+              <a:t>▸  Freier Beruf vs. Gewerbe: eigene rechtliche und steuerliche Logik.</a:t>
             </a:r>
           </a:p>
           <a:p>
@@ -9316,7 +9819,7 @@
                 </a:solidFill>
                 <a:latin typeface="Arial"/>
               </a:rPr>
-              <a:t>▸  Substanzwert: Zeitwert aller materiellen Wirtschaftsgüter (Praxiseinrichtung, Medizintechnik, IT, Vorräte). Dieser Anteil ist relativ unproblematisch zu finanzieren und gut beleihbar.</a:t>
+              <a:t>▸  Einzelpraxis, Berufsausübungsgemeinschaft (BAG) und MVZ mit unterschiedlichem Risikoprofil.</a:t>
             </a:r>
           </a:p>
           <a:p>
@@ -9335,159 +9838,7 @@
                 </a:solidFill>
                 <a:latin typeface="Arial"/>
               </a:rPr>
-              <a:t>▸  ```</a:t>
-            </a:r>
-          </a:p>
-          <a:p>
-            <a:pPr marL="190500" indent="-190500">
-              <a:spcBef>
-                <a:spcPts val="400"/>
-              </a:spcBef>
-              <a:spcAft>
-                <a:spcPts val="200"/>
-              </a:spcAft>
-            </a:pPr>
-            <a:r>
-              <a:rPr sz="1300">
-                <a:solidFill>
-                  <a:srgbClr val="3D5466"/>
-                </a:solidFill>
-                <a:latin typeface="Arial"/>
-              </a:rPr>
-              <a:t>▸  Modifizierte Ertragswertmethode (IDW S5):</a:t>
-            </a:r>
-          </a:p>
-          <a:p>
-            <a:pPr marL="190500" indent="-190500">
-              <a:spcBef>
-                <a:spcPts val="400"/>
-              </a:spcBef>
-              <a:spcAft>
-                <a:spcPts val="200"/>
-              </a:spcAft>
-            </a:pPr>
-            <a:r>
-              <a:rPr sz="1300">
-                <a:solidFill>
-                  <a:srgbClr val="3D5466"/>
-                </a:solidFill>
-                <a:latin typeface="Arial"/>
-              </a:rPr>
-              <a:t>▸  ./. Risikoabschlag (Zulassungsrisiko, Inhaberabhängigkeit) ca. 20–30 %</a:t>
-            </a:r>
-          </a:p>
-          <a:p>
-            <a:pPr marL="190500" indent="-190500">
-              <a:spcBef>
-                <a:spcPts val="400"/>
-              </a:spcBef>
-              <a:spcAft>
-                <a:spcPts val="200"/>
-              </a:spcAft>
-            </a:pPr>
-            <a:r>
-              <a:rPr sz="1300">
-                <a:solidFill>
-                  <a:srgbClr val="3D5466"/>
-                </a:solidFill>
-                <a:latin typeface="Arial"/>
-              </a:rPr>
-              <a:t>▸  × Kapitalisierungsfaktor (ca. 2,0–3,5×, je nach Fach/Lage)</a:t>
-            </a:r>
-          </a:p>
-          <a:p>
-            <a:pPr marL="190500" indent="-190500">
-              <a:spcBef>
-                <a:spcPts val="400"/>
-              </a:spcBef>
-              <a:spcAft>
-                <a:spcPts val="200"/>
-              </a:spcAft>
-            </a:pPr>
-            <a:r>
-              <a:rPr sz="1300">
-                <a:solidFill>
-                  <a:srgbClr val="3D5466"/>
-                </a:solidFill>
-                <a:latin typeface="Arial"/>
-              </a:rPr>
-              <a:t>▸  Praxiswert gesamt = Substanzwert + Goodwill</a:t>
-            </a:r>
-          </a:p>
-          <a:p>
-            <a:pPr marL="190500" indent="-190500">
-              <a:spcBef>
-                <a:spcPts val="400"/>
-              </a:spcBef>
-              <a:spcAft>
-                <a:spcPts val="200"/>
-              </a:spcAft>
-            </a:pPr>
-            <a:r>
-              <a:rPr sz="1300">
-                <a:solidFill>
-                  <a:srgbClr val="3D5466"/>
-                </a:solidFill>
-                <a:latin typeface="Arial"/>
-              </a:rPr>
-              <a:t>▸  ```</a:t>
-            </a:r>
-          </a:p>
-          <a:p>
-            <a:pPr marL="190500" indent="-190500">
-              <a:spcBef>
-                <a:spcPts val="400"/>
-              </a:spcBef>
-              <a:spcAft>
-                <a:spcPts val="200"/>
-              </a:spcAft>
-            </a:pPr>
-            <a:r>
-              <a:rPr sz="1300">
-                <a:solidFill>
-                  <a:srgbClr val="3D5466"/>
-                </a:solidFill>
-                <a:latin typeface="Arial"/>
-              </a:rPr>
-              <a:t>▸  Quelle: IDW S5 (2021 ); Frodl (2019 )</a:t>
-            </a:r>
-          </a:p>
-          <a:p>
-            <a:pPr>
-              <a:spcBef>
-                <a:spcPts val="1000"/>
-              </a:spcBef>
-              <a:spcAft>
-                <a:spcPts val="200"/>
-              </a:spcAft>
-            </a:pPr>
-            <a:r>
-              <a:rPr sz="800" b="1">
-                <a:solidFill>
-                  <a:srgbClr val="78808C"/>
-                </a:solidFill>
-                <a:latin typeface="Consolas"/>
-              </a:rPr>
-              <a:t>TYPISCHE INVESTITIONSANLÄSSE IM ÜBERBLICK</a:t>
-            </a:r>
-          </a:p>
-          <a:p>
-            <a:pPr marL="190500" indent="-190500">
-              <a:spcBef>
-                <a:spcPts val="400"/>
-              </a:spcBef>
-              <a:spcAft>
-                <a:spcPts val="200"/>
-              </a:spcAft>
-            </a:pPr>
-            <a:r>
-              <a:rPr sz="1300">
-                <a:solidFill>
-                  <a:srgbClr val="3D5466"/>
-                </a:solidFill>
-                <a:latin typeface="Arial"/>
-              </a:rPr>
-              <a:t>▸  Medizinische Versorgungszentren (MVZ):</a:t>
+              <a:t>▸  EÜR statt Bilanz, Honorarstrukturen (KV, PKV, Apothekenmarge) prägen die Analyse.</a:t>
             </a:r>
           </a:p>
         </p:txBody>
@@ -9603,7 +9954,7 @@
             <a:avLst/>
           </a:prstGeom>
           <a:solidFill>
-            <a:srgbClr val="FFFFFF"/>
+            <a:srgbClr val="1F2C56"/>
           </a:solidFill>
           <a:ln>
             <a:noFill/>
@@ -9633,57 +9984,14 @@
       </p:sp>
       <p:sp>
         <p:nvSpPr>
-          <p:cNvPr id="3" name="Rectangle 2"/>
-          <p:cNvSpPr/>
-          <p:nvPr/>
-        </p:nvSpPr>
-        <p:spPr>
-          <a:xfrm>
-            <a:off x="0" y="0"/>
-            <a:ext cx="12188952" cy="50292"/>
-          </a:xfrm>
-          <a:prstGeom prst="rect">
-            <a:avLst/>
-          </a:prstGeom>
-          <a:solidFill>
-            <a:srgbClr val="1F2C56"/>
-          </a:solidFill>
-          <a:ln>
-            <a:noFill/>
-          </a:ln>
-        </p:spPr>
-        <p:style>
-          <a:lnRef idx="1">
-            <a:schemeClr val="accent1"/>
-          </a:lnRef>
-          <a:fillRef idx="3">
-            <a:schemeClr val="accent1"/>
-          </a:fillRef>
-          <a:effectRef idx="2">
-            <a:schemeClr val="accent1"/>
-          </a:effectRef>
-          <a:fontRef idx="minor">
-            <a:schemeClr val="lt1"/>
-          </a:fontRef>
-        </p:style>
-        <p:txBody>
-          <a:bodyPr rtlCol="0" anchor="ctr"/>
-          <a:lstStyle/>
-          <a:p>
-            <a:pPr algn="ctr"/>
-          </a:p>
-        </p:txBody>
-      </p:sp>
-      <p:sp>
-        <p:nvSpPr>
-          <p:cNvPr id="4" name="TextBox 3"/>
+          <p:cNvPr id="3" name="TextBox 2"/>
           <p:cNvSpPr txBox="1"/>
           <p:nvPr/>
         </p:nvSpPr>
         <p:spPr>
           <a:xfrm>
-            <a:off x="685800" y="109728"/>
-            <a:ext cx="10817352" cy="228600"/>
+            <a:off x="685800" y="2377440"/>
+            <a:ext cx="10817352" cy="365760"/>
           </a:xfrm>
           <a:prstGeom prst="rect">
             <a:avLst/>
@@ -9698,62 +10006,27 @@
           <a:p>
             <a:pPr algn="l"/>
             <a:r>
-              <a:rPr sz="750">
-                <a:solidFill>
-                  <a:srgbClr val="78808C"/>
+              <a:rPr sz="1200">
+                <a:solidFill>
+                  <a:srgbClr val="D9C089"/>
                 </a:solidFill>
                 <a:latin typeface="Consolas"/>
               </a:rPr>
-              <a:t>M07  ·  SCHAUBILD</a:t>
-            </a:r>
-          </a:p>
-        </p:txBody>
-      </p:sp>
-      <p:sp>
-        <p:nvSpPr>
-          <p:cNvPr id="5" name="TextBox 4"/>
-          <p:cNvSpPr txBox="1"/>
-          <p:nvPr/>
-        </p:nvSpPr>
-        <p:spPr>
-          <a:xfrm>
-            <a:off x="685800" y="502920"/>
-            <a:ext cx="10817352" cy="594360"/>
-          </a:xfrm>
-          <a:prstGeom prst="rect">
-            <a:avLst/>
-          </a:prstGeom>
-          <a:noFill/>
-        </p:spPr>
-        <p:txBody>
-          <a:bodyPr wrap="square">
-            <a:spAutoFit/>
-          </a:bodyPr>
-          <a:lstStyle/>
-          <a:p>
-            <a:pPr algn="l"/>
-            <a:r>
-              <a:rPr sz="2000" b="1" i="0">
-                <a:solidFill>
-                  <a:srgbClr val="1F2C56"/>
-                </a:solidFill>
-                <a:latin typeface="Arial"/>
-              </a:rPr>
-              <a:t>Praxiswert-Ermittlung nach IDW S5</a:t>
-            </a:r>
-          </a:p>
-        </p:txBody>
-      </p:sp>
-      <p:sp>
-        <p:nvSpPr>
-          <p:cNvPr id="6" name="Rectangle 5"/>
+              <a:t>BEWERTUNG</a:t>
+            </a:r>
+          </a:p>
+        </p:txBody>
+      </p:sp>
+      <p:sp>
+        <p:nvSpPr>
+          <p:cNvPr id="4" name="Rectangle 3"/>
           <p:cNvSpPr/>
           <p:nvPr/>
         </p:nvSpPr>
         <p:spPr>
           <a:xfrm>
-            <a:off x="685800" y="1143000"/>
-            <a:ext cx="10817352" cy="25400"/>
+            <a:off x="685800" y="2788920"/>
+            <a:ext cx="548640" cy="38100"/>
           </a:xfrm>
           <a:prstGeom prst="rect">
             <a:avLst/>
@@ -9787,83 +10060,86 @@
           </a:p>
         </p:txBody>
       </p:sp>
-      <p:pic>
-        <p:nvPicPr>
-          <p:cNvPr id="7" name="Picture 6" descr="image.png"/>
-          <p:cNvPicPr>
-            <a:picLocks noChangeAspect="1"/>
-          </p:cNvPicPr>
-          <p:nvPr/>
-        </p:nvPicPr>
-        <p:blipFill>
-          <a:blip r:embed="rId2"/>
-          <a:stretch>
-            <a:fillRect/>
-          </a:stretch>
-        </p:blipFill>
-        <p:spPr>
-          <a:xfrm>
-            <a:off x="2303489" y="1325880"/>
-            <a:ext cx="7581973" cy="4937760"/>
-          </a:xfrm>
-          <a:prstGeom prst="rect">
-            <a:avLst/>
-          </a:prstGeom>
-        </p:spPr>
-      </p:pic>
-      <p:sp>
-        <p:nvSpPr>
-          <p:cNvPr id="8" name="Rectangle 7"/>
-          <p:cNvSpPr/>
-          <p:nvPr/>
-        </p:nvSpPr>
-        <p:spPr>
-          <a:xfrm>
-            <a:off x="0" y="6510528"/>
-            <a:ext cx="12188952" cy="347472"/>
-          </a:xfrm>
-          <a:prstGeom prst="rect">
-            <a:avLst/>
-          </a:prstGeom>
-          <a:solidFill>
-            <a:srgbClr val="0A1937"/>
-          </a:solidFill>
-          <a:ln>
-            <a:noFill/>
-          </a:ln>
-        </p:spPr>
-        <p:style>
-          <a:lnRef idx="1">
-            <a:schemeClr val="accent1"/>
-          </a:lnRef>
-          <a:fillRef idx="3">
-            <a:schemeClr val="accent1"/>
-          </a:fillRef>
-          <a:effectRef idx="2">
-            <a:schemeClr val="accent1"/>
-          </a:effectRef>
-          <a:fontRef idx="minor">
-            <a:schemeClr val="lt1"/>
-          </a:fontRef>
-        </p:style>
-        <p:txBody>
-          <a:bodyPr rtlCol="0" anchor="ctr"/>
-          <a:lstStyle/>
-          <a:p>
-            <a:pPr algn="ctr"/>
-          </a:p>
-        </p:txBody>
-      </p:sp>
-      <p:sp>
-        <p:nvSpPr>
-          <p:cNvPr id="9" name="TextBox 8"/>
+      <p:sp>
+        <p:nvSpPr>
+          <p:cNvPr id="5" name="TextBox 4"/>
           <p:cNvSpPr txBox="1"/>
           <p:nvPr/>
         </p:nvSpPr>
         <p:spPr>
           <a:xfrm>
-            <a:off x="685800" y="6583680"/>
-            <a:ext cx="6490411" cy="256032"/>
+            <a:off x="685800" y="3017520"/>
+            <a:ext cx="10817352" cy="1463040"/>
+          </a:xfrm>
+          <a:prstGeom prst="rect">
+            <a:avLst/>
+          </a:prstGeom>
+          <a:noFill/>
+        </p:spPr>
+        <p:txBody>
+          <a:bodyPr wrap="square">
+            <a:spAutoFit/>
+          </a:bodyPr>
+          <a:lstStyle/>
+          <a:p>
+            <a:pPr algn="l"/>
+            <a:r>
+              <a:rPr sz="4000" b="1" i="0">
+                <a:solidFill>
+                  <a:srgbClr val="FFFFFF"/>
+                </a:solidFill>
+                <a:latin typeface="Arial"/>
+              </a:rPr>
+              <a:t>Praxisbewertung nach IDW S5</a:t>
+            </a:r>
+          </a:p>
+        </p:txBody>
+      </p:sp>
+      <p:sp>
+        <p:nvSpPr>
+          <p:cNvPr id="6" name="TextBox 5"/>
+          <p:cNvSpPr txBox="1"/>
+          <p:nvPr/>
+        </p:nvSpPr>
+        <p:spPr>
+          <a:xfrm>
+            <a:off x="685800" y="4480560"/>
+            <a:ext cx="8653881" cy="1280160"/>
+          </a:xfrm>
+          <a:prstGeom prst="rect">
+            <a:avLst/>
+          </a:prstGeom>
+          <a:noFill/>
+        </p:spPr>
+        <p:txBody>
+          <a:bodyPr wrap="square">
+            <a:spAutoFit/>
+          </a:bodyPr>
+          <a:lstStyle/>
+          <a:p>
+            <a:pPr algn="l"/>
+            <a:r>
+              <a:rPr sz="1600" b="0" i="0">
+                <a:solidFill>
+                  <a:srgbClr val="C8D2E6"/>
+                </a:solidFill>
+                <a:latin typeface="Arial"/>
+              </a:rPr>
+              <a:t>Den Praxiswert korrekt ermitteln – Goodwill und Substanzwert trennen.</a:t>
+            </a:r>
+          </a:p>
+        </p:txBody>
+      </p:sp>
+      <p:sp>
+        <p:nvSpPr>
+          <p:cNvPr id="7" name="TextBox 6"/>
+          <p:cNvSpPr txBox="1"/>
+          <p:nvPr/>
+        </p:nvSpPr>
+        <p:spPr>
+          <a:xfrm>
+            <a:off x="685800" y="6355080"/>
+            <a:ext cx="10817352" cy="274320"/>
           </a:xfrm>
           <a:prstGeom prst="rect">
             <a:avLst/>
@@ -9880,46 +10156,11 @@
             <a:r>
               <a:rPr sz="700">
                 <a:solidFill>
-                  <a:srgbClr val="A0B4D2"/>
+                  <a:srgbClr val="8CA0C3"/>
                 </a:solidFill>
                 <a:latin typeface="Consolas"/>
               </a:rPr>
               <a:t>FKB Campus  ·  M07</a:t>
-            </a:r>
-          </a:p>
-        </p:txBody>
-      </p:sp>
-      <p:sp>
-        <p:nvSpPr>
-          <p:cNvPr id="10" name="TextBox 9"/>
-          <p:cNvSpPr txBox="1"/>
-          <p:nvPr/>
-        </p:nvSpPr>
-        <p:spPr>
-          <a:xfrm>
-            <a:off x="7176211" y="6583680"/>
-            <a:ext cx="4326940" cy="256032"/>
-          </a:xfrm>
-          <a:prstGeom prst="rect">
-            <a:avLst/>
-          </a:prstGeom>
-          <a:noFill/>
-        </p:spPr>
-        <p:txBody>
-          <a:bodyPr wrap="none">
-            <a:spAutoFit/>
-          </a:bodyPr>
-          <a:lstStyle/>
-          <a:p>
-            <a:pPr algn="r"/>
-            <a:r>
-              <a:rPr sz="700">
-                <a:solidFill>
-                  <a:srgbClr val="A0B4D2"/>
-                </a:solidFill>
-                <a:latin typeface="Consolas"/>
-              </a:rPr>
-              <a:t>Schaubild</a:t>
             </a:r>
           </a:p>
         </p:txBody>
@@ -10179,7 +10420,7 @@
                 </a:solidFill>
                 <a:latin typeface="Arial"/>
               </a:rPr>
-              <a:t>Theorie-Input 3: Risikoprofil und Sicherheitenkonzept</a:t>
+              <a:t>Praxiswert: Goodwill plus Substanzwert</a:t>
             </a:r>
           </a:p>
         </p:txBody>
@@ -10201,27 +10442,27 @@
           <a:noFill/>
         </p:spPr>
         <p:txBody>
-          <a:bodyPr wrap="square">
+          <a:bodyPr wrap="square" anchor="ctr">
             <a:spAutoFit/>
           </a:bodyPr>
           <a:lstStyle/>
           <a:p>
-            <a:pPr>
+            <a:pPr marL="177800" indent="-177800">
               <a:spcBef>
-                <a:spcPts val="1000"/>
+                <a:spcPts val="600"/>
               </a:spcBef>
               <a:spcAft>
                 <a:spcPts val="200"/>
               </a:spcAft>
             </a:pPr>
             <a:r>
-              <a:rPr sz="800" b="1">
-                <a:solidFill>
-                  <a:srgbClr val="78808C"/>
-                </a:solidFill>
-                <a:latin typeface="Consolas"/>
-              </a:rPr>
-              <a:t>SPEZIFISCHE RISIKEN BEI HEILBERUFE-KUNDEN</a:t>
+              <a:rPr sz="1200" i="1">
+                <a:solidFill>
+                  <a:srgbClr val="3D5466"/>
+                </a:solidFill>
+                <a:latin typeface="Arial"/>
+              </a:rPr>
+              <a:t>→  Der Praxiswert ist überwiegend Goodwill – der ideelle Wert aus Patientenstamm, Standort und Ruf.</a:t>
             </a:r>
           </a:p>
           <a:p>
@@ -10240,7 +10481,7 @@
                 </a:solidFill>
                 <a:latin typeface="Arial"/>
               </a:rPr>
-              <a:t>▸  Zulassungsrisiko:</a:t>
+              <a:t>▸  Modifizierte Ertragswertmethode (IDW S5): nachhaltiger Gewinn minus Unternehmerlohn, kapitalisiert.</a:t>
             </a:r>
           </a:p>
           <a:p>
@@ -10259,178 +10500,7 @@
                 </a:solidFill>
                 <a:latin typeface="Arial"/>
               </a:rPr>
-              <a:t>▸  Kassenarztzulassung und ihre Übertragbarkeit in der Nachfolge:</a:t>
-            </a:r>
-          </a:p>
-          <a:p>
-            <a:pPr marL="190500" indent="-190500">
-              <a:spcBef>
-                <a:spcPts val="400"/>
-              </a:spcBef>
-              <a:spcAft>
-                <a:spcPts val="200"/>
-              </a:spcAft>
-            </a:pPr>
-            <a:r>
-              <a:rPr sz="1300">
-                <a:solidFill>
-                  <a:srgbClr val="3D5466"/>
-                </a:solidFill>
-                <a:latin typeface="Arial"/>
-              </a:rPr>
-              <a:t>▸  Regressrisiko:</a:t>
-            </a:r>
-          </a:p>
-          <a:p>
-            <a:pPr marL="190500" indent="-190500">
-              <a:spcBef>
-                <a:spcPts val="400"/>
-              </a:spcBef>
-              <a:spcAft>
-                <a:spcPts val="200"/>
-              </a:spcAft>
-            </a:pPr>
-            <a:r>
-              <a:rPr sz="1300">
-                <a:solidFill>
-                  <a:srgbClr val="3D5466"/>
-                </a:solidFill>
-                <a:latin typeface="Arial"/>
-              </a:rPr>
-              <a:t>▸  Inhaberabhängigkeit:</a:t>
-            </a:r>
-          </a:p>
-          <a:p>
-            <a:pPr marL="190500" indent="-190500">
-              <a:spcBef>
-                <a:spcPts val="400"/>
-              </a:spcBef>
-              <a:spcAft>
-                <a:spcPts val="200"/>
-              </a:spcAft>
-            </a:pPr>
-            <a:r>
-              <a:rPr sz="1300">
-                <a:solidFill>
-                  <a:srgbClr val="3D5466"/>
-                </a:solidFill>
-                <a:latin typeface="Arial"/>
-              </a:rPr>
-              <a:t>▸  Versorgungswerk statt gesetzliche Rentenversicherung:</a:t>
-            </a:r>
-          </a:p>
-          <a:p>
-            <a:pPr marL="190500" indent="-190500">
-              <a:spcBef>
-                <a:spcPts val="400"/>
-              </a:spcBef>
-              <a:spcAft>
-                <a:spcPts val="200"/>
-              </a:spcAft>
-            </a:pPr>
-            <a:r>
-              <a:rPr sz="1300">
-                <a:solidFill>
-                  <a:srgbClr val="3D5466"/>
-                </a:solidFill>
-                <a:latin typeface="Arial"/>
-              </a:rPr>
-              <a:t>▸  Strukturrisiko MVZ-Konsolidierung:</a:t>
-            </a:r>
-          </a:p>
-          <a:p>
-            <a:pPr>
-              <a:spcBef>
-                <a:spcPts val="1000"/>
-              </a:spcBef>
-              <a:spcAft>
-                <a:spcPts val="200"/>
-              </a:spcAft>
-            </a:pPr>
-            <a:r>
-              <a:rPr sz="800" b="1">
-                <a:solidFill>
-                  <a:srgbClr val="78808C"/>
-                </a:solidFill>
-                <a:latin typeface="Consolas"/>
-              </a:rPr>
-              <a:t>SICHERHEITENKONZEPT BEI HEILBERUFE-FINANZIERUNGEN</a:t>
-            </a:r>
-          </a:p>
-          <a:p>
-            <a:pPr marL="190500" indent="-190500">
-              <a:spcBef>
-                <a:spcPts val="400"/>
-              </a:spcBef>
-              <a:spcAft>
-                <a:spcPts val="200"/>
-              </a:spcAft>
-            </a:pPr>
-            <a:r>
-              <a:rPr sz="1300">
-                <a:solidFill>
-                  <a:srgbClr val="3D5466"/>
-                </a:solidFill>
-                <a:latin typeface="Arial"/>
-              </a:rPr>
-              <a:t>▸  § 18 KWG (Offenlegungspflicht ab 750.000 EUR Kreditbetrag) ist zu beachten. Die gesamtschuldnerische Bonitätsanalyse bei Praxisübernahmen folgt MaRisk BTO 1.2.1 .</a:t>
-            </a:r>
-          </a:p>
-          <a:p>
-            <a:pPr>
-              <a:spcBef>
-                <a:spcPts val="1000"/>
-              </a:spcBef>
-              <a:spcAft>
-                <a:spcPts val="200"/>
-              </a:spcAft>
-            </a:pPr>
-            <a:r>
-              <a:rPr sz="800" b="1">
-                <a:solidFill>
-                  <a:srgbClr val="78808C"/>
-                </a:solidFill>
-                <a:latin typeface="Consolas"/>
-              </a:rPr>
-              <a:t>VERBUNDPARTNER SCHWÄBISCH HALL: PRAXISIMMOBILIEN UND TILGUNGSAUSSETZUNGSMODELL</a:t>
-            </a:r>
-          </a:p>
-          <a:p>
-            <a:pPr marL="190500" indent="-190500">
-              <a:spcBef>
-                <a:spcPts val="400"/>
-              </a:spcBef>
-              <a:spcAft>
-                <a:spcPts val="200"/>
-              </a:spcAft>
-            </a:pPr>
-            <a:r>
-              <a:rPr sz="1300">
-                <a:solidFill>
-                  <a:srgbClr val="3D5466"/>
-                </a:solidFill>
-                <a:latin typeface="Arial"/>
-              </a:rPr>
-              <a:t>▸  Das Tilgungsaussetzungsmodell (Vorfinanzierung mit Bausparvertrag):</a:t>
-            </a:r>
-          </a:p>
-          <a:p>
-            <a:pPr marL="190500" indent="-190500">
-              <a:spcBef>
-                <a:spcPts val="400"/>
-              </a:spcBef>
-              <a:spcAft>
-                <a:spcPts val="200"/>
-              </a:spcAft>
-            </a:pPr>
-            <a:r>
-              <a:rPr sz="1300">
-                <a:solidFill>
-                  <a:srgbClr val="3D5466"/>
-                </a:solidFill>
-                <a:latin typeface="Arial"/>
-              </a:rPr>
-              <a:t>▸  Vorteile für den Kunden:</a:t>
+              <a:t>▸  Goodwill plus Substanzwert (Geräte, Einrichtung) ergibt den Praxiswert.</a:t>
             </a:r>
           </a:p>
         </p:txBody>
@@ -10682,7 +10752,7 @@
                 </a:solidFill>
                 <a:latin typeface="Arial"/>
               </a:rPr>
-              <a:t>Handlungsempfehlung Heilberufe</a:t>
+              <a:t>Praxiswert-Ermittlung nach IDW S5</a:t>
             </a:r>
           </a:p>
         </p:txBody>
